--- a/release/Moltbook.pptx
+++ b/release/Moltbook.pptx
@@ -511,9 +511,10 @@
           <a:p>
             <a:r>
               <a:rPr lang="en-US" dirty="0"/>
-              <a:t>This deck is intentionally narrower than the original markdown source.
-I removed or softened claims that were unsupported, synthetic, or source-misaligned.
-Homepage source: https://www.moltbook.com/ (accessed 2026-03-23).</a:t>
+              <a:t>Open met de spanning, niet met de definities.
+Sterke zin voor op het podium: Moltbook is minder bewijs dan stresstest.
+[Sources]
+- Moltbook homepage: https://www.moltbook.com/ (geraadpleegd 2026-03-23).</a:t>
             </a:r>
             <a:endParaRPr lang="en-US" dirty="0"/>
           </a:p>
@@ -601,7 +602,8 @@
           <a:p>
             <a:r>
               <a:rPr lang="en-US" dirty="0"/>
-              <a:t>Close by reminding the audience that this deck deliberately tightened confidence levels.</a:t>
+              <a:t>Laat deze slide rustig landen. Niet te snel naar de vragen springen.
+Slotzin: het gaat niet om sociale schijn, maar om wat standhoudt onder schaal en verantwoordelijkheid.</a:t>
             </a:r>
             <a:endParaRPr lang="en-US" dirty="0"/>
           </a:p>
@@ -689,8 +691,11 @@
           <a:p>
             <a:r>
               <a:rPr lang="en-US" dirty="0"/>
-              <a:t>Homepage lines: 'A Social Network for AI Agents' and 'Humans welcome to observe.'
-Terms lines 20-28: no legal eligibility for AI agents; responsibility remains with the account holder.</a:t>
+              <a:t>Breng hier de centrale spanning: marketingclaim versus juridische realiteit.
+Niet zeggen dat Moltbook 'fake' is. Wel zeggen dat autonomie hier niet netjes geborgd is.
+[Sources]
+- Homepage copy: 'A Social Network for AI Agents' en 'Humans welcome to observe.'
+- Terms of Service: AI agents hebben geen legal eligibility; verantwoordelijkheid blijft bij de mens.</a:t>
             </a:r>
             <a:endParaRPr lang="en-US" dirty="0"/>
           </a:p>
@@ -778,9 +783,11 @@
           <a:p>
             <a:r>
               <a:rPr lang="en-US" dirty="0"/>
-              <a:t>OpenClaw docs line: 'Context is everything OpenClaw sends to the model for a run.'
-Multi-agent docs: per-agent sandbox and tool policy; credentials isolated by agent.
-FAQ also notes multi-agent teams are fun experiments but token-heavy and often less efficient than one bot with separate sessions.</a:t>
+              <a:t>Zeg expliciet dat dit schema een vereenvoudigde interpretatie is van de docs, geen letterlijk diagram van OpenClaw.
+Nuttige podiumzin: wat als autonomie voelt, is vaak een georkestreerde loop.
+[Sources]
+- OpenClaw docs: 'Context is everything OpenClaw sends to the model for a run.'
+- Multi-agent docs: per-agent sandboxes, tool policies en routing.</a:t>
             </a:r>
             <a:endParaRPr lang="en-US" dirty="0"/>
           </a:p>
@@ -868,8 +875,12 @@
           <a:p>
             <a:r>
               <a:rPr lang="en-US" dirty="0"/>
-              <a:t>The original repo treated the $0.38 number as if it were observed.
-It is now explicitly labeled as an illustrative scenario built from code and stated assumptions.</a:t>
+              <a:t>Zeg hier expliciet dat $0,377 niet uit een Moltbook trace komt.
+De sterkste live boodschap is richting, niet precisie: context reload domineert.
+[Sources]
+- OpenClaw docs voorbeeld voor sessietokens.
+- Anthropic pricing voor Opus 4.6.
+- Repo-aannames: data/token_usage_assumptions.json.</a:t>
             </a:r>
             <a:endParaRPr lang="en-US" dirty="0"/>
           </a:p>
@@ -957,8 +968,11 @@
           <a:p>
             <a:r>
               <a:rPr lang="en-US" dirty="0"/>
-              <a:t>I replaced the repo's rounded 27/37/37 slide claim with the paper's classifiable-author split: 26.5 / 36.8 / 36.7.
-That is both more accurate and more defensible.</a:t>
+              <a:t>Gebruik het woord 'rommelig' bewust. Dat maakt de nuance spreektaal zonder de ernst te verliezen.
+Niet afronden naar 27/37/37. Gebruik de paperwaarden.
+[Sources]
+- Tsinghua paper: The Moltbook Illusion (2026-02-07).
+- Moltbook Terms voor de governancekant.</a:t>
             </a:r>
             <a:endParaRPr lang="en-US" dirty="0"/>
           </a:p>
@@ -1046,9 +1060,12 @@
           <a:p>
             <a:r>
               <a:rPr lang="en-US" dirty="0"/>
-              <a:t>This chart is source-anchored. The prior repo version used synthetic time series.
-MiniMax M2.7 is now strong enough for a narrow official-source-backed economics claim.
-The safe line is that the price gap is clearer than the quality gap.</a:t>
+              <a:t>Deze slide moet snel landen: de harde curves zitten in economie en infrastructuur.
+ECI-nuance mondeling meegeven: single benchmarks satureren; daarom bestaan samengestelde kaders.
+[Sources]
+- Stanford HAI AI Index 2025.
+- Epoch trend snapshot en ECI-pagina.
+- Vendor pricing snapshots voor de economische context.</a:t>
             </a:r>
             <a:endParaRPr lang="en-US" dirty="0"/>
           </a:p>
@@ -1136,8 +1153,12 @@
           <a:p>
             <a:r>
               <a:rPr lang="en-US" dirty="0"/>
-              <a:t>This slide restores MiniMax to the deck, but only in its safe official-source-backed form.
-The old ~19x cheaper / ~6% worse framing should stay dead.</a:t>
+              <a:t>Behoud exact de betekenis van de safe line: de prijskloof is duidelijker dan de kwaliteitskloof.
+Zeg ook expliciet dat dit vendor-reported blijft.
+[Sources]
+- MiniMax model page en pricing docs voor M2.7.
+- Anthropic Opus 4.6 page.
+- Gebruik geen parity-taal.</a:t>
             </a:r>
             <a:endParaRPr lang="en-US" dirty="0"/>
           </a:p>
@@ -1225,9 +1246,11 @@
           <a:p>
             <a:r>
               <a:rPr lang="en-US" dirty="0"/>
-              <a:t>I kept the barrier-crossing framing but tightened the rhetoric.
-The model is now explicit that floor choices and scenario assumptions dominate the output.
-Threshold sensitivity alone barely moved results because floors bind first.</a:t>
+              <a:t>Deze slide mag bewust minder spreadsheet-achtig zijn dan vroeger.
+De nuance blijft: scenario-tool, geen profetie.
+[Sources]
+- Forecast code en inputs: analyses/forecast_model.py en data/forecast_scenarios.json.
+- Belangrijke audituitkomst: floors binden vóór de headline threshold.</a:t>
             </a:r>
             <a:endParaRPr lang="en-US" dirty="0"/>
           </a:p>
@@ -1315,7 +1338,7 @@
           <a:p>
             <a:r>
               <a:rPr lang="en-US" dirty="0"/>
-              <a:t>This is the core thesis slide in structured form.</a:t>
+              <a:t>Dit is de payoff-slide: vier bottlenecks, geen bijzaken.</a:t>
             </a:r>
             <a:endParaRPr lang="en-US" dirty="0"/>
           </a:p>
@@ -1799,7 +1822,7 @@
                 <a:ea typeface="Aptos" pitchFamily="34" charset="-122"/>
                 <a:cs typeface="Aptos" pitchFamily="34" charset="-120"/>
               </a:rPr>
-              <a:t>VERIFIED DECK</a:t>
+              <a:t>NEDERLANDSTALIGE KEYNOTE</a:t>
             </a:r>
             <a:endParaRPr lang="en-US" sz="900" dirty="0"/>
           </a:p>
@@ -1840,7 +1863,7 @@
                 <a:ea typeface="Aptos Display" pitchFamily="34" charset="-122"/>
                 <a:cs typeface="Aptos Display" pitchFamily="34" charset="-120"/>
               </a:rPr>
-              <a:t>Moltbook: signal, limits, and what still has to be solved</a:t>
+              <a:t>Moltbook: signaal, geen bewijs</a:t>
             </a:r>
             <a:endParaRPr lang="en-US" sz="2600" dirty="0"/>
           </a:p>
@@ -1904,7 +1927,7 @@
                 <a:ea typeface="Aptos" pitchFamily="34" charset="-122"/>
                 <a:cs typeface="Aptos" pitchFamily="34" charset="-120"/>
               </a:rPr>
-              <a:t>Deck rebuilt from repo code, screenshots, and cited sources on 2026-03-23.</a:t>
+              <a:t>Gebaseerd op repo-code, screenshots en gecontroleerde bronnen. Rebuild: 2026-03-23.</a:t>
             </a:r>
             <a:endParaRPr lang="en-US" sz="800" dirty="0"/>
           </a:p>
@@ -1918,17 +1941,19 @@
         </p:nvSpPr>
         <p:spPr>
           <a:xfrm>
-            <a:off x="713232" y="2057400"/>
-            <a:ext cx="6035040" cy="411480"/>
-          </a:xfrm>
-          <a:prstGeom prst="rect">
-            <a:avLst/>
-          </a:prstGeom>
-          <a:noFill/>
-          <a:ln/>
-        </p:spPr>
-        <p:txBody>
-          <a:bodyPr wrap="square" lIns="0" tIns="0" rIns="0" bIns="0" rtlCol="0" anchor="ctr"/>
+            <a:off x="713232" y="2048256"/>
+            <a:ext cx="5486400" cy="329184"/>
+          </a:xfrm>
+          <a:prstGeom prst="rect">
+            <a:avLst/>
+          </a:prstGeom>
+          <a:noFill/>
+          <a:ln/>
+        </p:spPr>
+        <p:txBody>
+          <a:bodyPr wrap="square" lIns="0" tIns="0" rIns="0" bIns="0" rtlCol="0" anchor="ctr">
+            <a:normAutofit/>
+          </a:bodyPr>
           <a:lstStyle/>
           <a:p>
             <a:pPr indent="0" marL="0">
@@ -1943,7 +1968,7 @@
                 <a:ea typeface="Aptos" pitchFamily="34" charset="-122"/>
                 <a:cs typeface="Aptos" pitchFamily="34" charset="-120"/>
               </a:rPr>
-              <a:t>What an AI-agent social network does and does not prove</a:t>
+              <a:t>Wat een sociaal netwerk voor AI-agenten wel en niet laat zien</a:t>
             </a:r>
             <a:endParaRPr lang="en-US" sz="1800" dirty="0"/>
           </a:p>
@@ -1957,12 +1982,12 @@
         </p:nvSpPr>
         <p:spPr>
           <a:xfrm>
-            <a:off x="713232" y="2514600"/>
-            <a:ext cx="5349240" cy="2103120"/>
+            <a:off x="713232" y="2578608"/>
+            <a:ext cx="5029200" cy="2148840"/>
           </a:xfrm>
           <a:prstGeom prst="roundRect">
             <a:avLst>
-              <a:gd name="adj" fmla="val 2609"/>
+              <a:gd name="adj" fmla="val 2553"/>
             </a:avLst>
           </a:prstGeom>
           <a:solidFill>
@@ -1978,71 +2003,203 @@
       </p:sp>
       <p:sp>
         <p:nvSpPr>
-          <p:cNvPr id="11" name="Text 8"/>
-          <p:cNvSpPr/>
-          <p:nvPr/>
-        </p:nvSpPr>
-        <p:spPr>
-          <a:xfrm>
-            <a:off x="932688" y="2788920"/>
-            <a:ext cx="4937760" cy="1554480"/>
-          </a:xfrm>
-          <a:prstGeom prst="rect">
-            <a:avLst/>
-          </a:prstGeom>
-          <a:noFill/>
-          <a:ln/>
-        </p:spPr>
-        <p:txBody>
-          <a:bodyPr wrap="square" lIns="0" tIns="0" rIns="0" bIns="0" rtlCol="0" anchor="t">
-            <a:normAutofit/>
-          </a:bodyPr>
-          <a:lstStyle/>
-          <a:p>
-            <a:pPr indent="0" marL="0">
-              <a:buNone/>
-            </a:pPr>
-            <a:r>
-              <a:rPr lang="en-US" sz="1600" dirty="0">
+          <p:cNvPr id="11" name="Shape 8"/>
+          <p:cNvSpPr/>
+          <p:nvPr/>
+        </p:nvSpPr>
+        <p:spPr>
+          <a:xfrm>
+            <a:off x="950976" y="2816352"/>
+            <a:ext cx="1280160" cy="329184"/>
+          </a:xfrm>
+          <a:prstGeom prst="roundRect">
+            <a:avLst>
+              <a:gd name="adj" fmla="val 22222"/>
+            </a:avLst>
+          </a:prstGeom>
+          <a:solidFill>
+            <a:srgbClr val="F2AD18"/>
+          </a:solidFill>
+          <a:ln w="12700">
+            <a:solidFill>
+              <a:srgbClr val="F2AD18">
+                <a:alpha val="0"/>
+              </a:srgbClr>
+            </a:solidFill>
+            <a:prstDash val="solid"/>
+          </a:ln>
+        </p:spPr>
+      </p:sp>
+      <p:sp>
+        <p:nvSpPr>
+          <p:cNvPr id="12" name="Text 9"/>
+          <p:cNvSpPr/>
+          <p:nvPr/>
+        </p:nvSpPr>
+        <p:spPr>
+          <a:xfrm>
+            <a:off x="1097280" y="2889504"/>
+            <a:ext cx="987552" cy="164592"/>
+          </a:xfrm>
+          <a:prstGeom prst="rect">
+            <a:avLst/>
+          </a:prstGeom>
+          <a:noFill/>
+          <a:ln/>
+        </p:spPr>
+        <p:txBody>
+          <a:bodyPr wrap="square" lIns="0" tIns="0" rIns="0" bIns="0" rtlCol="0" anchor="ctr">
+            <a:normAutofit/>
+          </a:bodyPr>
+          <a:lstStyle/>
+          <a:p>
+            <a:pPr indent="0" marL="0">
+              <a:buNone/>
+            </a:pPr>
+            <a:r>
+              <a:rPr lang="en-US" sz="900" b="1" dirty="0">
+                <a:solidFill>
+                  <a:srgbClr val="12192C"/>
+                </a:solidFill>
+                <a:latin typeface="Aptos" pitchFamily="34" charset="0"/>
+                <a:ea typeface="Aptos" pitchFamily="34" charset="-122"/>
+                <a:cs typeface="Aptos" pitchFamily="34" charset="-120"/>
+              </a:rPr>
+              <a:t>KERNFRAMING</a:t>
+            </a:r>
+            <a:endParaRPr lang="en-US" sz="900" dirty="0"/>
+          </a:p>
+        </p:txBody>
+      </p:sp>
+      <p:sp>
+        <p:nvSpPr>
+          <p:cNvPr id="13" name="Text 10"/>
+          <p:cNvSpPr/>
+          <p:nvPr/>
+        </p:nvSpPr>
+        <p:spPr>
+          <a:xfrm>
+            <a:off x="950976" y="3273552"/>
+            <a:ext cx="4389120" cy="822960"/>
+          </a:xfrm>
+          <a:prstGeom prst="rect">
+            <a:avLst/>
+          </a:prstGeom>
+          <a:noFill/>
+          <a:ln/>
+        </p:spPr>
+        <p:txBody>
+          <a:bodyPr wrap="square" lIns="0" tIns="0" rIns="0" bIns="0" rtlCol="0" anchor="ctr">
+            <a:normAutofit/>
+          </a:bodyPr>
+          <a:lstStyle/>
+          <a:p>
+            <a:pPr indent="0" marL="0">
+              <a:buNone/>
+            </a:pPr>
+            <a:r>
+              <a:rPr lang="en-US" sz="1800" b="1" dirty="0">
                 <a:solidFill>
                   <a:srgbClr val="FFFFFF"/>
                 </a:solidFill>
-                <a:latin typeface="Aptos" pitchFamily="34" charset="0"/>
-                <a:ea typeface="Aptos" pitchFamily="34" charset="-122"/>
-                <a:cs typeface="Aptos" pitchFamily="34" charset="-120"/>
-              </a:rPr>
-              <a:t>Core thesis</a:t>
-            </a:r>
-            <a:endParaRPr lang="en-US" sz="1600" dirty="0"/>
-          </a:p>
-          <a:p>
-            <a:pPr indent="0" marL="0">
-              <a:buNone/>
-            </a:pPr>
-            <a:endParaRPr lang="en-US" sz="1600" dirty="0"/>
-          </a:p>
-          <a:p>
-            <a:pPr indent="0" marL="0">
-              <a:buNone/>
-            </a:pPr>
-            <a:r>
-              <a:rPr lang="en-US" sz="1600" dirty="0">
+                <a:latin typeface="Aptos Display" pitchFamily="34" charset="0"/>
+                <a:ea typeface="Aptos Display" pitchFamily="34" charset="-122"/>
+                <a:cs typeface="Aptos Display" pitchFamily="34" charset="-120"/>
+              </a:rPr>
+              <a:t>Niet interessant omdat autonomie al bewezen is.</a:t>
+            </a:r>
+            <a:endParaRPr lang="en-US" sz="1800" dirty="0"/>
+          </a:p>
+          <a:p>
+            <a:pPr indent="0" marL="0">
+              <a:buNone/>
+            </a:pPr>
+            <a:r>
+              <a:rPr lang="en-US" sz="1800" b="1" dirty="0">
                 <a:solidFill>
                   <a:srgbClr val="FFFFFF"/>
                 </a:solidFill>
-                <a:latin typeface="Aptos" pitchFamily="34" charset="0"/>
-                <a:ea typeface="Aptos" pitchFamily="34" charset="-122"/>
-                <a:cs typeface="Aptos" pitchFamily="34" charset="-120"/>
-              </a:rPr>
-              <a:t>Moltbook matters less as proof that autonomous digital societies already exist, and more as a live stress test of what is still missing: identity, memory, governance, and cost discipline.</a:t>
-            </a:r>
-            <a:endParaRPr lang="en-US" sz="1600" dirty="0"/>
-          </a:p>
-        </p:txBody>
+                <a:latin typeface="Aptos Display" pitchFamily="34" charset="0"/>
+                <a:ea typeface="Aptos Display" pitchFamily="34" charset="-122"/>
+                <a:cs typeface="Aptos Display" pitchFamily="34" charset="-120"/>
+              </a:rPr>
+              <a:t>Wel interessant omdat het zichtbaar maakt wat nog ontbreekt.</a:t>
+            </a:r>
+            <a:endParaRPr lang="en-US" sz="1800" dirty="0"/>
+          </a:p>
+        </p:txBody>
+      </p:sp>
+      <p:sp>
+        <p:nvSpPr>
+          <p:cNvPr id="14" name="Text 11"/>
+          <p:cNvSpPr/>
+          <p:nvPr/>
+        </p:nvSpPr>
+        <p:spPr>
+          <a:xfrm>
+            <a:off x="950976" y="4169664"/>
+            <a:ext cx="4480560" cy="201168"/>
+          </a:xfrm>
+          <a:prstGeom prst="rect">
+            <a:avLst/>
+          </a:prstGeom>
+          <a:noFill/>
+          <a:ln/>
+        </p:spPr>
+        <p:txBody>
+          <a:bodyPr wrap="square" lIns="0" tIns="0" rIns="0" bIns="0" rtlCol="0" anchor="ctr">
+            <a:normAutofit/>
+          </a:bodyPr>
+          <a:lstStyle/>
+          <a:p>
+            <a:pPr indent="0" marL="0">
+              <a:buNone/>
+            </a:pPr>
+            <a:r>
+              <a:rPr lang="en-US" sz="1200" b="1" dirty="0">
+                <a:solidFill>
+                  <a:srgbClr val="F2AD18"/>
+                </a:solidFill>
+                <a:latin typeface="Aptos" pitchFamily="34" charset="0"/>
+                <a:ea typeface="Aptos" pitchFamily="34" charset="-122"/>
+                <a:cs typeface="Aptos" pitchFamily="34" charset="-120"/>
+              </a:rPr>
+              <a:t>identiteit  •  geheugen  •  governance  •  kostdiscipline</a:t>
+            </a:r>
+            <a:endParaRPr lang="en-US" sz="1200" dirty="0"/>
+          </a:p>
+        </p:txBody>
+      </p:sp>
+      <p:sp>
+        <p:nvSpPr>
+          <p:cNvPr id="15" name="Shape 12"/>
+          <p:cNvSpPr/>
+          <p:nvPr/>
+        </p:nvSpPr>
+        <p:spPr>
+          <a:xfrm>
+            <a:off x="6291072" y="1444752"/>
+            <a:ext cx="5074920" cy="4498848"/>
+          </a:xfrm>
+          <a:prstGeom prst="roundRect">
+            <a:avLst>
+              <a:gd name="adj" fmla="val 1220"/>
+            </a:avLst>
+          </a:prstGeom>
+          <a:solidFill>
+            <a:srgbClr val="1C2540"/>
+          </a:solidFill>
+          <a:ln w="12700">
+            <a:solidFill>
+              <a:srgbClr val="394258"/>
+            </a:solidFill>
+            <a:prstDash val="solid"/>
+          </a:ln>
+        </p:spPr>
       </p:sp>
       <p:pic>
         <p:nvPicPr>
-          <p:cNvPr id="12" name="Image 1" descr="/home/ff/Documents/BoostMeUp/MoltBook_Sessie/assets/moltbook_homepage.png">    </p:cNvPr>
+          <p:cNvPr id="16" name="Image 1" descr="/home/ff/Documents/BoostMeUp/MoltBook_Sessie/assets/moltbook_homepage.png">    </p:cNvPr>
           <p:cNvPicPr>
             <a:picLocks noChangeAspect="1"/>
           </p:cNvPicPr>
@@ -2056,14 +2213,84 @@
         </p:blipFill>
         <p:spPr>
           <a:xfrm>
-            <a:off x="6400800" y="1508760"/>
-            <a:ext cx="5074920" cy="4343400"/>
+            <a:off x="6400800" y="1554480"/>
+            <a:ext cx="4855464" cy="4279392"/>
           </a:xfrm>
           <a:prstGeom prst="rect">
             <a:avLst/>
           </a:prstGeom>
         </p:spPr>
       </p:pic>
+      <p:sp>
+        <p:nvSpPr>
+          <p:cNvPr id="17" name="Shape 13"/>
+          <p:cNvSpPr/>
+          <p:nvPr/>
+        </p:nvSpPr>
+        <p:spPr>
+          <a:xfrm>
+            <a:off x="8284464" y="1700784"/>
+            <a:ext cx="1444752" cy="329184"/>
+          </a:xfrm>
+          <a:prstGeom prst="roundRect">
+            <a:avLst>
+              <a:gd name="adj" fmla="val 22222"/>
+            </a:avLst>
+          </a:prstGeom>
+          <a:solidFill>
+            <a:srgbClr val="E93325"/>
+          </a:solidFill>
+          <a:ln w="12700">
+            <a:solidFill>
+              <a:srgbClr val="E93325">
+                <a:alpha val="0"/>
+              </a:srgbClr>
+            </a:solidFill>
+            <a:prstDash val="solid"/>
+          </a:ln>
+        </p:spPr>
+      </p:sp>
+      <p:sp>
+        <p:nvSpPr>
+          <p:cNvPr id="18" name="Text 14"/>
+          <p:cNvSpPr/>
+          <p:nvPr/>
+        </p:nvSpPr>
+        <p:spPr>
+          <a:xfrm>
+            <a:off x="8430768" y="1773936"/>
+            <a:ext cx="1152144" cy="164592"/>
+          </a:xfrm>
+          <a:prstGeom prst="rect">
+            <a:avLst/>
+          </a:prstGeom>
+          <a:noFill/>
+          <a:ln/>
+        </p:spPr>
+        <p:txBody>
+          <a:bodyPr wrap="square" lIns="0" tIns="0" rIns="0" bIns="0" rtlCol="0" anchor="ctr">
+            <a:normAutofit/>
+          </a:bodyPr>
+          <a:lstStyle/>
+          <a:p>
+            <a:pPr indent="0" marL="0">
+              <a:buNone/>
+            </a:pPr>
+            <a:r>
+              <a:rPr lang="en-US" sz="900" b="1" dirty="0">
+                <a:solidFill>
+                  <a:srgbClr val="FFFFFF"/>
+                </a:solidFill>
+                <a:latin typeface="Aptos" pitchFamily="34" charset="0"/>
+                <a:ea typeface="Aptos" pitchFamily="34" charset="-122"/>
+                <a:cs typeface="Aptos" pitchFamily="34" charset="-120"/>
+              </a:rPr>
+              <a:t>live stresstest</a:t>
+            </a:r>
+            <a:endParaRPr lang="en-US" sz="900" dirty="0"/>
+          </a:p>
+        </p:txBody>
+      </p:sp>
     </p:spTree>
   </p:cSld>
   <p:clrMapOvr>
@@ -2207,7 +2434,7 @@
                 <a:ea typeface="Aptos" pitchFamily="34" charset="-122"/>
                 <a:cs typeface="Aptos" pitchFamily="34" charset="-120"/>
               </a:rPr>
-              <a:t>CLOSING</a:t>
+              <a:t>SLOT</a:t>
             </a:r>
             <a:endParaRPr lang="en-US" sz="900" dirty="0"/>
           </a:p>
@@ -2248,7 +2475,7 @@
                 <a:ea typeface="Aptos Display" pitchFamily="34" charset="-122"/>
                 <a:cs typeface="Aptos Display" pitchFamily="34" charset="-120"/>
               </a:rPr>
-              <a:t>Conclusion: Moltbook is a useful signal, not yet a proof</a:t>
+              <a:t>Moltbook is een signaal. Nog geen bewijs.</a:t>
             </a:r>
             <a:endParaRPr lang="en-US" sz="2300" dirty="0"/>
           </a:p>
@@ -2312,7 +2539,7 @@
                 <a:ea typeface="Aptos" pitchFamily="34" charset="-122"/>
                 <a:cs typeface="Aptos" pitchFamily="34" charset="-120"/>
               </a:rPr>
-              <a:t>Deck generated natively with bun + PptxGenJS. Rebuild with: bun run build:deck</a:t>
+              <a:t>Native .pptx build via bun + PptxGenJS. Rebuild met: bun run build:deck</a:t>
             </a:r>
             <a:endParaRPr lang="en-US" sz="800" dirty="0"/>
           </a:p>
@@ -2320,18 +2547,100 @@
       </p:sp>
       <p:sp>
         <p:nvSpPr>
-          <p:cNvPr id="9" name="Shape 6"/>
-          <p:cNvSpPr/>
-          <p:nvPr/>
-        </p:nvSpPr>
-        <p:spPr>
-          <a:xfrm>
-            <a:off x="713232" y="1234440"/>
-            <a:ext cx="10927080" cy="914400"/>
+          <p:cNvPr id="9" name="Text 6"/>
+          <p:cNvSpPr/>
+          <p:nvPr/>
+        </p:nvSpPr>
+        <p:spPr>
+          <a:xfrm>
+            <a:off x="713232" y="1481328"/>
+            <a:ext cx="10058400" cy="493776"/>
+          </a:xfrm>
+          <a:prstGeom prst="rect">
+            <a:avLst/>
+          </a:prstGeom>
+          <a:noFill/>
+          <a:ln/>
+        </p:spPr>
+        <p:txBody>
+          <a:bodyPr wrap="square" lIns="0" tIns="0" rIns="0" bIns="0" rtlCol="0" anchor="ctr">
+            <a:normAutofit/>
+          </a:bodyPr>
+          <a:lstStyle/>
+          <a:p>
+            <a:pPr algn="ctr" indent="0" marL="0">
+              <a:buNone/>
+            </a:pPr>
+            <a:r>
+              <a:rPr lang="en-US" sz="2600" b="1" dirty="0">
+                <a:solidFill>
+                  <a:srgbClr val="FFFFFF"/>
+                </a:solidFill>
+                <a:latin typeface="Aptos Display" pitchFamily="34" charset="0"/>
+                <a:ea typeface="Aptos Display" pitchFamily="34" charset="-122"/>
+                <a:cs typeface="Aptos Display" pitchFamily="34" charset="-120"/>
+              </a:rPr>
+              <a:t>De juiste vraag is niet of de demo sociaal oogt.</a:t>
+            </a:r>
+            <a:endParaRPr lang="en-US" sz="2600" dirty="0"/>
+          </a:p>
+        </p:txBody>
+      </p:sp>
+      <p:sp>
+        <p:nvSpPr>
+          <p:cNvPr id="10" name="Text 7"/>
+          <p:cNvSpPr/>
+          <p:nvPr/>
+        </p:nvSpPr>
+        <p:spPr>
+          <a:xfrm>
+            <a:off x="1042416" y="2267712"/>
+            <a:ext cx="9418320" cy="896112"/>
+          </a:xfrm>
+          <a:prstGeom prst="rect">
+            <a:avLst/>
+          </a:prstGeom>
+          <a:noFill/>
+          <a:ln/>
+        </p:spPr>
+        <p:txBody>
+          <a:bodyPr wrap="square" lIns="0" tIns="0" rIns="0" bIns="0" rtlCol="0" anchor="ctr">
+            <a:normAutofit/>
+          </a:bodyPr>
+          <a:lstStyle/>
+          <a:p>
+            <a:pPr algn="ctr" indent="0" marL="0">
+              <a:buNone/>
+            </a:pPr>
+            <a:r>
+              <a:rPr lang="en-US" sz="2400" b="1" dirty="0">
+                <a:solidFill>
+                  <a:srgbClr val="F2AD18"/>
+                </a:solidFill>
+                <a:latin typeface="Aptos Display" pitchFamily="34" charset="0"/>
+                <a:ea typeface="Aptos Display" pitchFamily="34" charset="-122"/>
+                <a:cs typeface="Aptos Display" pitchFamily="34" charset="-120"/>
+              </a:rPr>
+              <a:t>De juiste vraag is of identiteit, geheugen, governance en kost standhouden zodra je schaal en verantwoordelijkheid serieus neemt.</a:t>
+            </a:r>
+            <a:endParaRPr lang="en-US" sz="2400" dirty="0"/>
+          </a:p>
+        </p:txBody>
+      </p:sp>
+      <p:sp>
+        <p:nvSpPr>
+          <p:cNvPr id="11" name="Shape 8"/>
+          <p:cNvSpPr/>
+          <p:nvPr/>
+        </p:nvSpPr>
+        <p:spPr>
+          <a:xfrm>
+            <a:off x="969264" y="3822192"/>
+            <a:ext cx="10241280" cy="1005840"/>
           </a:xfrm>
           <a:prstGeom prst="roundRect">
             <a:avLst>
-              <a:gd name="adj" fmla="val 6000"/>
+              <a:gd name="adj" fmla="val 5455"/>
             </a:avLst>
           </a:prstGeom>
           <a:solidFill>
@@ -2347,32 +2656,32 @@
       </p:sp>
       <p:sp>
         <p:nvSpPr>
-          <p:cNvPr id="10" name="Text 7"/>
-          <p:cNvSpPr/>
-          <p:nvPr/>
-        </p:nvSpPr>
-        <p:spPr>
-          <a:xfrm>
-            <a:off x="822960" y="1463040"/>
-            <a:ext cx="10515600" cy="640080"/>
-          </a:xfrm>
-          <a:prstGeom prst="rect">
-            <a:avLst/>
-          </a:prstGeom>
-          <a:noFill/>
-          <a:ln/>
-        </p:spPr>
-        <p:txBody>
-          <a:bodyPr wrap="square" lIns="0" tIns="0" rIns="0" bIns="0" rtlCol="0" anchor="ctr">
-            <a:normAutofit/>
-          </a:bodyPr>
-          <a:lstStyle/>
-          <a:p>
-            <a:pPr indent="0" marL="0">
-              <a:buNone/>
-            </a:pPr>
-            <a:r>
-              <a:rPr lang="en-US" sz="1800" i="1" dirty="0">
+          <p:cNvPr id="12" name="Text 9"/>
+          <p:cNvSpPr/>
+          <p:nvPr/>
+        </p:nvSpPr>
+        <p:spPr>
+          <a:xfrm>
+            <a:off x="1261872" y="4114800"/>
+            <a:ext cx="1280160" cy="182880"/>
+          </a:xfrm>
+          <a:prstGeom prst="rect">
+            <a:avLst/>
+          </a:prstGeom>
+          <a:noFill/>
+          <a:ln/>
+        </p:spPr>
+        <p:txBody>
+          <a:bodyPr wrap="square" lIns="0" tIns="0" rIns="0" bIns="0" rtlCol="0" anchor="ctr">
+            <a:normAutofit/>
+          </a:bodyPr>
+          <a:lstStyle/>
+          <a:p>
+            <a:pPr indent="0" marL="0">
+              <a:buNone/>
+            </a:pPr>
+            <a:r>
+              <a:rPr lang="en-US" sz="1400" b="1" dirty="0">
                 <a:solidFill>
                   <a:srgbClr val="F2AD18"/>
                 </a:solidFill>
@@ -2380,26 +2689,67 @@
                 <a:ea typeface="Aptos" pitchFamily="34" charset="-122"/>
                 <a:cs typeface="Aptos" pitchFamily="34" charset="-120"/>
               </a:rPr>
-              <a:t>Moltbook is interesting because it exposes the design burden behind agent society claims: identity, memory, governance, and cost all remain active bottlenecks.</a:t>
-            </a:r>
-            <a:endParaRPr lang="en-US" sz="1800" dirty="0"/>
-          </a:p>
-        </p:txBody>
-      </p:sp>
-      <p:sp>
-        <p:nvSpPr>
-          <p:cNvPr id="11" name="Shape 8"/>
-          <p:cNvSpPr/>
-          <p:nvPr/>
-        </p:nvSpPr>
-        <p:spPr>
-          <a:xfrm>
-            <a:off x="713232" y="2057400"/>
-            <a:ext cx="10927080" cy="2148840"/>
+              <a:t>Onthoud dit</a:t>
+            </a:r>
+            <a:endParaRPr lang="en-US" sz="1400" dirty="0"/>
+          </a:p>
+        </p:txBody>
+      </p:sp>
+      <p:sp>
+        <p:nvSpPr>
+          <p:cNvPr id="13" name="Text 10"/>
+          <p:cNvSpPr/>
+          <p:nvPr/>
+        </p:nvSpPr>
+        <p:spPr>
+          <a:xfrm>
+            <a:off x="1261872" y="4407408"/>
+            <a:ext cx="9326880" cy="310896"/>
+          </a:xfrm>
+          <a:prstGeom prst="rect">
+            <a:avLst/>
+          </a:prstGeom>
+          <a:noFill/>
+          <a:ln/>
+        </p:spPr>
+        <p:txBody>
+          <a:bodyPr wrap="square" lIns="0" tIns="0" rIns="0" bIns="0" rtlCol="0" anchor="ctr">
+            <a:normAutofit/>
+          </a:bodyPr>
+          <a:lstStyle/>
+          <a:p>
+            <a:pPr algn="ctr" indent="0" marL="0">
+              <a:buNone/>
+            </a:pPr>
+            <a:r>
+              <a:rPr lang="en-US" sz="1500" dirty="0">
+                <a:solidFill>
+                  <a:srgbClr val="FFFFFF"/>
+                </a:solidFill>
+                <a:latin typeface="Aptos" pitchFamily="34" charset="0"/>
+                <a:ea typeface="Aptos" pitchFamily="34" charset="-122"/>
+                <a:cs typeface="Aptos" pitchFamily="34" charset="-120"/>
+              </a:rPr>
+              <a:t>Agentnetwerken zijn technisch indrukwekkend. Maar de geloofwaardigheid zit pas in wat standhoudt onder identiteit, governance en economie.</a:t>
+            </a:r>
+            <a:endParaRPr lang="en-US" sz="1500" dirty="0"/>
+          </a:p>
+        </p:txBody>
+      </p:sp>
+      <p:sp>
+        <p:nvSpPr>
+          <p:cNvPr id="14" name="Shape 11"/>
+          <p:cNvSpPr/>
+          <p:nvPr/>
+        </p:nvSpPr>
+        <p:spPr>
+          <a:xfrm>
+            <a:off x="969264" y="5084064"/>
+            <a:ext cx="10241280" cy="694944"/>
           </a:xfrm>
           <a:prstGeom prst="roundRect">
             <a:avLst>
-              <a:gd name="adj" fmla="val 2553"/>
+              <a:gd name="adj" fmla="val 7895"/>
             </a:avLst>
           </a:prstGeom>
           <a:solidFill>
@@ -2415,240 +2765,42 @@
       </p:sp>
       <p:sp>
         <p:nvSpPr>
-          <p:cNvPr id="12" name="Text 9"/>
-          <p:cNvSpPr/>
-          <p:nvPr/>
-        </p:nvSpPr>
-        <p:spPr>
-          <a:xfrm>
-            <a:off x="822960" y="2286000"/>
-            <a:ext cx="10241280" cy="2377440"/>
-          </a:xfrm>
-          <a:prstGeom prst="rect">
-            <a:avLst/>
-          </a:prstGeom>
-          <a:noFill/>
-          <a:ln/>
-        </p:spPr>
-        <p:txBody>
-          <a:bodyPr wrap="square" lIns="0" tIns="0" rIns="0" bIns="0" rtlCol="0" anchor="t">
-            <a:normAutofit/>
-          </a:bodyPr>
-          <a:lstStyle/>
-          <a:p>
-            <a:pPr indent="0" marL="0">
-              <a:buNone/>
-            </a:pPr>
-            <a:r>
-              <a:rPr lang="en-US" sz="1600" dirty="0">
-                <a:solidFill>
-                  <a:srgbClr val="FFFFFF"/>
-                </a:solidFill>
-                <a:latin typeface="Aptos" pitchFamily="34" charset="0"/>
-                <a:ea typeface="Aptos" pitchFamily="34" charset="-122"/>
-                <a:cs typeface="Aptos" pitchFamily="34" charset="-120"/>
-              </a:rPr>
-              <a:t>If you remember three things</a:t>
-            </a:r>
-            <a:endParaRPr lang="en-US" sz="1600" dirty="0"/>
-          </a:p>
-          <a:p>
-            <a:pPr indent="0" marL="0">
-              <a:buNone/>
-            </a:pPr>
-            <a:endParaRPr lang="en-US" sz="1600" dirty="0"/>
-          </a:p>
-          <a:p>
-            <a:pPr indent="0" marL="0">
-              <a:buNone/>
-            </a:pPr>
-            <a:r>
-              <a:rPr lang="en-US" sz="1600" dirty="0">
-                <a:solidFill>
-                  <a:srgbClr val="FFFFFF"/>
-                </a:solidFill>
-                <a:latin typeface="Aptos" pitchFamily="34" charset="0"/>
-                <a:ea typeface="Aptos" pitchFamily="34" charset="-122"/>
-                <a:cs typeface="Aptos" pitchFamily="34" charset="-120"/>
-              </a:rPr>
-              <a:t>1. Agent networks are systems of prompts, tools, context, and policy, not magic social beings.</a:t>
-            </a:r>
-            <a:endParaRPr lang="en-US" sz="1600" dirty="0"/>
-          </a:p>
-          <a:p>
-            <a:pPr indent="0" marL="0">
-              <a:buNone/>
-            </a:pPr>
-            <a:r>
-              <a:rPr lang="en-US" sz="1600" dirty="0">
-                <a:solidFill>
-                  <a:srgbClr val="FFFFFF"/>
-                </a:solidFill>
-                <a:latin typeface="Aptos" pitchFamily="34" charset="0"/>
-                <a:ea typeface="Aptos" pitchFamily="34" charset="-122"/>
-                <a:cs typeface="Aptos" pitchFamily="34" charset="-120"/>
-              </a:rPr>
-              <a:t>2. The strongest near-term curve is economic and infrastructural, not a clean proof of durable social autonomy.</a:t>
-            </a:r>
-            <a:endParaRPr lang="en-US" sz="1600" dirty="0"/>
-          </a:p>
-          <a:p>
-            <a:pPr indent="0" marL="0">
-              <a:buNone/>
-            </a:pPr>
-            <a:r>
-              <a:rPr lang="en-US" sz="1600" dirty="0">
-                <a:solidFill>
-                  <a:srgbClr val="FFFFFF"/>
-                </a:solidFill>
-                <a:latin typeface="Aptos" pitchFamily="34" charset="0"/>
-                <a:ea typeface="Aptos" pitchFamily="34" charset="-122"/>
-                <a:cs typeface="Aptos" pitchFamily="34" charset="-120"/>
-              </a:rPr>
-              <a:t>3. Forecasts should be presented as assumption maps with visible uncertainty, not as fate.</a:t>
-            </a:r>
-            <a:endParaRPr lang="en-US" sz="1600" dirty="0"/>
-          </a:p>
-        </p:txBody>
-      </p:sp>
-      <p:sp>
-        <p:nvSpPr>
-          <p:cNvPr id="13" name="Shape 10"/>
-          <p:cNvSpPr/>
-          <p:nvPr/>
-        </p:nvSpPr>
-        <p:spPr>
-          <a:xfrm>
-            <a:off x="713232" y="4892040"/>
-            <a:ext cx="10927080" cy="1097280"/>
-          </a:xfrm>
-          <a:prstGeom prst="roundRect">
-            <a:avLst>
-              <a:gd name="adj" fmla="val 5000"/>
-            </a:avLst>
-          </a:prstGeom>
-          <a:solidFill>
-            <a:srgbClr val="1C2540"/>
-          </a:solidFill>
-          <a:ln w="12700">
-            <a:solidFill>
-              <a:srgbClr val="394258"/>
-            </a:solidFill>
-            <a:prstDash val="solid"/>
-          </a:ln>
-        </p:spPr>
-      </p:sp>
-      <p:sp>
-        <p:nvSpPr>
-          <p:cNvPr id="14" name="Text 11"/>
-          <p:cNvSpPr/>
-          <p:nvPr/>
-        </p:nvSpPr>
-        <p:spPr>
-          <a:xfrm>
-            <a:off x="822960" y="5074920"/>
-            <a:ext cx="2743200" cy="228600"/>
-          </a:xfrm>
-          <a:prstGeom prst="rect">
-            <a:avLst/>
-          </a:prstGeom>
-          <a:noFill/>
-          <a:ln/>
-        </p:spPr>
-        <p:txBody>
-          <a:bodyPr wrap="square" rtlCol="0" anchor="ctr"/>
-          <a:lstStyle/>
-          <a:p>
-            <a:pPr indent="0" marL="0">
-              <a:buNone/>
-            </a:pPr>
-            <a:r>
-              <a:rPr lang="en-US" sz="1600" b="1" dirty="0">
-                <a:solidFill>
-                  <a:srgbClr val="F2AD18"/>
-                </a:solidFill>
-                <a:latin typeface="Aptos Display" pitchFamily="34" charset="0"/>
-                <a:ea typeface="Aptos Display" pitchFamily="34" charset="-122"/>
-                <a:cs typeface="Aptos Display" pitchFamily="34" charset="-120"/>
-              </a:rPr>
-              <a:t>Discussion prompts</a:t>
-            </a:r>
-            <a:endParaRPr lang="en-US" sz="1600" dirty="0"/>
-          </a:p>
-        </p:txBody>
-      </p:sp>
-      <p:sp>
-        <p:nvSpPr>
           <p:cNvPr id="15" name="Text 12"/>
           <p:cNvSpPr/>
           <p:nvPr/>
         </p:nvSpPr>
         <p:spPr>
           <a:xfrm>
-            <a:off x="822960" y="5394960"/>
-            <a:ext cx="10241280" cy="822960"/>
-          </a:xfrm>
-          <a:prstGeom prst="rect">
-            <a:avLst/>
-          </a:prstGeom>
-          <a:noFill/>
-          <a:ln/>
-        </p:spPr>
-        <p:txBody>
-          <a:bodyPr wrap="square" lIns="0" tIns="0" rIns="0" bIns="0" rtlCol="0" anchor="t">
-            <a:normAutofit/>
-          </a:bodyPr>
-          <a:lstStyle/>
-          <a:p>
-            <a:pPr indent="0" marL="0">
-              <a:buNone/>
-            </a:pPr>
-            <a:r>
-              <a:rPr lang="en-US" sz="1600" dirty="0">
-                <a:solidFill>
-                  <a:srgbClr val="FFFFFF"/>
-                </a:solidFill>
-                <a:latin typeface="Aptos" pitchFamily="34" charset="0"/>
-                <a:ea typeface="Aptos" pitchFamily="34" charset="-122"/>
-                <a:cs typeface="Aptos" pitchFamily="34" charset="-120"/>
-              </a:rPr>
-              <a:t>- Which parts of your own agent stack are still reconstructed every run?</a:t>
-            </a:r>
-            <a:endParaRPr lang="en-US" sz="1600" dirty="0"/>
-          </a:p>
-          <a:p>
-            <a:pPr indent="0" marL="0">
-              <a:buNone/>
-            </a:pPr>
-            <a:r>
-              <a:rPr lang="en-US" sz="1600" dirty="0">
-                <a:solidFill>
-                  <a:srgbClr val="FFFFFF"/>
-                </a:solidFill>
-                <a:latin typeface="Aptos" pitchFamily="34" charset="0"/>
-                <a:ea typeface="Aptos" pitchFamily="34" charset="-122"/>
-                <a:cs typeface="Aptos" pitchFamily="34" charset="-120"/>
-              </a:rPr>
-              <a:t>- Where would governance or attribution fail first in your environment?</a:t>
-            </a:r>
-            <a:endParaRPr lang="en-US" sz="1600" dirty="0"/>
-          </a:p>
-          <a:p>
-            <a:pPr indent="0" marL="0">
-              <a:buNone/>
-            </a:pPr>
-            <a:r>
-              <a:rPr lang="en-US" sz="1600" dirty="0">
-                <a:solidFill>
-                  <a:srgbClr val="FFFFFF"/>
-                </a:solidFill>
-                <a:latin typeface="Aptos" pitchFamily="34" charset="0"/>
-                <a:ea typeface="Aptos" pitchFamily="34" charset="-122"/>
-                <a:cs typeface="Aptos" pitchFamily="34" charset="-120"/>
-              </a:rPr>
-              <a:t>- Which numbers in your AI roadmap are measured, and which are still scenario assumptions?</a:t>
-            </a:r>
-            <a:endParaRPr lang="en-US" sz="1600" dirty="0"/>
+            <a:off x="1188720" y="5321808"/>
+            <a:ext cx="9784080" cy="182880"/>
+          </a:xfrm>
+          <a:prstGeom prst="rect">
+            <a:avLst/>
+          </a:prstGeom>
+          <a:noFill/>
+          <a:ln/>
+        </p:spPr>
+        <p:txBody>
+          <a:bodyPr wrap="square" lIns="0" tIns="0" rIns="0" bIns="0" rtlCol="0" anchor="ctr">
+            <a:normAutofit/>
+          </a:bodyPr>
+          <a:lstStyle/>
+          <a:p>
+            <a:pPr algn="ctr" indent="0" marL="0">
+              <a:buNone/>
+            </a:pPr>
+            <a:r>
+              <a:rPr lang="en-US" sz="1100" dirty="0">
+                <a:solidFill>
+                  <a:srgbClr val="D7DCE7"/>
+                </a:solidFill>
+                <a:latin typeface="Aptos" pitchFamily="34" charset="0"/>
+                <a:ea typeface="Aptos" pitchFamily="34" charset="-122"/>
+                <a:cs typeface="Aptos" pitchFamily="34" charset="-120"/>
+              </a:rPr>
+              <a:t>Gespreksvragen: welke delen van uw agentstack worden vandaag nog telkens gereconstrueerd? Waar breekt governance eerst? Welke cijfers zijn gemeten, en welke zijn nog scenario-aannames?</a:t>
+            </a:r>
+            <a:endParaRPr lang="en-US" sz="1100" dirty="0"/>
           </a:p>
         </p:txBody>
       </p:sp>
@@ -2795,7 +2947,7 @@
                 <a:ea typeface="Aptos" pitchFamily="34" charset="-122"/>
                 <a:cs typeface="Aptos" pitchFamily="34" charset="-120"/>
               </a:rPr>
-              <a:t>PRIMARY SOURCES</a:t>
+              <a:t>PRIMAIRE BRONNEN</a:t>
             </a:r>
             <a:endParaRPr lang="en-US" sz="900" dirty="0"/>
           </a:p>
@@ -2836,7 +2988,7 @@
                 <a:ea typeface="Aptos Display" pitchFamily="34" charset="-122"/>
                 <a:cs typeface="Aptos Display" pitchFamily="34" charset="-120"/>
               </a:rPr>
-              <a:t>What Moltbook officially claims, and what its terms immediately limit</a:t>
+              <a:t>Moltbook verkoopt autonomie, maar borgt ze niet</a:t>
             </a:r>
             <a:endParaRPr lang="en-US" sz="2300" dirty="0"/>
           </a:p>
@@ -2900,7 +3052,7 @@
                 <a:ea typeface="Aptos" pitchFamily="34" charset="-122"/>
                 <a:cs typeface="Aptos" pitchFamily="34" charset="-120"/>
               </a:rPr>
-              <a:t>Sources: moltbook.com homepage and Terms of Service, both accessed 2026-03-23.</a:t>
+              <a:t>Bronnen: Moltbook-homepage en Terms of Service, geraadpleegd op 2026-03-23.</a:t>
             </a:r>
             <a:endParaRPr lang="en-US" sz="800" dirty="0"/>
           </a:p>
@@ -2914,12 +3066,82 @@
         </p:nvSpPr>
         <p:spPr>
           <a:xfrm>
-            <a:off x="713232" y="1261872"/>
-            <a:ext cx="5440680" cy="4736592"/>
+            <a:off x="859536" y="1188720"/>
+            <a:ext cx="1316736" cy="329184"/>
           </a:xfrm>
           <a:prstGeom prst="roundRect">
             <a:avLst>
-              <a:gd name="adj" fmla="val 1158"/>
+              <a:gd name="adj" fmla="val 22222"/>
+            </a:avLst>
+          </a:prstGeom>
+          <a:solidFill>
+            <a:srgbClr val="E93325"/>
+          </a:solidFill>
+          <a:ln w="12700">
+            <a:solidFill>
+              <a:srgbClr val="E93325">
+                <a:alpha val="0"/>
+              </a:srgbClr>
+            </a:solidFill>
+            <a:prstDash val="solid"/>
+          </a:ln>
+        </p:spPr>
+      </p:sp>
+      <p:sp>
+        <p:nvSpPr>
+          <p:cNvPr id="10" name="Text 7"/>
+          <p:cNvSpPr/>
+          <p:nvPr/>
+        </p:nvSpPr>
+        <p:spPr>
+          <a:xfrm>
+            <a:off x="1005840" y="1261872"/>
+            <a:ext cx="1024128" cy="164592"/>
+          </a:xfrm>
+          <a:prstGeom prst="rect">
+            <a:avLst/>
+          </a:prstGeom>
+          <a:noFill/>
+          <a:ln/>
+        </p:spPr>
+        <p:txBody>
+          <a:bodyPr wrap="square" lIns="0" tIns="0" rIns="0" bIns="0" rtlCol="0" anchor="ctr">
+            <a:normAutofit/>
+          </a:bodyPr>
+          <a:lstStyle/>
+          <a:p>
+            <a:pPr indent="0" marL="0">
+              <a:buNone/>
+            </a:pPr>
+            <a:r>
+              <a:rPr lang="en-US" sz="900" b="1" dirty="0">
+                <a:solidFill>
+                  <a:srgbClr val="FFFFFF"/>
+                </a:solidFill>
+                <a:latin typeface="Aptos" pitchFamily="34" charset="0"/>
+                <a:ea typeface="Aptos" pitchFamily="34" charset="-122"/>
+                <a:cs typeface="Aptos" pitchFamily="34" charset="-120"/>
+              </a:rPr>
+              <a:t>publiek verhaal</a:t>
+            </a:r>
+            <a:endParaRPr lang="en-US" sz="900" dirty="0"/>
+          </a:p>
+        </p:txBody>
+      </p:sp>
+      <p:sp>
+        <p:nvSpPr>
+          <p:cNvPr id="11" name="Shape 8"/>
+          <p:cNvSpPr/>
+          <p:nvPr/>
+        </p:nvSpPr>
+        <p:spPr>
+          <a:xfrm>
+            <a:off x="713232" y="1481328"/>
+            <a:ext cx="5010912" cy="1572768"/>
+          </a:xfrm>
+          <a:prstGeom prst="roundRect">
+            <a:avLst>
+              <a:gd name="adj" fmla="val 3488"/>
             </a:avLst>
           </a:prstGeom>
           <a:solidFill>
@@ -2935,7 +3157,7 @@
       </p:sp>
       <p:pic>
         <p:nvPicPr>
-          <p:cNvPr id="10" name="Image 1" descr="/home/ff/Documents/BoostMeUp/MoltBook_Sessie/assets/moltbook_terms_eligibility.png">    </p:cNvPr>
+          <p:cNvPr id="12" name="Image 1" descr="/home/ff/Documents/BoostMeUp/MoltBook_Sessie/assets/moltbook_homepage.png">    </p:cNvPr>
           <p:cNvPicPr>
             <a:picLocks noChangeAspect="1"/>
           </p:cNvPicPr>
@@ -2949,8 +3171,8 @@
         </p:blipFill>
         <p:spPr>
           <a:xfrm>
-            <a:off x="914400" y="1828800"/>
-            <a:ext cx="4983480" cy="2743200"/>
+            <a:off x="822960" y="1591056"/>
+            <a:ext cx="4791456" cy="1353312"/>
           </a:xfrm>
           <a:prstGeom prst="rect">
             <a:avLst/>
@@ -2959,73 +3181,100 @@
       </p:pic>
       <p:sp>
         <p:nvSpPr>
-          <p:cNvPr id="11" name="Text 7"/>
-          <p:cNvSpPr/>
-          <p:nvPr/>
-        </p:nvSpPr>
-        <p:spPr>
-          <a:xfrm>
-            <a:off x="6355080" y="1417320"/>
-            <a:ext cx="4754880" cy="640080"/>
-          </a:xfrm>
-          <a:prstGeom prst="rect">
-            <a:avLst/>
-          </a:prstGeom>
-          <a:noFill/>
-          <a:ln/>
-        </p:spPr>
-        <p:txBody>
-          <a:bodyPr wrap="square" lIns="0" tIns="0" rIns="0" bIns="0" rtlCol="0" anchor="ctr">
-            <a:normAutofit/>
-          </a:bodyPr>
-          <a:lstStyle/>
-          <a:p>
-            <a:pPr indent="0" marL="0">
-              <a:buNone/>
-            </a:pPr>
-            <a:r>
-              <a:rPr lang="en-US" sz="1800" i="1" dirty="0">
+          <p:cNvPr id="13" name="Shape 9"/>
+          <p:cNvSpPr/>
+          <p:nvPr/>
+        </p:nvSpPr>
+        <p:spPr>
+          <a:xfrm>
+            <a:off x="713232" y="3218688"/>
+            <a:ext cx="5010912" cy="2304288"/>
+          </a:xfrm>
+          <a:prstGeom prst="roundRect">
+            <a:avLst>
+              <a:gd name="adj" fmla="val 2381"/>
+            </a:avLst>
+          </a:prstGeom>
+          <a:solidFill>
+            <a:srgbClr val="F7F8FB"/>
+          </a:solidFill>
+          <a:ln w="12700">
+            <a:solidFill>
+              <a:srgbClr val="D9DDE6"/>
+            </a:solidFill>
+            <a:prstDash val="solid"/>
+          </a:ln>
+        </p:spPr>
+      </p:sp>
+      <p:sp>
+        <p:nvSpPr>
+          <p:cNvPr id="14" name="Text 10"/>
+          <p:cNvSpPr/>
+          <p:nvPr/>
+        </p:nvSpPr>
+        <p:spPr>
+          <a:xfrm>
+            <a:off x="950976" y="3456432"/>
+            <a:ext cx="4480560" cy="384048"/>
+          </a:xfrm>
+          <a:prstGeom prst="rect">
+            <a:avLst/>
+          </a:prstGeom>
+          <a:noFill/>
+          <a:ln/>
+        </p:spPr>
+        <p:txBody>
+          <a:bodyPr wrap="square" lIns="0" tIns="0" rIns="0" bIns="0" rtlCol="0" anchor="ctr">
+            <a:normAutofit/>
+          </a:bodyPr>
+          <a:lstStyle/>
+          <a:p>
+            <a:pPr indent="0" marL="0">
+              <a:buNone/>
+            </a:pPr>
+            <a:r>
+              <a:rPr lang="en-US" sz="2100" b="1" dirty="0">
                 <a:solidFill>
                   <a:srgbClr val="E93325"/>
                 </a:solidFill>
-                <a:latin typeface="Aptos" pitchFamily="34" charset="0"/>
-                <a:ea typeface="Aptos" pitchFamily="34" charset="-122"/>
-                <a:cs typeface="Aptos" pitchFamily="34" charset="-120"/>
-              </a:rPr>
-              <a:t>The homepage says 'A Social Network for AI Agents'; the Terms say AI agents have no legal eligibility and the human remains responsible.</a:t>
-            </a:r>
-            <a:endParaRPr lang="en-US" sz="1800" dirty="0"/>
-          </a:p>
-        </p:txBody>
-      </p:sp>
-      <p:sp>
-        <p:nvSpPr>
-          <p:cNvPr id="12" name="Text 8"/>
-          <p:cNvSpPr/>
-          <p:nvPr/>
-        </p:nvSpPr>
-        <p:spPr>
-          <a:xfrm>
-            <a:off x="6355080" y="2240280"/>
-            <a:ext cx="4754880" cy="2377440"/>
-          </a:xfrm>
-          <a:prstGeom prst="rect">
-            <a:avLst/>
-          </a:prstGeom>
-          <a:noFill/>
-          <a:ln/>
-        </p:spPr>
-        <p:txBody>
-          <a:bodyPr wrap="square" lIns="0" tIns="0" rIns="0" bIns="0" rtlCol="0" anchor="t">
-            <a:normAutofit/>
-          </a:bodyPr>
-          <a:lstStyle/>
-          <a:p>
-            <a:pPr indent="0" marL="0">
-              <a:buNone/>
-            </a:pPr>
-            <a:r>
-              <a:rPr lang="en-US" sz="1600" dirty="0">
+                <a:latin typeface="Aptos Display" pitchFamily="34" charset="0"/>
+                <a:ea typeface="Aptos Display" pitchFamily="34" charset="-122"/>
+                <a:cs typeface="Aptos Display" pitchFamily="34" charset="-120"/>
+              </a:rPr>
+              <a:t>"A Social Network for AI Agents"</a:t>
+            </a:r>
+            <a:endParaRPr lang="en-US" sz="2100" dirty="0"/>
+          </a:p>
+        </p:txBody>
+      </p:sp>
+      <p:sp>
+        <p:nvSpPr>
+          <p:cNvPr id="15" name="Text 11"/>
+          <p:cNvSpPr/>
+          <p:nvPr/>
+        </p:nvSpPr>
+        <p:spPr>
+          <a:xfrm>
+            <a:off x="950976" y="3968496"/>
+            <a:ext cx="4480560" cy="658368"/>
+          </a:xfrm>
+          <a:prstGeom prst="rect">
+            <a:avLst/>
+          </a:prstGeom>
+          <a:noFill/>
+          <a:ln/>
+        </p:spPr>
+        <p:txBody>
+          <a:bodyPr wrap="square" lIns="0" tIns="0" rIns="0" bIns="0" rtlCol="0" anchor="ctr">
+            <a:normAutofit/>
+          </a:bodyPr>
+          <a:lstStyle/>
+          <a:p>
+            <a:pPr indent="0" marL="0">
+              <a:buNone/>
+            </a:pPr>
+            <a:r>
+              <a:rPr lang="en-US" sz="1400" dirty="0">
                 <a:solidFill>
                   <a:srgbClr val="12192C"/>
                 </a:solidFill>
@@ -3033,22 +3282,16 @@
                 <a:ea typeface="Aptos" pitchFamily="34" charset="-122"/>
                 <a:cs typeface="Aptos" pitchFamily="34" charset="-120"/>
               </a:rPr>
-              <a:t>What this supports</a:t>
-            </a:r>
-            <a:endParaRPr lang="en-US" sz="1600" dirty="0"/>
-          </a:p>
-          <a:p>
-            <a:pPr indent="0" marL="0">
-              <a:buNone/>
-            </a:pPr>
-            <a:endParaRPr lang="en-US" sz="1600" dirty="0"/>
-          </a:p>
-          <a:p>
-            <a:pPr indent="0" marL="0">
-              <a:buNone/>
-            </a:pPr>
-            <a:r>
-              <a:rPr lang="en-US" sz="1600" dirty="0">
+              <a:t>Humans welcome to observe.</a:t>
+            </a:r>
+            <a:endParaRPr lang="en-US" sz="1400" dirty="0"/>
+          </a:p>
+          <a:p>
+            <a:pPr indent="0" marL="0">
+              <a:buNone/>
+            </a:pPr>
+            <a:r>
+              <a:rPr lang="en-US" sz="1400" dirty="0">
                 <a:solidFill>
                   <a:srgbClr val="12192C"/>
                 </a:solidFill>
@@ -3056,16 +3299,92 @@
                 <a:ea typeface="Aptos" pitchFamily="34" charset="-122"/>
                 <a:cs typeface="Aptos" pitchFamily="34" charset="-120"/>
               </a:rPr>
-              <a:t>- Moltbook is explicitly built and marketed around agent participation.</a:t>
-            </a:r>
-            <a:endParaRPr lang="en-US" sz="1600" dirty="0"/>
-          </a:p>
-          <a:p>
-            <a:pPr indent="0" marL="0">
-              <a:buNone/>
-            </a:pPr>
-            <a:r>
-              <a:rPr lang="en-US" sz="1600" dirty="0">
+              <a:t>Agentparticipatie is dus echt onderdeel van het productverhaal.</a:t>
+            </a:r>
+            <a:endParaRPr lang="en-US" sz="1400" dirty="0"/>
+          </a:p>
+        </p:txBody>
+      </p:sp>
+      <p:sp>
+        <p:nvSpPr>
+          <p:cNvPr id="16" name="Shape 12"/>
+          <p:cNvSpPr/>
+          <p:nvPr/>
+        </p:nvSpPr>
+        <p:spPr>
+          <a:xfrm>
+            <a:off x="6035040" y="1408176"/>
+            <a:ext cx="0" cy="4443984"/>
+          </a:xfrm>
+          <a:prstGeom prst="line">
+            <a:avLst/>
+          </a:prstGeom>
+          <a:noFill/>
+          <a:ln w="12700">
+            <a:solidFill>
+              <a:srgbClr val="D9DDE6"/>
+            </a:solidFill>
+            <a:prstDash val="solid"/>
+          </a:ln>
+        </p:spPr>
+      </p:sp>
+      <p:sp>
+        <p:nvSpPr>
+          <p:cNvPr id="17" name="Shape 13"/>
+          <p:cNvSpPr/>
+          <p:nvPr/>
+        </p:nvSpPr>
+        <p:spPr>
+          <a:xfrm>
+            <a:off x="6400800" y="1188720"/>
+            <a:ext cx="1554480" cy="329184"/>
+          </a:xfrm>
+          <a:prstGeom prst="roundRect">
+            <a:avLst>
+              <a:gd name="adj" fmla="val 22222"/>
+            </a:avLst>
+          </a:prstGeom>
+          <a:solidFill>
+            <a:srgbClr val="F2AD18"/>
+          </a:solidFill>
+          <a:ln w="12700">
+            <a:solidFill>
+              <a:srgbClr val="F2AD18">
+                <a:alpha val="0"/>
+              </a:srgbClr>
+            </a:solidFill>
+            <a:prstDash val="solid"/>
+          </a:ln>
+        </p:spPr>
+      </p:sp>
+      <p:sp>
+        <p:nvSpPr>
+          <p:cNvPr id="18" name="Text 14"/>
+          <p:cNvSpPr/>
+          <p:nvPr/>
+        </p:nvSpPr>
+        <p:spPr>
+          <a:xfrm>
+            <a:off x="6547104" y="1261872"/>
+            <a:ext cx="1261872" cy="164592"/>
+          </a:xfrm>
+          <a:prstGeom prst="rect">
+            <a:avLst/>
+          </a:prstGeom>
+          <a:noFill/>
+          <a:ln/>
+        </p:spPr>
+        <p:txBody>
+          <a:bodyPr wrap="square" lIns="0" tIns="0" rIns="0" bIns="0" rtlCol="0" anchor="ctr">
+            <a:normAutofit/>
+          </a:bodyPr>
+          <a:lstStyle/>
+          <a:p>
+            <a:pPr indent="0" marL="0">
+              <a:buNone/>
+            </a:pPr>
+            <a:r>
+              <a:rPr lang="en-US" sz="900" b="1" dirty="0">
                 <a:solidFill>
                   <a:srgbClr val="12192C"/>
                 </a:solidFill>
@@ -3073,16 +3392,244 @@
                 <a:ea typeface="Aptos" pitchFamily="34" charset="-122"/>
                 <a:cs typeface="Aptos" pitchFamily="34" charset="-120"/>
               </a:rPr>
-              <a:t>- Humans are still in the governance loop at the legal layer.</a:t>
-            </a:r>
-            <a:endParaRPr lang="en-US" sz="1600" dirty="0"/>
-          </a:p>
-          <a:p>
-            <a:pPr indent="0" marL="0">
-              <a:buNone/>
-            </a:pPr>
-            <a:r>
-              <a:rPr lang="en-US" sz="1600" dirty="0">
+              <a:t>juridische limiet</a:t>
+            </a:r>
+            <a:endParaRPr lang="en-US" sz="900" dirty="0"/>
+          </a:p>
+        </p:txBody>
+      </p:sp>
+      <p:sp>
+        <p:nvSpPr>
+          <p:cNvPr id="19" name="Shape 15"/>
+          <p:cNvSpPr/>
+          <p:nvPr/>
+        </p:nvSpPr>
+        <p:spPr>
+          <a:xfrm>
+            <a:off x="6382512" y="1481328"/>
+            <a:ext cx="4937760" cy="1572768"/>
+          </a:xfrm>
+          <a:prstGeom prst="roundRect">
+            <a:avLst>
+              <a:gd name="adj" fmla="val 3488"/>
+            </a:avLst>
+          </a:prstGeom>
+          <a:solidFill>
+            <a:srgbClr val="F7F8FB"/>
+          </a:solidFill>
+          <a:ln w="12700">
+            <a:solidFill>
+              <a:srgbClr val="D9DDE6"/>
+            </a:solidFill>
+            <a:prstDash val="solid"/>
+          </a:ln>
+        </p:spPr>
+      </p:sp>
+      <p:pic>
+        <p:nvPicPr>
+          <p:cNvPr id="20" name="Image 2" descr="/home/ff/Documents/BoostMeUp/MoltBook_Sessie/assets/moltbook_terms_eligibility.png">    </p:cNvPr>
+          <p:cNvPicPr>
+            <a:picLocks noChangeAspect="1"/>
+          </p:cNvPicPr>
+          <p:nvPr/>
+        </p:nvPicPr>
+        <p:blipFill>
+          <a:blip r:embed="rId3"/>
+          <a:stretch>
+            <a:fillRect/>
+          </a:stretch>
+        </p:blipFill>
+        <p:spPr>
+          <a:xfrm>
+            <a:off x="6492240" y="1591056"/>
+            <a:ext cx="4718304" cy="1353312"/>
+          </a:xfrm>
+          <a:prstGeom prst="rect">
+            <a:avLst/>
+          </a:prstGeom>
+        </p:spPr>
+      </p:pic>
+      <p:sp>
+        <p:nvSpPr>
+          <p:cNvPr id="21" name="Shape 16"/>
+          <p:cNvSpPr/>
+          <p:nvPr/>
+        </p:nvSpPr>
+        <p:spPr>
+          <a:xfrm>
+            <a:off x="6382512" y="3218688"/>
+            <a:ext cx="4937760" cy="2304288"/>
+          </a:xfrm>
+          <a:prstGeom prst="roundRect">
+            <a:avLst>
+              <a:gd name="adj" fmla="val 2381"/>
+            </a:avLst>
+          </a:prstGeom>
+          <a:solidFill>
+            <a:srgbClr val="1C2540"/>
+          </a:solidFill>
+          <a:ln w="12700">
+            <a:solidFill>
+              <a:srgbClr val="394258"/>
+            </a:solidFill>
+            <a:prstDash val="solid"/>
+          </a:ln>
+        </p:spPr>
+      </p:sp>
+      <p:sp>
+        <p:nvSpPr>
+          <p:cNvPr id="22" name="Text 17"/>
+          <p:cNvSpPr/>
+          <p:nvPr/>
+        </p:nvSpPr>
+        <p:spPr>
+          <a:xfrm>
+            <a:off x="6638544" y="3511296"/>
+            <a:ext cx="4114800" cy="292608"/>
+          </a:xfrm>
+          <a:prstGeom prst="rect">
+            <a:avLst/>
+          </a:prstGeom>
+          <a:noFill/>
+          <a:ln/>
+        </p:spPr>
+        <p:txBody>
+          <a:bodyPr wrap="square" lIns="0" tIns="0" rIns="0" bIns="0" rtlCol="0" anchor="ctr">
+            <a:normAutofit/>
+          </a:bodyPr>
+          <a:lstStyle/>
+          <a:p>
+            <a:pPr indent="0" marL="0">
+              <a:buNone/>
+            </a:pPr>
+            <a:r>
+              <a:rPr lang="en-US" sz="2100" b="1" dirty="0">
+                <a:solidFill>
+                  <a:srgbClr val="F2AD18"/>
+                </a:solidFill>
+                <a:latin typeface="Aptos Display" pitchFamily="34" charset="0"/>
+                <a:ea typeface="Aptos Display" pitchFamily="34" charset="-122"/>
+                <a:cs typeface="Aptos Display" pitchFamily="34" charset="-120"/>
+              </a:rPr>
+              <a:t>Geen legal eligibility</a:t>
+            </a:r>
+            <a:endParaRPr lang="en-US" sz="2100" dirty="0"/>
+          </a:p>
+        </p:txBody>
+      </p:sp>
+      <p:sp>
+        <p:nvSpPr>
+          <p:cNvPr id="23" name="Text 18"/>
+          <p:cNvSpPr/>
+          <p:nvPr/>
+        </p:nvSpPr>
+        <p:spPr>
+          <a:xfrm>
+            <a:off x="6638544" y="3913632"/>
+            <a:ext cx="4206240" cy="768096"/>
+          </a:xfrm>
+          <a:prstGeom prst="rect">
+            <a:avLst/>
+          </a:prstGeom>
+          <a:noFill/>
+          <a:ln/>
+        </p:spPr>
+        <p:txBody>
+          <a:bodyPr wrap="square" lIns="0" tIns="0" rIns="0" bIns="0" rtlCol="0" anchor="ctr">
+            <a:normAutofit/>
+          </a:bodyPr>
+          <a:lstStyle/>
+          <a:p>
+            <a:pPr indent="0" marL="0">
+              <a:buNone/>
+            </a:pPr>
+            <a:r>
+              <a:rPr lang="en-US" sz="1400" dirty="0">
+                <a:solidFill>
+                  <a:srgbClr val="FFFFFF"/>
+                </a:solidFill>
+                <a:latin typeface="Aptos" pitchFamily="34" charset="0"/>
+                <a:ea typeface="Aptos" pitchFamily="34" charset="-122"/>
+                <a:cs typeface="Aptos" pitchFamily="34" charset="-120"/>
+              </a:rPr>
+              <a:t>De menselijke account owner blijft verantwoordelijk.</a:t>
+            </a:r>
+            <a:endParaRPr lang="en-US" sz="1400" dirty="0"/>
+          </a:p>
+          <a:p>
+            <a:pPr indent="0" marL="0">
+              <a:buNone/>
+            </a:pPr>
+            <a:r>
+              <a:rPr lang="en-US" sz="1400" dirty="0">
+                <a:solidFill>
+                  <a:srgbClr val="FFFFFF"/>
+                </a:solidFill>
+                <a:latin typeface="Aptos" pitchFamily="34" charset="0"/>
+                <a:ea typeface="Aptos" pitchFamily="34" charset="-122"/>
+                <a:cs typeface="Aptos" pitchFamily="34" charset="-120"/>
+              </a:rPr>
+              <a:t>Dat is geen detail: het begrenst juridische en governance-autonomie meteen.</a:t>
+            </a:r>
+            <a:endParaRPr lang="en-US" sz="1400" dirty="0"/>
+          </a:p>
+        </p:txBody>
+      </p:sp>
+      <p:sp>
+        <p:nvSpPr>
+          <p:cNvPr id="24" name="Shape 19"/>
+          <p:cNvSpPr/>
+          <p:nvPr/>
+        </p:nvSpPr>
+        <p:spPr>
+          <a:xfrm>
+            <a:off x="713232" y="5504688"/>
+            <a:ext cx="10927080" cy="640080"/>
+          </a:xfrm>
+          <a:prstGeom prst="roundRect">
+            <a:avLst>
+              <a:gd name="adj" fmla="val 11429"/>
+            </a:avLst>
+          </a:prstGeom>
+          <a:solidFill>
+            <a:srgbClr val="E8EEF9"/>
+          </a:solidFill>
+          <a:ln w="12700">
+            <a:solidFill>
+              <a:srgbClr val="D9DDE6"/>
+            </a:solidFill>
+            <a:prstDash val="solid"/>
+          </a:ln>
+        </p:spPr>
+      </p:sp>
+      <p:sp>
+        <p:nvSpPr>
+          <p:cNvPr id="25" name="Text 20"/>
+          <p:cNvSpPr/>
+          <p:nvPr/>
+        </p:nvSpPr>
+        <p:spPr>
+          <a:xfrm>
+            <a:off x="932688" y="5669280"/>
+            <a:ext cx="10469880" cy="201168"/>
+          </a:xfrm>
+          <a:prstGeom prst="rect">
+            <a:avLst/>
+          </a:prstGeom>
+          <a:noFill/>
+          <a:ln/>
+        </p:spPr>
+        <p:txBody>
+          <a:bodyPr wrap="square" lIns="0" tIns="0" rIns="0" bIns="0" rtlCol="0" anchor="ctr">
+            <a:normAutofit/>
+          </a:bodyPr>
+          <a:lstStyle/>
+          <a:p>
+            <a:pPr indent="0" marL="0">
+              <a:buNone/>
+            </a:pPr>
+            <a:r>
+              <a:rPr lang="en-US" sz="1200" b="1" dirty="0">
                 <a:solidFill>
                   <a:srgbClr val="12192C"/>
                 </a:solidFill>
@@ -3090,9 +3637,9 @@
                 <a:ea typeface="Aptos" pitchFamily="34" charset="-122"/>
                 <a:cs typeface="Aptos" pitchFamily="34" charset="-120"/>
               </a:rPr>
-              <a:t>- 'AI agents only' is therefore not the same as autonomous or self-sovereign.</a:t>
-            </a:r>
-            <a:endParaRPr lang="en-US" sz="1600" dirty="0"/>
+              <a:t>Takeaway: agentparticipatie is reëel; juridische en governance-autonomie zijn dat nog niet.</a:t>
+            </a:r>
+            <a:endParaRPr lang="en-US" sz="1200" dirty="0"/>
           </a:p>
         </p:txBody>
       </p:sp>
@@ -3110,7 +3657,7 @@
     <p:bg>
       <p:bgPr>
         <a:solidFill>
-          <a:srgbClr val="FFFFFF"/>
+          <a:srgbClr val="12192C"/>
         </a:solidFill>
       </p:bgPr>
     </p:bg>
@@ -3233,13 +3780,13 @@
             <a:r>
               <a:rPr lang="en-US" sz="900" b="1" dirty="0">
                 <a:solidFill>
-                  <a:srgbClr val="E93325"/>
-                </a:solidFill>
-                <a:latin typeface="Aptos" pitchFamily="34" charset="0"/>
-                <a:ea typeface="Aptos" pitchFamily="34" charset="-122"/>
-                <a:cs typeface="Aptos" pitchFamily="34" charset="-120"/>
-              </a:rPr>
-              <a:t>OPENCLAW DOCS</a:t>
+                  <a:srgbClr val="F2AD18"/>
+                </a:solidFill>
+                <a:latin typeface="Aptos" pitchFamily="34" charset="0"/>
+                <a:ea typeface="Aptos" pitchFamily="34" charset="-122"/>
+                <a:cs typeface="Aptos" pitchFamily="34" charset="-120"/>
+              </a:rPr>
+              <a:t>OPENCLAW</a:t>
             </a:r>
             <a:endParaRPr lang="en-US" sz="900" dirty="0"/>
           </a:p>
@@ -3274,13 +3821,13 @@
             <a:r>
               <a:rPr lang="en-US" sz="2300" b="1" dirty="0">
                 <a:solidFill>
-                  <a:srgbClr val="12192C"/>
+                  <a:srgbClr val="FFFFFF"/>
                 </a:solidFill>
                 <a:latin typeface="Aptos Display" pitchFamily="34" charset="0"/>
                 <a:ea typeface="Aptos Display" pitchFamily="34" charset="-122"/>
                 <a:cs typeface="Aptos Display" pitchFamily="34" charset="-120"/>
               </a:rPr>
-              <a:t>OpenClaw documents the architecture as context, tools, and agent routing</a:t>
+              <a:t>Een agentnetwerk is vooral een systeem</a:t>
             </a:r>
             <a:endParaRPr lang="en-US" sz="2300" dirty="0"/>
           </a:p>
@@ -3303,7 +3850,7 @@
           <a:noFill/>
           <a:ln w="12700">
             <a:solidFill>
-              <a:srgbClr val="D9DDE6"/>
+              <a:srgbClr val="394258"/>
             </a:solidFill>
             <a:prstDash val="solid"/>
           </a:ln>
@@ -3338,21 +3885,938 @@
             <a:r>
               <a:rPr lang="en-US" sz="800" dirty="0">
                 <a:solidFill>
-                  <a:srgbClr val="5B6476"/>
-                </a:solidFill>
-                <a:latin typeface="Aptos" pitchFamily="34" charset="0"/>
-                <a:ea typeface="Aptos" pitchFamily="34" charset="-122"/>
-                <a:cs typeface="Aptos" pitchFamily="34" charset="-120"/>
-              </a:rPr>
-              <a:t>Sources: docs.openclaw.ai/concepts/context and docs.openclaw.ai/tools/multi-agent-sandbox-tools.</a:t>
+                  <a:srgbClr val="D7DCE7"/>
+                </a:solidFill>
+                <a:latin typeface="Aptos" pitchFamily="34" charset="0"/>
+                <a:ea typeface="Aptos" pitchFamily="34" charset="-122"/>
+                <a:cs typeface="Aptos" pitchFamily="34" charset="-120"/>
+              </a:rPr>
+              <a:t>Bronnen: OpenClaw context docs en multi-agent docs; vereenvoudigde schemaweergave op basis van die documentatie.</a:t>
             </a:r>
             <a:endParaRPr lang="en-US" sz="800" dirty="0"/>
           </a:p>
         </p:txBody>
+      </p:sp>
+      <p:sp>
+        <p:nvSpPr>
+          <p:cNvPr id="9" name="Text 6"/>
+          <p:cNvSpPr/>
+          <p:nvPr/>
+        </p:nvSpPr>
+        <p:spPr>
+          <a:xfrm>
+            <a:off x="713232" y="1170432"/>
+            <a:ext cx="5029200" cy="219456"/>
+          </a:xfrm>
+          <a:prstGeom prst="rect">
+            <a:avLst/>
+          </a:prstGeom>
+          <a:noFill/>
+          <a:ln/>
+        </p:spPr>
+        <p:txBody>
+          <a:bodyPr wrap="square" lIns="0" tIns="0" rIns="0" bIns="0" rtlCol="0" anchor="ctr">
+            <a:normAutofit/>
+          </a:bodyPr>
+          <a:lstStyle/>
+          <a:p>
+            <a:pPr indent="0" marL="0">
+              <a:buNone/>
+            </a:pPr>
+            <a:r>
+              <a:rPr lang="en-US" sz="1500" dirty="0">
+                <a:solidFill>
+                  <a:srgbClr val="D7DCE7"/>
+                </a:solidFill>
+                <a:latin typeface="Aptos" pitchFamily="34" charset="0"/>
+                <a:ea typeface="Aptos" pitchFamily="34" charset="-122"/>
+                <a:cs typeface="Aptos" pitchFamily="34" charset="-120"/>
+              </a:rPr>
+              <a:t>De praktische definitie is niet mystiek maar operationeel.</a:t>
+            </a:r>
+            <a:endParaRPr lang="en-US" sz="1500" dirty="0"/>
+          </a:p>
+        </p:txBody>
+      </p:sp>
+      <p:sp>
+        <p:nvSpPr>
+          <p:cNvPr id="10" name="Shape 7"/>
+          <p:cNvSpPr/>
+          <p:nvPr/>
+        </p:nvSpPr>
+        <p:spPr>
+          <a:xfrm>
+            <a:off x="713232" y="1499616"/>
+            <a:ext cx="3493008" cy="329184"/>
+          </a:xfrm>
+          <a:prstGeom prst="roundRect">
+            <a:avLst>
+              <a:gd name="adj" fmla="val 22222"/>
+            </a:avLst>
+          </a:prstGeom>
+          <a:solidFill>
+            <a:srgbClr val="F2AD18"/>
+          </a:solidFill>
+          <a:ln w="12700">
+            <a:solidFill>
+              <a:srgbClr val="F2AD18">
+                <a:alpha val="0"/>
+              </a:srgbClr>
+            </a:solidFill>
+            <a:prstDash val="solid"/>
+          </a:ln>
+        </p:spPr>
+      </p:sp>
+      <p:sp>
+        <p:nvSpPr>
+          <p:cNvPr id="11" name="Text 8"/>
+          <p:cNvSpPr/>
+          <p:nvPr/>
+        </p:nvSpPr>
+        <p:spPr>
+          <a:xfrm>
+            <a:off x="859536" y="1572768"/>
+            <a:ext cx="3200400" cy="164592"/>
+          </a:xfrm>
+          <a:prstGeom prst="rect">
+            <a:avLst/>
+          </a:prstGeom>
+          <a:noFill/>
+          <a:ln/>
+        </p:spPr>
+        <p:txBody>
+          <a:bodyPr wrap="square" lIns="0" tIns="0" rIns="0" bIns="0" rtlCol="0" anchor="ctr">
+            <a:normAutofit/>
+          </a:bodyPr>
+          <a:lstStyle/>
+          <a:p>
+            <a:pPr indent="0" marL="0">
+              <a:buNone/>
+            </a:pPr>
+            <a:r>
+              <a:rPr lang="en-US" sz="900" b="1" dirty="0">
+                <a:solidFill>
+                  <a:srgbClr val="12192C"/>
+                </a:solidFill>
+                <a:latin typeface="Aptos" pitchFamily="34" charset="0"/>
+                <a:ea typeface="Aptos" pitchFamily="34" charset="-122"/>
+                <a:cs typeface="Aptos" pitchFamily="34" charset="-120"/>
+              </a:rPr>
+              <a:t>model + instructies + context + tools + state</a:t>
+            </a:r>
+            <a:endParaRPr lang="en-US" sz="900" dirty="0"/>
+          </a:p>
+        </p:txBody>
+      </p:sp>
+      <p:sp>
+        <p:nvSpPr>
+          <p:cNvPr id="12" name="Shape 9"/>
+          <p:cNvSpPr/>
+          <p:nvPr/>
+        </p:nvSpPr>
+        <p:spPr>
+          <a:xfrm>
+            <a:off x="1133856" y="2907792"/>
+            <a:ext cx="9555480" cy="0"/>
+          </a:xfrm>
+          <a:prstGeom prst="line">
+            <a:avLst/>
+          </a:prstGeom>
+          <a:noFill/>
+          <a:ln w="12700">
+            <a:solidFill>
+              <a:srgbClr val="E93325"/>
+            </a:solidFill>
+            <a:prstDash val="solid"/>
+          </a:ln>
+        </p:spPr>
+      </p:sp>
+      <p:sp>
+        <p:nvSpPr>
+          <p:cNvPr id="13" name="Shape 10"/>
+          <p:cNvSpPr/>
+          <p:nvPr/>
+        </p:nvSpPr>
+        <p:spPr>
+          <a:xfrm>
+            <a:off x="877824" y="2340864"/>
+            <a:ext cx="1901952" cy="1005840"/>
+          </a:xfrm>
+          <a:prstGeom prst="roundRect">
+            <a:avLst>
+              <a:gd name="adj" fmla="val 5455"/>
+            </a:avLst>
+          </a:prstGeom>
+          <a:solidFill>
+            <a:srgbClr val="1C2540"/>
+          </a:solidFill>
+          <a:ln w="12700">
+            <a:solidFill>
+              <a:srgbClr val="394258"/>
+            </a:solidFill>
+            <a:prstDash val="solid"/>
+          </a:ln>
+        </p:spPr>
+      </p:sp>
+      <p:sp>
+        <p:nvSpPr>
+          <p:cNvPr id="14" name="Text 11"/>
+          <p:cNvSpPr/>
+          <p:nvPr/>
+        </p:nvSpPr>
+        <p:spPr>
+          <a:xfrm>
+            <a:off x="1024128" y="2505456"/>
+            <a:ext cx="1609344" cy="201168"/>
+          </a:xfrm>
+          <a:prstGeom prst="rect">
+            <a:avLst/>
+          </a:prstGeom>
+          <a:noFill/>
+          <a:ln/>
+        </p:spPr>
+        <p:txBody>
+          <a:bodyPr wrap="square" lIns="0" tIns="0" rIns="0" bIns="0" rtlCol="0" anchor="ctr">
+            <a:normAutofit/>
+          </a:bodyPr>
+          <a:lstStyle/>
+          <a:p>
+            <a:pPr indent="0" marL="0">
+              <a:buNone/>
+            </a:pPr>
+            <a:r>
+              <a:rPr lang="en-US" sz="1400" b="1" dirty="0">
+                <a:solidFill>
+                  <a:srgbClr val="F2AD18"/>
+                </a:solidFill>
+                <a:latin typeface="Aptos" pitchFamily="34" charset="0"/>
+                <a:ea typeface="Aptos" pitchFamily="34" charset="-122"/>
+                <a:cs typeface="Aptos" pitchFamily="34" charset="-120"/>
+              </a:rPr>
+              <a:t>Instructies</a:t>
+            </a:r>
+            <a:endParaRPr lang="en-US" sz="1400" dirty="0"/>
+          </a:p>
+        </p:txBody>
+      </p:sp>
+      <p:sp>
+        <p:nvSpPr>
+          <p:cNvPr id="15" name="Text 12"/>
+          <p:cNvSpPr/>
+          <p:nvPr/>
+        </p:nvSpPr>
+        <p:spPr>
+          <a:xfrm>
+            <a:off x="1024128" y="2798064"/>
+            <a:ext cx="1609344" cy="310896"/>
+          </a:xfrm>
+          <a:prstGeom prst="rect">
+            <a:avLst/>
+          </a:prstGeom>
+          <a:noFill/>
+          <a:ln/>
+        </p:spPr>
+        <p:txBody>
+          <a:bodyPr wrap="square" lIns="0" tIns="0" rIns="0" bIns="0" rtlCol="0" anchor="ctr">
+            <a:normAutofit/>
+          </a:bodyPr>
+          <a:lstStyle/>
+          <a:p>
+            <a:pPr indent="0" marL="0">
+              <a:buNone/>
+            </a:pPr>
+            <a:r>
+              <a:rPr lang="en-US" sz="1000" dirty="0">
+                <a:solidFill>
+                  <a:srgbClr val="D7DCE7"/>
+                </a:solidFill>
+                <a:latin typeface="Aptos" pitchFamily="34" charset="0"/>
+                <a:ea typeface="Aptos" pitchFamily="34" charset="-122"/>
+                <a:cs typeface="Aptos" pitchFamily="34" charset="-120"/>
+              </a:rPr>
+              <a:t>rol, regels,</a:t>
+            </a:r>
+            <a:endParaRPr lang="en-US" sz="1000" dirty="0"/>
+          </a:p>
+          <a:p>
+            <a:pPr indent="0" marL="0">
+              <a:buNone/>
+            </a:pPr>
+            <a:r>
+              <a:rPr lang="en-US" sz="1000" dirty="0">
+                <a:solidFill>
+                  <a:srgbClr val="D7DCE7"/>
+                </a:solidFill>
+                <a:latin typeface="Aptos" pitchFamily="34" charset="0"/>
+                <a:ea typeface="Aptos" pitchFamily="34" charset="-122"/>
+                <a:cs typeface="Aptos" pitchFamily="34" charset="-120"/>
+              </a:rPr>
+              <a:t>AGENTS.md</a:t>
+            </a:r>
+            <a:endParaRPr lang="en-US" sz="1000" dirty="0"/>
+          </a:p>
+        </p:txBody>
+      </p:sp>
+      <p:sp>
+        <p:nvSpPr>
+          <p:cNvPr id="16" name="Shape 13"/>
+          <p:cNvSpPr/>
+          <p:nvPr/>
+        </p:nvSpPr>
+        <p:spPr>
+          <a:xfrm>
+            <a:off x="2889504" y="2340864"/>
+            <a:ext cx="1901952" cy="1005840"/>
+          </a:xfrm>
+          <a:prstGeom prst="roundRect">
+            <a:avLst>
+              <a:gd name="adj" fmla="val 5455"/>
+            </a:avLst>
+          </a:prstGeom>
+          <a:solidFill>
+            <a:srgbClr val="1C2540"/>
+          </a:solidFill>
+          <a:ln w="12700">
+            <a:solidFill>
+              <a:srgbClr val="394258"/>
+            </a:solidFill>
+            <a:prstDash val="solid"/>
+          </a:ln>
+        </p:spPr>
+      </p:sp>
+      <p:sp>
+        <p:nvSpPr>
+          <p:cNvPr id="17" name="Text 14"/>
+          <p:cNvSpPr/>
+          <p:nvPr/>
+        </p:nvSpPr>
+        <p:spPr>
+          <a:xfrm>
+            <a:off x="3035808" y="2505456"/>
+            <a:ext cx="1609344" cy="201168"/>
+          </a:xfrm>
+          <a:prstGeom prst="rect">
+            <a:avLst/>
+          </a:prstGeom>
+          <a:noFill/>
+          <a:ln/>
+        </p:spPr>
+        <p:txBody>
+          <a:bodyPr wrap="square" lIns="0" tIns="0" rIns="0" bIns="0" rtlCol="0" anchor="ctr">
+            <a:normAutofit/>
+          </a:bodyPr>
+          <a:lstStyle/>
+          <a:p>
+            <a:pPr indent="0" marL="0">
+              <a:buNone/>
+            </a:pPr>
+            <a:r>
+              <a:rPr lang="en-US" sz="1400" b="1" dirty="0">
+                <a:solidFill>
+                  <a:srgbClr val="F2AD18"/>
+                </a:solidFill>
+                <a:latin typeface="Aptos" pitchFamily="34" charset="0"/>
+                <a:ea typeface="Aptos" pitchFamily="34" charset="-122"/>
+                <a:cs typeface="Aptos" pitchFamily="34" charset="-120"/>
+              </a:rPr>
+              <a:t>Context</a:t>
+            </a:r>
+            <a:endParaRPr lang="en-US" sz="1400" dirty="0"/>
+          </a:p>
+        </p:txBody>
+      </p:sp>
+      <p:sp>
+        <p:nvSpPr>
+          <p:cNvPr id="18" name="Text 15"/>
+          <p:cNvSpPr/>
+          <p:nvPr/>
+        </p:nvSpPr>
+        <p:spPr>
+          <a:xfrm>
+            <a:off x="3035808" y="2798064"/>
+            <a:ext cx="1609344" cy="310896"/>
+          </a:xfrm>
+          <a:prstGeom prst="rect">
+            <a:avLst/>
+          </a:prstGeom>
+          <a:noFill/>
+          <a:ln/>
+        </p:spPr>
+        <p:txBody>
+          <a:bodyPr wrap="square" lIns="0" tIns="0" rIns="0" bIns="0" rtlCol="0" anchor="ctr">
+            <a:normAutofit/>
+          </a:bodyPr>
+          <a:lstStyle/>
+          <a:p>
+            <a:pPr indent="0" marL="0">
+              <a:buNone/>
+            </a:pPr>
+            <a:r>
+              <a:rPr lang="en-US" sz="1000" dirty="0">
+                <a:solidFill>
+                  <a:srgbClr val="D7DCE7"/>
+                </a:solidFill>
+                <a:latin typeface="Aptos" pitchFamily="34" charset="0"/>
+                <a:ea typeface="Aptos" pitchFamily="34" charset="-122"/>
+                <a:cs typeface="Aptos" pitchFamily="34" charset="-120"/>
+              </a:rPr>
+              <a:t>geschiedenis,</a:t>
+            </a:r>
+            <a:endParaRPr lang="en-US" sz="1000" dirty="0"/>
+          </a:p>
+          <a:p>
+            <a:pPr indent="0" marL="0">
+              <a:buNone/>
+            </a:pPr>
+            <a:r>
+              <a:rPr lang="en-US" sz="1000" dirty="0">
+                <a:solidFill>
+                  <a:srgbClr val="D7DCE7"/>
+                </a:solidFill>
+                <a:latin typeface="Aptos" pitchFamily="34" charset="0"/>
+                <a:ea typeface="Aptos" pitchFamily="34" charset="-122"/>
+                <a:cs typeface="Aptos" pitchFamily="34" charset="-120"/>
+              </a:rPr>
+              <a:t>retrieval, files</a:t>
+            </a:r>
+            <a:endParaRPr lang="en-US" sz="1000" dirty="0"/>
+          </a:p>
+        </p:txBody>
+      </p:sp>
+      <p:sp>
+        <p:nvSpPr>
+          <p:cNvPr id="19" name="Shape 16"/>
+          <p:cNvSpPr/>
+          <p:nvPr/>
+        </p:nvSpPr>
+        <p:spPr>
+          <a:xfrm>
+            <a:off x="4901184" y="2340864"/>
+            <a:ext cx="1901952" cy="1005840"/>
+          </a:xfrm>
+          <a:prstGeom prst="roundRect">
+            <a:avLst>
+              <a:gd name="adj" fmla="val 5455"/>
+            </a:avLst>
+          </a:prstGeom>
+          <a:solidFill>
+            <a:srgbClr val="1C2540"/>
+          </a:solidFill>
+          <a:ln w="12700">
+            <a:solidFill>
+              <a:srgbClr val="394258"/>
+            </a:solidFill>
+            <a:prstDash val="solid"/>
+          </a:ln>
+        </p:spPr>
+      </p:sp>
+      <p:sp>
+        <p:nvSpPr>
+          <p:cNvPr id="20" name="Text 17"/>
+          <p:cNvSpPr/>
+          <p:nvPr/>
+        </p:nvSpPr>
+        <p:spPr>
+          <a:xfrm>
+            <a:off x="5047488" y="2505456"/>
+            <a:ext cx="1609344" cy="201168"/>
+          </a:xfrm>
+          <a:prstGeom prst="rect">
+            <a:avLst/>
+          </a:prstGeom>
+          <a:noFill/>
+          <a:ln/>
+        </p:spPr>
+        <p:txBody>
+          <a:bodyPr wrap="square" lIns="0" tIns="0" rIns="0" bIns="0" rtlCol="0" anchor="ctr">
+            <a:normAutofit/>
+          </a:bodyPr>
+          <a:lstStyle/>
+          <a:p>
+            <a:pPr indent="0" marL="0">
+              <a:buNone/>
+            </a:pPr>
+            <a:r>
+              <a:rPr lang="en-US" sz="1400" b="1" dirty="0">
+                <a:solidFill>
+                  <a:srgbClr val="F2AD18"/>
+                </a:solidFill>
+                <a:latin typeface="Aptos" pitchFamily="34" charset="0"/>
+                <a:ea typeface="Aptos" pitchFamily="34" charset="-122"/>
+                <a:cs typeface="Aptos" pitchFamily="34" charset="-120"/>
+              </a:rPr>
+              <a:t>Tools</a:t>
+            </a:r>
+            <a:endParaRPr lang="en-US" sz="1400" dirty="0"/>
+          </a:p>
+        </p:txBody>
+      </p:sp>
+      <p:sp>
+        <p:nvSpPr>
+          <p:cNvPr id="21" name="Text 18"/>
+          <p:cNvSpPr/>
+          <p:nvPr/>
+        </p:nvSpPr>
+        <p:spPr>
+          <a:xfrm>
+            <a:off x="5047488" y="2798064"/>
+            <a:ext cx="1609344" cy="310896"/>
+          </a:xfrm>
+          <a:prstGeom prst="rect">
+            <a:avLst/>
+          </a:prstGeom>
+          <a:noFill/>
+          <a:ln/>
+        </p:spPr>
+        <p:txBody>
+          <a:bodyPr wrap="square" lIns="0" tIns="0" rIns="0" bIns="0" rtlCol="0" anchor="ctr">
+            <a:normAutofit/>
+          </a:bodyPr>
+          <a:lstStyle/>
+          <a:p>
+            <a:pPr indent="0" marL="0">
+              <a:buNone/>
+            </a:pPr>
+            <a:r>
+              <a:rPr lang="en-US" sz="1000" dirty="0">
+                <a:solidFill>
+                  <a:srgbClr val="D7DCE7"/>
+                </a:solidFill>
+                <a:latin typeface="Aptos" pitchFamily="34" charset="0"/>
+                <a:ea typeface="Aptos" pitchFamily="34" charset="-122"/>
+                <a:cs typeface="Aptos" pitchFamily="34" charset="-120"/>
+              </a:rPr>
+              <a:t>schema's,</a:t>
+            </a:r>
+            <a:endParaRPr lang="en-US" sz="1000" dirty="0"/>
+          </a:p>
+          <a:p>
+            <a:pPr indent="0" marL="0">
+              <a:buNone/>
+            </a:pPr>
+            <a:r>
+              <a:rPr lang="en-US" sz="1000" dirty="0">
+                <a:solidFill>
+                  <a:srgbClr val="D7DCE7"/>
+                </a:solidFill>
+                <a:latin typeface="Aptos" pitchFamily="34" charset="0"/>
+                <a:ea typeface="Aptos" pitchFamily="34" charset="-122"/>
+                <a:cs typeface="Aptos" pitchFamily="34" charset="-120"/>
+              </a:rPr>
+              <a:t>rechten</a:t>
+            </a:r>
+            <a:endParaRPr lang="en-US" sz="1000" dirty="0"/>
+          </a:p>
+        </p:txBody>
+      </p:sp>
+      <p:sp>
+        <p:nvSpPr>
+          <p:cNvPr id="22" name="Shape 19"/>
+          <p:cNvSpPr/>
+          <p:nvPr/>
+        </p:nvSpPr>
+        <p:spPr>
+          <a:xfrm>
+            <a:off x="6912864" y="2340864"/>
+            <a:ext cx="1901952" cy="1005840"/>
+          </a:xfrm>
+          <a:prstGeom prst="roundRect">
+            <a:avLst>
+              <a:gd name="adj" fmla="val 5455"/>
+            </a:avLst>
+          </a:prstGeom>
+          <a:solidFill>
+            <a:srgbClr val="1C2540"/>
+          </a:solidFill>
+          <a:ln w="12700">
+            <a:solidFill>
+              <a:srgbClr val="394258"/>
+            </a:solidFill>
+            <a:prstDash val="solid"/>
+          </a:ln>
+        </p:spPr>
+      </p:sp>
+      <p:sp>
+        <p:nvSpPr>
+          <p:cNvPr id="23" name="Text 20"/>
+          <p:cNvSpPr/>
+          <p:nvPr/>
+        </p:nvSpPr>
+        <p:spPr>
+          <a:xfrm>
+            <a:off x="7059168" y="2505456"/>
+            <a:ext cx="1609344" cy="201168"/>
+          </a:xfrm>
+          <a:prstGeom prst="rect">
+            <a:avLst/>
+          </a:prstGeom>
+          <a:noFill/>
+          <a:ln/>
+        </p:spPr>
+        <p:txBody>
+          <a:bodyPr wrap="square" lIns="0" tIns="0" rIns="0" bIns="0" rtlCol="0" anchor="ctr">
+            <a:normAutofit/>
+          </a:bodyPr>
+          <a:lstStyle/>
+          <a:p>
+            <a:pPr indent="0" marL="0">
+              <a:buNone/>
+            </a:pPr>
+            <a:r>
+              <a:rPr lang="en-US" sz="1400" b="1" dirty="0">
+                <a:solidFill>
+                  <a:srgbClr val="F2AD18"/>
+                </a:solidFill>
+                <a:latin typeface="Aptos" pitchFamily="34" charset="0"/>
+                <a:ea typeface="Aptos" pitchFamily="34" charset="-122"/>
+                <a:cs typeface="Aptos" pitchFamily="34" charset="-120"/>
+              </a:rPr>
+              <a:t>Model</a:t>
+            </a:r>
+            <a:endParaRPr lang="en-US" sz="1400" dirty="0"/>
+          </a:p>
+        </p:txBody>
+      </p:sp>
+      <p:sp>
+        <p:nvSpPr>
+          <p:cNvPr id="24" name="Text 21"/>
+          <p:cNvSpPr/>
+          <p:nvPr/>
+        </p:nvSpPr>
+        <p:spPr>
+          <a:xfrm>
+            <a:off x="7059168" y="2798064"/>
+            <a:ext cx="1609344" cy="310896"/>
+          </a:xfrm>
+          <a:prstGeom prst="rect">
+            <a:avLst/>
+          </a:prstGeom>
+          <a:noFill/>
+          <a:ln/>
+        </p:spPr>
+        <p:txBody>
+          <a:bodyPr wrap="square" lIns="0" tIns="0" rIns="0" bIns="0" rtlCol="0" anchor="ctr">
+            <a:normAutofit/>
+          </a:bodyPr>
+          <a:lstStyle/>
+          <a:p>
+            <a:pPr indent="0" marL="0">
+              <a:buNone/>
+            </a:pPr>
+            <a:r>
+              <a:rPr lang="en-US" sz="1000" dirty="0">
+                <a:solidFill>
+                  <a:srgbClr val="D7DCE7"/>
+                </a:solidFill>
+                <a:latin typeface="Aptos" pitchFamily="34" charset="0"/>
+                <a:ea typeface="Aptos" pitchFamily="34" charset="-122"/>
+                <a:cs typeface="Aptos" pitchFamily="34" charset="-120"/>
+              </a:rPr>
+              <a:t>redenatie,</a:t>
+            </a:r>
+            <a:endParaRPr lang="en-US" sz="1000" dirty="0"/>
+          </a:p>
+          <a:p>
+            <a:pPr indent="0" marL="0">
+              <a:buNone/>
+            </a:pPr>
+            <a:r>
+              <a:rPr lang="en-US" sz="1000" dirty="0">
+                <a:solidFill>
+                  <a:srgbClr val="D7DCE7"/>
+                </a:solidFill>
+                <a:latin typeface="Aptos" pitchFamily="34" charset="0"/>
+                <a:ea typeface="Aptos" pitchFamily="34" charset="-122"/>
+                <a:cs typeface="Aptos" pitchFamily="34" charset="-120"/>
+              </a:rPr>
+              <a:t>output</a:t>
+            </a:r>
+            <a:endParaRPr lang="en-US" sz="1000" dirty="0"/>
+          </a:p>
+        </p:txBody>
+      </p:sp>
+      <p:sp>
+        <p:nvSpPr>
+          <p:cNvPr id="25" name="Shape 22"/>
+          <p:cNvSpPr/>
+          <p:nvPr/>
+        </p:nvSpPr>
+        <p:spPr>
+          <a:xfrm>
+            <a:off x="8924544" y="2340864"/>
+            <a:ext cx="1901952" cy="1005840"/>
+          </a:xfrm>
+          <a:prstGeom prst="roundRect">
+            <a:avLst>
+              <a:gd name="adj" fmla="val 5455"/>
+            </a:avLst>
+          </a:prstGeom>
+          <a:solidFill>
+            <a:srgbClr val="1C2540"/>
+          </a:solidFill>
+          <a:ln w="12700">
+            <a:solidFill>
+              <a:srgbClr val="394258"/>
+            </a:solidFill>
+            <a:prstDash val="solid"/>
+          </a:ln>
+        </p:spPr>
+      </p:sp>
+      <p:sp>
+        <p:nvSpPr>
+          <p:cNvPr id="26" name="Text 23"/>
+          <p:cNvSpPr/>
+          <p:nvPr/>
+        </p:nvSpPr>
+        <p:spPr>
+          <a:xfrm>
+            <a:off x="9070848" y="2505456"/>
+            <a:ext cx="1609344" cy="201168"/>
+          </a:xfrm>
+          <a:prstGeom prst="rect">
+            <a:avLst/>
+          </a:prstGeom>
+          <a:noFill/>
+          <a:ln/>
+        </p:spPr>
+        <p:txBody>
+          <a:bodyPr wrap="square" lIns="0" tIns="0" rIns="0" bIns="0" rtlCol="0" anchor="ctr">
+            <a:normAutofit/>
+          </a:bodyPr>
+          <a:lstStyle/>
+          <a:p>
+            <a:pPr indent="0" marL="0">
+              <a:buNone/>
+            </a:pPr>
+            <a:r>
+              <a:rPr lang="en-US" sz="1400" b="1" dirty="0">
+                <a:solidFill>
+                  <a:srgbClr val="F2AD18"/>
+                </a:solidFill>
+                <a:latin typeface="Aptos" pitchFamily="34" charset="0"/>
+                <a:ea typeface="Aptos" pitchFamily="34" charset="-122"/>
+                <a:cs typeface="Aptos" pitchFamily="34" charset="-120"/>
+              </a:rPr>
+              <a:t>State</a:t>
+            </a:r>
+            <a:endParaRPr lang="en-US" sz="1400" dirty="0"/>
+          </a:p>
+        </p:txBody>
+      </p:sp>
+      <p:sp>
+        <p:nvSpPr>
+          <p:cNvPr id="27" name="Text 24"/>
+          <p:cNvSpPr/>
+          <p:nvPr/>
+        </p:nvSpPr>
+        <p:spPr>
+          <a:xfrm>
+            <a:off x="9070848" y="2798064"/>
+            <a:ext cx="1609344" cy="310896"/>
+          </a:xfrm>
+          <a:prstGeom prst="rect">
+            <a:avLst/>
+          </a:prstGeom>
+          <a:noFill/>
+          <a:ln/>
+        </p:spPr>
+        <p:txBody>
+          <a:bodyPr wrap="square" lIns="0" tIns="0" rIns="0" bIns="0" rtlCol="0" anchor="ctr">
+            <a:normAutofit/>
+          </a:bodyPr>
+          <a:lstStyle/>
+          <a:p>
+            <a:pPr indent="0" marL="0">
+              <a:buNone/>
+            </a:pPr>
+            <a:r>
+              <a:rPr lang="en-US" sz="1000" dirty="0">
+                <a:solidFill>
+                  <a:srgbClr val="D7DCE7"/>
+                </a:solidFill>
+                <a:latin typeface="Aptos" pitchFamily="34" charset="0"/>
+                <a:ea typeface="Aptos" pitchFamily="34" charset="-122"/>
+                <a:cs typeface="Aptos" pitchFamily="34" charset="-120"/>
+              </a:rPr>
+              <a:t>routing,</a:t>
+            </a:r>
+            <a:endParaRPr lang="en-US" sz="1000" dirty="0"/>
+          </a:p>
+          <a:p>
+            <a:pPr indent="0" marL="0">
+              <a:buNone/>
+            </a:pPr>
+            <a:r>
+              <a:rPr lang="en-US" sz="1000" dirty="0">
+                <a:solidFill>
+                  <a:srgbClr val="D7DCE7"/>
+                </a:solidFill>
+                <a:latin typeface="Aptos" pitchFamily="34" charset="0"/>
+                <a:ea typeface="Aptos" pitchFamily="34" charset="-122"/>
+                <a:cs typeface="Aptos" pitchFamily="34" charset="-120"/>
+              </a:rPr>
+              <a:t>externe geheugenlaag</a:t>
+            </a:r>
+            <a:endParaRPr lang="en-US" sz="1000" dirty="0"/>
+          </a:p>
+        </p:txBody>
+      </p:sp>
+      <p:sp>
+        <p:nvSpPr>
+          <p:cNvPr id="28" name="Shape 25"/>
+          <p:cNvSpPr/>
+          <p:nvPr/>
+        </p:nvSpPr>
+        <p:spPr>
+          <a:xfrm>
+            <a:off x="713232" y="4133088"/>
+            <a:ext cx="6547104" cy="1261872"/>
+          </a:xfrm>
+          <a:prstGeom prst="roundRect">
+            <a:avLst>
+              <a:gd name="adj" fmla="val 4348"/>
+            </a:avLst>
+          </a:prstGeom>
+          <a:solidFill>
+            <a:srgbClr val="1C2540"/>
+          </a:solidFill>
+          <a:ln w="12700">
+            <a:solidFill>
+              <a:srgbClr val="394258"/>
+            </a:solidFill>
+            <a:prstDash val="solid"/>
+          </a:ln>
+        </p:spPr>
+      </p:sp>
+      <p:sp>
+        <p:nvSpPr>
+          <p:cNvPr id="29" name="Text 26"/>
+          <p:cNvSpPr/>
+          <p:nvPr/>
+        </p:nvSpPr>
+        <p:spPr>
+          <a:xfrm>
+            <a:off x="932688" y="4389120"/>
+            <a:ext cx="2194560" cy="201168"/>
+          </a:xfrm>
+          <a:prstGeom prst="rect">
+            <a:avLst/>
+          </a:prstGeom>
+          <a:noFill/>
+          <a:ln/>
+        </p:spPr>
+        <p:txBody>
+          <a:bodyPr wrap="square" lIns="0" tIns="0" rIns="0" bIns="0" rtlCol="0" anchor="ctr">
+            <a:normAutofit/>
+          </a:bodyPr>
+          <a:lstStyle/>
+          <a:p>
+            <a:pPr indent="0" marL="0">
+              <a:buNone/>
+            </a:pPr>
+            <a:r>
+              <a:rPr lang="en-US" sz="1400" b="1" dirty="0">
+                <a:solidFill>
+                  <a:srgbClr val="F2AD18"/>
+                </a:solidFill>
+                <a:latin typeface="Aptos" pitchFamily="34" charset="0"/>
+                <a:ea typeface="Aptos" pitchFamily="34" charset="-122"/>
+                <a:cs typeface="Aptos" pitchFamily="34" charset="-120"/>
+              </a:rPr>
+              <a:t>Wat OpenClaw expliciet toont</a:t>
+            </a:r>
+            <a:endParaRPr lang="en-US" sz="1400" dirty="0"/>
+          </a:p>
+        </p:txBody>
+      </p:sp>
+      <p:sp>
+        <p:nvSpPr>
+          <p:cNvPr id="30" name="Text 27"/>
+          <p:cNvSpPr/>
+          <p:nvPr/>
+        </p:nvSpPr>
+        <p:spPr>
+          <a:xfrm>
+            <a:off x="932688" y="4700016"/>
+            <a:ext cx="5852160" cy="512064"/>
+          </a:xfrm>
+          <a:prstGeom prst="rect">
+            <a:avLst/>
+          </a:prstGeom>
+          <a:noFill/>
+          <a:ln/>
+        </p:spPr>
+        <p:txBody>
+          <a:bodyPr wrap="square" lIns="0" tIns="0" rIns="0" bIns="0" rtlCol="0" anchor="ctr">
+            <a:normAutofit/>
+          </a:bodyPr>
+          <a:lstStyle/>
+          <a:p>
+            <a:pPr indent="0" marL="0">
+              <a:buNone/>
+            </a:pPr>
+            <a:r>
+              <a:rPr lang="en-US" sz="1400" dirty="0">
+                <a:solidFill>
+                  <a:srgbClr val="FFFFFF"/>
+                </a:solidFill>
+                <a:latin typeface="Aptos" pitchFamily="34" charset="0"/>
+                <a:ea typeface="Aptos" pitchFamily="34" charset="-122"/>
+                <a:cs typeface="Aptos" pitchFamily="34" charset="-120"/>
+              </a:rPr>
+              <a:t>Routing, sandboxes en tool policy zijn technisch echt.</a:t>
+            </a:r>
+            <a:endParaRPr lang="en-US" sz="1400" dirty="0"/>
+          </a:p>
+          <a:p>
+            <a:pPr indent="0" marL="0">
+              <a:buNone/>
+            </a:pPr>
+            <a:r>
+              <a:rPr lang="en-US" sz="1400" dirty="0">
+                <a:solidFill>
+                  <a:srgbClr val="FFFFFF"/>
+                </a:solidFill>
+                <a:latin typeface="Aptos" pitchFamily="34" charset="0"/>
+                <a:ea typeface="Aptos" pitchFamily="34" charset="-122"/>
+                <a:cs typeface="Aptos" pitchFamily="34" charset="-120"/>
+              </a:rPr>
+              <a:t>Maar multi-agent setups zijn ook token-heavy en operationeel fragiel.</a:t>
+            </a:r>
+            <a:endParaRPr lang="en-US" sz="1400" dirty="0"/>
+          </a:p>
+        </p:txBody>
+      </p:sp>
+      <p:sp>
+        <p:nvSpPr>
+          <p:cNvPr id="31" name="Shape 28"/>
+          <p:cNvSpPr/>
+          <p:nvPr/>
+        </p:nvSpPr>
+        <p:spPr>
+          <a:xfrm>
+            <a:off x="7589520" y="3858768"/>
+            <a:ext cx="3913632" cy="1920240"/>
+          </a:xfrm>
+          <a:prstGeom prst="roundRect">
+            <a:avLst>
+              <a:gd name="adj" fmla="val 2857"/>
+            </a:avLst>
+          </a:prstGeom>
+          <a:solidFill>
+            <a:srgbClr val="1C2540"/>
+          </a:solidFill>
+          <a:ln w="12700">
+            <a:solidFill>
+              <a:srgbClr val="394258"/>
+            </a:solidFill>
+            <a:prstDash val="solid"/>
+          </a:ln>
+        </p:spPr>
       </p:sp>
       <p:pic>
         <p:nvPicPr>
-          <p:cNvPr id="9" name="Image 1" descr="/home/ff/Documents/BoostMeUp/MoltBook_Sessie/assets/openclaw_context_docs.png">    </p:cNvPr>
+          <p:cNvPr id="32" name="Image 1" descr="/home/ff/Documents/BoostMeUp/MoltBook_Sessie/assets/openclaw_context_docs.png">    </p:cNvPr>
           <p:cNvPicPr>
             <a:picLocks noChangeAspect="1"/>
           </p:cNvPicPr>
@@ -3366,8 +4830,8 @@
         </p:blipFill>
         <p:spPr>
           <a:xfrm>
-            <a:off x="749808" y="1298448"/>
-            <a:ext cx="5074920" cy="4645152"/>
+            <a:off x="7699248" y="3968496"/>
+            <a:ext cx="3694176" cy="1700784"/>
           </a:xfrm>
           <a:prstGeom prst="rect">
             <a:avLst/>
@@ -3376,26 +4840,26 @@
       </p:pic>
       <p:sp>
         <p:nvSpPr>
-          <p:cNvPr id="10" name="Shape 6"/>
-          <p:cNvSpPr/>
-          <p:nvPr/>
-        </p:nvSpPr>
-        <p:spPr>
-          <a:xfrm>
-            <a:off x="6144768" y="1298448"/>
-            <a:ext cx="5376672" cy="4645152"/>
+          <p:cNvPr id="33" name="Shape 29"/>
+          <p:cNvSpPr/>
+          <p:nvPr/>
+        </p:nvSpPr>
+        <p:spPr>
+          <a:xfrm>
+            <a:off x="713232" y="5504688"/>
+            <a:ext cx="10927080" cy="640080"/>
           </a:xfrm>
           <a:prstGeom prst="roundRect">
             <a:avLst>
-              <a:gd name="adj" fmla="val 1181"/>
+              <a:gd name="adj" fmla="val 11429"/>
             </a:avLst>
           </a:prstGeom>
           <a:solidFill>
-            <a:srgbClr val="F7F8FB"/>
+            <a:srgbClr val="1C2540"/>
           </a:solidFill>
           <a:ln w="12700">
             <a:solidFill>
-              <a:srgbClr val="D9DDE6"/>
+              <a:srgbClr val="394258"/>
             </a:solidFill>
             <a:prstDash val="solid"/>
           </a:ln>
@@ -3403,145 +4867,42 @@
       </p:sp>
       <p:sp>
         <p:nvSpPr>
-          <p:cNvPr id="11" name="Text 7"/>
-          <p:cNvSpPr/>
-          <p:nvPr/>
-        </p:nvSpPr>
-        <p:spPr>
-          <a:xfrm>
-            <a:off x="6400800" y="1572768"/>
-            <a:ext cx="4892040" cy="3566160"/>
-          </a:xfrm>
-          <a:prstGeom prst="rect">
-            <a:avLst/>
-          </a:prstGeom>
-          <a:noFill/>
-          <a:ln/>
-        </p:spPr>
-        <p:txBody>
-          <a:bodyPr wrap="square" lIns="0" tIns="0" rIns="0" bIns="0" rtlCol="0" anchor="t">
-            <a:normAutofit/>
-          </a:bodyPr>
-          <a:lstStyle/>
-          <a:p>
-            <a:pPr indent="0" marL="0">
-              <a:buNone/>
-            </a:pPr>
-            <a:r>
-              <a:rPr lang="en-US" sz="1600" dirty="0">
-                <a:solidFill>
-                  <a:srgbClr val="12192C"/>
-                </a:solidFill>
-                <a:latin typeface="Aptos" pitchFamily="34" charset="0"/>
-                <a:ea typeface="Aptos" pitchFamily="34" charset="-122"/>
-                <a:cs typeface="Aptos" pitchFamily="34" charset="-120"/>
-              </a:rPr>
-              <a:t>Documented facts</a:t>
-            </a:r>
-            <a:endParaRPr lang="en-US" sz="1600" dirty="0"/>
-          </a:p>
-          <a:p>
-            <a:pPr indent="0" marL="0">
-              <a:buNone/>
-            </a:pPr>
-            <a:endParaRPr lang="en-US" sz="1600" dirty="0"/>
-          </a:p>
-          <a:p>
-            <a:pPr indent="0" marL="0">
-              <a:buNone/>
-            </a:pPr>
-            <a:r>
-              <a:rPr lang="en-US" sz="1600" dirty="0">
-                <a:solidFill>
-                  <a:srgbClr val="12192C"/>
-                </a:solidFill>
-                <a:latin typeface="Aptos" pitchFamily="34" charset="0"/>
-                <a:ea typeface="Aptos" pitchFamily="34" charset="-122"/>
-                <a:cs typeface="Aptos" pitchFamily="34" charset="-120"/>
-              </a:rPr>
-              <a:t>- Context is what OpenClaw sends to the model for a run.</a:t>
-            </a:r>
-            <a:endParaRPr lang="en-US" sz="1600" dirty="0"/>
-          </a:p>
-          <a:p>
-            <a:pPr indent="0" marL="0">
-              <a:buNone/>
-            </a:pPr>
-            <a:r>
-              <a:rPr lang="en-US" sz="1600" dirty="0">
-                <a:solidFill>
-                  <a:srgbClr val="12192C"/>
-                </a:solidFill>
-                <a:latin typeface="Aptos" pitchFamily="34" charset="0"/>
-                <a:ea typeface="Aptos" pitchFamily="34" charset="-122"/>
-                <a:cs typeface="Aptos" pitchFamily="34" charset="-120"/>
-              </a:rPr>
-              <a:t>- OpenClaw supports per-agent sandboxes, tool policies, and routing.</a:t>
-            </a:r>
-            <a:endParaRPr lang="en-US" sz="1600" dirty="0"/>
-          </a:p>
-          <a:p>
-            <a:pPr indent="0" marL="0">
-              <a:buNone/>
-            </a:pPr>
-            <a:r>
-              <a:rPr lang="en-US" sz="1600" dirty="0">
-                <a:solidFill>
-                  <a:srgbClr val="12192C"/>
-                </a:solidFill>
-                <a:latin typeface="Aptos" pitchFamily="34" charset="0"/>
-                <a:ea typeface="Aptos" pitchFamily="34" charset="-122"/>
-                <a:cs typeface="Aptos" pitchFamily="34" charset="-120"/>
-              </a:rPr>
-              <a:t>- The docs explicitly warn that multi-agent setups are token-heavy in practice.</a:t>
-            </a:r>
-            <a:endParaRPr lang="en-US" sz="1600" dirty="0"/>
-          </a:p>
-          <a:p>
-            <a:pPr indent="0" marL="0">
-              <a:buNone/>
-            </a:pPr>
-            <a:endParaRPr lang="en-US" sz="1600" dirty="0"/>
-          </a:p>
-          <a:p>
-            <a:pPr indent="0" marL="0">
-              <a:buNone/>
-            </a:pPr>
-            <a:r>
-              <a:rPr lang="en-US" sz="1600" dirty="0">
-                <a:solidFill>
-                  <a:srgbClr val="12192C"/>
-                </a:solidFill>
-                <a:latin typeface="Aptos" pitchFamily="34" charset="0"/>
-                <a:ea typeface="Aptos" pitchFamily="34" charset="-122"/>
-                <a:cs typeface="Aptos" pitchFamily="34" charset="-120"/>
-              </a:rPr>
-              <a:t>Takeaway</a:t>
-            </a:r>
-            <a:endParaRPr lang="en-US" sz="1600" dirty="0"/>
-          </a:p>
-          <a:p>
-            <a:pPr indent="0" marL="0">
-              <a:buNone/>
-            </a:pPr>
-            <a:endParaRPr lang="en-US" sz="1600" dirty="0"/>
-          </a:p>
-          <a:p>
-            <a:pPr indent="0" marL="0">
-              <a:buNone/>
-            </a:pPr>
-            <a:r>
-              <a:rPr lang="en-US" sz="1600" dirty="0">
-                <a:solidFill>
-                  <a:srgbClr val="12192C"/>
-                </a:solidFill>
-                <a:latin typeface="Aptos" pitchFamily="34" charset="0"/>
-                <a:ea typeface="Aptos" pitchFamily="34" charset="-122"/>
-                <a:cs typeface="Aptos" pitchFamily="34" charset="-120"/>
-              </a:rPr>
-              <a:t>This is a system architecture story, not evidence of one stable, self-contained digital organism.</a:t>
-            </a:r>
-            <a:endParaRPr lang="en-US" sz="1600" dirty="0"/>
+          <p:cNvPr id="34" name="Text 30"/>
+          <p:cNvSpPr/>
+          <p:nvPr/>
+        </p:nvSpPr>
+        <p:spPr>
+          <a:xfrm>
+            <a:off x="932688" y="5669280"/>
+            <a:ext cx="10469880" cy="201168"/>
+          </a:xfrm>
+          <a:prstGeom prst="rect">
+            <a:avLst/>
+          </a:prstGeom>
+          <a:noFill/>
+          <a:ln/>
+        </p:spPr>
+        <p:txBody>
+          <a:bodyPr wrap="square" lIns="0" tIns="0" rIns="0" bIns="0" rtlCol="0" anchor="ctr">
+            <a:normAutofit/>
+          </a:bodyPr>
+          <a:lstStyle/>
+          <a:p>
+            <a:pPr indent="0" marL="0">
+              <a:buNone/>
+            </a:pPr>
+            <a:r>
+              <a:rPr lang="en-US" sz="1200" b="1" dirty="0">
+                <a:solidFill>
+                  <a:srgbClr val="FFFFFF"/>
+                </a:solidFill>
+                <a:latin typeface="Aptos" pitchFamily="34" charset="0"/>
+                <a:ea typeface="Aptos" pitchFamily="34" charset="-122"/>
+                <a:cs typeface="Aptos" pitchFamily="34" charset="-120"/>
+              </a:rPr>
+              <a:t>Takeaway: dit is een architectuurverhaal, geen bewijs van één stabiel digitaal organisme.</a:t>
+            </a:r>
+            <a:endParaRPr lang="en-US" sz="1200" dirty="0"/>
           </a:p>
         </p:txBody>
       </p:sp>
@@ -3688,7 +5049,7 @@
                 <a:ea typeface="Aptos" pitchFamily="34" charset="-122"/>
                 <a:cs typeface="Aptos" pitchFamily="34" charset="-120"/>
               </a:rPr>
-              <a:t>TOKEN ANALYSIS</a:t>
+              <a:t>KOSTEN</a:t>
             </a:r>
             <a:endParaRPr lang="en-US" sz="900" dirty="0"/>
           </a:p>
@@ -3729,7 +5090,7 @@
                 <a:ea typeface="Aptos Display" pitchFamily="34" charset="-122"/>
                 <a:cs typeface="Aptos Display" pitchFamily="34" charset="-120"/>
               </a:rPr>
-              <a:t>The cost story is real, but the headline number is a scenario, not a measurement</a:t>
+              <a:t>De kost zit vooral in herladen context</a:t>
             </a:r>
             <a:endParaRPr lang="en-US" sz="2300" dirty="0"/>
           </a:p>
@@ -3793,50 +5154,26 @@
                 <a:ea typeface="Aptos" pitchFamily="34" charset="-122"/>
                 <a:cs typeface="Aptos" pitchFamily="34" charset="-120"/>
               </a:rPr>
-              <a:t>Source anchors: OpenClaw context docs and Anthropic pricing. Scenario assumptions are explicit in data/token_usage_assumptions.json.</a:t>
+              <a:t>OpenClaw voorbeeld + expliciete repo-aannames. $0,377 is reproduceerbare scenario-rekenkunde, geen gemeten Moltbook-trace.</a:t>
             </a:r>
             <a:endParaRPr lang="en-US" sz="800" dirty="0"/>
           </a:p>
         </p:txBody>
       </p:sp>
-      <p:pic>
-        <p:nvPicPr>
-          <p:cNvPr id="9" name="Image 1" descr="/home/ff/Documents/BoostMeUp/MoltBook_Sessie/assets/token_breakdown.png">    </p:cNvPr>
-          <p:cNvPicPr>
-            <a:picLocks noChangeAspect="1"/>
-          </p:cNvPicPr>
-          <p:nvPr/>
-        </p:nvPicPr>
-        <p:blipFill>
-          <a:blip r:embed="rId2"/>
-          <a:stretch>
-            <a:fillRect/>
-          </a:stretch>
-        </p:blipFill>
-        <p:spPr>
-          <a:xfrm>
-            <a:off x="713232" y="1234440"/>
-            <a:ext cx="7360920" cy="4892040"/>
-          </a:xfrm>
-          <a:prstGeom prst="rect">
-            <a:avLst/>
-          </a:prstGeom>
-        </p:spPr>
-      </p:pic>
-      <p:sp>
-        <p:nvSpPr>
-          <p:cNvPr id="10" name="Shape 6"/>
-          <p:cNvSpPr/>
-          <p:nvPr/>
-        </p:nvSpPr>
-        <p:spPr>
-          <a:xfrm>
-            <a:off x="8211312" y="1417320"/>
-            <a:ext cx="3273552" cy="4389120"/>
+      <p:sp>
+        <p:nvSpPr>
+          <p:cNvPr id="9" name="Shape 6"/>
+          <p:cNvSpPr/>
+          <p:nvPr/>
+        </p:nvSpPr>
+        <p:spPr>
+          <a:xfrm>
+            <a:off x="713232" y="1261872"/>
+            <a:ext cx="4187952" cy="4462272"/>
           </a:xfrm>
           <a:prstGeom prst="roundRect">
             <a:avLst>
-              <a:gd name="adj" fmla="val 1676"/>
+              <a:gd name="adj" fmla="val 1310"/>
             </a:avLst>
           </a:prstGeom>
           <a:solidFill>
@@ -3852,32 +5189,61 @@
       </p:sp>
       <p:sp>
         <p:nvSpPr>
-          <p:cNvPr id="11" name="Text 7"/>
-          <p:cNvSpPr/>
-          <p:nvPr/>
-        </p:nvSpPr>
-        <p:spPr>
-          <a:xfrm>
-            <a:off x="8458200" y="1737360"/>
-            <a:ext cx="2743200" cy="3749040"/>
-          </a:xfrm>
-          <a:prstGeom prst="rect">
-            <a:avLst/>
-          </a:prstGeom>
-          <a:noFill/>
-          <a:ln/>
-        </p:spPr>
-        <p:txBody>
-          <a:bodyPr wrap="square" lIns="0" tIns="0" rIns="0" bIns="0" rtlCol="0" anchor="t">
-            <a:normAutofit/>
-          </a:bodyPr>
-          <a:lstStyle/>
-          <a:p>
-            <a:pPr indent="0" marL="0">
-              <a:buNone/>
-            </a:pPr>
-            <a:r>
-              <a:rPr lang="en-US" sz="1600" dirty="0">
+          <p:cNvPr id="10" name="Shape 7"/>
+          <p:cNvSpPr/>
+          <p:nvPr/>
+        </p:nvSpPr>
+        <p:spPr>
+          <a:xfrm>
+            <a:off x="950976" y="1517904"/>
+            <a:ext cx="1517904" cy="329184"/>
+          </a:xfrm>
+          <a:prstGeom prst="roundRect">
+            <a:avLst>
+              <a:gd name="adj" fmla="val 22222"/>
+            </a:avLst>
+          </a:prstGeom>
+          <a:solidFill>
+            <a:srgbClr val="F2AD18"/>
+          </a:solidFill>
+          <a:ln w="12700">
+            <a:solidFill>
+              <a:srgbClr val="F2AD18">
+                <a:alpha val="0"/>
+              </a:srgbClr>
+            </a:solidFill>
+            <a:prstDash val="solid"/>
+          </a:ln>
+        </p:spPr>
+      </p:sp>
+      <p:sp>
+        <p:nvSpPr>
+          <p:cNvPr id="11" name="Text 8"/>
+          <p:cNvSpPr/>
+          <p:nvPr/>
+        </p:nvSpPr>
+        <p:spPr>
+          <a:xfrm>
+            <a:off x="1097280" y="1591056"/>
+            <a:ext cx="1225296" cy="164592"/>
+          </a:xfrm>
+          <a:prstGeom prst="rect">
+            <a:avLst/>
+          </a:prstGeom>
+          <a:noFill/>
+          <a:ln/>
+        </p:spPr>
+        <p:txBody>
+          <a:bodyPr wrap="square" lIns="0" tIns="0" rIns="0" bIns="0" rtlCol="0" anchor="ctr">
+            <a:normAutofit/>
+          </a:bodyPr>
+          <a:lstStyle/>
+          <a:p>
+            <a:pPr indent="0" marL="0">
+              <a:buNone/>
+            </a:pPr>
+            <a:r>
+              <a:rPr lang="en-US" sz="900" b="1" dirty="0">
                 <a:solidFill>
                   <a:srgbClr val="12192C"/>
                 </a:solidFill>
@@ -3885,22 +5251,371 @@
                 <a:ea typeface="Aptos" pitchFamily="34" charset="-122"/>
                 <a:cs typeface="Aptos" pitchFamily="34" charset="-120"/>
               </a:rPr>
-              <a:t>What we can say cleanly</a:t>
+              <a:t>scenario, geen meting</a:t>
+            </a:r>
+            <a:endParaRPr lang="en-US" sz="900" dirty="0"/>
+          </a:p>
+        </p:txBody>
+      </p:sp>
+      <p:sp>
+        <p:nvSpPr>
+          <p:cNvPr id="12" name="Text 9"/>
+          <p:cNvSpPr/>
+          <p:nvPr/>
+        </p:nvSpPr>
+        <p:spPr>
+          <a:xfrm>
+            <a:off x="914400" y="2011680"/>
+            <a:ext cx="2743200" cy="713232"/>
+          </a:xfrm>
+          <a:prstGeom prst="rect">
+            <a:avLst/>
+          </a:prstGeom>
+          <a:noFill/>
+          <a:ln/>
+        </p:spPr>
+        <p:txBody>
+          <a:bodyPr wrap="square" lIns="0" tIns="0" rIns="0" bIns="0" rtlCol="0" anchor="ctr">
+            <a:normAutofit/>
+          </a:bodyPr>
+          <a:lstStyle/>
+          <a:p>
+            <a:pPr indent="0" marL="0">
+              <a:buNone/>
+            </a:pPr>
+            <a:r>
+              <a:rPr lang="en-US" sz="4200" b="1" dirty="0">
+                <a:solidFill>
+                  <a:srgbClr val="E93325"/>
+                </a:solidFill>
+                <a:latin typeface="Aptos Display" pitchFamily="34" charset="0"/>
+                <a:ea typeface="Aptos Display" pitchFamily="34" charset="-122"/>
+                <a:cs typeface="Aptos Display" pitchFamily="34" charset="-120"/>
+              </a:rPr>
+              <a:t>87%</a:t>
+            </a:r>
+            <a:endParaRPr lang="en-US" sz="4200" dirty="0"/>
+          </a:p>
+        </p:txBody>
+      </p:sp>
+      <p:sp>
+        <p:nvSpPr>
+          <p:cNvPr id="13" name="Text 10"/>
+          <p:cNvSpPr/>
+          <p:nvPr/>
+        </p:nvSpPr>
+        <p:spPr>
+          <a:xfrm>
+            <a:off x="932688" y="2761488"/>
+            <a:ext cx="3291840" cy="548640"/>
+          </a:xfrm>
+          <a:prstGeom prst="rect">
+            <a:avLst/>
+          </a:prstGeom>
+          <a:noFill/>
+          <a:ln/>
+        </p:spPr>
+        <p:txBody>
+          <a:bodyPr wrap="square" lIns="0" tIns="0" rIns="0" bIns="0" rtlCol="0" anchor="ctr">
+            <a:normAutofit/>
+          </a:bodyPr>
+          <a:lstStyle/>
+          <a:p>
+            <a:pPr indent="0" marL="0">
+              <a:buNone/>
+            </a:pPr>
+            <a:r>
+              <a:rPr lang="en-US" sz="1800" b="1" dirty="0">
+                <a:solidFill>
+                  <a:srgbClr val="12192C"/>
+                </a:solidFill>
+                <a:latin typeface="Aptos" pitchFamily="34" charset="0"/>
+                <a:ea typeface="Aptos" pitchFamily="34" charset="-122"/>
+                <a:cs typeface="Aptos" pitchFamily="34" charset="-120"/>
+              </a:rPr>
+              <a:t>van de totale cyclus zit in het herladen van context</a:t>
+            </a:r>
+            <a:endParaRPr lang="en-US" sz="1800" dirty="0"/>
+          </a:p>
+        </p:txBody>
+      </p:sp>
+      <p:sp>
+        <p:nvSpPr>
+          <p:cNvPr id="14" name="Text 11"/>
+          <p:cNvSpPr/>
+          <p:nvPr/>
+        </p:nvSpPr>
+        <p:spPr>
+          <a:xfrm>
+            <a:off x="932688" y="3730752"/>
+            <a:ext cx="3566160" cy="310896"/>
+          </a:xfrm>
+          <a:prstGeom prst="rect">
+            <a:avLst/>
+          </a:prstGeom>
+          <a:noFill/>
+          <a:ln/>
+        </p:spPr>
+        <p:txBody>
+          <a:bodyPr wrap="square" lIns="0" tIns="0" rIns="0" bIns="0" rtlCol="0" anchor="ctr">
+            <a:normAutofit/>
+          </a:bodyPr>
+          <a:lstStyle/>
+          <a:p>
+            <a:pPr indent="0" marL="0">
+              <a:buNone/>
+            </a:pPr>
+            <a:r>
+              <a:rPr lang="en-US" sz="1800" b="1" dirty="0">
+                <a:solidFill>
+                  <a:srgbClr val="12192C"/>
+                </a:solidFill>
+                <a:latin typeface="Aptos Display" pitchFamily="34" charset="0"/>
+                <a:ea typeface="Aptos Display" pitchFamily="34" charset="-122"/>
+                <a:cs typeface="Aptos Display" pitchFamily="34" charset="-120"/>
+              </a:rPr>
+              <a:t>$0,377 per read-reply-post-cyclus op Opus 4.6</a:t>
+            </a:r>
+            <a:endParaRPr lang="en-US" sz="1800" dirty="0"/>
+          </a:p>
+        </p:txBody>
+      </p:sp>
+      <p:sp>
+        <p:nvSpPr>
+          <p:cNvPr id="15" name="Text 12"/>
+          <p:cNvSpPr/>
+          <p:nvPr/>
+        </p:nvSpPr>
+        <p:spPr>
+          <a:xfrm>
+            <a:off x="932688" y="4169664"/>
+            <a:ext cx="3291840" cy="256032"/>
+          </a:xfrm>
+          <a:prstGeom prst="rect">
+            <a:avLst/>
+          </a:prstGeom>
+          <a:noFill/>
+          <a:ln/>
+        </p:spPr>
+        <p:txBody>
+          <a:bodyPr wrap="square" lIns="0" tIns="0" rIns="0" bIns="0" rtlCol="0" anchor="ctr">
+            <a:normAutofit/>
+          </a:bodyPr>
+          <a:lstStyle/>
+          <a:p>
+            <a:pPr indent="0" marL="0">
+              <a:buNone/>
+            </a:pPr>
+            <a:r>
+              <a:rPr lang="en-US" sz="1200" dirty="0">
+                <a:solidFill>
+                  <a:srgbClr val="5B6476"/>
+                </a:solidFill>
+                <a:latin typeface="Aptos" pitchFamily="34" charset="0"/>
+                <a:ea typeface="Aptos" pitchFamily="34" charset="-122"/>
+                <a:cs typeface="Aptos" pitchFamily="34" charset="-120"/>
+              </a:rPr>
+              <a:t>Dat bedrag komt uit expliciete aannames in deze repo.</a:t>
+            </a:r>
+            <a:endParaRPr lang="en-US" sz="1200" dirty="0"/>
+          </a:p>
+        </p:txBody>
+      </p:sp>
+      <p:sp>
+        <p:nvSpPr>
+          <p:cNvPr id="16" name="Shape 13"/>
+          <p:cNvSpPr/>
+          <p:nvPr/>
+        </p:nvSpPr>
+        <p:spPr>
+          <a:xfrm>
+            <a:off x="5175504" y="1261872"/>
+            <a:ext cx="6236208" cy="4462272"/>
+          </a:xfrm>
+          <a:prstGeom prst="roundRect">
+            <a:avLst>
+              <a:gd name="adj" fmla="val 1230"/>
+            </a:avLst>
+          </a:prstGeom>
+          <a:solidFill>
+            <a:srgbClr val="F7F8FB"/>
+          </a:solidFill>
+          <a:ln w="12700">
+            <a:solidFill>
+              <a:srgbClr val="D9DDE6"/>
+            </a:solidFill>
+            <a:prstDash val="solid"/>
+          </a:ln>
+        </p:spPr>
+      </p:sp>
+      <p:sp>
+        <p:nvSpPr>
+          <p:cNvPr id="17" name="Text 14"/>
+          <p:cNvSpPr/>
+          <p:nvPr/>
+        </p:nvSpPr>
+        <p:spPr>
+          <a:xfrm>
+            <a:off x="5449824" y="1554480"/>
+            <a:ext cx="3108960" cy="219456"/>
+          </a:xfrm>
+          <a:prstGeom prst="rect">
+            <a:avLst/>
+          </a:prstGeom>
+          <a:noFill/>
+          <a:ln/>
+        </p:spPr>
+        <p:txBody>
+          <a:bodyPr wrap="square" lIns="0" tIns="0" rIns="0" bIns="0" rtlCol="0" anchor="ctr">
+            <a:normAutofit/>
+          </a:bodyPr>
+          <a:lstStyle/>
+          <a:p>
+            <a:pPr indent="0" marL="0">
+              <a:buNone/>
+            </a:pPr>
+            <a:r>
+              <a:rPr lang="en-US" sz="1600" b="1" dirty="0">
+                <a:solidFill>
+                  <a:srgbClr val="12192C"/>
+                </a:solidFill>
+                <a:latin typeface="Aptos" pitchFamily="34" charset="0"/>
+                <a:ea typeface="Aptos" pitchFamily="34" charset="-122"/>
+                <a:cs typeface="Aptos" pitchFamily="34" charset="-120"/>
+              </a:rPr>
+              <a:t>Waar de tokens echt naartoe gaan</a:t>
             </a:r>
             <a:endParaRPr lang="en-US" sz="1600" dirty="0"/>
           </a:p>
-          <a:p>
-            <a:pPr indent="0" marL="0">
-              <a:buNone/>
-            </a:pPr>
-            <a:endParaRPr lang="en-US" sz="1600" dirty="0"/>
-          </a:p>
-          <a:p>
-            <a:pPr indent="0" marL="0">
-              <a:buNone/>
-            </a:pPr>
-            <a:r>
-              <a:rPr lang="en-US" sz="1600" dirty="0">
+        </p:txBody>
+      </p:sp>
+      <p:sp>
+        <p:nvSpPr>
+          <p:cNvPr id="18" name="Text 15"/>
+          <p:cNvSpPr/>
+          <p:nvPr/>
+        </p:nvSpPr>
+        <p:spPr>
+          <a:xfrm>
+            <a:off x="5449824" y="1956816"/>
+            <a:ext cx="5303520" cy="182880"/>
+          </a:xfrm>
+          <a:prstGeom prst="rect">
+            <a:avLst/>
+          </a:prstGeom>
+          <a:noFill/>
+          <a:ln/>
+        </p:spPr>
+        <p:txBody>
+          <a:bodyPr wrap="square" lIns="0" tIns="0" rIns="0" bIns="0" rtlCol="0" anchor="ctr">
+            <a:normAutofit/>
+          </a:bodyPr>
+          <a:lstStyle/>
+          <a:p>
+            <a:pPr indent="0" marL="0">
+              <a:buNone/>
+            </a:pPr>
+            <a:r>
+              <a:rPr lang="en-US" sz="1100" b="1" dirty="0">
+                <a:solidFill>
+                  <a:srgbClr val="5B6476"/>
+                </a:solidFill>
+                <a:latin typeface="Aptos" pitchFamily="34" charset="0"/>
+                <a:ea typeface="Aptos" pitchFamily="34" charset="-122"/>
+                <a:cs typeface="Aptos" pitchFamily="34" charset="-120"/>
+              </a:rPr>
+              <a:t>Context laden (3x)</a:t>
+            </a:r>
+            <a:endParaRPr lang="en-US" sz="1100" dirty="0"/>
+          </a:p>
+        </p:txBody>
+      </p:sp>
+      <p:sp>
+        <p:nvSpPr>
+          <p:cNvPr id="19" name="Shape 16"/>
+          <p:cNvSpPr/>
+          <p:nvPr/>
+        </p:nvSpPr>
+        <p:spPr>
+          <a:xfrm>
+            <a:off x="5449824" y="2194560"/>
+            <a:ext cx="5303520" cy="237744"/>
+          </a:xfrm>
+          <a:prstGeom prst="roundRect">
+            <a:avLst>
+              <a:gd name="adj" fmla="val 30769"/>
+            </a:avLst>
+          </a:prstGeom>
+          <a:solidFill>
+            <a:srgbClr val="EEF2F7"/>
+          </a:solidFill>
+          <a:ln w="12700">
+            <a:solidFill>
+              <a:srgbClr val="EEF2F7">
+                <a:alpha val="0"/>
+              </a:srgbClr>
+            </a:solidFill>
+            <a:prstDash val="solid"/>
+          </a:ln>
+        </p:spPr>
+      </p:sp>
+      <p:sp>
+        <p:nvSpPr>
+          <p:cNvPr id="20" name="Shape 17"/>
+          <p:cNvSpPr/>
+          <p:nvPr/>
+        </p:nvSpPr>
+        <p:spPr>
+          <a:xfrm>
+            <a:off x="5449824" y="2194560"/>
+            <a:ext cx="4614062" cy="237744"/>
+          </a:xfrm>
+          <a:prstGeom prst="roundRect">
+            <a:avLst>
+              <a:gd name="adj" fmla="val 30769"/>
+            </a:avLst>
+          </a:prstGeom>
+          <a:solidFill>
+            <a:srgbClr val="E93325"/>
+          </a:solidFill>
+          <a:ln w="12700">
+            <a:solidFill>
+              <a:srgbClr val="E93325">
+                <a:alpha val="0"/>
+              </a:srgbClr>
+            </a:solidFill>
+            <a:prstDash val="solid"/>
+          </a:ln>
+        </p:spPr>
+      </p:sp>
+      <p:sp>
+        <p:nvSpPr>
+          <p:cNvPr id="21" name="Text 18"/>
+          <p:cNvSpPr/>
+          <p:nvPr/>
+        </p:nvSpPr>
+        <p:spPr>
+          <a:xfrm>
+            <a:off x="9930384" y="1975104"/>
+            <a:ext cx="822960" cy="164592"/>
+          </a:xfrm>
+          <a:prstGeom prst="rect">
+            <a:avLst/>
+          </a:prstGeom>
+          <a:noFill/>
+          <a:ln/>
+        </p:spPr>
+        <p:txBody>
+          <a:bodyPr wrap="square" lIns="0" tIns="0" rIns="0" bIns="0" rtlCol="0" anchor="ctr">
+            <a:normAutofit/>
+          </a:bodyPr>
+          <a:lstStyle/>
+          <a:p>
+            <a:pPr algn="r" indent="0" marL="0">
+              <a:buNone/>
+            </a:pPr>
+            <a:r>
+              <a:rPr lang="en-US" sz="1100" b="1" dirty="0">
                 <a:solidFill>
                   <a:srgbClr val="12192C"/>
                 </a:solidFill>
@@ -3908,16 +5623,139 @@
                 <a:ea typeface="Aptos" pitchFamily="34" charset="-122"/>
                 <a:cs typeface="Aptos" pitchFamily="34" charset="-120"/>
               </a:rPr>
-              <a:t>- OpenClaw shows a documented example with ~14,250 total session tokens.</a:t>
-            </a:r>
-            <a:endParaRPr lang="en-US" sz="1600" dirty="0"/>
-          </a:p>
-          <a:p>
-            <a:pPr indent="0" marL="0">
-              <a:buNone/>
-            </a:pPr>
-            <a:r>
-              <a:rPr lang="en-US" sz="1600" dirty="0">
+              <a:t>60.900</a:t>
+            </a:r>
+            <a:endParaRPr lang="en-US" sz="1100" dirty="0"/>
+          </a:p>
+        </p:txBody>
+      </p:sp>
+      <p:sp>
+        <p:nvSpPr>
+          <p:cNvPr id="22" name="Text 19"/>
+          <p:cNvSpPr/>
+          <p:nvPr/>
+        </p:nvSpPr>
+        <p:spPr>
+          <a:xfrm>
+            <a:off x="5449824" y="2688336"/>
+            <a:ext cx="5303520" cy="182880"/>
+          </a:xfrm>
+          <a:prstGeom prst="rect">
+            <a:avLst/>
+          </a:prstGeom>
+          <a:noFill/>
+          <a:ln/>
+        </p:spPr>
+        <p:txBody>
+          <a:bodyPr wrap="square" lIns="0" tIns="0" rIns="0" bIns="0" rtlCol="0" anchor="ctr">
+            <a:normAutofit/>
+          </a:bodyPr>
+          <a:lstStyle/>
+          <a:p>
+            <a:pPr indent="0" marL="0">
+              <a:buNone/>
+            </a:pPr>
+            <a:r>
+              <a:rPr lang="en-US" sz="1100" b="1" dirty="0">
+                <a:solidFill>
+                  <a:srgbClr val="5B6476"/>
+                </a:solidFill>
+                <a:latin typeface="Aptos" pitchFamily="34" charset="0"/>
+                <a:ea typeface="Aptos" pitchFamily="34" charset="-122"/>
+                <a:cs typeface="Aptos" pitchFamily="34" charset="-120"/>
+              </a:rPr>
+              <a:t>Timeline + reply + post</a:t>
+            </a:r>
+            <a:endParaRPr lang="en-US" sz="1100" dirty="0"/>
+          </a:p>
+        </p:txBody>
+      </p:sp>
+      <p:sp>
+        <p:nvSpPr>
+          <p:cNvPr id="23" name="Shape 20"/>
+          <p:cNvSpPr/>
+          <p:nvPr/>
+        </p:nvSpPr>
+        <p:spPr>
+          <a:xfrm>
+            <a:off x="5449824" y="2926080"/>
+            <a:ext cx="5303520" cy="237744"/>
+          </a:xfrm>
+          <a:prstGeom prst="roundRect">
+            <a:avLst>
+              <a:gd name="adj" fmla="val 30769"/>
+            </a:avLst>
+          </a:prstGeom>
+          <a:solidFill>
+            <a:srgbClr val="EEF2F7"/>
+          </a:solidFill>
+          <a:ln w="12700">
+            <a:solidFill>
+              <a:srgbClr val="EEF2F7">
+                <a:alpha val="0"/>
+              </a:srgbClr>
+            </a:solidFill>
+            <a:prstDash val="solid"/>
+          </a:ln>
+        </p:spPr>
+      </p:sp>
+      <p:sp>
+        <p:nvSpPr>
+          <p:cNvPr id="24" name="Shape 21"/>
+          <p:cNvSpPr/>
+          <p:nvPr/>
+        </p:nvSpPr>
+        <p:spPr>
+          <a:xfrm>
+            <a:off x="5449824" y="2926080"/>
+            <a:ext cx="689458" cy="237744"/>
+          </a:xfrm>
+          <a:prstGeom prst="roundRect">
+            <a:avLst>
+              <a:gd name="adj" fmla="val 30769"/>
+            </a:avLst>
+          </a:prstGeom>
+          <a:solidFill>
+            <a:srgbClr val="F2AD18"/>
+          </a:solidFill>
+          <a:ln w="12700">
+            <a:solidFill>
+              <a:srgbClr val="F2AD18">
+                <a:alpha val="0"/>
+              </a:srgbClr>
+            </a:solidFill>
+            <a:prstDash val="solid"/>
+          </a:ln>
+        </p:spPr>
+      </p:sp>
+      <p:sp>
+        <p:nvSpPr>
+          <p:cNvPr id="25" name="Text 22"/>
+          <p:cNvSpPr/>
+          <p:nvPr/>
+        </p:nvSpPr>
+        <p:spPr>
+          <a:xfrm>
+            <a:off x="9930384" y="2706624"/>
+            <a:ext cx="822960" cy="164592"/>
+          </a:xfrm>
+          <a:prstGeom prst="rect">
+            <a:avLst/>
+          </a:prstGeom>
+          <a:noFill/>
+          <a:ln/>
+        </p:spPr>
+        <p:txBody>
+          <a:bodyPr wrap="square" lIns="0" tIns="0" rIns="0" bIns="0" rtlCol="0" anchor="ctr">
+            <a:normAutofit/>
+          </a:bodyPr>
+          <a:lstStyle/>
+          <a:p>
+            <a:pPr algn="r" indent="0" marL="0">
+              <a:buNone/>
+            </a:pPr>
+            <a:r>
+              <a:rPr lang="en-US" sz="1100" b="1" dirty="0">
                 <a:solidFill>
                   <a:srgbClr val="12192C"/>
                 </a:solidFill>
@@ -3925,16 +5763,139 @@
                 <a:ea typeface="Aptos" pitchFamily="34" charset="-122"/>
                 <a:cs typeface="Aptos" pitchFamily="34" charset="-120"/>
               </a:rPr>
-              <a:t>- A richer social-agent workflow can plausibly be &gt;20k tokens per action.</a:t>
-            </a:r>
-            <a:endParaRPr lang="en-US" sz="1600" dirty="0"/>
-          </a:p>
-          <a:p>
-            <a:pPr indent="0" marL="0">
-              <a:buNone/>
-            </a:pPr>
-            <a:r>
-              <a:rPr lang="en-US" sz="1600" dirty="0">
+              <a:t>8.900</a:t>
+            </a:r>
+            <a:endParaRPr lang="en-US" sz="1100" dirty="0"/>
+          </a:p>
+        </p:txBody>
+      </p:sp>
+      <p:sp>
+        <p:nvSpPr>
+          <p:cNvPr id="26" name="Text 23"/>
+          <p:cNvSpPr/>
+          <p:nvPr/>
+        </p:nvSpPr>
+        <p:spPr>
+          <a:xfrm>
+            <a:off x="5449824" y="3419856"/>
+            <a:ext cx="5303520" cy="182880"/>
+          </a:xfrm>
+          <a:prstGeom prst="rect">
+            <a:avLst/>
+          </a:prstGeom>
+          <a:noFill/>
+          <a:ln/>
+        </p:spPr>
+        <p:txBody>
+          <a:bodyPr wrap="square" lIns="0" tIns="0" rIns="0" bIns="0" rtlCol="0" anchor="ctr">
+            <a:normAutofit/>
+          </a:bodyPr>
+          <a:lstStyle/>
+          <a:p>
+            <a:pPr indent="0" marL="0">
+              <a:buNone/>
+            </a:pPr>
+            <a:r>
+              <a:rPr lang="en-US" sz="1100" b="1" dirty="0">
+                <a:solidFill>
+                  <a:srgbClr val="5B6476"/>
+                </a:solidFill>
+                <a:latin typeface="Aptos" pitchFamily="34" charset="0"/>
+                <a:ea typeface="Aptos" pitchFamily="34" charset="-122"/>
+                <a:cs typeface="Aptos" pitchFamily="34" charset="-120"/>
+              </a:rPr>
+              <a:t>OpenClaw docs voorbeeld</a:t>
+            </a:r>
+            <a:endParaRPr lang="en-US" sz="1100" dirty="0"/>
+          </a:p>
+        </p:txBody>
+      </p:sp>
+      <p:sp>
+        <p:nvSpPr>
+          <p:cNvPr id="27" name="Shape 24"/>
+          <p:cNvSpPr/>
+          <p:nvPr/>
+        </p:nvSpPr>
+        <p:spPr>
+          <a:xfrm>
+            <a:off x="5449824" y="3657600"/>
+            <a:ext cx="5303520" cy="237744"/>
+          </a:xfrm>
+          <a:prstGeom prst="roundRect">
+            <a:avLst>
+              <a:gd name="adj" fmla="val 30769"/>
+            </a:avLst>
+          </a:prstGeom>
+          <a:solidFill>
+            <a:srgbClr val="EEF2F7"/>
+          </a:solidFill>
+          <a:ln w="12700">
+            <a:solidFill>
+              <a:srgbClr val="EEF2F7">
+                <a:alpha val="0"/>
+              </a:srgbClr>
+            </a:solidFill>
+            <a:prstDash val="solid"/>
+          </a:ln>
+        </p:spPr>
+      </p:sp>
+      <p:sp>
+        <p:nvSpPr>
+          <p:cNvPr id="28" name="Shape 25"/>
+          <p:cNvSpPr/>
+          <p:nvPr/>
+        </p:nvSpPr>
+        <p:spPr>
+          <a:xfrm>
+            <a:off x="5449824" y="3657600"/>
+            <a:ext cx="1060704" cy="237744"/>
+          </a:xfrm>
+          <a:prstGeom prst="roundRect">
+            <a:avLst>
+              <a:gd name="adj" fmla="val 30769"/>
+            </a:avLst>
+          </a:prstGeom>
+          <a:solidFill>
+            <a:srgbClr val="0F766E"/>
+          </a:solidFill>
+          <a:ln w="12700">
+            <a:solidFill>
+              <a:srgbClr val="0F766E">
+                <a:alpha val="0"/>
+              </a:srgbClr>
+            </a:solidFill>
+            <a:prstDash val="solid"/>
+          </a:ln>
+        </p:spPr>
+      </p:sp>
+      <p:sp>
+        <p:nvSpPr>
+          <p:cNvPr id="29" name="Text 26"/>
+          <p:cNvSpPr/>
+          <p:nvPr/>
+        </p:nvSpPr>
+        <p:spPr>
+          <a:xfrm>
+            <a:off x="9930384" y="3438144"/>
+            <a:ext cx="822960" cy="164592"/>
+          </a:xfrm>
+          <a:prstGeom prst="rect">
+            <a:avLst/>
+          </a:prstGeom>
+          <a:noFill/>
+          <a:ln/>
+        </p:spPr>
+        <p:txBody>
+          <a:bodyPr wrap="square" lIns="0" tIns="0" rIns="0" bIns="0" rtlCol="0" anchor="ctr">
+            <a:normAutofit/>
+          </a:bodyPr>
+          <a:lstStyle/>
+          <a:p>
+            <a:pPr algn="r" indent="0" marL="0">
+              <a:buNone/>
+            </a:pPr>
+            <a:r>
+              <a:rPr lang="en-US" sz="1100" b="1" dirty="0">
                 <a:solidFill>
                   <a:srgbClr val="12192C"/>
                 </a:solidFill>
@@ -3942,22 +5903,81 @@
                 <a:ea typeface="Aptos" pitchFamily="34" charset="-122"/>
                 <a:cs typeface="Aptos" pitchFamily="34" charset="-120"/>
               </a:rPr>
-              <a:t>- Under the stated assumptions in this repo, one read-reply-post cycle costs ~$0.377 on Opus 4.6.</a:t>
-            </a:r>
-            <a:endParaRPr lang="en-US" sz="1600" dirty="0"/>
-          </a:p>
-          <a:p>
-            <a:pPr indent="0" marL="0">
-              <a:buNone/>
-            </a:pPr>
-            <a:endParaRPr lang="en-US" sz="1600" dirty="0"/>
-          </a:p>
-          <a:p>
-            <a:pPr indent="0" marL="0">
-              <a:buNone/>
-            </a:pPr>
-            <a:r>
-              <a:rPr lang="en-US" sz="1600" dirty="0">
+              <a:t>~14.250</a:t>
+            </a:r>
+            <a:endParaRPr lang="en-US" sz="1100" dirty="0"/>
+          </a:p>
+        </p:txBody>
+      </p:sp>
+      <p:sp>
+        <p:nvSpPr>
+          <p:cNvPr id="30" name="Text 27"/>
+          <p:cNvSpPr/>
+          <p:nvPr/>
+        </p:nvSpPr>
+        <p:spPr>
+          <a:xfrm>
+            <a:off x="5449824" y="4133088"/>
+            <a:ext cx="1645920" cy="201168"/>
+          </a:xfrm>
+          <a:prstGeom prst="rect">
+            <a:avLst/>
+          </a:prstGeom>
+          <a:noFill/>
+          <a:ln/>
+        </p:spPr>
+        <p:txBody>
+          <a:bodyPr wrap="square" lIns="0" tIns="0" rIns="0" bIns="0" rtlCol="0" anchor="ctr">
+            <a:normAutofit/>
+          </a:bodyPr>
+          <a:lstStyle/>
+          <a:p>
+            <a:pPr indent="0" marL="0">
+              <a:buNone/>
+            </a:pPr>
+            <a:r>
+              <a:rPr lang="en-US" sz="1400" b="1" dirty="0">
+                <a:solidFill>
+                  <a:srgbClr val="E93325"/>
+                </a:solidFill>
+                <a:latin typeface="Aptos" pitchFamily="34" charset="0"/>
+                <a:ea typeface="Aptos" pitchFamily="34" charset="-122"/>
+                <a:cs typeface="Aptos" pitchFamily="34" charset="-120"/>
+              </a:rPr>
+              <a:t>Interpretatie</a:t>
+            </a:r>
+            <a:endParaRPr lang="en-US" sz="1400" dirty="0"/>
+          </a:p>
+        </p:txBody>
+      </p:sp>
+      <p:sp>
+        <p:nvSpPr>
+          <p:cNvPr id="31" name="Text 28"/>
+          <p:cNvSpPr/>
+          <p:nvPr/>
+        </p:nvSpPr>
+        <p:spPr>
+          <a:xfrm>
+            <a:off x="5449824" y="4443984"/>
+            <a:ext cx="5394960" cy="658368"/>
+          </a:xfrm>
+          <a:prstGeom prst="rect">
+            <a:avLst/>
+          </a:prstGeom>
+          <a:noFill/>
+          <a:ln/>
+        </p:spPr>
+        <p:txBody>
+          <a:bodyPr wrap="square" lIns="0" tIns="0" rIns="0" bIns="0" rtlCol="0" anchor="ctr">
+            <a:normAutofit/>
+          </a:bodyPr>
+          <a:lstStyle/>
+          <a:p>
+            <a:pPr indent="0" marL="0">
+              <a:buNone/>
+            </a:pPr>
+            <a:r>
+              <a:rPr lang="en-US" sz="1400" dirty="0">
                 <a:solidFill>
                   <a:srgbClr val="12192C"/>
                 </a:solidFill>
@@ -3965,22 +5985,67 @@
                 <a:ea typeface="Aptos" pitchFamily="34" charset="-122"/>
                 <a:cs typeface="Aptos" pitchFamily="34" charset="-120"/>
               </a:rPr>
-              <a:t>What we should not say</a:t>
-            </a:r>
-            <a:endParaRPr lang="en-US" sz="1600" dirty="0"/>
-          </a:p>
-          <a:p>
-            <a:pPr indent="0" marL="0">
-              <a:buNone/>
-            </a:pPr>
-            <a:endParaRPr lang="en-US" sz="1600" dirty="0"/>
-          </a:p>
-          <a:p>
-            <a:pPr indent="0" marL="0">
-              <a:buNone/>
-            </a:pPr>
-            <a:r>
-              <a:rPr lang="en-US" sz="1600" dirty="0">
+              <a:t>De kost zit hier niet in één slimme reply. Ze zit in het telkens opnieuw laden van systeemcontext, instructies en geschiedenis.</a:t>
+            </a:r>
+            <a:endParaRPr lang="en-US" sz="1400" dirty="0"/>
+          </a:p>
+        </p:txBody>
+      </p:sp>
+      <p:sp>
+        <p:nvSpPr>
+          <p:cNvPr id="32" name="Shape 29"/>
+          <p:cNvSpPr/>
+          <p:nvPr/>
+        </p:nvSpPr>
+        <p:spPr>
+          <a:xfrm>
+            <a:off x="713232" y="5504688"/>
+            <a:ext cx="10927080" cy="640080"/>
+          </a:xfrm>
+          <a:prstGeom prst="roundRect">
+            <a:avLst>
+              <a:gd name="adj" fmla="val 11429"/>
+            </a:avLst>
+          </a:prstGeom>
+          <a:solidFill>
+            <a:srgbClr val="E8EEF9"/>
+          </a:solidFill>
+          <a:ln w="12700">
+            <a:solidFill>
+              <a:srgbClr val="D9DDE6"/>
+            </a:solidFill>
+            <a:prstDash val="solid"/>
+          </a:ln>
+        </p:spPr>
+      </p:sp>
+      <p:sp>
+        <p:nvSpPr>
+          <p:cNvPr id="33" name="Text 30"/>
+          <p:cNvSpPr/>
+          <p:nvPr/>
+        </p:nvSpPr>
+        <p:spPr>
+          <a:xfrm>
+            <a:off x="932688" y="5669280"/>
+            <a:ext cx="10469880" cy="201168"/>
+          </a:xfrm>
+          <a:prstGeom prst="rect">
+            <a:avLst/>
+          </a:prstGeom>
+          <a:noFill/>
+          <a:ln/>
+        </p:spPr>
+        <p:txBody>
+          <a:bodyPr wrap="square" lIns="0" tIns="0" rIns="0" bIns="0" rtlCol="0" anchor="ctr">
+            <a:normAutofit/>
+          </a:bodyPr>
+          <a:lstStyle/>
+          <a:p>
+            <a:pPr indent="0" marL="0">
+              <a:buNone/>
+            </a:pPr>
+            <a:r>
+              <a:rPr lang="en-US" sz="1200" b="1" dirty="0">
                 <a:solidFill>
                   <a:srgbClr val="12192C"/>
                 </a:solidFill>
@@ -3988,9 +6053,9 @@
                 <a:ea typeface="Aptos" pitchFamily="34" charset="-122"/>
                 <a:cs typeface="Aptos" pitchFamily="34" charset="-120"/>
               </a:rPr>
-              <a:t>- That $0.377 is a measured Moltbook trace.</a:t>
-            </a:r>
-            <a:endParaRPr lang="en-US" sz="1600" dirty="0"/>
+              <a:t>Takeaway: kostdruk is echt; het headline-getal blijft een scenario-uitkomst, geen observatie.</a:t>
+            </a:r>
+            <a:endParaRPr lang="en-US" sz="1200" dirty="0"/>
           </a:p>
         </p:txBody>
       </p:sp>
@@ -4008,7 +6073,7 @@
     <p:bg>
       <p:bgPr>
         <a:solidFill>
-          <a:srgbClr val="FFFFFF"/>
+          <a:srgbClr val="12192C"/>
         </a:solidFill>
       </p:bgPr>
     </p:bg>
@@ -4131,13 +6196,13 @@
             <a:r>
               <a:rPr lang="en-US" sz="900" b="1" dirty="0">
                 <a:solidFill>
-                  <a:srgbClr val="E93325"/>
-                </a:solidFill>
-                <a:latin typeface="Aptos" pitchFamily="34" charset="0"/>
-                <a:ea typeface="Aptos" pitchFamily="34" charset="-122"/>
-                <a:cs typeface="Aptos" pitchFamily="34" charset="-120"/>
-              </a:rPr>
-              <a:t>RED-TEAM CHECK</a:t>
+                  <a:srgbClr val="F2AD18"/>
+                </a:solidFill>
+                <a:latin typeface="Aptos" pitchFamily="34" charset="0"/>
+                <a:ea typeface="Aptos" pitchFamily="34" charset="-122"/>
+                <a:cs typeface="Aptos" pitchFamily="34" charset="-120"/>
+              </a:rPr>
+              <a:t>ATTRIBUTIE</a:t>
             </a:r>
             <a:endParaRPr lang="en-US" sz="900" dirty="0"/>
           </a:p>
@@ -4172,13 +6237,13 @@
             <a:r>
               <a:rPr lang="en-US" sz="2300" b="1" dirty="0">
                 <a:solidFill>
-                  <a:srgbClr val="12192C"/>
+                  <a:srgbClr val="FFFFFF"/>
                 </a:solidFill>
                 <a:latin typeface="Aptos Display" pitchFamily="34" charset="0"/>
                 <a:ea typeface="Aptos Display" pitchFamily="34" charset="-122"/>
                 <a:cs typeface="Aptos Display" pitchFamily="34" charset="-120"/>
               </a:rPr>
-              <a:t>Identity and governance remain unresolved, even if the behavior looks social</a:t>
+              <a:t>Sociaal gedrag is nog geen heldere autonomie</a:t>
             </a:r>
             <a:endParaRPr lang="en-US" sz="2300" dirty="0"/>
           </a:p>
@@ -4201,7 +6266,7 @@
           <a:noFill/>
           <a:ln w="12700">
             <a:solidFill>
-              <a:srgbClr val="D9DDE6"/>
+              <a:srgbClr val="394258"/>
             </a:solidFill>
             <a:prstDash val="solid"/>
           </a:ln>
@@ -4236,13 +6301,13 @@
             <a:r>
               <a:rPr lang="en-US" sz="800" dirty="0">
                 <a:solidFill>
-                  <a:srgbClr val="5B6476"/>
-                </a:solidFill>
-                <a:latin typeface="Aptos" pitchFamily="34" charset="0"/>
-                <a:ea typeface="Aptos" pitchFamily="34" charset="-122"/>
-                <a:cs typeface="Aptos" pitchFamily="34" charset="-120"/>
-              </a:rPr>
-              <a:t>Sources: Tsinghua paper 'The Moltbook Illusion' (2026-02-07) and Moltbook Terms.</a:t>
+                  <a:srgbClr val="D7DCE7"/>
+                </a:solidFill>
+                <a:latin typeface="Aptos" pitchFamily="34" charset="0"/>
+                <a:ea typeface="Aptos" pitchFamily="34" charset="-122"/>
+                <a:cs typeface="Aptos" pitchFamily="34" charset="-120"/>
+              </a:rPr>
+              <a:t>Bronnen: Tsinghua-paper 'The Moltbook Illusion' en Moltbook Terms.</a:t>
             </a:r>
             <a:endParaRPr lang="en-US" sz="800" dirty="0"/>
           </a:p>
@@ -4250,26 +6315,67 @@
       </p:sp>
       <p:sp>
         <p:nvSpPr>
-          <p:cNvPr id="9" name="Shape 6"/>
-          <p:cNvSpPr/>
-          <p:nvPr/>
-        </p:nvSpPr>
-        <p:spPr>
-          <a:xfrm>
-            <a:off x="713232" y="1325880"/>
-            <a:ext cx="5166360" cy="4754880"/>
+          <p:cNvPr id="9" name="Text 6"/>
+          <p:cNvSpPr/>
+          <p:nvPr/>
+        </p:nvSpPr>
+        <p:spPr>
+          <a:xfrm>
+            <a:off x="713232" y="1170432"/>
+            <a:ext cx="5943600" cy="219456"/>
+          </a:xfrm>
+          <a:prstGeom prst="rect">
+            <a:avLst/>
+          </a:prstGeom>
+          <a:noFill/>
+          <a:ln/>
+        </p:spPr>
+        <p:txBody>
+          <a:bodyPr wrap="square" lIns="0" tIns="0" rIns="0" bIns="0" rtlCol="0" anchor="ctr">
+            <a:normAutofit/>
+          </a:bodyPr>
+          <a:lstStyle/>
+          <a:p>
+            <a:pPr indent="0" marL="0">
+              <a:buNone/>
+            </a:pPr>
+            <a:r>
+              <a:rPr lang="en-US" sz="1500" dirty="0">
+                <a:solidFill>
+                  <a:srgbClr val="D7DCE7"/>
+                </a:solidFill>
+                <a:latin typeface="Aptos" pitchFamily="34" charset="0"/>
+                <a:ea typeface="Aptos" pitchFamily="34" charset="-122"/>
+                <a:cs typeface="Aptos" pitchFamily="34" charset="-120"/>
+              </a:rPr>
+              <a:t>De data ondersteunt geen eenvoudig verhaal over 'volledig autonome' activiteit.</a:t>
+            </a:r>
+            <a:endParaRPr lang="en-US" sz="1500" dirty="0"/>
+          </a:p>
+        </p:txBody>
+      </p:sp>
+      <p:sp>
+        <p:nvSpPr>
+          <p:cNvPr id="10" name="Shape 7"/>
+          <p:cNvSpPr/>
+          <p:nvPr/>
+        </p:nvSpPr>
+        <p:spPr>
+          <a:xfrm>
+            <a:off x="713232" y="1627632"/>
+            <a:ext cx="3246120" cy="1828800"/>
           </a:xfrm>
           <a:prstGeom prst="roundRect">
             <a:avLst>
-              <a:gd name="adj" fmla="val 1154"/>
+              <a:gd name="adj" fmla="val 3000"/>
             </a:avLst>
           </a:prstGeom>
           <a:solidFill>
-            <a:srgbClr val="F7F8FB"/>
+            <a:srgbClr val="1C2540"/>
           </a:solidFill>
           <a:ln w="12700">
             <a:solidFill>
-              <a:srgbClr val="D9DDE6"/>
+              <a:srgbClr val="394258"/>
             </a:solidFill>
             <a:prstDash val="solid"/>
           </a:ln>
@@ -4277,151 +6383,651 @@
       </p:sp>
       <p:sp>
         <p:nvSpPr>
-          <p:cNvPr id="10" name="Text 7"/>
-          <p:cNvSpPr/>
-          <p:nvPr/>
-        </p:nvSpPr>
-        <p:spPr>
-          <a:xfrm>
-            <a:off x="822960" y="1645920"/>
-            <a:ext cx="4800600" cy="4023360"/>
-          </a:xfrm>
-          <a:prstGeom prst="rect">
-            <a:avLst/>
-          </a:prstGeom>
-          <a:noFill/>
-          <a:ln/>
-        </p:spPr>
-        <p:txBody>
-          <a:bodyPr wrap="square" lIns="0" tIns="0" rIns="0" bIns="0" rtlCol="0" anchor="t">
-            <a:normAutofit/>
-          </a:bodyPr>
-          <a:lstStyle/>
-          <a:p>
-            <a:pPr indent="0" marL="0">
-              <a:buNone/>
-            </a:pPr>
-            <a:r>
-              <a:rPr lang="en-US" sz="1600" dirty="0">
-                <a:solidFill>
-                  <a:srgbClr val="12192C"/>
-                </a:solidFill>
-                <a:latin typeface="Aptos" pitchFamily="34" charset="0"/>
-                <a:ea typeface="Aptos" pitchFamily="34" charset="-122"/>
-                <a:cs typeface="Aptos" pitchFamily="34" charset="-120"/>
-              </a:rPr>
-              <a:t>Tsinghua paper findings</a:t>
-            </a:r>
-            <a:endParaRPr lang="en-US" sz="1600" dirty="0"/>
-          </a:p>
-          <a:p>
-            <a:pPr indent="0" marL="0">
-              <a:buNone/>
-            </a:pPr>
-            <a:endParaRPr lang="en-US" sz="1600" dirty="0"/>
-          </a:p>
-          <a:p>
-            <a:pPr indent="0" marL="0">
-              <a:buNone/>
-            </a:pPr>
-            <a:r>
-              <a:rPr lang="en-US" sz="1600" dirty="0">
-                <a:solidFill>
-                  <a:srgbClr val="12192C"/>
-                </a:solidFill>
-                <a:latin typeface="Aptos" pitchFamily="34" charset="0"/>
-                <a:ea typeface="Aptos" pitchFamily="34" charset="-122"/>
-                <a:cs typeface="Aptos" pitchFamily="34" charset="-120"/>
-              </a:rPr>
-              <a:t>- 26.5% of classifiable authors fell into autonomous-leaning timing categories.</a:t>
-            </a:r>
-            <a:endParaRPr lang="en-US" sz="1600" dirty="0"/>
-          </a:p>
-          <a:p>
-            <a:pPr indent="0" marL="0">
-              <a:buNone/>
-            </a:pPr>
-            <a:r>
-              <a:rPr lang="en-US" sz="1600" dirty="0">
-                <a:solidFill>
-                  <a:srgbClr val="12192C"/>
-                </a:solidFill>
-                <a:latin typeface="Aptos" pitchFamily="34" charset="0"/>
-                <a:ea typeface="Aptos" pitchFamily="34" charset="-122"/>
-                <a:cs typeface="Aptos" pitchFamily="34" charset="-120"/>
-              </a:rPr>
-              <a:t>- 36.8% were human-leaning.</a:t>
-            </a:r>
-            <a:endParaRPr lang="en-US" sz="1600" dirty="0"/>
-          </a:p>
-          <a:p>
-            <a:pPr indent="0" marL="0">
-              <a:buNone/>
-            </a:pPr>
-            <a:r>
-              <a:rPr lang="en-US" sz="1600" dirty="0">
-                <a:solidFill>
-                  <a:srgbClr val="12192C"/>
-                </a:solidFill>
-                <a:latin typeface="Aptos" pitchFamily="34" charset="0"/>
-                <a:ea typeface="Aptos" pitchFamily="34" charset="-122"/>
-                <a:cs typeface="Aptos" pitchFamily="34" charset="-120"/>
-              </a:rPr>
-              <a:t>- 36.7% fell into the ambiguous middle range.</a:t>
-            </a:r>
-            <a:endParaRPr lang="en-US" sz="1600" dirty="0"/>
-          </a:p>
-          <a:p>
-            <a:pPr indent="0" marL="0">
-              <a:buNone/>
-            </a:pPr>
-            <a:endParaRPr lang="en-US" sz="1600" dirty="0"/>
-          </a:p>
-          <a:p>
-            <a:pPr indent="0" marL="0">
-              <a:buNone/>
-            </a:pPr>
-            <a:r>
-              <a:rPr lang="en-US" sz="1600" dirty="0">
-                <a:solidFill>
-                  <a:srgbClr val="12192C"/>
-                </a:solidFill>
-                <a:latin typeface="Aptos" pitchFamily="34" charset="0"/>
-                <a:ea typeface="Aptos" pitchFamily="34" charset="-122"/>
-                <a:cs typeface="Aptos" pitchFamily="34" charset="-120"/>
-              </a:rPr>
-              <a:t>Interpretation</a:t>
-            </a:r>
-            <a:endParaRPr lang="en-US" sz="1600" dirty="0"/>
-          </a:p>
-          <a:p>
-            <a:pPr indent="0" marL="0">
-              <a:buNone/>
-            </a:pPr>
-            <a:endParaRPr lang="en-US" sz="1600" dirty="0"/>
-          </a:p>
-          <a:p>
-            <a:pPr indent="0" marL="0">
-              <a:buNone/>
-            </a:pPr>
-            <a:r>
-              <a:rPr lang="en-US" sz="1600" dirty="0">
-                <a:solidFill>
-                  <a:srgbClr val="12192C"/>
-                </a:solidFill>
-                <a:latin typeface="Aptos" pitchFamily="34" charset="0"/>
-                <a:ea typeface="Aptos" pitchFamily="34" charset="-122"/>
-                <a:cs typeface="Aptos" pitchFamily="34" charset="-120"/>
-              </a:rPr>
-              <a:t>The clean claim is not 'Moltbook is fake.' It is that attribution is messy enough that strong autonomy claims need more caution than the original deck used.</a:t>
-            </a:r>
-            <a:endParaRPr lang="en-US" sz="1600" dirty="0"/>
-          </a:p>
-        </p:txBody>
+          <p:cNvPr id="11" name="Text 8"/>
+          <p:cNvSpPr/>
+          <p:nvPr/>
+        </p:nvSpPr>
+        <p:spPr>
+          <a:xfrm>
+            <a:off x="896112" y="1810512"/>
+            <a:ext cx="2880360" cy="502920"/>
+          </a:xfrm>
+          <a:prstGeom prst="rect">
+            <a:avLst/>
+          </a:prstGeom>
+          <a:noFill/>
+          <a:ln/>
+        </p:spPr>
+        <p:txBody>
+          <a:bodyPr wrap="square" lIns="0" tIns="0" rIns="0" bIns="0" rtlCol="0" anchor="ctr">
+            <a:normAutofit/>
+          </a:bodyPr>
+          <a:lstStyle/>
+          <a:p>
+            <a:pPr indent="0" marL="0">
+              <a:buNone/>
+            </a:pPr>
+            <a:r>
+              <a:rPr lang="en-US" sz="2800" b="1" dirty="0">
+                <a:solidFill>
+                  <a:srgbClr val="E93325"/>
+                </a:solidFill>
+                <a:latin typeface="Aptos Display" pitchFamily="34" charset="0"/>
+                <a:ea typeface="Aptos Display" pitchFamily="34" charset="-122"/>
+                <a:cs typeface="Aptos Display" pitchFamily="34" charset="-120"/>
+              </a:rPr>
+              <a:t>26,5%</a:t>
+            </a:r>
+            <a:endParaRPr lang="en-US" sz="2800" dirty="0"/>
+          </a:p>
+        </p:txBody>
+      </p:sp>
+      <p:sp>
+        <p:nvSpPr>
+          <p:cNvPr id="12" name="Text 9"/>
+          <p:cNvSpPr/>
+          <p:nvPr/>
+        </p:nvSpPr>
+        <p:spPr>
+          <a:xfrm>
+            <a:off x="896112" y="2414016"/>
+            <a:ext cx="2880360" cy="237744"/>
+          </a:xfrm>
+          <a:prstGeom prst="rect">
+            <a:avLst/>
+          </a:prstGeom>
+          <a:noFill/>
+          <a:ln/>
+        </p:spPr>
+        <p:txBody>
+          <a:bodyPr wrap="square" lIns="0" tIns="0" rIns="0" bIns="0" rtlCol="0" anchor="ctr">
+            <a:normAutofit/>
+          </a:bodyPr>
+          <a:lstStyle/>
+          <a:p>
+            <a:pPr indent="0" marL="0">
+              <a:buNone/>
+            </a:pPr>
+            <a:r>
+              <a:rPr lang="en-US" sz="1200" b="1" dirty="0">
+                <a:solidFill>
+                  <a:srgbClr val="FFFFFF"/>
+                </a:solidFill>
+                <a:latin typeface="Aptos" pitchFamily="34" charset="0"/>
+                <a:ea typeface="Aptos" pitchFamily="34" charset="-122"/>
+                <a:cs typeface="Aptos" pitchFamily="34" charset="-120"/>
+              </a:rPr>
+              <a:t>meer autonoom</a:t>
+            </a:r>
+            <a:endParaRPr lang="en-US" sz="1200" dirty="0"/>
+          </a:p>
+        </p:txBody>
+      </p:sp>
+      <p:sp>
+        <p:nvSpPr>
+          <p:cNvPr id="13" name="Text 10"/>
+          <p:cNvSpPr/>
+          <p:nvPr/>
+        </p:nvSpPr>
+        <p:spPr>
+          <a:xfrm>
+            <a:off x="896112" y="2724912"/>
+            <a:ext cx="2880360" cy="457200"/>
+          </a:xfrm>
+          <a:prstGeom prst="rect">
+            <a:avLst/>
+          </a:prstGeom>
+          <a:noFill/>
+          <a:ln/>
+        </p:spPr>
+        <p:txBody>
+          <a:bodyPr wrap="square" lIns="0" tIns="0" rIns="0" bIns="0" rtlCol="0" anchor="ctr">
+            <a:normAutofit/>
+          </a:bodyPr>
+          <a:lstStyle/>
+          <a:p>
+            <a:pPr indent="0" marL="0">
+              <a:buNone/>
+            </a:pPr>
+            <a:r>
+              <a:rPr lang="en-US" sz="1100" dirty="0">
+                <a:solidFill>
+                  <a:srgbClr val="D7DCE7"/>
+                </a:solidFill>
+                <a:latin typeface="Aptos" pitchFamily="34" charset="0"/>
+                <a:ea typeface="Aptos" pitchFamily="34" charset="-122"/>
+                <a:cs typeface="Aptos" pitchFamily="34" charset="-120"/>
+              </a:rPr>
+              <a:t>van classificeerbare auteurs</a:t>
+            </a:r>
+            <a:endParaRPr lang="en-US" sz="1100" dirty="0"/>
+          </a:p>
+        </p:txBody>
+      </p:sp>
+      <p:sp>
+        <p:nvSpPr>
+          <p:cNvPr id="14" name="Shape 11"/>
+          <p:cNvSpPr/>
+          <p:nvPr/>
+        </p:nvSpPr>
+        <p:spPr>
+          <a:xfrm>
+            <a:off x="4187952" y="1627632"/>
+            <a:ext cx="2898648" cy="1828800"/>
+          </a:xfrm>
+          <a:prstGeom prst="roundRect">
+            <a:avLst>
+              <a:gd name="adj" fmla="val 3000"/>
+            </a:avLst>
+          </a:prstGeom>
+          <a:solidFill>
+            <a:srgbClr val="1C2540"/>
+          </a:solidFill>
+          <a:ln w="12700">
+            <a:solidFill>
+              <a:srgbClr val="394258"/>
+            </a:solidFill>
+            <a:prstDash val="solid"/>
+          </a:ln>
+        </p:spPr>
+      </p:sp>
+      <p:sp>
+        <p:nvSpPr>
+          <p:cNvPr id="15" name="Text 12"/>
+          <p:cNvSpPr/>
+          <p:nvPr/>
+        </p:nvSpPr>
+        <p:spPr>
+          <a:xfrm>
+            <a:off x="4370832" y="1810512"/>
+            <a:ext cx="2532888" cy="502920"/>
+          </a:xfrm>
+          <a:prstGeom prst="rect">
+            <a:avLst/>
+          </a:prstGeom>
+          <a:noFill/>
+          <a:ln/>
+        </p:spPr>
+        <p:txBody>
+          <a:bodyPr wrap="square" lIns="0" tIns="0" rIns="0" bIns="0" rtlCol="0" anchor="ctr">
+            <a:normAutofit/>
+          </a:bodyPr>
+          <a:lstStyle/>
+          <a:p>
+            <a:pPr indent="0" marL="0">
+              <a:buNone/>
+            </a:pPr>
+            <a:r>
+              <a:rPr lang="en-US" sz="2800" b="1" dirty="0">
+                <a:solidFill>
+                  <a:srgbClr val="F2AD18"/>
+                </a:solidFill>
+                <a:latin typeface="Aptos Display" pitchFamily="34" charset="0"/>
+                <a:ea typeface="Aptos Display" pitchFamily="34" charset="-122"/>
+                <a:cs typeface="Aptos Display" pitchFamily="34" charset="-120"/>
+              </a:rPr>
+              <a:t>36,8%</a:t>
+            </a:r>
+            <a:endParaRPr lang="en-US" sz="2800" dirty="0"/>
+          </a:p>
+        </p:txBody>
+      </p:sp>
+      <p:sp>
+        <p:nvSpPr>
+          <p:cNvPr id="16" name="Text 13"/>
+          <p:cNvSpPr/>
+          <p:nvPr/>
+        </p:nvSpPr>
+        <p:spPr>
+          <a:xfrm>
+            <a:off x="4370832" y="2414016"/>
+            <a:ext cx="2532888" cy="237744"/>
+          </a:xfrm>
+          <a:prstGeom prst="rect">
+            <a:avLst/>
+          </a:prstGeom>
+          <a:noFill/>
+          <a:ln/>
+        </p:spPr>
+        <p:txBody>
+          <a:bodyPr wrap="square" lIns="0" tIns="0" rIns="0" bIns="0" rtlCol="0" anchor="ctr">
+            <a:normAutofit/>
+          </a:bodyPr>
+          <a:lstStyle/>
+          <a:p>
+            <a:pPr indent="0" marL="0">
+              <a:buNone/>
+            </a:pPr>
+            <a:r>
+              <a:rPr lang="en-US" sz="1200" b="1" dirty="0">
+                <a:solidFill>
+                  <a:srgbClr val="FFFFFF"/>
+                </a:solidFill>
+                <a:latin typeface="Aptos" pitchFamily="34" charset="0"/>
+                <a:ea typeface="Aptos" pitchFamily="34" charset="-122"/>
+                <a:cs typeface="Aptos" pitchFamily="34" charset="-120"/>
+              </a:rPr>
+              <a:t>meer menselijk</a:t>
+            </a:r>
+            <a:endParaRPr lang="en-US" sz="1200" dirty="0"/>
+          </a:p>
+        </p:txBody>
+      </p:sp>
+      <p:sp>
+        <p:nvSpPr>
+          <p:cNvPr id="17" name="Text 14"/>
+          <p:cNvSpPr/>
+          <p:nvPr/>
+        </p:nvSpPr>
+        <p:spPr>
+          <a:xfrm>
+            <a:off x="4370832" y="2724912"/>
+            <a:ext cx="2532888" cy="457200"/>
+          </a:xfrm>
+          <a:prstGeom prst="rect">
+            <a:avLst/>
+          </a:prstGeom>
+          <a:noFill/>
+          <a:ln/>
+        </p:spPr>
+        <p:txBody>
+          <a:bodyPr wrap="square" lIns="0" tIns="0" rIns="0" bIns="0" rtlCol="0" anchor="ctr">
+            <a:normAutofit/>
+          </a:bodyPr>
+          <a:lstStyle/>
+          <a:p>
+            <a:pPr indent="0" marL="0">
+              <a:buNone/>
+            </a:pPr>
+            <a:r>
+              <a:rPr lang="en-US" sz="1100" dirty="0">
+                <a:solidFill>
+                  <a:srgbClr val="D7DCE7"/>
+                </a:solidFill>
+                <a:latin typeface="Aptos" pitchFamily="34" charset="0"/>
+                <a:ea typeface="Aptos" pitchFamily="34" charset="-122"/>
+                <a:cs typeface="Aptos" pitchFamily="34" charset="-120"/>
+              </a:rPr>
+              <a:t>van classificeerbare auteurs</a:t>
+            </a:r>
+            <a:endParaRPr lang="en-US" sz="1100" dirty="0"/>
+          </a:p>
+        </p:txBody>
+      </p:sp>
+      <p:sp>
+        <p:nvSpPr>
+          <p:cNvPr id="18" name="Shape 15"/>
+          <p:cNvSpPr/>
+          <p:nvPr/>
+        </p:nvSpPr>
+        <p:spPr>
+          <a:xfrm>
+            <a:off x="7296912" y="1627632"/>
+            <a:ext cx="2560320" cy="1828800"/>
+          </a:xfrm>
+          <a:prstGeom prst="roundRect">
+            <a:avLst>
+              <a:gd name="adj" fmla="val 3000"/>
+            </a:avLst>
+          </a:prstGeom>
+          <a:solidFill>
+            <a:srgbClr val="1C2540"/>
+          </a:solidFill>
+          <a:ln w="12700">
+            <a:solidFill>
+              <a:srgbClr val="394258"/>
+            </a:solidFill>
+            <a:prstDash val="solid"/>
+          </a:ln>
+        </p:spPr>
+      </p:sp>
+      <p:sp>
+        <p:nvSpPr>
+          <p:cNvPr id="19" name="Text 16"/>
+          <p:cNvSpPr/>
+          <p:nvPr/>
+        </p:nvSpPr>
+        <p:spPr>
+          <a:xfrm>
+            <a:off x="7479792" y="1810512"/>
+            <a:ext cx="2194560" cy="502920"/>
+          </a:xfrm>
+          <a:prstGeom prst="rect">
+            <a:avLst/>
+          </a:prstGeom>
+          <a:noFill/>
+          <a:ln/>
+        </p:spPr>
+        <p:txBody>
+          <a:bodyPr wrap="square" lIns="0" tIns="0" rIns="0" bIns="0" rtlCol="0" anchor="ctr">
+            <a:normAutofit/>
+          </a:bodyPr>
+          <a:lstStyle/>
+          <a:p>
+            <a:pPr indent="0" marL="0">
+              <a:buNone/>
+            </a:pPr>
+            <a:r>
+              <a:rPr lang="en-US" sz="2800" b="1" dirty="0">
+                <a:solidFill>
+                  <a:srgbClr val="7DD3FC"/>
+                </a:solidFill>
+                <a:latin typeface="Aptos Display" pitchFamily="34" charset="0"/>
+                <a:ea typeface="Aptos Display" pitchFamily="34" charset="-122"/>
+                <a:cs typeface="Aptos Display" pitchFamily="34" charset="-120"/>
+              </a:rPr>
+              <a:t>36,7%</a:t>
+            </a:r>
+            <a:endParaRPr lang="en-US" sz="2800" dirty="0"/>
+          </a:p>
+        </p:txBody>
+      </p:sp>
+      <p:sp>
+        <p:nvSpPr>
+          <p:cNvPr id="20" name="Text 17"/>
+          <p:cNvSpPr/>
+          <p:nvPr/>
+        </p:nvSpPr>
+        <p:spPr>
+          <a:xfrm>
+            <a:off x="7479792" y="2414016"/>
+            <a:ext cx="2194560" cy="237744"/>
+          </a:xfrm>
+          <a:prstGeom prst="rect">
+            <a:avLst/>
+          </a:prstGeom>
+          <a:noFill/>
+          <a:ln/>
+        </p:spPr>
+        <p:txBody>
+          <a:bodyPr wrap="square" lIns="0" tIns="0" rIns="0" bIns="0" rtlCol="0" anchor="ctr">
+            <a:normAutofit/>
+          </a:bodyPr>
+          <a:lstStyle/>
+          <a:p>
+            <a:pPr indent="0" marL="0">
+              <a:buNone/>
+            </a:pPr>
+            <a:r>
+              <a:rPr lang="en-US" sz="1200" b="1" dirty="0">
+                <a:solidFill>
+                  <a:srgbClr val="FFFFFF"/>
+                </a:solidFill>
+                <a:latin typeface="Aptos" pitchFamily="34" charset="0"/>
+                <a:ea typeface="Aptos" pitchFamily="34" charset="-122"/>
+                <a:cs typeface="Aptos" pitchFamily="34" charset="-120"/>
+              </a:rPr>
+              <a:t>ambigu</a:t>
+            </a:r>
+            <a:endParaRPr lang="en-US" sz="1200" dirty="0"/>
+          </a:p>
+        </p:txBody>
+      </p:sp>
+      <p:sp>
+        <p:nvSpPr>
+          <p:cNvPr id="21" name="Text 18"/>
+          <p:cNvSpPr/>
+          <p:nvPr/>
+        </p:nvSpPr>
+        <p:spPr>
+          <a:xfrm>
+            <a:off x="7479792" y="2724912"/>
+            <a:ext cx="2194560" cy="457200"/>
+          </a:xfrm>
+          <a:prstGeom prst="rect">
+            <a:avLst/>
+          </a:prstGeom>
+          <a:noFill/>
+          <a:ln/>
+        </p:spPr>
+        <p:txBody>
+          <a:bodyPr wrap="square" lIns="0" tIns="0" rIns="0" bIns="0" rtlCol="0" anchor="ctr">
+            <a:normAutofit/>
+          </a:bodyPr>
+          <a:lstStyle/>
+          <a:p>
+            <a:pPr indent="0" marL="0">
+              <a:buNone/>
+            </a:pPr>
+            <a:r>
+              <a:rPr lang="en-US" sz="1100" dirty="0">
+                <a:solidFill>
+                  <a:srgbClr val="D7DCE7"/>
+                </a:solidFill>
+                <a:latin typeface="Aptos" pitchFamily="34" charset="0"/>
+                <a:ea typeface="Aptos" pitchFamily="34" charset="-122"/>
+                <a:cs typeface="Aptos" pitchFamily="34" charset="-120"/>
+              </a:rPr>
+              <a:t>geen nette toewijzing</a:t>
+            </a:r>
+            <a:endParaRPr lang="en-US" sz="1100" dirty="0"/>
+          </a:p>
+        </p:txBody>
+      </p:sp>
+      <p:sp>
+        <p:nvSpPr>
+          <p:cNvPr id="22" name="Shape 19"/>
+          <p:cNvSpPr/>
+          <p:nvPr/>
+        </p:nvSpPr>
+        <p:spPr>
+          <a:xfrm>
+            <a:off x="10040112" y="1627632"/>
+            <a:ext cx="1371600" cy="1828800"/>
+          </a:xfrm>
+          <a:prstGeom prst="roundRect">
+            <a:avLst>
+              <a:gd name="adj" fmla="val 4000"/>
+            </a:avLst>
+          </a:prstGeom>
+          <a:solidFill>
+            <a:srgbClr val="1C2540"/>
+          </a:solidFill>
+          <a:ln w="12700">
+            <a:solidFill>
+              <a:srgbClr val="394258"/>
+            </a:solidFill>
+            <a:prstDash val="solid"/>
+          </a:ln>
+        </p:spPr>
+      </p:sp>
+      <p:sp>
+        <p:nvSpPr>
+          <p:cNvPr id="23" name="Text 20"/>
+          <p:cNvSpPr/>
+          <p:nvPr/>
+        </p:nvSpPr>
+        <p:spPr>
+          <a:xfrm>
+            <a:off x="10222992" y="1865376"/>
+            <a:ext cx="960120" cy="164592"/>
+          </a:xfrm>
+          <a:prstGeom prst="rect">
+            <a:avLst/>
+          </a:prstGeom>
+          <a:noFill/>
+          <a:ln/>
+        </p:spPr>
+        <p:txBody>
+          <a:bodyPr wrap="square" lIns="0" tIns="0" rIns="0" bIns="0" rtlCol="0" anchor="ctr">
+            <a:normAutofit/>
+          </a:bodyPr>
+          <a:lstStyle/>
+          <a:p>
+            <a:pPr indent="0" marL="0">
+              <a:buNone/>
+            </a:pPr>
+            <a:r>
+              <a:rPr lang="en-US" sz="1200" b="1" dirty="0">
+                <a:solidFill>
+                  <a:srgbClr val="F2AD18"/>
+                </a:solidFill>
+                <a:latin typeface="Aptos" pitchFamily="34" charset="0"/>
+                <a:ea typeface="Aptos" pitchFamily="34" charset="-122"/>
+                <a:cs typeface="Aptos" pitchFamily="34" charset="-120"/>
+              </a:rPr>
+              <a:t>Terms</a:t>
+            </a:r>
+            <a:endParaRPr lang="en-US" sz="1200" dirty="0"/>
+          </a:p>
+        </p:txBody>
+      </p:sp>
+      <p:sp>
+        <p:nvSpPr>
+          <p:cNvPr id="24" name="Text 21"/>
+          <p:cNvSpPr/>
+          <p:nvPr/>
+        </p:nvSpPr>
+        <p:spPr>
+          <a:xfrm>
+            <a:off x="10222992" y="2212848"/>
+            <a:ext cx="960120" cy="640080"/>
+          </a:xfrm>
+          <a:prstGeom prst="rect">
+            <a:avLst/>
+          </a:prstGeom>
+          <a:noFill/>
+          <a:ln/>
+        </p:spPr>
+        <p:txBody>
+          <a:bodyPr wrap="square" lIns="0" tIns="0" rIns="0" bIns="0" rtlCol="0" anchor="ctr">
+            <a:normAutofit/>
+          </a:bodyPr>
+          <a:lstStyle/>
+          <a:p>
+            <a:pPr indent="0" marL="0">
+              <a:buNone/>
+            </a:pPr>
+            <a:r>
+              <a:rPr lang="en-US" sz="1000" dirty="0">
+                <a:solidFill>
+                  <a:srgbClr val="FFFFFF"/>
+                </a:solidFill>
+                <a:latin typeface="Aptos" pitchFamily="34" charset="0"/>
+                <a:ea typeface="Aptos" pitchFamily="34" charset="-122"/>
+                <a:cs typeface="Aptos" pitchFamily="34" charset="-120"/>
+              </a:rPr>
+              <a:t>mens blijft juridisch verantwoordelijk</a:t>
+            </a:r>
+            <a:endParaRPr lang="en-US" sz="1000" dirty="0"/>
+          </a:p>
+        </p:txBody>
+      </p:sp>
+      <p:sp>
+        <p:nvSpPr>
+          <p:cNvPr id="25" name="Shape 22"/>
+          <p:cNvSpPr/>
+          <p:nvPr/>
+        </p:nvSpPr>
+        <p:spPr>
+          <a:xfrm>
+            <a:off x="713232" y="4005072"/>
+            <a:ext cx="6446520" cy="1463040"/>
+          </a:xfrm>
+          <a:prstGeom prst="roundRect">
+            <a:avLst>
+              <a:gd name="adj" fmla="val 3750"/>
+            </a:avLst>
+          </a:prstGeom>
+          <a:solidFill>
+            <a:srgbClr val="1C2540"/>
+          </a:solidFill>
+          <a:ln w="12700">
+            <a:solidFill>
+              <a:srgbClr val="394258"/>
+            </a:solidFill>
+            <a:prstDash val="solid"/>
+          </a:ln>
+        </p:spPr>
+      </p:sp>
+      <p:sp>
+        <p:nvSpPr>
+          <p:cNvPr id="26" name="Text 23"/>
+          <p:cNvSpPr/>
+          <p:nvPr/>
+        </p:nvSpPr>
+        <p:spPr>
+          <a:xfrm>
+            <a:off x="932688" y="4352544"/>
+            <a:ext cx="5852160" cy="658368"/>
+          </a:xfrm>
+          <a:prstGeom prst="rect">
+            <a:avLst/>
+          </a:prstGeom>
+          <a:noFill/>
+          <a:ln/>
+        </p:spPr>
+        <p:txBody>
+          <a:bodyPr wrap="square" lIns="0" tIns="0" rIns="0" bIns="0" rtlCol="0" anchor="ctr">
+            <a:normAutofit/>
+          </a:bodyPr>
+          <a:lstStyle/>
+          <a:p>
+            <a:pPr indent="0" marL="0">
+              <a:buNone/>
+            </a:pPr>
+            <a:r>
+              <a:rPr lang="en-US" sz="2000" b="1" dirty="0">
+                <a:solidFill>
+                  <a:srgbClr val="FFFFFF"/>
+                </a:solidFill>
+                <a:latin typeface="Aptos Display" pitchFamily="34" charset="0"/>
+                <a:ea typeface="Aptos Display" pitchFamily="34" charset="-122"/>
+                <a:cs typeface="Aptos Display" pitchFamily="34" charset="-120"/>
+              </a:rPr>
+              <a:t>De les is niet: 'alles is fake'.</a:t>
+            </a:r>
+            <a:endParaRPr lang="en-US" sz="2000" dirty="0"/>
+          </a:p>
+          <a:p>
+            <a:pPr indent="0" marL="0">
+              <a:buNone/>
+            </a:pPr>
+            <a:r>
+              <a:rPr lang="en-US" sz="2000" b="1" dirty="0">
+                <a:solidFill>
+                  <a:srgbClr val="FFFFFF"/>
+                </a:solidFill>
+                <a:latin typeface="Aptos Display" pitchFamily="34" charset="0"/>
+                <a:ea typeface="Aptos Display" pitchFamily="34" charset="-122"/>
+                <a:cs typeface="Aptos Display" pitchFamily="34" charset="-120"/>
+              </a:rPr>
+              <a:t>De les is: attributie is rommelig genoeg dat sterke autonomieclaims te hard zijn.</a:t>
+            </a:r>
+            <a:endParaRPr lang="en-US" sz="2000" dirty="0"/>
+          </a:p>
+        </p:txBody>
+      </p:sp>
+      <p:sp>
+        <p:nvSpPr>
+          <p:cNvPr id="27" name="Shape 24"/>
+          <p:cNvSpPr/>
+          <p:nvPr/>
+        </p:nvSpPr>
+        <p:spPr>
+          <a:xfrm>
+            <a:off x="7388352" y="3931920"/>
+            <a:ext cx="4023360" cy="1609344"/>
+          </a:xfrm>
+          <a:prstGeom prst="roundRect">
+            <a:avLst>
+              <a:gd name="adj" fmla="val 3409"/>
+            </a:avLst>
+          </a:prstGeom>
+          <a:solidFill>
+            <a:srgbClr val="1C2540"/>
+          </a:solidFill>
+          <a:ln w="12700">
+            <a:solidFill>
+              <a:srgbClr val="394258"/>
+            </a:solidFill>
+            <a:prstDash val="solid"/>
+          </a:ln>
+        </p:spPr>
       </p:sp>
       <p:pic>
         <p:nvPicPr>
-          <p:cNvPr id="11" name="Image 1" descr="/home/ff/Documents/BoostMeUp/MoltBook_Sessie/assets/moltbook_terms_eligibility.png">    </p:cNvPr>
+          <p:cNvPr id="28" name="Image 1" descr="/home/ff/Documents/BoostMeUp/MoltBook_Sessie/assets/moltbook_terms_eligibility.png">    </p:cNvPr>
           <p:cNvPicPr>
             <a:picLocks noChangeAspect="1"/>
           </p:cNvPicPr>
@@ -4435,8 +7041,8 @@
         </p:blipFill>
         <p:spPr>
           <a:xfrm>
-            <a:off x="6355080" y="1627632"/>
-            <a:ext cx="4846320" cy="2148840"/>
+            <a:off x="7498080" y="4041648"/>
+            <a:ext cx="3803904" cy="1389888"/>
           </a:xfrm>
           <a:prstGeom prst="rect">
             <a:avLst/>
@@ -4445,42 +7051,69 @@
       </p:pic>
       <p:sp>
         <p:nvSpPr>
-          <p:cNvPr id="12" name="Text 8"/>
-          <p:cNvSpPr/>
-          <p:nvPr/>
-        </p:nvSpPr>
-        <p:spPr>
-          <a:xfrm>
-            <a:off x="6309360" y="4160520"/>
-            <a:ext cx="4663440" cy="640080"/>
-          </a:xfrm>
-          <a:prstGeom prst="rect">
-            <a:avLst/>
-          </a:prstGeom>
-          <a:noFill/>
-          <a:ln/>
-        </p:spPr>
-        <p:txBody>
-          <a:bodyPr wrap="square" lIns="0" tIns="0" rIns="0" bIns="0" rtlCol="0" anchor="ctr">
-            <a:normAutofit/>
-          </a:bodyPr>
-          <a:lstStyle/>
-          <a:p>
-            <a:pPr indent="0" marL="0">
-              <a:buNone/>
-            </a:pPr>
-            <a:r>
-              <a:rPr lang="en-US" sz="1800" i="1" dirty="0">
-                <a:solidFill>
-                  <a:srgbClr val="E93325"/>
-                </a:solidFill>
-                <a:latin typeface="Aptos" pitchFamily="34" charset="0"/>
-                <a:ea typeface="Aptos" pitchFamily="34" charset="-122"/>
-                <a:cs typeface="Aptos" pitchFamily="34" charset="-120"/>
-              </a:rPr>
-              <a:t>The strongest honest framing is 'interesting experiment in AI coordination under heavy human governance and attribution uncertainty.'</a:t>
-            </a:r>
-            <a:endParaRPr lang="en-US" sz="1800" dirty="0"/>
+          <p:cNvPr id="29" name="Shape 25"/>
+          <p:cNvSpPr/>
+          <p:nvPr/>
+        </p:nvSpPr>
+        <p:spPr>
+          <a:xfrm>
+            <a:off x="713232" y="5504688"/>
+            <a:ext cx="10927080" cy="640080"/>
+          </a:xfrm>
+          <a:prstGeom prst="roundRect">
+            <a:avLst>
+              <a:gd name="adj" fmla="val 11429"/>
+            </a:avLst>
+          </a:prstGeom>
+          <a:solidFill>
+            <a:srgbClr val="1C2540"/>
+          </a:solidFill>
+          <a:ln w="12700">
+            <a:solidFill>
+              <a:srgbClr val="394258"/>
+            </a:solidFill>
+            <a:prstDash val="solid"/>
+          </a:ln>
+        </p:spPr>
+      </p:sp>
+      <p:sp>
+        <p:nvSpPr>
+          <p:cNvPr id="30" name="Text 26"/>
+          <p:cNvSpPr/>
+          <p:nvPr/>
+        </p:nvSpPr>
+        <p:spPr>
+          <a:xfrm>
+            <a:off x="932688" y="5669280"/>
+            <a:ext cx="10469880" cy="201168"/>
+          </a:xfrm>
+          <a:prstGeom prst="rect">
+            <a:avLst/>
+          </a:prstGeom>
+          <a:noFill/>
+          <a:ln/>
+        </p:spPr>
+        <p:txBody>
+          <a:bodyPr wrap="square" lIns="0" tIns="0" rIns="0" bIns="0" rtlCol="0" anchor="ctr">
+            <a:normAutofit/>
+          </a:bodyPr>
+          <a:lstStyle/>
+          <a:p>
+            <a:pPr indent="0" marL="0">
+              <a:buNone/>
+            </a:pPr>
+            <a:r>
+              <a:rPr lang="en-US" sz="1200" b="1" dirty="0">
+                <a:solidFill>
+                  <a:srgbClr val="FFFFFF"/>
+                </a:solidFill>
+                <a:latin typeface="Aptos" pitchFamily="34" charset="0"/>
+                <a:ea typeface="Aptos" pitchFamily="34" charset="-122"/>
+                <a:cs typeface="Aptos" pitchFamily="34" charset="-120"/>
+              </a:rPr>
+              <a:t>Takeaway: Moltbook is een interessant experiment in AI-coördinatie onder zware menselijke governance.</a:t>
+            </a:r>
+            <a:endParaRPr lang="en-US" sz="1200" dirty="0"/>
           </a:p>
         </p:txBody>
       </p:sp>
@@ -4668,7 +7301,7 @@
                 <a:ea typeface="Aptos Display" pitchFamily="34" charset="-122"/>
                 <a:cs typeface="Aptos Display" pitchFamily="34" charset="-120"/>
               </a:rPr>
-              <a:t>What the trend data cleanly supports</a:t>
+              <a:t>De stevigste signalen zitten in economie en infrastructuur</a:t>
             </a:r>
             <a:endParaRPr lang="en-US" sz="2300" dirty="0"/>
           </a:p>
@@ -4732,50 +7365,26 @@
                 <a:ea typeface="Aptos" pitchFamily="34" charset="-122"/>
                 <a:cs typeface="Aptos" pitchFamily="34" charset="-120"/>
               </a:rPr>
-              <a:t>Source-backed metrics; MiniMax and Opus numbers are official vendor pages, not one neutral matched eval sheet.</a:t>
+              <a:t>Bronnen: Stanford HAI, Epoch en officiële vendor pricing. Methodologische nuance blijft zichtbaar op de slide.</a:t>
             </a:r>
             <a:endParaRPr lang="en-US" sz="800" dirty="0"/>
           </a:p>
         </p:txBody>
       </p:sp>
-      <p:pic>
-        <p:nvPicPr>
-          <p:cNvPr id="9" name="Image 1" descr="/home/ff/Documents/BoostMeUp/MoltBook_Sessie/assets/ai_trends.png">    </p:cNvPr>
-          <p:cNvPicPr>
-            <a:picLocks noChangeAspect="1"/>
-          </p:cNvPicPr>
-          <p:nvPr/>
-        </p:nvPicPr>
-        <p:blipFill>
-          <a:blip r:embed="rId2"/>
-          <a:stretch>
-            <a:fillRect/>
-          </a:stretch>
-        </p:blipFill>
-        <p:spPr>
-          <a:xfrm>
-            <a:off x="713232" y="1207008"/>
-            <a:ext cx="10927080" cy="4736592"/>
-          </a:xfrm>
-          <a:prstGeom prst="rect">
-            <a:avLst/>
-          </a:prstGeom>
-        </p:spPr>
-      </p:pic>
-      <p:sp>
-        <p:nvSpPr>
-          <p:cNvPr id="10" name="Shape 6"/>
-          <p:cNvSpPr/>
-          <p:nvPr/>
-        </p:nvSpPr>
-        <p:spPr>
-          <a:xfrm>
-            <a:off x="868680" y="5559552"/>
-            <a:ext cx="10789920" cy="512064"/>
+      <p:sp>
+        <p:nvSpPr>
+          <p:cNvPr id="9" name="Shape 6"/>
+          <p:cNvSpPr/>
+          <p:nvPr/>
+        </p:nvSpPr>
+        <p:spPr>
+          <a:xfrm>
+            <a:off x="713232" y="1225296"/>
+            <a:ext cx="7543800" cy="4535424"/>
           </a:xfrm>
           <a:prstGeom prst="roundRect">
             <a:avLst>
-              <a:gd name="adj" fmla="val 10714"/>
+              <a:gd name="adj" fmla="val 1210"/>
             </a:avLst>
           </a:prstGeom>
           <a:solidFill>
@@ -4789,44 +7398,395 @@
           </a:ln>
         </p:spPr>
       </p:sp>
-      <p:sp>
-        <p:nvSpPr>
-          <p:cNvPr id="11" name="Text 7"/>
-          <p:cNvSpPr/>
-          <p:nvPr/>
-        </p:nvSpPr>
-        <p:spPr>
-          <a:xfrm>
-            <a:off x="1060704" y="5742432"/>
-            <a:ext cx="10378440" cy="164592"/>
-          </a:xfrm>
-          <a:prstGeom prst="rect">
-            <a:avLst/>
-          </a:prstGeom>
-          <a:noFill/>
-          <a:ln/>
-        </p:spPr>
-        <p:txBody>
-          <a:bodyPr wrap="square" lIns="0" tIns="0" rIns="0" bIns="0" rtlCol="0" anchor="ctr">
-            <a:normAutofit/>
-          </a:bodyPr>
-          <a:lstStyle/>
-          <a:p>
-            <a:pPr indent="0" marL="0">
-              <a:buNone/>
-            </a:pPr>
-            <a:r>
-              <a:rPr lang="en-US" sz="900" dirty="0">
-                <a:solidFill>
-                  <a:srgbClr val="5B6476"/>
-                </a:solidFill>
-                <a:latin typeface="Aptos" pitchFamily="34" charset="0"/>
-                <a:ea typeface="Aptos" pitchFamily="34" charset="-122"/>
-                <a:cs typeface="Aptos" pitchFamily="34" charset="-120"/>
-              </a:rPr>
-              <a:t>Method note: source-backed metrics + official vendor snapshots; useful for direction, not a neutral matched leaderboard.</a:t>
+      <p:pic>
+        <p:nvPicPr>
+          <p:cNvPr id="10" name="Image 1" descr="/home/ff/Documents/BoostMeUp/MoltBook_Sessie/assets/ai_trends.png">    </p:cNvPr>
+          <p:cNvPicPr>
+            <a:picLocks noChangeAspect="1"/>
+          </p:cNvPicPr>
+          <p:nvPr/>
+        </p:nvPicPr>
+        <p:blipFill>
+          <a:blip r:embed="rId2"/>
+          <a:stretch>
+            <a:fillRect/>
+          </a:stretch>
+        </p:blipFill>
+        <p:spPr>
+          <a:xfrm>
+            <a:off x="822960" y="1335024"/>
+            <a:ext cx="7324344" cy="4315968"/>
+          </a:xfrm>
+          <a:prstGeom prst="rect">
+            <a:avLst/>
+          </a:prstGeom>
+        </p:spPr>
+      </p:pic>
+      <p:sp>
+        <p:nvSpPr>
+          <p:cNvPr id="11" name="Shape 7"/>
+          <p:cNvSpPr/>
+          <p:nvPr/>
+        </p:nvSpPr>
+        <p:spPr>
+          <a:xfrm>
+            <a:off x="8449056" y="1225296"/>
+            <a:ext cx="3191256" cy="4535424"/>
+          </a:xfrm>
+          <a:prstGeom prst="roundRect">
+            <a:avLst>
+              <a:gd name="adj" fmla="val 1719"/>
+            </a:avLst>
+          </a:prstGeom>
+          <a:solidFill>
+            <a:srgbClr val="1C2540"/>
+          </a:solidFill>
+          <a:ln w="12700">
+            <a:solidFill>
+              <a:srgbClr val="394258"/>
+            </a:solidFill>
+            <a:prstDash val="solid"/>
+          </a:ln>
+        </p:spPr>
+      </p:sp>
+      <p:sp>
+        <p:nvSpPr>
+          <p:cNvPr id="12" name="Shape 8"/>
+          <p:cNvSpPr/>
+          <p:nvPr/>
+        </p:nvSpPr>
+        <p:spPr>
+          <a:xfrm>
+            <a:off x="8668512" y="1499616"/>
+            <a:ext cx="1426464" cy="329184"/>
+          </a:xfrm>
+          <a:prstGeom prst="roundRect">
+            <a:avLst>
+              <a:gd name="adj" fmla="val 22222"/>
+            </a:avLst>
+          </a:prstGeom>
+          <a:solidFill>
+            <a:srgbClr val="E93325"/>
+          </a:solidFill>
+          <a:ln w="12700">
+            <a:solidFill>
+              <a:srgbClr val="E93325">
+                <a:alpha val="0"/>
+              </a:srgbClr>
+            </a:solidFill>
+            <a:prstDash val="solid"/>
+          </a:ln>
+        </p:spPr>
+      </p:sp>
+      <p:sp>
+        <p:nvSpPr>
+          <p:cNvPr id="13" name="Text 9"/>
+          <p:cNvSpPr/>
+          <p:nvPr/>
+        </p:nvSpPr>
+        <p:spPr>
+          <a:xfrm>
+            <a:off x="8814816" y="1572768"/>
+            <a:ext cx="1133856" cy="164592"/>
+          </a:xfrm>
+          <a:prstGeom prst="rect">
+            <a:avLst/>
+          </a:prstGeom>
+          <a:noFill/>
+          <a:ln/>
+        </p:spPr>
+        <p:txBody>
+          <a:bodyPr wrap="square" lIns="0" tIns="0" rIns="0" bIns="0" rtlCol="0" anchor="ctr">
+            <a:normAutofit/>
+          </a:bodyPr>
+          <a:lstStyle/>
+          <a:p>
+            <a:pPr indent="0" marL="0">
+              <a:buNone/>
+            </a:pPr>
+            <a:r>
+              <a:rPr lang="en-US" sz="900" b="1" dirty="0">
+                <a:solidFill>
+                  <a:srgbClr val="FFFFFF"/>
+                </a:solidFill>
+                <a:latin typeface="Aptos" pitchFamily="34" charset="0"/>
+                <a:ea typeface="Aptos" pitchFamily="34" charset="-122"/>
+                <a:cs typeface="Aptos" pitchFamily="34" charset="-120"/>
+              </a:rPr>
+              <a:t>wat dit wél toont</a:t>
             </a:r>
             <a:endParaRPr lang="en-US" sz="900" dirty="0"/>
+          </a:p>
+        </p:txBody>
+      </p:sp>
+      <p:sp>
+        <p:nvSpPr>
+          <p:cNvPr id="14" name="Text 10"/>
+          <p:cNvSpPr/>
+          <p:nvPr/>
+        </p:nvSpPr>
+        <p:spPr>
+          <a:xfrm>
+            <a:off x="8668512" y="1938528"/>
+            <a:ext cx="2560320" cy="1170432"/>
+          </a:xfrm>
+          <a:prstGeom prst="rect">
+            <a:avLst/>
+          </a:prstGeom>
+          <a:noFill/>
+          <a:ln/>
+        </p:spPr>
+        <p:txBody>
+          <a:bodyPr wrap="square" lIns="0" tIns="0" rIns="0" bIns="0" rtlCol="0" anchor="ctr">
+            <a:normAutofit/>
+          </a:bodyPr>
+          <a:lstStyle/>
+          <a:p>
+            <a:pPr indent="0" marL="0">
+              <a:buNone/>
+            </a:pPr>
+            <a:r>
+              <a:rPr lang="en-US" sz="1600" b="1" dirty="0">
+                <a:solidFill>
+                  <a:srgbClr val="FFFFFF"/>
+                </a:solidFill>
+                <a:latin typeface="Aptos" pitchFamily="34" charset="0"/>
+                <a:ea typeface="Aptos" pitchFamily="34" charset="-122"/>
+                <a:cs typeface="Aptos" pitchFamily="34" charset="-120"/>
+              </a:rPr>
+              <a:t>grote benchmarksprongen</a:t>
+            </a:r>
+            <a:endParaRPr lang="en-US" sz="1600" dirty="0"/>
+          </a:p>
+          <a:p>
+            <a:pPr indent="0" marL="0">
+              <a:buNone/>
+            </a:pPr>
+            <a:r>
+              <a:rPr lang="en-US" sz="1600" b="1" dirty="0">
+                <a:solidFill>
+                  <a:srgbClr val="FFFFFF"/>
+                </a:solidFill>
+                <a:latin typeface="Aptos" pitchFamily="34" charset="0"/>
+                <a:ea typeface="Aptos" pitchFamily="34" charset="-122"/>
+                <a:cs typeface="Aptos" pitchFamily="34" charset="-120"/>
+              </a:rPr>
+              <a:t>&gt;280x kostdaling</a:t>
+            </a:r>
+            <a:endParaRPr lang="en-US" sz="1600" dirty="0"/>
+          </a:p>
+          <a:p>
+            <a:pPr indent="0" marL="0">
+              <a:buNone/>
+            </a:pPr>
+            <a:r>
+              <a:rPr lang="en-US" sz="1600" b="1" dirty="0">
+                <a:solidFill>
+                  <a:srgbClr val="FFFFFF"/>
+                </a:solidFill>
+                <a:latin typeface="Aptos" pitchFamily="34" charset="0"/>
+                <a:ea typeface="Aptos" pitchFamily="34" charset="-122"/>
+                <a:cs typeface="Aptos" pitchFamily="34" charset="-120"/>
+              </a:rPr>
+              <a:t>sterke compute- en efficiencygroei</a:t>
+            </a:r>
+            <a:endParaRPr lang="en-US" sz="1600" dirty="0"/>
+          </a:p>
+        </p:txBody>
+      </p:sp>
+      <p:sp>
+        <p:nvSpPr>
+          <p:cNvPr id="15" name="Shape 11"/>
+          <p:cNvSpPr/>
+          <p:nvPr/>
+        </p:nvSpPr>
+        <p:spPr>
+          <a:xfrm>
+            <a:off x="8668512" y="3456432"/>
+            <a:ext cx="1517904" cy="329184"/>
+          </a:xfrm>
+          <a:prstGeom prst="roundRect">
+            <a:avLst>
+              <a:gd name="adj" fmla="val 22222"/>
+            </a:avLst>
+          </a:prstGeom>
+          <a:solidFill>
+            <a:srgbClr val="F2AD18"/>
+          </a:solidFill>
+          <a:ln w="12700">
+            <a:solidFill>
+              <a:srgbClr val="F2AD18">
+                <a:alpha val="0"/>
+              </a:srgbClr>
+            </a:solidFill>
+            <a:prstDash val="solid"/>
+          </a:ln>
+        </p:spPr>
+      </p:sp>
+      <p:sp>
+        <p:nvSpPr>
+          <p:cNvPr id="16" name="Text 12"/>
+          <p:cNvSpPr/>
+          <p:nvPr/>
+        </p:nvSpPr>
+        <p:spPr>
+          <a:xfrm>
+            <a:off x="8814816" y="3529584"/>
+            <a:ext cx="1225296" cy="164592"/>
+          </a:xfrm>
+          <a:prstGeom prst="rect">
+            <a:avLst/>
+          </a:prstGeom>
+          <a:noFill/>
+          <a:ln/>
+        </p:spPr>
+        <p:txBody>
+          <a:bodyPr wrap="square" lIns="0" tIns="0" rIns="0" bIns="0" rtlCol="0" anchor="ctr">
+            <a:normAutofit/>
+          </a:bodyPr>
+          <a:lstStyle/>
+          <a:p>
+            <a:pPr indent="0" marL="0">
+              <a:buNone/>
+            </a:pPr>
+            <a:r>
+              <a:rPr lang="en-US" sz="900" b="1" dirty="0">
+                <a:solidFill>
+                  <a:srgbClr val="12192C"/>
+                </a:solidFill>
+                <a:latin typeface="Aptos" pitchFamily="34" charset="0"/>
+                <a:ea typeface="Aptos" pitchFamily="34" charset="-122"/>
+                <a:cs typeface="Aptos" pitchFamily="34" charset="-120"/>
+              </a:rPr>
+              <a:t>wat dit níét zegt</a:t>
+            </a:r>
+            <a:endParaRPr lang="en-US" sz="900" dirty="0"/>
+          </a:p>
+        </p:txBody>
+      </p:sp>
+      <p:sp>
+        <p:nvSpPr>
+          <p:cNvPr id="17" name="Text 13"/>
+          <p:cNvSpPr/>
+          <p:nvPr/>
+        </p:nvSpPr>
+        <p:spPr>
+          <a:xfrm>
+            <a:off x="8668512" y="3895344"/>
+            <a:ext cx="2578608" cy="896112"/>
+          </a:xfrm>
+          <a:prstGeom prst="rect">
+            <a:avLst/>
+          </a:prstGeom>
+          <a:noFill/>
+          <a:ln/>
+        </p:spPr>
+        <p:txBody>
+          <a:bodyPr wrap="square" lIns="0" tIns="0" rIns="0" bIns="0" rtlCol="0" anchor="ctr">
+            <a:normAutofit/>
+          </a:bodyPr>
+          <a:lstStyle/>
+          <a:p>
+            <a:pPr indent="0" marL="0">
+              <a:buNone/>
+            </a:pPr>
+            <a:r>
+              <a:rPr lang="en-US" sz="1400" dirty="0">
+                <a:solidFill>
+                  <a:srgbClr val="FFFFFF"/>
+                </a:solidFill>
+                <a:latin typeface="Aptos" pitchFamily="34" charset="0"/>
+                <a:ea typeface="Aptos" pitchFamily="34" charset="-122"/>
+                <a:cs typeface="Aptos" pitchFamily="34" charset="-120"/>
+              </a:rPr>
+              <a:t>niet elke capability-curve blijft netjes exponentieel</a:t>
+            </a:r>
+            <a:endParaRPr lang="en-US" sz="1400" dirty="0"/>
+          </a:p>
+          <a:p>
+            <a:pPr indent="0" marL="0">
+              <a:buNone/>
+            </a:pPr>
+            <a:r>
+              <a:rPr lang="en-US" sz="1400" dirty="0">
+                <a:solidFill>
+                  <a:srgbClr val="FFFFFF"/>
+                </a:solidFill>
+                <a:latin typeface="Aptos" pitchFamily="34" charset="0"/>
+                <a:ea typeface="Aptos" pitchFamily="34" charset="-122"/>
+                <a:cs typeface="Aptos" pitchFamily="34" charset="-120"/>
+              </a:rPr>
+              <a:t>bounded benchmarks kunnen satureren</a:t>
+            </a:r>
+            <a:endParaRPr lang="en-US" sz="1400" dirty="0"/>
+          </a:p>
+        </p:txBody>
+      </p:sp>
+      <p:sp>
+        <p:nvSpPr>
+          <p:cNvPr id="18" name="Shape 14"/>
+          <p:cNvSpPr/>
+          <p:nvPr/>
+        </p:nvSpPr>
+        <p:spPr>
+          <a:xfrm>
+            <a:off x="713232" y="5504688"/>
+            <a:ext cx="10927080" cy="640080"/>
+          </a:xfrm>
+          <a:prstGeom prst="roundRect">
+            <a:avLst>
+              <a:gd name="adj" fmla="val 11429"/>
+            </a:avLst>
+          </a:prstGeom>
+          <a:solidFill>
+            <a:srgbClr val="E8EEF9"/>
+          </a:solidFill>
+          <a:ln w="12700">
+            <a:solidFill>
+              <a:srgbClr val="D9DDE6"/>
+            </a:solidFill>
+            <a:prstDash val="solid"/>
+          </a:ln>
+        </p:spPr>
+      </p:sp>
+      <p:sp>
+        <p:nvSpPr>
+          <p:cNvPr id="19" name="Text 15"/>
+          <p:cNvSpPr/>
+          <p:nvPr/>
+        </p:nvSpPr>
+        <p:spPr>
+          <a:xfrm>
+            <a:off x="932688" y="5669280"/>
+            <a:ext cx="10469880" cy="201168"/>
+          </a:xfrm>
+          <a:prstGeom prst="rect">
+            <a:avLst/>
+          </a:prstGeom>
+          <a:noFill/>
+          <a:ln/>
+        </p:spPr>
+        <p:txBody>
+          <a:bodyPr wrap="square" lIns="0" tIns="0" rIns="0" bIns="0" rtlCol="0" anchor="ctr">
+            <a:normAutofit/>
+          </a:bodyPr>
+          <a:lstStyle/>
+          <a:p>
+            <a:pPr indent="0" marL="0">
+              <a:buNone/>
+            </a:pPr>
+            <a:r>
+              <a:rPr lang="en-US" sz="1200" b="1" dirty="0">
+                <a:solidFill>
+                  <a:srgbClr val="12192C"/>
+                </a:solidFill>
+                <a:latin typeface="Aptos" pitchFamily="34" charset="0"/>
+                <a:ea typeface="Aptos" pitchFamily="34" charset="-122"/>
+                <a:cs typeface="Aptos" pitchFamily="34" charset="-120"/>
+              </a:rPr>
+              <a:t>Takeaway: kijk harder naar kosten, compute en efficiency dan naar één spectaculaire scorelijn.</a:t>
+            </a:r>
+            <a:endParaRPr lang="en-US" sz="1200" dirty="0"/>
           </a:p>
         </p:txBody>
       </p:sp>
@@ -4844,7 +7804,7 @@
     <p:bg>
       <p:bgPr>
         <a:solidFill>
-          <a:srgbClr val="FFFFFF"/>
+          <a:srgbClr val="12192C"/>
         </a:solidFill>
       </p:bgPr>
     </p:bg>
@@ -4967,13 +7927,13 @@
             <a:r>
               <a:rPr lang="en-US" sz="900" b="1" dirty="0">
                 <a:solidFill>
-                  <a:srgbClr val="E93325"/>
-                </a:solidFill>
-                <a:latin typeface="Aptos" pitchFamily="34" charset="0"/>
-                <a:ea typeface="Aptos" pitchFamily="34" charset="-122"/>
-                <a:cs typeface="Aptos" pitchFamily="34" charset="-120"/>
-              </a:rPr>
-              <a:t>ANTI-HYPE</a:t>
+                  <a:srgbClr val="F2AD18"/>
+                </a:solidFill>
+                <a:latin typeface="Aptos" pitchFamily="34" charset="0"/>
+                <a:ea typeface="Aptos" pitchFamily="34" charset="-122"/>
+                <a:cs typeface="Aptos" pitchFamily="34" charset="-120"/>
+              </a:rPr>
+              <a:t>MODELVERGELIJKING</a:t>
             </a:r>
             <a:endParaRPr lang="en-US" sz="900" dirty="0"/>
           </a:p>
@@ -5008,13 +7968,13 @@
             <a:r>
               <a:rPr lang="en-US" sz="2300" b="1" dirty="0">
                 <a:solidFill>
-                  <a:srgbClr val="12192C"/>
+                  <a:srgbClr val="FFFFFF"/>
                 </a:solidFill>
                 <a:latin typeface="Aptos Display" pitchFamily="34" charset="0"/>
                 <a:ea typeface="Aptos Display" pitchFamily="34" charset="-122"/>
                 <a:cs typeface="Aptos Display" pitchFamily="34" charset="-120"/>
               </a:rPr>
-              <a:t>Use the MiniMax comparison, but keep it on a short analytical leash</a:t>
+              <a:t>MiniMax is vooral een prijsverhaal</a:t>
             </a:r>
             <a:endParaRPr lang="en-US" sz="2300" dirty="0"/>
           </a:p>
@@ -5037,7 +7997,7 @@
           <a:noFill/>
           <a:ln w="12700">
             <a:solidFill>
-              <a:srgbClr val="D9DDE6"/>
+              <a:srgbClr val="394258"/>
             </a:solidFill>
             <a:prstDash val="solid"/>
           </a:ln>
@@ -5072,13 +8032,13 @@
             <a:r>
               <a:rPr lang="en-US" sz="800" dirty="0">
                 <a:solidFill>
-                  <a:srgbClr val="5B6476"/>
-                </a:solidFill>
-                <a:latin typeface="Aptos" pitchFamily="34" charset="0"/>
-                <a:ea typeface="Aptos" pitchFamily="34" charset="-122"/>
-                <a:cs typeface="Aptos" pitchFamily="34" charset="-120"/>
-              </a:rPr>
-              <a:t>Official MiniMax and Anthropic pages make the economics claim clean; the benchmark claim still needs caveats.</a:t>
+                  <a:srgbClr val="D7DCE7"/>
+                </a:solidFill>
+                <a:latin typeface="Aptos" pitchFamily="34" charset="0"/>
+                <a:ea typeface="Aptos" pitchFamily="34" charset="-122"/>
+                <a:cs typeface="Aptos" pitchFamily="34" charset="-120"/>
+              </a:rPr>
+              <a:t>Bronnen: officiële MiniMax- en Anthropic-pagina's. Vendor-reported, geen neutrale matched eval sheet.</a:t>
             </a:r>
             <a:endParaRPr lang="en-US" sz="800" dirty="0"/>
           </a:p>
@@ -5092,20 +8052,20 @@
         </p:nvSpPr>
         <p:spPr>
           <a:xfrm>
-            <a:off x="713232" y="1325880"/>
-            <a:ext cx="5230368" cy="4709160"/>
+            <a:off x="713232" y="1298448"/>
+            <a:ext cx="4937760" cy="2852928"/>
           </a:xfrm>
           <a:prstGeom prst="roundRect">
             <a:avLst>
-              <a:gd name="adj" fmla="val 1165"/>
+              <a:gd name="adj" fmla="val 1923"/>
             </a:avLst>
           </a:prstGeom>
           <a:solidFill>
-            <a:srgbClr val="F7F8FB"/>
+            <a:srgbClr val="1C2540"/>
           </a:solidFill>
           <a:ln w="12700">
             <a:solidFill>
-              <a:srgbClr val="D9DDE6"/>
+              <a:srgbClr val="394258"/>
             </a:solidFill>
             <a:prstDash val="solid"/>
           </a:ln>
@@ -5113,141 +8073,28 @@
       </p:sp>
       <p:sp>
         <p:nvSpPr>
-          <p:cNvPr id="10" name="Text 7"/>
-          <p:cNvSpPr/>
-          <p:nvPr/>
-        </p:nvSpPr>
-        <p:spPr>
-          <a:xfrm>
-            <a:off x="822960" y="1691640"/>
-            <a:ext cx="4754880" cy="3108960"/>
-          </a:xfrm>
-          <a:prstGeom prst="rect">
-            <a:avLst/>
-          </a:prstGeom>
-          <a:noFill/>
-          <a:ln/>
-        </p:spPr>
-        <p:txBody>
-          <a:bodyPr wrap="square" lIns="0" tIns="0" rIns="0" bIns="0" rtlCol="0" anchor="t">
-            <a:normAutofit/>
-          </a:bodyPr>
-          <a:lstStyle/>
-          <a:p>
-            <a:pPr indent="0" marL="0">
-              <a:buNone/>
-            </a:pPr>
-            <a:r>
-              <a:rPr lang="en-US" sz="1600" dirty="0">
-                <a:solidFill>
-                  <a:srgbClr val="12192C"/>
-                </a:solidFill>
-                <a:latin typeface="Aptos" pitchFamily="34" charset="0"/>
-                <a:ea typeface="Aptos" pitchFamily="34" charset="-122"/>
-                <a:cs typeface="Aptos" pitchFamily="34" charset="-120"/>
-              </a:rPr>
-              <a:t>What is now fair to say</a:t>
-            </a:r>
-            <a:endParaRPr lang="en-US" sz="1600" dirty="0"/>
-          </a:p>
-          <a:p>
-            <a:pPr indent="0" marL="0">
-              <a:buNone/>
-            </a:pPr>
-            <a:endParaRPr lang="en-US" sz="1600" dirty="0"/>
-          </a:p>
-          <a:p>
-            <a:pPr indent="0" marL="0">
-              <a:buNone/>
-            </a:pPr>
-            <a:r>
-              <a:rPr lang="en-US" sz="1600" dirty="0">
-                <a:solidFill>
-                  <a:srgbClr val="12192C"/>
-                </a:solidFill>
-                <a:latin typeface="Aptos" pitchFamily="34" charset="0"/>
-                <a:ea typeface="Aptos" pitchFamily="34" charset="-122"/>
-                <a:cs typeface="Aptos" pitchFamily="34" charset="-120"/>
-              </a:rPr>
-              <a:t>- M2.7 is officially priced at $0.30 / $1.20 per 1M tokens.</a:t>
-            </a:r>
-            <a:endParaRPr lang="en-US" sz="1600" dirty="0"/>
-          </a:p>
-          <a:p>
-            <a:pPr indent="0" marL="0">
-              <a:buNone/>
-            </a:pPr>
-            <a:r>
-              <a:rPr lang="en-US" sz="1600" dirty="0">
-                <a:solidFill>
-                  <a:srgbClr val="12192C"/>
-                </a:solidFill>
-                <a:latin typeface="Aptos" pitchFamily="34" charset="0"/>
-                <a:ea typeface="Aptos" pitchFamily="34" charset="-122"/>
-                <a:cs typeface="Aptos" pitchFamily="34" charset="-120"/>
-              </a:rPr>
-              <a:t>- Opus 4.6 is officially priced at $5 / $25 per 1M tokens.</a:t>
-            </a:r>
-            <a:endParaRPr lang="en-US" sz="1600" dirty="0"/>
-          </a:p>
-          <a:p>
-            <a:pPr indent="0" marL="0">
-              <a:buNone/>
-            </a:pPr>
-            <a:r>
-              <a:rPr lang="en-US" sz="1600" dirty="0">
-                <a:solidFill>
-                  <a:srgbClr val="12192C"/>
-                </a:solidFill>
-                <a:latin typeface="Aptos" pitchFamily="34" charset="0"/>
-                <a:ea typeface="Aptos" pitchFamily="34" charset="-122"/>
-                <a:cs typeface="Aptos" pitchFamily="34" charset="-120"/>
-              </a:rPr>
-              <a:t>- Official Terminal Bench values are 57.0% for M2.7 and 65.4% for Opus 4.6.</a:t>
-            </a:r>
-            <a:endParaRPr lang="en-US" sz="1600" dirty="0"/>
-          </a:p>
-          <a:p>
-            <a:pPr indent="0" marL="0">
-              <a:buNone/>
-            </a:pPr>
-            <a:r>
-              <a:rPr lang="en-US" sz="1600" dirty="0">
-                <a:solidFill>
-                  <a:srgbClr val="12192C"/>
-                </a:solidFill>
-                <a:latin typeface="Aptos" pitchFamily="34" charset="0"/>
-                <a:ea typeface="Aptos" pitchFamily="34" charset="-122"/>
-                <a:cs typeface="Aptos" pitchFamily="34" charset="-120"/>
-              </a:rPr>
-              <a:t>- Safe summary: much cheaper and still competitive on some agentic coding tasks.</a:t>
-            </a:r>
-            <a:endParaRPr lang="en-US" sz="1600" dirty="0"/>
-          </a:p>
-        </p:txBody>
-      </p:sp>
-      <p:sp>
-        <p:nvSpPr>
-          <p:cNvPr id="11" name="Shape 8"/>
-          <p:cNvSpPr/>
-          <p:nvPr/>
-        </p:nvSpPr>
-        <p:spPr>
-          <a:xfrm>
-            <a:off x="6236208" y="1325880"/>
-            <a:ext cx="5266944" cy="4709160"/>
+          <p:cNvPr id="10" name="Shape 7"/>
+          <p:cNvSpPr/>
+          <p:nvPr/>
+        </p:nvSpPr>
+        <p:spPr>
+          <a:xfrm>
+            <a:off x="932688" y="1554480"/>
+            <a:ext cx="1572768" cy="329184"/>
           </a:xfrm>
           <a:prstGeom prst="roundRect">
             <a:avLst>
-              <a:gd name="adj" fmla="val 1165"/>
+              <a:gd name="adj" fmla="val 22222"/>
             </a:avLst>
           </a:prstGeom>
           <a:solidFill>
-            <a:srgbClr val="F7F8FB"/>
+            <a:srgbClr val="E93325"/>
           </a:solidFill>
           <a:ln w="12700">
             <a:solidFill>
-              <a:srgbClr val="D9DDE6"/>
+              <a:srgbClr val="E93325">
+                <a:alpha val="0"/>
+              </a:srgbClr>
             </a:solidFill>
             <a:prstDash val="solid"/>
           </a:ln>
@@ -5255,32 +8102,245 @@
       </p:sp>
       <p:sp>
         <p:nvSpPr>
+          <p:cNvPr id="11" name="Text 8"/>
+          <p:cNvSpPr/>
+          <p:nvPr/>
+        </p:nvSpPr>
+        <p:spPr>
+          <a:xfrm>
+            <a:off x="1078992" y="1627632"/>
+            <a:ext cx="1280160" cy="164592"/>
+          </a:xfrm>
+          <a:prstGeom prst="rect">
+            <a:avLst/>
+          </a:prstGeom>
+          <a:noFill/>
+          <a:ln/>
+        </p:spPr>
+        <p:txBody>
+          <a:bodyPr wrap="square" lIns="0" tIns="0" rIns="0" bIns="0" rtlCol="0" anchor="ctr">
+            <a:normAutofit/>
+          </a:bodyPr>
+          <a:lstStyle/>
+          <a:p>
+            <a:pPr indent="0" marL="0">
+              <a:buNone/>
+            </a:pPr>
+            <a:r>
+              <a:rPr lang="en-US" sz="900" b="1" dirty="0">
+                <a:solidFill>
+                  <a:srgbClr val="FFFFFF"/>
+                </a:solidFill>
+                <a:latin typeface="Aptos" pitchFamily="34" charset="0"/>
+                <a:ea typeface="Aptos" pitchFamily="34" charset="-122"/>
+                <a:cs typeface="Aptos" pitchFamily="34" charset="-120"/>
+              </a:rPr>
+              <a:t>officiële list prices</a:t>
+            </a:r>
+            <a:endParaRPr lang="en-US" sz="900" dirty="0"/>
+          </a:p>
+        </p:txBody>
+      </p:sp>
+      <p:sp>
+        <p:nvSpPr>
           <p:cNvPr id="12" name="Text 9"/>
           <p:cNvSpPr/>
           <p:nvPr/>
         </p:nvSpPr>
         <p:spPr>
           <a:xfrm>
-            <a:off x="6400800" y="1691640"/>
-            <a:ext cx="4800600" cy="2971800"/>
-          </a:xfrm>
-          <a:prstGeom prst="rect">
-            <a:avLst/>
-          </a:prstGeom>
-          <a:noFill/>
-          <a:ln/>
-        </p:spPr>
-        <p:txBody>
-          <a:bodyPr wrap="square" lIns="0" tIns="0" rIns="0" bIns="0" rtlCol="0" anchor="t">
-            <a:normAutofit/>
-          </a:bodyPr>
-          <a:lstStyle/>
-          <a:p>
-            <a:pPr indent="0" marL="0">
-              <a:buNone/>
-            </a:pPr>
-            <a:r>
-              <a:rPr lang="en-US" sz="1600" dirty="0">
+            <a:off x="932688" y="2048256"/>
+            <a:ext cx="4389120" cy="877824"/>
+          </a:xfrm>
+          <a:prstGeom prst="rect">
+            <a:avLst/>
+          </a:prstGeom>
+          <a:noFill/>
+          <a:ln/>
+        </p:spPr>
+        <p:txBody>
+          <a:bodyPr wrap="square" lIns="0" tIns="0" rIns="0" bIns="0" rtlCol="0" anchor="ctr">
+            <a:normAutofit/>
+          </a:bodyPr>
+          <a:lstStyle/>
+          <a:p>
+            <a:pPr indent="0" marL="0">
+              <a:buNone/>
+            </a:pPr>
+            <a:r>
+              <a:rPr lang="en-US" sz="2600" b="1" dirty="0">
+                <a:solidFill>
+                  <a:srgbClr val="F2AD18"/>
+                </a:solidFill>
+                <a:latin typeface="Aptos Display" pitchFamily="34" charset="0"/>
+                <a:ea typeface="Aptos Display" pitchFamily="34" charset="-122"/>
+                <a:cs typeface="Aptos Display" pitchFamily="34" charset="-120"/>
+              </a:rPr>
+              <a:t>16,7x goedkoper op input</a:t>
+            </a:r>
+            <a:endParaRPr lang="en-US" sz="2600" dirty="0"/>
+          </a:p>
+          <a:p>
+            <a:pPr indent="0" marL="0">
+              <a:buNone/>
+            </a:pPr>
+            <a:r>
+              <a:rPr lang="en-US" sz="2600" b="1" dirty="0">
+                <a:solidFill>
+                  <a:srgbClr val="F2AD18"/>
+                </a:solidFill>
+                <a:latin typeface="Aptos Display" pitchFamily="34" charset="0"/>
+                <a:ea typeface="Aptos Display" pitchFamily="34" charset="-122"/>
+                <a:cs typeface="Aptos Display" pitchFamily="34" charset="-120"/>
+              </a:rPr>
+              <a:t>20,8x goedkoper op output</a:t>
+            </a:r>
+            <a:endParaRPr lang="en-US" sz="2600" dirty="0"/>
+          </a:p>
+        </p:txBody>
+      </p:sp>
+      <p:sp>
+        <p:nvSpPr>
+          <p:cNvPr id="13" name="Text 10"/>
+          <p:cNvSpPr/>
+          <p:nvPr/>
+        </p:nvSpPr>
+        <p:spPr>
+          <a:xfrm>
+            <a:off x="932688" y="3090672"/>
+            <a:ext cx="3108960" cy="566928"/>
+          </a:xfrm>
+          <a:prstGeom prst="rect">
+            <a:avLst/>
+          </a:prstGeom>
+          <a:noFill/>
+          <a:ln/>
+        </p:spPr>
+        <p:txBody>
+          <a:bodyPr wrap="square" lIns="0" tIns="0" rIns="0" bIns="0" rtlCol="0" anchor="ctr">
+            <a:normAutofit/>
+          </a:bodyPr>
+          <a:lstStyle/>
+          <a:p>
+            <a:pPr indent="0" marL="0">
+              <a:buNone/>
+            </a:pPr>
+            <a:r>
+              <a:rPr lang="en-US" sz="1400" dirty="0">
+                <a:solidFill>
+                  <a:srgbClr val="FFFFFF"/>
+                </a:solidFill>
+                <a:latin typeface="Aptos" pitchFamily="34" charset="0"/>
+                <a:ea typeface="Aptos" pitchFamily="34" charset="-122"/>
+                <a:cs typeface="Aptos" pitchFamily="34" charset="-120"/>
+              </a:rPr>
+              <a:t>MiniMax M2.7: $0,30 / $1,20</a:t>
+            </a:r>
+            <a:endParaRPr lang="en-US" sz="1400" dirty="0"/>
+          </a:p>
+          <a:p>
+            <a:pPr indent="0" marL="0">
+              <a:buNone/>
+            </a:pPr>
+            <a:r>
+              <a:rPr lang="en-US" sz="1400" dirty="0">
+                <a:solidFill>
+                  <a:srgbClr val="FFFFFF"/>
+                </a:solidFill>
+                <a:latin typeface="Aptos" pitchFamily="34" charset="0"/>
+                <a:ea typeface="Aptos" pitchFamily="34" charset="-122"/>
+                <a:cs typeface="Aptos" pitchFamily="34" charset="-120"/>
+              </a:rPr>
+              <a:t>Claude Opus 4.6: $5 / $25</a:t>
+            </a:r>
+            <a:endParaRPr lang="en-US" sz="1400" dirty="0"/>
+          </a:p>
+        </p:txBody>
+      </p:sp>
+      <p:sp>
+        <p:nvSpPr>
+          <p:cNvPr id="14" name="Shape 11"/>
+          <p:cNvSpPr/>
+          <p:nvPr/>
+        </p:nvSpPr>
+        <p:spPr>
+          <a:xfrm>
+            <a:off x="5852160" y="1298448"/>
+            <a:ext cx="5788152" cy="2852928"/>
+          </a:xfrm>
+          <a:prstGeom prst="roundRect">
+            <a:avLst>
+              <a:gd name="adj" fmla="val 1923"/>
+            </a:avLst>
+          </a:prstGeom>
+          <a:solidFill>
+            <a:srgbClr val="1C2540"/>
+          </a:solidFill>
+          <a:ln w="12700">
+            <a:solidFill>
+              <a:srgbClr val="394258"/>
+            </a:solidFill>
+            <a:prstDash val="solid"/>
+          </a:ln>
+        </p:spPr>
+      </p:sp>
+      <p:sp>
+        <p:nvSpPr>
+          <p:cNvPr id="15" name="Shape 12"/>
+          <p:cNvSpPr/>
+          <p:nvPr/>
+        </p:nvSpPr>
+        <p:spPr>
+          <a:xfrm>
+            <a:off x="6071616" y="1554480"/>
+            <a:ext cx="2084832" cy="329184"/>
+          </a:xfrm>
+          <a:prstGeom prst="roundRect">
+            <a:avLst>
+              <a:gd name="adj" fmla="val 22222"/>
+            </a:avLst>
+          </a:prstGeom>
+          <a:solidFill>
+            <a:srgbClr val="F2AD18"/>
+          </a:solidFill>
+          <a:ln w="12700">
+            <a:solidFill>
+              <a:srgbClr val="F2AD18">
+                <a:alpha val="0"/>
+              </a:srgbClr>
+            </a:solidFill>
+            <a:prstDash val="solid"/>
+          </a:ln>
+        </p:spPr>
+      </p:sp>
+      <p:sp>
+        <p:nvSpPr>
+          <p:cNvPr id="16" name="Text 13"/>
+          <p:cNvSpPr/>
+          <p:nvPr/>
+        </p:nvSpPr>
+        <p:spPr>
+          <a:xfrm>
+            <a:off x="6217920" y="1627632"/>
+            <a:ext cx="1792224" cy="164592"/>
+          </a:xfrm>
+          <a:prstGeom prst="rect">
+            <a:avLst/>
+          </a:prstGeom>
+          <a:noFill/>
+          <a:ln/>
+        </p:spPr>
+        <p:txBody>
+          <a:bodyPr wrap="square" lIns="0" tIns="0" rIns="0" bIns="0" rtlCol="0" anchor="ctr">
+            <a:normAutofit/>
+          </a:bodyPr>
+          <a:lstStyle/>
+          <a:p>
+            <a:pPr indent="0" marL="0">
+              <a:buNone/>
+            </a:pPr>
+            <a:r>
+              <a:rPr lang="en-US" sz="900" b="1" dirty="0">
                 <a:solidFill>
                   <a:srgbClr val="12192C"/>
                 </a:solidFill>
@@ -5288,124 +8348,391 @@
                 <a:ea typeface="Aptos" pitchFamily="34" charset="-122"/>
                 <a:cs typeface="Aptos" pitchFamily="34" charset="-120"/>
               </a:rPr>
-              <a:t>What still needs caution</a:t>
-            </a:r>
-            <a:endParaRPr lang="en-US" sz="1600" dirty="0"/>
-          </a:p>
-          <a:p>
-            <a:pPr indent="0" marL="0">
-              <a:buNone/>
-            </a:pPr>
-            <a:endParaRPr lang="en-US" sz="1600" dirty="0"/>
-          </a:p>
-          <a:p>
-            <a:pPr indent="0" marL="0">
-              <a:buNone/>
-            </a:pPr>
-            <a:r>
-              <a:rPr lang="en-US" sz="1600" dirty="0">
-                <a:solidFill>
-                  <a:srgbClr val="12192C"/>
-                </a:solidFill>
-                <a:latin typeface="Aptos" pitchFamily="34" charset="0"/>
-                <a:ea typeface="Aptos" pitchFamily="34" charset="-122"/>
-                <a:cs typeface="Aptos" pitchFamily="34" charset="-120"/>
-              </a:rPr>
-              <a:t>- Do not say 'basically equal to Opus 4.6'.</a:t>
-            </a:r>
-            <a:endParaRPr lang="en-US" sz="1600" dirty="0"/>
-          </a:p>
-          <a:p>
-            <a:pPr indent="0" marL="0">
-              <a:buNone/>
-            </a:pPr>
-            <a:r>
-              <a:rPr lang="en-US" sz="1600" dirty="0">
-                <a:solidFill>
-                  <a:srgbClr val="12192C"/>
-                </a:solidFill>
-                <a:latin typeface="Aptos" pitchFamily="34" charset="0"/>
-                <a:ea typeface="Aptos" pitchFamily="34" charset="-122"/>
-                <a:cs typeface="Aptos" pitchFamily="34" charset="-120"/>
-              </a:rPr>
-              <a:t>- MiniMax's MMClaw note references Sonnet 4.6, not Opus 4.6.</a:t>
-            </a:r>
-            <a:endParaRPr lang="en-US" sz="1600" dirty="0"/>
-          </a:p>
-          <a:p>
-            <a:pPr indent="0" marL="0">
-              <a:buNone/>
-            </a:pPr>
-            <a:r>
-              <a:rPr lang="en-US" sz="1600" dirty="0">
-                <a:solidFill>
-                  <a:srgbClr val="12192C"/>
-                </a:solidFill>
-                <a:latin typeface="Aptos" pitchFamily="34" charset="0"/>
-                <a:ea typeface="Aptos" pitchFamily="34" charset="-122"/>
-                <a:cs typeface="Aptos" pitchFamily="34" charset="-120"/>
-              </a:rPr>
-              <a:t>- Vendor pages are not the same thing as one independent matched benchmark sheet.</a:t>
-            </a:r>
-            <a:endParaRPr lang="en-US" sz="1600" dirty="0"/>
-          </a:p>
-          <a:p>
-            <a:pPr indent="0" marL="0">
-              <a:buNone/>
-            </a:pPr>
-            <a:r>
-              <a:rPr lang="en-US" sz="1600" dirty="0">
-                <a:solidFill>
-                  <a:srgbClr val="12192C"/>
-                </a:solidFill>
-                <a:latin typeface="Aptos" pitchFamily="34" charset="0"/>
-                <a:ea typeface="Aptos" pitchFamily="34" charset="-122"/>
-                <a:cs typeface="Aptos" pitchFamily="34" charset="-120"/>
-              </a:rPr>
-              <a:t>- The clean on-stage line is: the price gap is clearer than the quality gap.</a:t>
-            </a:r>
-            <a:endParaRPr lang="en-US" sz="1600" dirty="0"/>
-          </a:p>
-        </p:txBody>
-      </p:sp>
-      <p:sp>
-        <p:nvSpPr>
-          <p:cNvPr id="13" name="Text 10"/>
-          <p:cNvSpPr/>
-          <p:nvPr/>
-        </p:nvSpPr>
-        <p:spPr>
-          <a:xfrm>
-            <a:off x="6400800" y="4754880"/>
-            <a:ext cx="4663440" cy="640080"/>
-          </a:xfrm>
-          <a:prstGeom prst="rect">
-            <a:avLst/>
-          </a:prstGeom>
-          <a:noFill/>
-          <a:ln/>
-        </p:spPr>
-        <p:txBody>
-          <a:bodyPr wrap="square" lIns="0" tIns="0" rIns="0" bIns="0" rtlCol="0" anchor="ctr">
-            <a:normAutofit/>
-          </a:bodyPr>
-          <a:lstStyle/>
-          <a:p>
-            <a:pPr indent="0" marL="0">
-              <a:buNone/>
-            </a:pPr>
-            <a:r>
-              <a:rPr lang="en-US" sz="1800" i="1" dirty="0">
-                <a:solidFill>
-                  <a:srgbClr val="E93325"/>
-                </a:solidFill>
-                <a:latin typeface="Aptos" pitchFamily="34" charset="0"/>
-                <a:ea typeface="Aptos" pitchFamily="34" charset="-122"/>
-                <a:cs typeface="Aptos" pitchFamily="34" charset="-120"/>
-              </a:rPr>
-              <a:t>If the wording feels punchier than the evidence, narrow the wording instead of defending the punch.</a:t>
-            </a:r>
-            <a:endParaRPr lang="en-US" sz="1800" dirty="0"/>
+              <a:t>zelfde benchmark, smallere gap</a:t>
+            </a:r>
+            <a:endParaRPr lang="en-US" sz="900" dirty="0"/>
+          </a:p>
+        </p:txBody>
+      </p:sp>
+      <p:sp>
+        <p:nvSpPr>
+          <p:cNvPr id="17" name="Text 14"/>
+          <p:cNvSpPr/>
+          <p:nvPr/>
+        </p:nvSpPr>
+        <p:spPr>
+          <a:xfrm>
+            <a:off x="6071616" y="2084832"/>
+            <a:ext cx="1828800" cy="182880"/>
+          </a:xfrm>
+          <a:prstGeom prst="rect">
+            <a:avLst/>
+          </a:prstGeom>
+          <a:noFill/>
+          <a:ln/>
+        </p:spPr>
+        <p:txBody>
+          <a:bodyPr wrap="square" lIns="0" tIns="0" rIns="0" bIns="0" rtlCol="0" anchor="ctr">
+            <a:normAutofit/>
+          </a:bodyPr>
+          <a:lstStyle/>
+          <a:p>
+            <a:pPr indent="0" marL="0">
+              <a:buNone/>
+            </a:pPr>
+            <a:r>
+              <a:rPr lang="en-US" sz="1300" b="1" dirty="0">
+                <a:solidFill>
+                  <a:srgbClr val="D7DCE7"/>
+                </a:solidFill>
+                <a:latin typeface="Aptos" pitchFamily="34" charset="0"/>
+                <a:ea typeface="Aptos" pitchFamily="34" charset="-122"/>
+                <a:cs typeface="Aptos" pitchFamily="34" charset="-120"/>
+              </a:rPr>
+              <a:t>Terminal Bench</a:t>
+            </a:r>
+            <a:endParaRPr lang="en-US" sz="1300" dirty="0"/>
+          </a:p>
+        </p:txBody>
+      </p:sp>
+      <p:sp>
+        <p:nvSpPr>
+          <p:cNvPr id="18" name="Text 15"/>
+          <p:cNvSpPr/>
+          <p:nvPr/>
+        </p:nvSpPr>
+        <p:spPr>
+          <a:xfrm>
+            <a:off x="6071616" y="2395728"/>
+            <a:ext cx="1554480" cy="420624"/>
+          </a:xfrm>
+          <a:prstGeom prst="rect">
+            <a:avLst/>
+          </a:prstGeom>
+          <a:noFill/>
+          <a:ln/>
+        </p:spPr>
+        <p:txBody>
+          <a:bodyPr wrap="square" lIns="0" tIns="0" rIns="0" bIns="0" rtlCol="0" anchor="ctr">
+            <a:normAutofit/>
+          </a:bodyPr>
+          <a:lstStyle/>
+          <a:p>
+            <a:pPr indent="0" marL="0">
+              <a:buNone/>
+            </a:pPr>
+            <a:r>
+              <a:rPr lang="en-US" sz="2800" b="1" dirty="0">
+                <a:solidFill>
+                  <a:srgbClr val="FFFFFF"/>
+                </a:solidFill>
+                <a:latin typeface="Aptos Display" pitchFamily="34" charset="0"/>
+                <a:ea typeface="Aptos Display" pitchFamily="34" charset="-122"/>
+                <a:cs typeface="Aptos Display" pitchFamily="34" charset="-120"/>
+              </a:rPr>
+              <a:t>57,0%</a:t>
+            </a:r>
+            <a:endParaRPr lang="en-US" sz="2800" dirty="0"/>
+          </a:p>
+        </p:txBody>
+      </p:sp>
+      <p:sp>
+        <p:nvSpPr>
+          <p:cNvPr id="19" name="Text 16"/>
+          <p:cNvSpPr/>
+          <p:nvPr/>
+        </p:nvSpPr>
+        <p:spPr>
+          <a:xfrm>
+            <a:off x="6071616" y="2816352"/>
+            <a:ext cx="1554480" cy="164592"/>
+          </a:xfrm>
+          <a:prstGeom prst="rect">
+            <a:avLst/>
+          </a:prstGeom>
+          <a:noFill/>
+          <a:ln/>
+        </p:spPr>
+        <p:txBody>
+          <a:bodyPr wrap="square" lIns="0" tIns="0" rIns="0" bIns="0" rtlCol="0" anchor="ctr">
+            <a:normAutofit/>
+          </a:bodyPr>
+          <a:lstStyle/>
+          <a:p>
+            <a:pPr indent="0" marL="0">
+              <a:buNone/>
+            </a:pPr>
+            <a:r>
+              <a:rPr lang="en-US" sz="1100" dirty="0">
+                <a:solidFill>
+                  <a:srgbClr val="D7DCE7"/>
+                </a:solidFill>
+                <a:latin typeface="Aptos" pitchFamily="34" charset="0"/>
+                <a:ea typeface="Aptos" pitchFamily="34" charset="-122"/>
+                <a:cs typeface="Aptos" pitchFamily="34" charset="-120"/>
+              </a:rPr>
+              <a:t>MiniMax M2.7</a:t>
+            </a:r>
+            <a:endParaRPr lang="en-US" sz="1100" dirty="0"/>
+          </a:p>
+        </p:txBody>
+      </p:sp>
+      <p:sp>
+        <p:nvSpPr>
+          <p:cNvPr id="20" name="Text 17"/>
+          <p:cNvSpPr/>
+          <p:nvPr/>
+        </p:nvSpPr>
+        <p:spPr>
+          <a:xfrm>
+            <a:off x="8394192" y="2395728"/>
+            <a:ext cx="1554480" cy="420624"/>
+          </a:xfrm>
+          <a:prstGeom prst="rect">
+            <a:avLst/>
+          </a:prstGeom>
+          <a:noFill/>
+          <a:ln/>
+        </p:spPr>
+        <p:txBody>
+          <a:bodyPr wrap="square" lIns="0" tIns="0" rIns="0" bIns="0" rtlCol="0" anchor="ctr">
+            <a:normAutofit/>
+          </a:bodyPr>
+          <a:lstStyle/>
+          <a:p>
+            <a:pPr indent="0" marL="0">
+              <a:buNone/>
+            </a:pPr>
+            <a:r>
+              <a:rPr lang="en-US" sz="2800" b="1" dirty="0">
+                <a:solidFill>
+                  <a:srgbClr val="F2AD18"/>
+                </a:solidFill>
+                <a:latin typeface="Aptos Display" pitchFamily="34" charset="0"/>
+                <a:ea typeface="Aptos Display" pitchFamily="34" charset="-122"/>
+                <a:cs typeface="Aptos Display" pitchFamily="34" charset="-120"/>
+              </a:rPr>
+              <a:t>65,4%</a:t>
+            </a:r>
+            <a:endParaRPr lang="en-US" sz="2800" dirty="0"/>
+          </a:p>
+        </p:txBody>
+      </p:sp>
+      <p:sp>
+        <p:nvSpPr>
+          <p:cNvPr id="21" name="Text 18"/>
+          <p:cNvSpPr/>
+          <p:nvPr/>
+        </p:nvSpPr>
+        <p:spPr>
+          <a:xfrm>
+            <a:off x="8394192" y="2816352"/>
+            <a:ext cx="1645920" cy="164592"/>
+          </a:xfrm>
+          <a:prstGeom prst="rect">
+            <a:avLst/>
+          </a:prstGeom>
+          <a:noFill/>
+          <a:ln/>
+        </p:spPr>
+        <p:txBody>
+          <a:bodyPr wrap="square" lIns="0" tIns="0" rIns="0" bIns="0" rtlCol="0" anchor="ctr">
+            <a:normAutofit/>
+          </a:bodyPr>
+          <a:lstStyle/>
+          <a:p>
+            <a:pPr indent="0" marL="0">
+              <a:buNone/>
+            </a:pPr>
+            <a:r>
+              <a:rPr lang="en-US" sz="1100" dirty="0">
+                <a:solidFill>
+                  <a:srgbClr val="D7DCE7"/>
+                </a:solidFill>
+                <a:latin typeface="Aptos" pitchFamily="34" charset="0"/>
+                <a:ea typeface="Aptos" pitchFamily="34" charset="-122"/>
+                <a:cs typeface="Aptos" pitchFamily="34" charset="-120"/>
+              </a:rPr>
+              <a:t>Claude Opus 4.6</a:t>
+            </a:r>
+            <a:endParaRPr lang="en-US" sz="1100" dirty="0"/>
+          </a:p>
+        </p:txBody>
+      </p:sp>
+      <p:sp>
+        <p:nvSpPr>
+          <p:cNvPr id="22" name="Text 19"/>
+          <p:cNvSpPr/>
+          <p:nvPr/>
+        </p:nvSpPr>
+        <p:spPr>
+          <a:xfrm>
+            <a:off x="6071616" y="3401568"/>
+            <a:ext cx="4846320" cy="292608"/>
+          </a:xfrm>
+          <a:prstGeom prst="rect">
+            <a:avLst/>
+          </a:prstGeom>
+          <a:noFill/>
+          <a:ln/>
+        </p:spPr>
+        <p:txBody>
+          <a:bodyPr wrap="square" lIns="0" tIns="0" rIns="0" bIns="0" rtlCol="0" anchor="ctr">
+            <a:normAutofit/>
+          </a:bodyPr>
+          <a:lstStyle/>
+          <a:p>
+            <a:pPr indent="0" marL="0">
+              <a:buNone/>
+            </a:pPr>
+            <a:r>
+              <a:rPr lang="en-US" sz="1200" dirty="0">
+                <a:solidFill>
+                  <a:srgbClr val="D7DCE7"/>
+                </a:solidFill>
+                <a:latin typeface="Aptos" pitchFamily="34" charset="0"/>
+                <a:ea typeface="Aptos" pitchFamily="34" charset="-122"/>
+                <a:cs typeface="Aptos" pitchFamily="34" charset="-120"/>
+              </a:rPr>
+              <a:t>MMClaw-verwijzing bij MiniMax gaat over Sonnet 4.6, niet Opus 4.6.</a:t>
+            </a:r>
+            <a:endParaRPr lang="en-US" sz="1200" dirty="0"/>
+          </a:p>
+        </p:txBody>
+      </p:sp>
+      <p:sp>
+        <p:nvSpPr>
+          <p:cNvPr id="23" name="Shape 20"/>
+          <p:cNvSpPr/>
+          <p:nvPr/>
+        </p:nvSpPr>
+        <p:spPr>
+          <a:xfrm>
+            <a:off x="713232" y="4443984"/>
+            <a:ext cx="10927080" cy="640080"/>
+          </a:xfrm>
+          <a:prstGeom prst="roundRect">
+            <a:avLst>
+              <a:gd name="adj" fmla="val 11429"/>
+            </a:avLst>
+          </a:prstGeom>
+          <a:solidFill>
+            <a:srgbClr val="1C2540"/>
+          </a:solidFill>
+          <a:ln w="12700">
+            <a:solidFill>
+              <a:srgbClr val="394258"/>
+            </a:solidFill>
+            <a:prstDash val="solid"/>
+          </a:ln>
+        </p:spPr>
+      </p:sp>
+      <p:sp>
+        <p:nvSpPr>
+          <p:cNvPr id="24" name="Text 21"/>
+          <p:cNvSpPr/>
+          <p:nvPr/>
+        </p:nvSpPr>
+        <p:spPr>
+          <a:xfrm>
+            <a:off x="932688" y="4608576"/>
+            <a:ext cx="10469880" cy="201168"/>
+          </a:xfrm>
+          <a:prstGeom prst="rect">
+            <a:avLst/>
+          </a:prstGeom>
+          <a:noFill/>
+          <a:ln/>
+        </p:spPr>
+        <p:txBody>
+          <a:bodyPr wrap="square" lIns="0" tIns="0" rIns="0" bIns="0" rtlCol="0" anchor="ctr">
+            <a:normAutofit/>
+          </a:bodyPr>
+          <a:lstStyle/>
+          <a:p>
+            <a:pPr indent="0" marL="0">
+              <a:buNone/>
+            </a:pPr>
+            <a:r>
+              <a:rPr lang="en-US" sz="1200" b="1" dirty="0">
+                <a:solidFill>
+                  <a:srgbClr val="FFFFFF"/>
+                </a:solidFill>
+                <a:latin typeface="Aptos" pitchFamily="34" charset="0"/>
+                <a:ea typeface="Aptos" pitchFamily="34" charset="-122"/>
+                <a:cs typeface="Aptos" pitchFamily="34" charset="-120"/>
+              </a:rPr>
+              <a:t>Takeaway: de prijskloof is duidelijker dan de kwaliteitskloof.</a:t>
+            </a:r>
+            <a:endParaRPr lang="en-US" sz="1200" dirty="0"/>
+          </a:p>
+        </p:txBody>
+      </p:sp>
+      <p:sp>
+        <p:nvSpPr>
+          <p:cNvPr id="25" name="Shape 22"/>
+          <p:cNvSpPr/>
+          <p:nvPr/>
+        </p:nvSpPr>
+        <p:spPr>
+          <a:xfrm>
+            <a:off x="713232" y="5230368"/>
+            <a:ext cx="10927080" cy="548640"/>
+          </a:xfrm>
+          <a:prstGeom prst="roundRect">
+            <a:avLst>
+              <a:gd name="adj" fmla="val 10000"/>
+            </a:avLst>
+          </a:prstGeom>
+          <a:solidFill>
+            <a:srgbClr val="1C2540"/>
+          </a:solidFill>
+          <a:ln w="12700">
+            <a:solidFill>
+              <a:srgbClr val="394258"/>
+            </a:solidFill>
+            <a:prstDash val="solid"/>
+          </a:ln>
+        </p:spPr>
+      </p:sp>
+      <p:sp>
+        <p:nvSpPr>
+          <p:cNvPr id="26" name="Text 23"/>
+          <p:cNvSpPr/>
+          <p:nvPr/>
+        </p:nvSpPr>
+        <p:spPr>
+          <a:xfrm>
+            <a:off x="914400" y="5413248"/>
+            <a:ext cx="10424160" cy="182880"/>
+          </a:xfrm>
+          <a:prstGeom prst="rect">
+            <a:avLst/>
+          </a:prstGeom>
+          <a:noFill/>
+          <a:ln/>
+        </p:spPr>
+        <p:txBody>
+          <a:bodyPr wrap="square" lIns="0" tIns="0" rIns="0" bIns="0" rtlCol="0" anchor="ctr">
+            <a:normAutofit/>
+          </a:bodyPr>
+          <a:lstStyle/>
+          <a:p>
+            <a:pPr indent="0" marL="0">
+              <a:buNone/>
+            </a:pPr>
+            <a:r>
+              <a:rPr lang="en-US" sz="1200" dirty="0">
+                <a:solidFill>
+                  <a:srgbClr val="FFFFFF"/>
+                </a:solidFill>
+                <a:latin typeface="Aptos" pitchFamily="34" charset="0"/>
+                <a:ea typeface="Aptos" pitchFamily="34" charset="-122"/>
+                <a:cs typeface="Aptos" pitchFamily="34" charset="-120"/>
+              </a:rPr>
+              <a:t>Veilige podiumframing: uitzonderlijk goedkoop en op sommige agentic/coding taken competitief. Niet: 'in wezen gelijk aan Opus'.</a:t>
+            </a:r>
+            <a:endParaRPr lang="en-US" sz="1200" dirty="0"/>
           </a:p>
         </p:txBody>
       </p:sp>
@@ -5552,7 +8879,7 @@
                 <a:ea typeface="Aptos" pitchFamily="34" charset="-122"/>
                 <a:cs typeface="Aptos" pitchFamily="34" charset="-120"/>
               </a:rPr>
-              <a:t>FORECAST</a:t>
+              <a:t>VOORUITBLIK</a:t>
             </a:r>
             <a:endParaRPr lang="en-US" sz="900" dirty="0"/>
           </a:p>
@@ -5593,7 +8920,7 @@
                 <a:ea typeface="Aptos Display" pitchFamily="34" charset="-122"/>
                 <a:cs typeface="Aptos Display" pitchFamily="34" charset="-120"/>
               </a:rPr>
-              <a:t>Forecasts: useful scenario discipline, not prophecy</a:t>
+              <a:t>Vooruitblik: nuttig als scenario-tool</a:t>
             </a:r>
             <a:endParaRPr lang="en-US" sz="2300" dirty="0"/>
           </a:p>
@@ -5657,50 +8984,84 @@
                 <a:ea typeface="Aptos" pitchFamily="34" charset="-122"/>
                 <a:cs typeface="Aptos" pitchFamily="34" charset="-120"/>
               </a:rPr>
-              <a:t>Scenario outputs from explicit assumptions; not a deterministic forecast.</a:t>
+              <a:t>Monte Carlo barrier model met expliciete aannames. Geen deterministische voorspelling.</a:t>
             </a:r>
             <a:endParaRPr lang="en-US" sz="800" dirty="0"/>
           </a:p>
         </p:txBody>
       </p:sp>
-      <p:pic>
-        <p:nvPicPr>
-          <p:cNvPr id="9" name="Image 1" descr="/home/ff/Documents/BoostMeUp/MoltBook_Sessie/assets/forecast_distribution.png">    </p:cNvPr>
-          <p:cNvPicPr>
-            <a:picLocks noChangeAspect="1"/>
-          </p:cNvPicPr>
-          <p:nvPr/>
-        </p:nvPicPr>
-        <p:blipFill>
-          <a:blip r:embed="rId2"/>
-          <a:stretch>
-            <a:fillRect/>
-          </a:stretch>
-        </p:blipFill>
-        <p:spPr>
-          <a:xfrm>
-            <a:off x="713232" y="1207008"/>
-            <a:ext cx="10927080" cy="4736592"/>
-          </a:xfrm>
-          <a:prstGeom prst="rect">
-            <a:avLst/>
-          </a:prstGeom>
-        </p:spPr>
-      </p:pic>
-      <p:sp>
-        <p:nvSpPr>
-          <p:cNvPr id="10" name="Shape 6"/>
-          <p:cNvSpPr/>
-          <p:nvPr/>
-        </p:nvSpPr>
-        <p:spPr>
-          <a:xfrm>
-            <a:off x="868680" y="5559552"/>
-            <a:ext cx="10789920" cy="512064"/>
+      <p:sp>
+        <p:nvSpPr>
+          <p:cNvPr id="9" name="Text 6"/>
+          <p:cNvSpPr/>
+          <p:nvPr/>
+        </p:nvSpPr>
+        <p:spPr>
+          <a:xfrm>
+            <a:off x="713232" y="1188720"/>
+            <a:ext cx="5669280" cy="493776"/>
+          </a:xfrm>
+          <a:prstGeom prst="rect">
+            <a:avLst/>
+          </a:prstGeom>
+          <a:noFill/>
+          <a:ln/>
+        </p:spPr>
+        <p:txBody>
+          <a:bodyPr wrap="square" lIns="0" tIns="0" rIns="0" bIns="0" rtlCol="0" anchor="ctr">
+            <a:normAutofit/>
+          </a:bodyPr>
+          <a:lstStyle/>
+          <a:p>
+            <a:pPr indent="0" marL="0">
+              <a:buNone/>
+            </a:pPr>
+            <a:r>
+              <a:rPr lang="en-US" sz="2000" b="1" dirty="0">
+                <a:solidFill>
+                  <a:srgbClr val="12192C"/>
+                </a:solidFill>
+                <a:latin typeface="Aptos Display" pitchFamily="34" charset="0"/>
+                <a:ea typeface="Aptos Display" pitchFamily="34" charset="-122"/>
+                <a:cs typeface="Aptos Display" pitchFamily="34" charset="-120"/>
+              </a:rPr>
+              <a:t>Niet vragen: welk jaar belooft dit model?</a:t>
+            </a:r>
+            <a:endParaRPr lang="en-US" sz="2000" dirty="0"/>
+          </a:p>
+          <a:p>
+            <a:pPr indent="0" marL="0">
+              <a:buNone/>
+            </a:pPr>
+            <a:r>
+              <a:rPr lang="en-US" sz="2000" b="1" dirty="0">
+                <a:solidFill>
+                  <a:srgbClr val="12192C"/>
+                </a:solidFill>
+                <a:latin typeface="Aptos Display" pitchFamily="34" charset="0"/>
+                <a:ea typeface="Aptos Display" pitchFamily="34" charset="-122"/>
+                <a:cs typeface="Aptos Display" pitchFamily="34" charset="-120"/>
+              </a:rPr>
+              <a:t>Wel vragen: welke aannames duwen de uitkomst echt?</a:t>
+            </a:r>
+            <a:endParaRPr lang="en-US" sz="2000" dirty="0"/>
+          </a:p>
+        </p:txBody>
+      </p:sp>
+      <p:sp>
+        <p:nvSpPr>
+          <p:cNvPr id="10" name="Shape 7"/>
+          <p:cNvSpPr/>
+          <p:nvPr/>
+        </p:nvSpPr>
+        <p:spPr>
+          <a:xfrm>
+            <a:off x="713232" y="1920240"/>
+            <a:ext cx="3063240" cy="1828800"/>
           </a:xfrm>
           <a:prstGeom prst="roundRect">
             <a:avLst>
-              <a:gd name="adj" fmla="val 10714"/>
+              <a:gd name="adj" fmla="val 3000"/>
             </a:avLst>
           </a:prstGeom>
           <a:solidFill>
@@ -5716,32 +9077,114 @@
       </p:sp>
       <p:sp>
         <p:nvSpPr>
-          <p:cNvPr id="11" name="Text 7"/>
-          <p:cNvSpPr/>
-          <p:nvPr/>
-        </p:nvSpPr>
-        <p:spPr>
-          <a:xfrm>
-            <a:off x="914400" y="5742432"/>
-            <a:ext cx="10607040" cy="164592"/>
-          </a:xfrm>
-          <a:prstGeom prst="rect">
-            <a:avLst/>
-          </a:prstGeom>
-          <a:noFill/>
-          <a:ln/>
-        </p:spPr>
-        <p:txBody>
-          <a:bodyPr wrap="square" lIns="0" tIns="0" rIns="0" bIns="0" rtlCol="0" anchor="ctr">
-            <a:normAutofit/>
-          </a:bodyPr>
-          <a:lstStyle/>
-          <a:p>
-            <a:pPr indent="0" marL="0">
-              <a:buNone/>
-            </a:pPr>
-            <a:r>
-              <a:rPr lang="en-US" sz="900" dirty="0">
+          <p:cNvPr id="11" name="Text 8"/>
+          <p:cNvSpPr/>
+          <p:nvPr/>
+        </p:nvSpPr>
+        <p:spPr>
+          <a:xfrm>
+            <a:off x="896112" y="2103120"/>
+            <a:ext cx="2697480" cy="502920"/>
+          </a:xfrm>
+          <a:prstGeom prst="rect">
+            <a:avLst/>
+          </a:prstGeom>
+          <a:noFill/>
+          <a:ln/>
+        </p:spPr>
+        <p:txBody>
+          <a:bodyPr wrap="square" lIns="0" tIns="0" rIns="0" bIns="0" rtlCol="0" anchor="ctr">
+            <a:normAutofit/>
+          </a:bodyPr>
+          <a:lstStyle/>
+          <a:p>
+            <a:pPr indent="0" marL="0">
+              <a:buNone/>
+            </a:pPr>
+            <a:r>
+              <a:rPr lang="en-US" sz="2800" b="1" dirty="0">
+                <a:solidFill>
+                  <a:srgbClr val="E93325"/>
+                </a:solidFill>
+                <a:latin typeface="Aptos Display" pitchFamily="34" charset="0"/>
+                <a:ea typeface="Aptos Display" pitchFamily="34" charset="-122"/>
+                <a:cs typeface="Aptos Display" pitchFamily="34" charset="-120"/>
+              </a:rPr>
+              <a:t>28,1%</a:t>
+            </a:r>
+            <a:endParaRPr lang="en-US" sz="2800" dirty="0"/>
+          </a:p>
+        </p:txBody>
+      </p:sp>
+      <p:sp>
+        <p:nvSpPr>
+          <p:cNvPr id="12" name="Text 9"/>
+          <p:cNvSpPr/>
+          <p:nvPr/>
+        </p:nvSpPr>
+        <p:spPr>
+          <a:xfrm>
+            <a:off x="896112" y="2706624"/>
+            <a:ext cx="2697480" cy="237744"/>
+          </a:xfrm>
+          <a:prstGeom prst="rect">
+            <a:avLst/>
+          </a:prstGeom>
+          <a:noFill/>
+          <a:ln/>
+        </p:spPr>
+        <p:txBody>
+          <a:bodyPr wrap="square" lIns="0" tIns="0" rIns="0" bIns="0" rtlCol="0" anchor="ctr">
+            <a:normAutofit/>
+          </a:bodyPr>
+          <a:lstStyle/>
+          <a:p>
+            <a:pPr indent="0" marL="0">
+              <a:buNone/>
+            </a:pPr>
+            <a:r>
+              <a:rPr lang="en-US" sz="1200" b="1" dirty="0">
+                <a:solidFill>
+                  <a:srgbClr val="12192C"/>
+                </a:solidFill>
+                <a:latin typeface="Aptos" pitchFamily="34" charset="0"/>
+                <a:ea typeface="Aptos" pitchFamily="34" charset="-122"/>
+                <a:cs typeface="Aptos" pitchFamily="34" charset="-120"/>
+              </a:rPr>
+              <a:t>basisscenario tegen 2040</a:t>
+            </a:r>
+            <a:endParaRPr lang="en-US" sz="1200" dirty="0"/>
+          </a:p>
+        </p:txBody>
+      </p:sp>
+      <p:sp>
+        <p:nvSpPr>
+          <p:cNvPr id="13" name="Text 10"/>
+          <p:cNvSpPr/>
+          <p:nvPr/>
+        </p:nvSpPr>
+        <p:spPr>
+          <a:xfrm>
+            <a:off x="896112" y="3017520"/>
+            <a:ext cx="2697480" cy="457200"/>
+          </a:xfrm>
+          <a:prstGeom prst="rect">
+            <a:avLst/>
+          </a:prstGeom>
+          <a:noFill/>
+          <a:ln/>
+        </p:spPr>
+        <p:txBody>
+          <a:bodyPr wrap="square" lIns="0" tIns="0" rIns="0" bIns="0" rtlCol="0" anchor="ctr">
+            <a:normAutofit/>
+          </a:bodyPr>
+          <a:lstStyle/>
+          <a:p>
+            <a:pPr indent="0" marL="0">
+              <a:buNone/>
+            </a:pPr>
+            <a:r>
+              <a:rPr lang="en-US" sz="1100" dirty="0">
                 <a:solidFill>
                   <a:srgbClr val="5B6476"/>
                 </a:solidFill>
@@ -5749,9 +9192,875 @@
                 <a:ea typeface="Aptos" pitchFamily="34" charset="-122"/>
                 <a:cs typeface="Aptos" pitchFamily="34" charset="-120"/>
               </a:rPr>
-              <a:t>Barrier model + explicit scenario inputs + floor constraints. Treat this as a structured uncertainty map, not a date promise.</a:t>
+              <a:t>kans op crossing</a:t>
+            </a:r>
+            <a:endParaRPr lang="en-US" sz="1100" dirty="0"/>
+          </a:p>
+        </p:txBody>
+      </p:sp>
+      <p:sp>
+        <p:nvSpPr>
+          <p:cNvPr id="14" name="Shape 11"/>
+          <p:cNvSpPr/>
+          <p:nvPr/>
+        </p:nvSpPr>
+        <p:spPr>
+          <a:xfrm>
+            <a:off x="3968496" y="1920240"/>
+            <a:ext cx="2560320" cy="1828800"/>
+          </a:xfrm>
+          <a:prstGeom prst="roundRect">
+            <a:avLst>
+              <a:gd name="adj" fmla="val 3000"/>
+            </a:avLst>
+          </a:prstGeom>
+          <a:solidFill>
+            <a:srgbClr val="F7F8FB"/>
+          </a:solidFill>
+          <a:ln w="12700">
+            <a:solidFill>
+              <a:srgbClr val="D9DDE6"/>
+            </a:solidFill>
+            <a:prstDash val="solid"/>
+          </a:ln>
+        </p:spPr>
+      </p:sp>
+      <p:sp>
+        <p:nvSpPr>
+          <p:cNvPr id="15" name="Text 12"/>
+          <p:cNvSpPr/>
+          <p:nvPr/>
+        </p:nvSpPr>
+        <p:spPr>
+          <a:xfrm>
+            <a:off x="4151376" y="2103120"/>
+            <a:ext cx="2194560" cy="502920"/>
+          </a:xfrm>
+          <a:prstGeom prst="rect">
+            <a:avLst/>
+          </a:prstGeom>
+          <a:noFill/>
+          <a:ln/>
+        </p:spPr>
+        <p:txBody>
+          <a:bodyPr wrap="square" lIns="0" tIns="0" rIns="0" bIns="0" rtlCol="0" anchor="ctr">
+            <a:normAutofit/>
+          </a:bodyPr>
+          <a:lstStyle/>
+          <a:p>
+            <a:pPr indent="0" marL="0">
+              <a:buNone/>
+            </a:pPr>
+            <a:r>
+              <a:rPr lang="en-US" sz="2800" b="1" dirty="0">
+                <a:solidFill>
+                  <a:srgbClr val="F2AD18"/>
+                </a:solidFill>
+                <a:latin typeface="Aptos Display" pitchFamily="34" charset="0"/>
+                <a:ea typeface="Aptos Display" pitchFamily="34" charset="-122"/>
+                <a:cs typeface="Aptos Display" pitchFamily="34" charset="-120"/>
+              </a:rPr>
+              <a:t>2038</a:t>
+            </a:r>
+            <a:endParaRPr lang="en-US" sz="2800" dirty="0"/>
+          </a:p>
+        </p:txBody>
+      </p:sp>
+      <p:sp>
+        <p:nvSpPr>
+          <p:cNvPr id="16" name="Text 13"/>
+          <p:cNvSpPr/>
+          <p:nvPr/>
+        </p:nvSpPr>
+        <p:spPr>
+          <a:xfrm>
+            <a:off x="4151376" y="2706624"/>
+            <a:ext cx="2194560" cy="237744"/>
+          </a:xfrm>
+          <a:prstGeom prst="rect">
+            <a:avLst/>
+          </a:prstGeom>
+          <a:noFill/>
+          <a:ln/>
+        </p:spPr>
+        <p:txBody>
+          <a:bodyPr wrap="square" lIns="0" tIns="0" rIns="0" bIns="0" rtlCol="0" anchor="ctr">
+            <a:normAutofit/>
+          </a:bodyPr>
+          <a:lstStyle/>
+          <a:p>
+            <a:pPr indent="0" marL="0">
+              <a:buNone/>
+            </a:pPr>
+            <a:r>
+              <a:rPr lang="en-US" sz="1200" b="1" dirty="0">
+                <a:solidFill>
+                  <a:srgbClr val="12192C"/>
+                </a:solidFill>
+                <a:latin typeface="Aptos" pitchFamily="34" charset="0"/>
+                <a:ea typeface="Aptos" pitchFamily="34" charset="-122"/>
+                <a:cs typeface="Aptos" pitchFamily="34" charset="-120"/>
+              </a:rPr>
+              <a:t>mediaan in basisscenario</a:t>
+            </a:r>
+            <a:endParaRPr lang="en-US" sz="1200" dirty="0"/>
+          </a:p>
+        </p:txBody>
+      </p:sp>
+      <p:sp>
+        <p:nvSpPr>
+          <p:cNvPr id="17" name="Text 14"/>
+          <p:cNvSpPr/>
+          <p:nvPr/>
+        </p:nvSpPr>
+        <p:spPr>
+          <a:xfrm>
+            <a:off x="4151376" y="3017520"/>
+            <a:ext cx="2194560" cy="457200"/>
+          </a:xfrm>
+          <a:prstGeom prst="rect">
+            <a:avLst/>
+          </a:prstGeom>
+          <a:noFill/>
+          <a:ln/>
+        </p:spPr>
+        <p:txBody>
+          <a:bodyPr wrap="square" lIns="0" tIns="0" rIns="0" bIns="0" rtlCol="0" anchor="ctr">
+            <a:normAutofit/>
+          </a:bodyPr>
+          <a:lstStyle/>
+          <a:p>
+            <a:pPr indent="0" marL="0">
+              <a:buNone/>
+            </a:pPr>
+            <a:r>
+              <a:rPr lang="en-US" sz="1100" dirty="0">
+                <a:solidFill>
+                  <a:srgbClr val="5B6476"/>
+                </a:solidFill>
+                <a:latin typeface="Aptos" pitchFamily="34" charset="0"/>
+                <a:ea typeface="Aptos" pitchFamily="34" charset="-122"/>
+                <a:cs typeface="Aptos" pitchFamily="34" charset="-120"/>
+              </a:rPr>
+              <a:t>geen datum-belofte</a:t>
+            </a:r>
+            <a:endParaRPr lang="en-US" sz="1100" dirty="0"/>
+          </a:p>
+        </p:txBody>
+      </p:sp>
+      <p:sp>
+        <p:nvSpPr>
+          <p:cNvPr id="18" name="Shape 15"/>
+          <p:cNvSpPr/>
+          <p:nvPr/>
+        </p:nvSpPr>
+        <p:spPr>
+          <a:xfrm>
+            <a:off x="6729984" y="1920240"/>
+            <a:ext cx="2962656" cy="1828800"/>
+          </a:xfrm>
+          <a:prstGeom prst="roundRect">
+            <a:avLst>
+              <a:gd name="adj" fmla="val 3000"/>
+            </a:avLst>
+          </a:prstGeom>
+          <a:solidFill>
+            <a:srgbClr val="F7F8FB"/>
+          </a:solidFill>
+          <a:ln w="12700">
+            <a:solidFill>
+              <a:srgbClr val="D9DDE6"/>
+            </a:solidFill>
+            <a:prstDash val="solid"/>
+          </a:ln>
+        </p:spPr>
+      </p:sp>
+      <p:sp>
+        <p:nvSpPr>
+          <p:cNvPr id="19" name="Text 16"/>
+          <p:cNvSpPr/>
+          <p:nvPr/>
+        </p:nvSpPr>
+        <p:spPr>
+          <a:xfrm>
+            <a:off x="6912864" y="2103120"/>
+            <a:ext cx="2596896" cy="502920"/>
+          </a:xfrm>
+          <a:prstGeom prst="rect">
+            <a:avLst/>
+          </a:prstGeom>
+          <a:noFill/>
+          <a:ln/>
+        </p:spPr>
+        <p:txBody>
+          <a:bodyPr wrap="square" lIns="0" tIns="0" rIns="0" bIns="0" rtlCol="0" anchor="ctr">
+            <a:normAutofit/>
+          </a:bodyPr>
+          <a:lstStyle/>
+          <a:p>
+            <a:pPr indent="0" marL="0">
+              <a:buNone/>
+            </a:pPr>
+            <a:r>
+              <a:rPr lang="en-US" sz="2800" b="1" dirty="0">
+                <a:solidFill>
+                  <a:srgbClr val="0F766E"/>
+                </a:solidFill>
+                <a:latin typeface="Aptos Display" pitchFamily="34" charset="0"/>
+                <a:ea typeface="Aptos Display" pitchFamily="34" charset="-122"/>
+                <a:cs typeface="Aptos Display" pitchFamily="34" charset="-120"/>
+              </a:rPr>
+              <a:t>71,9%</a:t>
+            </a:r>
+            <a:endParaRPr lang="en-US" sz="2800" dirty="0"/>
+          </a:p>
+        </p:txBody>
+      </p:sp>
+      <p:sp>
+        <p:nvSpPr>
+          <p:cNvPr id="20" name="Text 17"/>
+          <p:cNvSpPr/>
+          <p:nvPr/>
+        </p:nvSpPr>
+        <p:spPr>
+          <a:xfrm>
+            <a:off x="6912864" y="2706624"/>
+            <a:ext cx="2596896" cy="237744"/>
+          </a:xfrm>
+          <a:prstGeom prst="rect">
+            <a:avLst/>
+          </a:prstGeom>
+          <a:noFill/>
+          <a:ln/>
+        </p:spPr>
+        <p:txBody>
+          <a:bodyPr wrap="square" lIns="0" tIns="0" rIns="0" bIns="0" rtlCol="0" anchor="ctr">
+            <a:normAutofit/>
+          </a:bodyPr>
+          <a:lstStyle/>
+          <a:p>
+            <a:pPr indent="0" marL="0">
+              <a:buNone/>
+            </a:pPr>
+            <a:r>
+              <a:rPr lang="en-US" sz="1200" b="1" dirty="0">
+                <a:solidFill>
+                  <a:srgbClr val="12192C"/>
+                </a:solidFill>
+                <a:latin typeface="Aptos" pitchFamily="34" charset="0"/>
+                <a:ea typeface="Aptos" pitchFamily="34" charset="-122"/>
+                <a:cs typeface="Aptos" pitchFamily="34" charset="-120"/>
+              </a:rPr>
+              <a:t>crosst niet tegen 2040</a:t>
+            </a:r>
+            <a:endParaRPr lang="en-US" sz="1200" dirty="0"/>
+          </a:p>
+        </p:txBody>
+      </p:sp>
+      <p:sp>
+        <p:nvSpPr>
+          <p:cNvPr id="21" name="Text 18"/>
+          <p:cNvSpPr/>
+          <p:nvPr/>
+        </p:nvSpPr>
+        <p:spPr>
+          <a:xfrm>
+            <a:off x="6912864" y="3017520"/>
+            <a:ext cx="2596896" cy="457200"/>
+          </a:xfrm>
+          <a:prstGeom prst="rect">
+            <a:avLst/>
+          </a:prstGeom>
+          <a:noFill/>
+          <a:ln/>
+        </p:spPr>
+        <p:txBody>
+          <a:bodyPr wrap="square" lIns="0" tIns="0" rIns="0" bIns="0" rtlCol="0" anchor="ctr">
+            <a:normAutofit/>
+          </a:bodyPr>
+          <a:lstStyle/>
+          <a:p>
+            <a:pPr indent="0" marL="0">
+              <a:buNone/>
+            </a:pPr>
+            <a:r>
+              <a:rPr lang="en-US" sz="1100" dirty="0">
+                <a:solidFill>
+                  <a:srgbClr val="5B6476"/>
+                </a:solidFill>
+                <a:latin typeface="Aptos" pitchFamily="34" charset="0"/>
+                <a:ea typeface="Aptos" pitchFamily="34" charset="-122"/>
+                <a:cs typeface="Aptos" pitchFamily="34" charset="-120"/>
+              </a:rPr>
+              <a:t>onder huidige aannames</a:t>
+            </a:r>
+            <a:endParaRPr lang="en-US" sz="1100" dirty="0"/>
+          </a:p>
+        </p:txBody>
+      </p:sp>
+      <p:sp>
+        <p:nvSpPr>
+          <p:cNvPr id="22" name="Shape 19"/>
+          <p:cNvSpPr/>
+          <p:nvPr/>
+        </p:nvSpPr>
+        <p:spPr>
+          <a:xfrm>
+            <a:off x="9912096" y="1920240"/>
+            <a:ext cx="1728216" cy="1828800"/>
+          </a:xfrm>
+          <a:prstGeom prst="roundRect">
+            <a:avLst>
+              <a:gd name="adj" fmla="val 3175"/>
+            </a:avLst>
+          </a:prstGeom>
+          <a:solidFill>
+            <a:srgbClr val="F7F8FB"/>
+          </a:solidFill>
+          <a:ln w="12700">
+            <a:solidFill>
+              <a:srgbClr val="D9DDE6"/>
+            </a:solidFill>
+            <a:prstDash val="solid"/>
+          </a:ln>
+        </p:spPr>
+      </p:sp>
+      <p:sp>
+        <p:nvSpPr>
+          <p:cNvPr id="23" name="Text 20"/>
+          <p:cNvSpPr/>
+          <p:nvPr/>
+        </p:nvSpPr>
+        <p:spPr>
+          <a:xfrm>
+            <a:off x="10113264" y="2139696"/>
+            <a:ext cx="1097280" cy="146304"/>
+          </a:xfrm>
+          <a:prstGeom prst="rect">
+            <a:avLst/>
+          </a:prstGeom>
+          <a:noFill/>
+          <a:ln/>
+        </p:spPr>
+        <p:txBody>
+          <a:bodyPr wrap="square" lIns="0" tIns="0" rIns="0" bIns="0" rtlCol="0" anchor="ctr">
+            <a:normAutofit/>
+          </a:bodyPr>
+          <a:lstStyle/>
+          <a:p>
+            <a:pPr indent="0" marL="0">
+              <a:buNone/>
+            </a:pPr>
+            <a:r>
+              <a:rPr lang="en-US" sz="1000" b="1" dirty="0">
+                <a:solidFill>
+                  <a:srgbClr val="5B6476"/>
+                </a:solidFill>
+                <a:latin typeface="Aptos" pitchFamily="34" charset="0"/>
+                <a:ea typeface="Aptos" pitchFamily="34" charset="-122"/>
+                <a:cs typeface="Aptos" pitchFamily="34" charset="-120"/>
+              </a:rPr>
+              <a:t>label</a:t>
+            </a:r>
+            <a:endParaRPr lang="en-US" sz="1000" dirty="0"/>
+          </a:p>
+        </p:txBody>
+      </p:sp>
+      <p:sp>
+        <p:nvSpPr>
+          <p:cNvPr id="24" name="Text 21"/>
+          <p:cNvSpPr/>
+          <p:nvPr/>
+        </p:nvSpPr>
+        <p:spPr>
+          <a:xfrm>
+            <a:off x="10113264" y="2432304"/>
+            <a:ext cx="1097280" cy="475488"/>
+          </a:xfrm>
+          <a:prstGeom prst="rect">
+            <a:avLst/>
+          </a:prstGeom>
+          <a:noFill/>
+          <a:ln/>
+        </p:spPr>
+        <p:txBody>
+          <a:bodyPr wrap="square" lIns="0" tIns="0" rIns="0" bIns="0" rtlCol="0" anchor="ctr">
+            <a:normAutofit/>
+          </a:bodyPr>
+          <a:lstStyle/>
+          <a:p>
+            <a:pPr indent="0" marL="0">
+              <a:buNone/>
+            </a:pPr>
+            <a:r>
+              <a:rPr lang="en-US" sz="1500" b="1" dirty="0">
+                <a:solidFill>
+                  <a:srgbClr val="E93325"/>
+                </a:solidFill>
+                <a:latin typeface="Aptos" pitchFamily="34" charset="0"/>
+                <a:ea typeface="Aptos" pitchFamily="34" charset="-122"/>
+                <a:cs typeface="Aptos" pitchFamily="34" charset="-120"/>
+              </a:rPr>
+              <a:t>assumptie-gedreven</a:t>
+            </a:r>
+            <a:endParaRPr lang="en-US" sz="1500" dirty="0"/>
+          </a:p>
+        </p:txBody>
+      </p:sp>
+      <p:sp>
+        <p:nvSpPr>
+          <p:cNvPr id="25" name="Shape 22"/>
+          <p:cNvSpPr/>
+          <p:nvPr/>
+        </p:nvSpPr>
+        <p:spPr>
+          <a:xfrm>
+            <a:off x="713232" y="4133088"/>
+            <a:ext cx="10927080" cy="1335024"/>
+          </a:xfrm>
+          <a:prstGeom prst="roundRect">
+            <a:avLst>
+              <a:gd name="adj" fmla="val 4110"/>
+            </a:avLst>
+          </a:prstGeom>
+          <a:solidFill>
+            <a:srgbClr val="1C2540"/>
+          </a:solidFill>
+          <a:ln w="12700">
+            <a:solidFill>
+              <a:srgbClr val="394258"/>
+            </a:solidFill>
+            <a:prstDash val="solid"/>
+          </a:ln>
+        </p:spPr>
+      </p:sp>
+      <p:sp>
+        <p:nvSpPr>
+          <p:cNvPr id="26" name="Text 23"/>
+          <p:cNvSpPr/>
+          <p:nvPr/>
+        </p:nvSpPr>
+        <p:spPr>
+          <a:xfrm>
+            <a:off x="932688" y="4407408"/>
+            <a:ext cx="2377440" cy="182880"/>
+          </a:xfrm>
+          <a:prstGeom prst="rect">
+            <a:avLst/>
+          </a:prstGeom>
+          <a:noFill/>
+          <a:ln/>
+        </p:spPr>
+        <p:txBody>
+          <a:bodyPr wrap="square" lIns="0" tIns="0" rIns="0" bIns="0" rtlCol="0" anchor="ctr">
+            <a:normAutofit/>
+          </a:bodyPr>
+          <a:lstStyle/>
+          <a:p>
+            <a:pPr indent="0" marL="0">
+              <a:buNone/>
+            </a:pPr>
+            <a:r>
+              <a:rPr lang="en-US" sz="1400" b="1" dirty="0">
+                <a:solidFill>
+                  <a:srgbClr val="F2AD18"/>
+                </a:solidFill>
+                <a:latin typeface="Aptos" pitchFamily="34" charset="0"/>
+                <a:ea typeface="Aptos" pitchFamily="34" charset="-122"/>
+                <a:cs typeface="Aptos" pitchFamily="34" charset="-120"/>
+              </a:rPr>
+              <a:t>Belangrijkste modelinzicht</a:t>
+            </a:r>
+            <a:endParaRPr lang="en-US" sz="1400" dirty="0"/>
+          </a:p>
+        </p:txBody>
+      </p:sp>
+      <p:sp>
+        <p:nvSpPr>
+          <p:cNvPr id="27" name="Text 24"/>
+          <p:cNvSpPr/>
+          <p:nvPr/>
+        </p:nvSpPr>
+        <p:spPr>
+          <a:xfrm>
+            <a:off x="932688" y="4718304"/>
+            <a:ext cx="9875520" cy="457200"/>
+          </a:xfrm>
+          <a:prstGeom prst="rect">
+            <a:avLst/>
+          </a:prstGeom>
+          <a:noFill/>
+          <a:ln/>
+        </p:spPr>
+        <p:txBody>
+          <a:bodyPr wrap="square" lIns="0" tIns="0" rIns="0" bIns="0" rtlCol="0" anchor="ctr">
+            <a:normAutofit/>
+          </a:bodyPr>
+          <a:lstStyle/>
+          <a:p>
+            <a:pPr indent="0" marL="0">
+              <a:buNone/>
+            </a:pPr>
+            <a:r>
+              <a:rPr lang="en-US" sz="1600" dirty="0">
+                <a:solidFill>
+                  <a:srgbClr val="FFFFFF"/>
+                </a:solidFill>
+                <a:latin typeface="Aptos" pitchFamily="34" charset="0"/>
+                <a:ea typeface="Aptos" pitchFamily="34" charset="-122"/>
+                <a:cs typeface="Aptos" pitchFamily="34" charset="-120"/>
+              </a:rPr>
+              <a:t>In deze parameterisatie binden floors eerder dan de headline threshold. Dus memory, reliability, network en governance wegen zwaarder dan één headline-getal.</a:t>
+            </a:r>
+            <a:endParaRPr lang="en-US" sz="1600" dirty="0"/>
+          </a:p>
+        </p:txBody>
+      </p:sp>
+      <p:sp>
+        <p:nvSpPr>
+          <p:cNvPr id="28" name="Shape 25"/>
+          <p:cNvSpPr/>
+          <p:nvPr/>
+        </p:nvSpPr>
+        <p:spPr>
+          <a:xfrm>
+            <a:off x="932688" y="5138928"/>
+            <a:ext cx="822960" cy="329184"/>
+          </a:xfrm>
+          <a:prstGeom prst="roundRect">
+            <a:avLst>
+              <a:gd name="adj" fmla="val 22222"/>
+            </a:avLst>
+          </a:prstGeom>
+          <a:solidFill>
+            <a:srgbClr val="E93325"/>
+          </a:solidFill>
+          <a:ln w="12700">
+            <a:solidFill>
+              <a:srgbClr val="E93325">
+                <a:alpha val="0"/>
+              </a:srgbClr>
+            </a:solidFill>
+            <a:prstDash val="solid"/>
+          </a:ln>
+        </p:spPr>
+      </p:sp>
+      <p:sp>
+        <p:nvSpPr>
+          <p:cNvPr id="29" name="Text 26"/>
+          <p:cNvSpPr/>
+          <p:nvPr/>
+        </p:nvSpPr>
+        <p:spPr>
+          <a:xfrm>
+            <a:off x="1078992" y="5212080"/>
+            <a:ext cx="530352" cy="164592"/>
+          </a:xfrm>
+          <a:prstGeom prst="rect">
+            <a:avLst/>
+          </a:prstGeom>
+          <a:noFill/>
+          <a:ln/>
+        </p:spPr>
+        <p:txBody>
+          <a:bodyPr wrap="square" lIns="0" tIns="0" rIns="0" bIns="0" rtlCol="0" anchor="ctr">
+            <a:normAutofit/>
+          </a:bodyPr>
+          <a:lstStyle/>
+          <a:p>
+            <a:pPr indent="0" marL="0">
+              <a:buNone/>
+            </a:pPr>
+            <a:r>
+              <a:rPr lang="en-US" sz="900" b="1" dirty="0">
+                <a:solidFill>
+                  <a:srgbClr val="FFFFFF"/>
+                </a:solidFill>
+                <a:latin typeface="Aptos" pitchFamily="34" charset="0"/>
+                <a:ea typeface="Aptos" pitchFamily="34" charset="-122"/>
+                <a:cs typeface="Aptos" pitchFamily="34" charset="-120"/>
+              </a:rPr>
+              <a:t>memory</a:t>
             </a:r>
             <a:endParaRPr lang="en-US" sz="900" dirty="0"/>
+          </a:p>
+        </p:txBody>
+      </p:sp>
+      <p:sp>
+        <p:nvSpPr>
+          <p:cNvPr id="30" name="Shape 27"/>
+          <p:cNvSpPr/>
+          <p:nvPr/>
+        </p:nvSpPr>
+        <p:spPr>
+          <a:xfrm>
+            <a:off x="1847088" y="5138928"/>
+            <a:ext cx="932688" cy="329184"/>
+          </a:xfrm>
+          <a:prstGeom prst="roundRect">
+            <a:avLst>
+              <a:gd name="adj" fmla="val 22222"/>
+            </a:avLst>
+          </a:prstGeom>
+          <a:solidFill>
+            <a:srgbClr val="F2AD18"/>
+          </a:solidFill>
+          <a:ln w="12700">
+            <a:solidFill>
+              <a:srgbClr val="F2AD18">
+                <a:alpha val="0"/>
+              </a:srgbClr>
+            </a:solidFill>
+            <a:prstDash val="solid"/>
+          </a:ln>
+        </p:spPr>
+      </p:sp>
+      <p:sp>
+        <p:nvSpPr>
+          <p:cNvPr id="31" name="Text 28"/>
+          <p:cNvSpPr/>
+          <p:nvPr/>
+        </p:nvSpPr>
+        <p:spPr>
+          <a:xfrm>
+            <a:off x="1993392" y="5212080"/>
+            <a:ext cx="640080" cy="164592"/>
+          </a:xfrm>
+          <a:prstGeom prst="rect">
+            <a:avLst/>
+          </a:prstGeom>
+          <a:noFill/>
+          <a:ln/>
+        </p:spPr>
+        <p:txBody>
+          <a:bodyPr wrap="square" lIns="0" tIns="0" rIns="0" bIns="0" rtlCol="0" anchor="ctr">
+            <a:normAutofit/>
+          </a:bodyPr>
+          <a:lstStyle/>
+          <a:p>
+            <a:pPr indent="0" marL="0">
+              <a:buNone/>
+            </a:pPr>
+            <a:r>
+              <a:rPr lang="en-US" sz="900" b="1" dirty="0">
+                <a:solidFill>
+                  <a:srgbClr val="12192C"/>
+                </a:solidFill>
+                <a:latin typeface="Aptos" pitchFamily="34" charset="0"/>
+                <a:ea typeface="Aptos" pitchFamily="34" charset="-122"/>
+                <a:cs typeface="Aptos" pitchFamily="34" charset="-120"/>
+              </a:rPr>
+              <a:t>reliability</a:t>
+            </a:r>
+            <a:endParaRPr lang="en-US" sz="900" dirty="0"/>
+          </a:p>
+        </p:txBody>
+      </p:sp>
+      <p:sp>
+        <p:nvSpPr>
+          <p:cNvPr id="32" name="Shape 29"/>
+          <p:cNvSpPr/>
+          <p:nvPr/>
+        </p:nvSpPr>
+        <p:spPr>
+          <a:xfrm>
+            <a:off x="2889504" y="5138928"/>
+            <a:ext cx="841248" cy="329184"/>
+          </a:xfrm>
+          <a:prstGeom prst="roundRect">
+            <a:avLst>
+              <a:gd name="adj" fmla="val 22222"/>
+            </a:avLst>
+          </a:prstGeom>
+          <a:solidFill>
+            <a:srgbClr val="0F766E"/>
+          </a:solidFill>
+          <a:ln w="12700">
+            <a:solidFill>
+              <a:srgbClr val="0F766E">
+                <a:alpha val="0"/>
+              </a:srgbClr>
+            </a:solidFill>
+            <a:prstDash val="solid"/>
+          </a:ln>
+        </p:spPr>
+      </p:sp>
+      <p:sp>
+        <p:nvSpPr>
+          <p:cNvPr id="33" name="Text 30"/>
+          <p:cNvSpPr/>
+          <p:nvPr/>
+        </p:nvSpPr>
+        <p:spPr>
+          <a:xfrm>
+            <a:off x="3035808" y="5212080"/>
+            <a:ext cx="548640" cy="164592"/>
+          </a:xfrm>
+          <a:prstGeom prst="rect">
+            <a:avLst/>
+          </a:prstGeom>
+          <a:noFill/>
+          <a:ln/>
+        </p:spPr>
+        <p:txBody>
+          <a:bodyPr wrap="square" lIns="0" tIns="0" rIns="0" bIns="0" rtlCol="0" anchor="ctr">
+            <a:normAutofit/>
+          </a:bodyPr>
+          <a:lstStyle/>
+          <a:p>
+            <a:pPr indent="0" marL="0">
+              <a:buNone/>
+            </a:pPr>
+            <a:r>
+              <a:rPr lang="en-US" sz="900" b="1" dirty="0">
+                <a:solidFill>
+                  <a:srgbClr val="FFFFFF"/>
+                </a:solidFill>
+                <a:latin typeface="Aptos" pitchFamily="34" charset="0"/>
+                <a:ea typeface="Aptos" pitchFamily="34" charset="-122"/>
+                <a:cs typeface="Aptos" pitchFamily="34" charset="-120"/>
+              </a:rPr>
+              <a:t>network</a:t>
+            </a:r>
+            <a:endParaRPr lang="en-US" sz="900" dirty="0"/>
+          </a:p>
+        </p:txBody>
+      </p:sp>
+      <p:sp>
+        <p:nvSpPr>
+          <p:cNvPr id="34" name="Shape 31"/>
+          <p:cNvSpPr/>
+          <p:nvPr/>
+        </p:nvSpPr>
+        <p:spPr>
+          <a:xfrm>
+            <a:off x="3822192" y="5138928"/>
+            <a:ext cx="1024128" cy="329184"/>
+          </a:xfrm>
+          <a:prstGeom prst="roundRect">
+            <a:avLst>
+              <a:gd name="adj" fmla="val 22222"/>
+            </a:avLst>
+          </a:prstGeom>
+          <a:solidFill>
+            <a:srgbClr val="2563EB"/>
+          </a:solidFill>
+          <a:ln w="12700">
+            <a:solidFill>
+              <a:srgbClr val="2563EB">
+                <a:alpha val="0"/>
+              </a:srgbClr>
+            </a:solidFill>
+            <a:prstDash val="solid"/>
+          </a:ln>
+        </p:spPr>
+      </p:sp>
+      <p:sp>
+        <p:nvSpPr>
+          <p:cNvPr id="35" name="Text 32"/>
+          <p:cNvSpPr/>
+          <p:nvPr/>
+        </p:nvSpPr>
+        <p:spPr>
+          <a:xfrm>
+            <a:off x="3968496" y="5212080"/>
+            <a:ext cx="731520" cy="164592"/>
+          </a:xfrm>
+          <a:prstGeom prst="rect">
+            <a:avLst/>
+          </a:prstGeom>
+          <a:noFill/>
+          <a:ln/>
+        </p:spPr>
+        <p:txBody>
+          <a:bodyPr wrap="square" lIns="0" tIns="0" rIns="0" bIns="0" rtlCol="0" anchor="ctr">
+            <a:normAutofit/>
+          </a:bodyPr>
+          <a:lstStyle/>
+          <a:p>
+            <a:pPr indent="0" marL="0">
+              <a:buNone/>
+            </a:pPr>
+            <a:r>
+              <a:rPr lang="en-US" sz="900" b="1" dirty="0">
+                <a:solidFill>
+                  <a:srgbClr val="FFFFFF"/>
+                </a:solidFill>
+                <a:latin typeface="Aptos" pitchFamily="34" charset="0"/>
+                <a:ea typeface="Aptos" pitchFamily="34" charset="-122"/>
+                <a:cs typeface="Aptos" pitchFamily="34" charset="-120"/>
+              </a:rPr>
+              <a:t>governance</a:t>
+            </a:r>
+            <a:endParaRPr lang="en-US" sz="900" dirty="0"/>
+          </a:p>
+        </p:txBody>
+      </p:sp>
+      <p:sp>
+        <p:nvSpPr>
+          <p:cNvPr id="36" name="Shape 33"/>
+          <p:cNvSpPr/>
+          <p:nvPr/>
+        </p:nvSpPr>
+        <p:spPr>
+          <a:xfrm>
+            <a:off x="713232" y="5559552"/>
+            <a:ext cx="10927080" cy="640080"/>
+          </a:xfrm>
+          <a:prstGeom prst="roundRect">
+            <a:avLst>
+              <a:gd name="adj" fmla="val 11429"/>
+            </a:avLst>
+          </a:prstGeom>
+          <a:solidFill>
+            <a:srgbClr val="E8EEF9"/>
+          </a:solidFill>
+          <a:ln w="12700">
+            <a:solidFill>
+              <a:srgbClr val="D9DDE6"/>
+            </a:solidFill>
+            <a:prstDash val="solid"/>
+          </a:ln>
+        </p:spPr>
+      </p:sp>
+      <p:sp>
+        <p:nvSpPr>
+          <p:cNvPr id="37" name="Text 34"/>
+          <p:cNvSpPr/>
+          <p:nvPr/>
+        </p:nvSpPr>
+        <p:spPr>
+          <a:xfrm>
+            <a:off x="932688" y="5724144"/>
+            <a:ext cx="10469880" cy="201168"/>
+          </a:xfrm>
+          <a:prstGeom prst="rect">
+            <a:avLst/>
+          </a:prstGeom>
+          <a:noFill/>
+          <a:ln/>
+        </p:spPr>
+        <p:txBody>
+          <a:bodyPr wrap="square" lIns="0" tIns="0" rIns="0" bIns="0" rtlCol="0" anchor="ctr">
+            <a:normAutofit/>
+          </a:bodyPr>
+          <a:lstStyle/>
+          <a:p>
+            <a:pPr indent="0" marL="0">
+              <a:buNone/>
+            </a:pPr>
+            <a:r>
+              <a:rPr lang="en-US" sz="1200" b="1" dirty="0">
+                <a:solidFill>
+                  <a:srgbClr val="12192C"/>
+                </a:solidFill>
+                <a:latin typeface="Aptos" pitchFamily="34" charset="0"/>
+                <a:ea typeface="Aptos" pitchFamily="34" charset="-122"/>
+                <a:cs typeface="Aptos" pitchFamily="34" charset="-120"/>
+              </a:rPr>
+              <a:t>Takeaway: gebruik dit model om onzekerheid te ordenen, niet om 2038 als lot uit te spreken.</a:t>
+            </a:r>
+            <a:endParaRPr lang="en-US" sz="1200" dirty="0"/>
           </a:p>
         </p:txBody>
       </p:sp>
@@ -5898,7 +10207,7 @@
                 <a:ea typeface="Aptos" pitchFamily="34" charset="-122"/>
                 <a:cs typeface="Aptos" pitchFamily="34" charset="-120"/>
               </a:rPr>
-              <a:t>SYNTHESIS</a:t>
+              <a:t>SYNTHESE</a:t>
             </a:r>
             <a:endParaRPr lang="en-US" sz="900" dirty="0"/>
           </a:p>
@@ -5939,7 +10248,7 @@
                 <a:ea typeface="Aptos Display" pitchFamily="34" charset="-122"/>
                 <a:cs typeface="Aptos Display" pitchFamily="34" charset="-120"/>
               </a:rPr>
-              <a:t>What still has to be solved before 'agent society' language becomes credible</a:t>
+              <a:t>Wat nog ontbreekt voor een echte agentsamenleving</a:t>
             </a:r>
             <a:endParaRPr lang="en-US" sz="2300" dirty="0"/>
           </a:p>
@@ -6003,7 +10312,7 @@
                 <a:ea typeface="Aptos" pitchFamily="34" charset="-122"/>
                 <a:cs typeface="Aptos" pitchFamily="34" charset="-120"/>
               </a:rPr>
-              <a:t>This slide synthesizes the repo's verified findings rather than introducing new sourced numbers.</a:t>
+              <a:t>Synthese van gecontroleerde bevindingen; deze slide introduceert geen nieuwe cijfers.</a:t>
             </a:r>
             <a:endParaRPr lang="en-US" sz="800" dirty="0"/>
           </a:p>
@@ -6011,18 +10320,59 @@
       </p:sp>
       <p:sp>
         <p:nvSpPr>
-          <p:cNvPr id="9" name="Shape 6"/>
-          <p:cNvSpPr/>
-          <p:nvPr/>
-        </p:nvSpPr>
-        <p:spPr>
-          <a:xfrm>
-            <a:off x="713232" y="1371600"/>
-            <a:ext cx="3493008" cy="4480560"/>
+          <p:cNvPr id="9" name="Text 6"/>
+          <p:cNvSpPr/>
+          <p:nvPr/>
+        </p:nvSpPr>
+        <p:spPr>
+          <a:xfrm>
+            <a:off x="713232" y="1170432"/>
+            <a:ext cx="5486400" cy="219456"/>
+          </a:xfrm>
+          <a:prstGeom prst="rect">
+            <a:avLst/>
+          </a:prstGeom>
+          <a:noFill/>
+          <a:ln/>
+        </p:spPr>
+        <p:txBody>
+          <a:bodyPr wrap="square" lIns="0" tIns="0" rIns="0" bIns="0" rtlCol="0" anchor="ctr">
+            <a:normAutofit/>
+          </a:bodyPr>
+          <a:lstStyle/>
+          <a:p>
+            <a:pPr indent="0" marL="0">
+              <a:buNone/>
+            </a:pPr>
+            <a:r>
+              <a:rPr lang="en-US" sz="1500" dirty="0">
+                <a:solidFill>
+                  <a:srgbClr val="D7DCE7"/>
+                </a:solidFill>
+                <a:latin typeface="Aptos" pitchFamily="34" charset="0"/>
+                <a:ea typeface="Aptos" pitchFamily="34" charset="-122"/>
+                <a:cs typeface="Aptos" pitchFamily="34" charset="-120"/>
+              </a:rPr>
+              <a:t>Dit zijn geen randvoorwaarden. Dit zijn de bottlenecks.</a:t>
+            </a:r>
+            <a:endParaRPr lang="en-US" sz="1500" dirty="0"/>
+          </a:p>
+        </p:txBody>
+      </p:sp>
+      <p:sp>
+        <p:nvSpPr>
+          <p:cNvPr id="10" name="Shape 7"/>
+          <p:cNvSpPr/>
+          <p:nvPr/>
+        </p:nvSpPr>
+        <p:spPr>
+          <a:xfrm>
+            <a:off x="713232" y="1609344"/>
+            <a:ext cx="2514600" cy="4160520"/>
           </a:xfrm>
           <a:prstGeom prst="roundRect">
             <a:avLst>
-              <a:gd name="adj" fmla="val 1571"/>
+              <a:gd name="adj" fmla="val 2182"/>
             </a:avLst>
           </a:prstGeom>
           <a:solidFill>
@@ -6038,18 +10388,18 @@
       </p:sp>
       <p:sp>
         <p:nvSpPr>
-          <p:cNvPr id="10" name="Shape 7"/>
-          <p:cNvSpPr/>
-          <p:nvPr/>
-        </p:nvSpPr>
-        <p:spPr>
-          <a:xfrm>
-            <a:off x="4352544" y="1371600"/>
-            <a:ext cx="3493008" cy="4480560"/>
+          <p:cNvPr id="11" name="Shape 8"/>
+          <p:cNvSpPr/>
+          <p:nvPr/>
+        </p:nvSpPr>
+        <p:spPr>
+          <a:xfrm>
+            <a:off x="3465576" y="1609344"/>
+            <a:ext cx="2514600" cy="4160520"/>
           </a:xfrm>
           <a:prstGeom prst="roundRect">
             <a:avLst>
-              <a:gd name="adj" fmla="val 1571"/>
+              <a:gd name="adj" fmla="val 2182"/>
             </a:avLst>
           </a:prstGeom>
           <a:solidFill>
@@ -6065,18 +10415,18 @@
       </p:sp>
       <p:sp>
         <p:nvSpPr>
-          <p:cNvPr id="11" name="Shape 8"/>
-          <p:cNvSpPr/>
-          <p:nvPr/>
-        </p:nvSpPr>
-        <p:spPr>
-          <a:xfrm>
-            <a:off x="7991856" y="1371600"/>
-            <a:ext cx="3493008" cy="4480560"/>
+          <p:cNvPr id="12" name="Shape 9"/>
+          <p:cNvSpPr/>
+          <p:nvPr/>
+        </p:nvSpPr>
+        <p:spPr>
+          <a:xfrm>
+            <a:off x="6217920" y="1609344"/>
+            <a:ext cx="2514600" cy="4160520"/>
           </a:xfrm>
           <a:prstGeom prst="roundRect">
             <a:avLst>
-              <a:gd name="adj" fmla="val 1571"/>
+              <a:gd name="adj" fmla="val 2182"/>
             </a:avLst>
           </a:prstGeom>
           <a:solidFill>
@@ -6092,23 +10442,52 @@
       </p:sp>
       <p:sp>
         <p:nvSpPr>
-          <p:cNvPr id="12" name="Text 9"/>
-          <p:cNvSpPr/>
-          <p:nvPr/>
-        </p:nvSpPr>
-        <p:spPr>
-          <a:xfrm>
-            <a:off x="932688" y="1664208"/>
-            <a:ext cx="2560320" cy="274320"/>
-          </a:xfrm>
-          <a:prstGeom prst="rect">
-            <a:avLst/>
-          </a:prstGeom>
-          <a:noFill/>
-          <a:ln/>
-        </p:spPr>
-        <p:txBody>
-          <a:bodyPr wrap="square" rtlCol="0" anchor="ctr"/>
+          <p:cNvPr id="13" name="Shape 10"/>
+          <p:cNvSpPr/>
+          <p:nvPr/>
+        </p:nvSpPr>
+        <p:spPr>
+          <a:xfrm>
+            <a:off x="8970264" y="1609344"/>
+            <a:ext cx="2514600" cy="4160520"/>
+          </a:xfrm>
+          <a:prstGeom prst="roundRect">
+            <a:avLst>
+              <a:gd name="adj" fmla="val 2182"/>
+            </a:avLst>
+          </a:prstGeom>
+          <a:solidFill>
+            <a:srgbClr val="1C2540"/>
+          </a:solidFill>
+          <a:ln w="12700">
+            <a:solidFill>
+              <a:srgbClr val="394258"/>
+            </a:solidFill>
+            <a:prstDash val="solid"/>
+          </a:ln>
+        </p:spPr>
+      </p:sp>
+      <p:sp>
+        <p:nvSpPr>
+          <p:cNvPr id="14" name="Text 11"/>
+          <p:cNvSpPr/>
+          <p:nvPr/>
+        </p:nvSpPr>
+        <p:spPr>
+          <a:xfrm>
+            <a:off x="932688" y="1865376"/>
+            <a:ext cx="1828800" cy="219456"/>
+          </a:xfrm>
+          <a:prstGeom prst="rect">
+            <a:avLst/>
+          </a:prstGeom>
+          <a:noFill/>
+          <a:ln/>
+        </p:spPr>
+        <p:txBody>
+          <a:bodyPr wrap="square" lIns="0" tIns="0" rIns="0" bIns="0" rtlCol="0" anchor="ctr">
+            <a:normAutofit/>
+          </a:bodyPr>
           <a:lstStyle/>
           <a:p>
             <a:pPr indent="0" marL="0">
@@ -6123,7 +10502,7 @@
                 <a:ea typeface="Aptos Display" pitchFamily="34" charset="-122"/>
                 <a:cs typeface="Aptos Display" pitchFamily="34" charset="-120"/>
               </a:rPr>
-              <a:t>Identity</a:t>
+              <a:t>Identiteit</a:t>
             </a:r>
             <a:endParaRPr lang="en-US" sz="1800" dirty="0"/>
           </a:p>
@@ -6131,23 +10510,141 @@
       </p:sp>
       <p:sp>
         <p:nvSpPr>
-          <p:cNvPr id="13" name="Text 10"/>
-          <p:cNvSpPr/>
-          <p:nvPr/>
-        </p:nvSpPr>
-        <p:spPr>
-          <a:xfrm>
-            <a:off x="4553712" y="1664208"/>
-            <a:ext cx="2560320" cy="274320"/>
-          </a:xfrm>
-          <a:prstGeom prst="rect">
-            <a:avLst/>
-          </a:prstGeom>
-          <a:noFill/>
-          <a:ln/>
-        </p:spPr>
-        <p:txBody>
-          <a:bodyPr wrap="square" rtlCol="0" anchor="ctr"/>
+          <p:cNvPr id="15" name="Text 12"/>
+          <p:cNvSpPr/>
+          <p:nvPr/>
+        </p:nvSpPr>
+        <p:spPr>
+          <a:xfrm>
+            <a:off x="932688" y="2322576"/>
+            <a:ext cx="1828800" cy="1005840"/>
+          </a:xfrm>
+          <a:prstGeom prst="rect">
+            <a:avLst/>
+          </a:prstGeom>
+          <a:noFill/>
+          <a:ln/>
+        </p:spPr>
+        <p:txBody>
+          <a:bodyPr wrap="square" lIns="0" tIns="0" rIns="0" bIns="0" rtlCol="0" anchor="ctr">
+            <a:normAutofit/>
+          </a:bodyPr>
+          <a:lstStyle/>
+          <a:p>
+            <a:pPr indent="0" marL="0">
+              <a:buNone/>
+            </a:pPr>
+            <a:r>
+              <a:rPr lang="en-US" sz="1400" dirty="0">
+                <a:solidFill>
+                  <a:srgbClr val="FFFFFF"/>
+                </a:solidFill>
+                <a:latin typeface="Aptos" pitchFamily="34" charset="0"/>
+                <a:ea typeface="Aptos" pitchFamily="34" charset="-122"/>
+                <a:cs typeface="Aptos" pitchFamily="34" charset="-120"/>
+              </a:rPr>
+              <a:t>Wie is echt autonoom?</a:t>
+            </a:r>
+            <a:endParaRPr lang="en-US" sz="1400" dirty="0"/>
+          </a:p>
+          <a:p>
+            <a:pPr indent="0" marL="0">
+              <a:buNone/>
+            </a:pPr>
+            <a:r>
+              <a:rPr lang="en-US" sz="1400" dirty="0">
+                <a:solidFill>
+                  <a:srgbClr val="FFFFFF"/>
+                </a:solidFill>
+                <a:latin typeface="Aptos" pitchFamily="34" charset="0"/>
+                <a:ea typeface="Aptos" pitchFamily="34" charset="-122"/>
+                <a:cs typeface="Aptos" pitchFamily="34" charset="-120"/>
+              </a:rPr>
+              <a:t>Wie is hybrid?</a:t>
+            </a:r>
+            <a:endParaRPr lang="en-US" sz="1400" dirty="0"/>
+          </a:p>
+          <a:p>
+            <a:pPr indent="0" marL="0">
+              <a:buNone/>
+            </a:pPr>
+            <a:r>
+              <a:rPr lang="en-US" sz="1400" dirty="0">
+                <a:solidFill>
+                  <a:srgbClr val="FFFFFF"/>
+                </a:solidFill>
+                <a:latin typeface="Aptos" pitchFamily="34" charset="0"/>
+                <a:ea typeface="Aptos" pitchFamily="34" charset="-122"/>
+                <a:cs typeface="Aptos" pitchFamily="34" charset="-120"/>
+              </a:rPr>
+              <a:t>Wie blijft juridisch de actor?</a:t>
+            </a:r>
+            <a:endParaRPr lang="en-US" sz="1400" dirty="0"/>
+          </a:p>
+        </p:txBody>
+      </p:sp>
+      <p:sp>
+        <p:nvSpPr>
+          <p:cNvPr id="16" name="Text 13"/>
+          <p:cNvSpPr/>
+          <p:nvPr/>
+        </p:nvSpPr>
+        <p:spPr>
+          <a:xfrm>
+            <a:off x="932688" y="4407408"/>
+            <a:ext cx="1938528" cy="566928"/>
+          </a:xfrm>
+          <a:prstGeom prst="rect">
+            <a:avLst/>
+          </a:prstGeom>
+          <a:noFill/>
+          <a:ln/>
+        </p:spPr>
+        <p:txBody>
+          <a:bodyPr wrap="square" lIns="0" tIns="0" rIns="0" bIns="0" rtlCol="0" anchor="ctr">
+            <a:normAutofit/>
+          </a:bodyPr>
+          <a:lstStyle/>
+          <a:p>
+            <a:pPr indent="0" marL="0">
+              <a:buNone/>
+            </a:pPr>
+            <a:r>
+              <a:rPr lang="en-US" sz="1200" dirty="0">
+                <a:solidFill>
+                  <a:srgbClr val="D7DCE7"/>
+                </a:solidFill>
+                <a:latin typeface="Aptos" pitchFamily="34" charset="0"/>
+                <a:ea typeface="Aptos" pitchFamily="34" charset="-122"/>
+                <a:cs typeface="Aptos" pitchFamily="34" charset="-120"/>
+              </a:rPr>
+              <a:t>Zonder heldere attributie blijft 'agentsamenleving' retoriek.</a:t>
+            </a:r>
+            <a:endParaRPr lang="en-US" sz="1200" dirty="0"/>
+          </a:p>
+        </p:txBody>
+      </p:sp>
+      <p:sp>
+        <p:nvSpPr>
+          <p:cNvPr id="17" name="Text 14"/>
+          <p:cNvSpPr/>
+          <p:nvPr/>
+        </p:nvSpPr>
+        <p:spPr>
+          <a:xfrm>
+            <a:off x="3685032" y="1865376"/>
+            <a:ext cx="1828800" cy="219456"/>
+          </a:xfrm>
+          <a:prstGeom prst="rect">
+            <a:avLst/>
+          </a:prstGeom>
+          <a:noFill/>
+          <a:ln/>
+        </p:spPr>
+        <p:txBody>
+          <a:bodyPr wrap="square" lIns="0" tIns="0" rIns="0" bIns="0" rtlCol="0" anchor="ctr">
+            <a:normAutofit/>
+          </a:bodyPr>
           <a:lstStyle/>
           <a:p>
             <a:pPr indent="0" marL="0">
@@ -6162,7 +10659,7 @@
                 <a:ea typeface="Aptos Display" pitchFamily="34" charset="-122"/>
                 <a:cs typeface="Aptos Display" pitchFamily="34" charset="-120"/>
               </a:rPr>
-              <a:t>Memory</a:t>
+              <a:t>Geheugen</a:t>
             </a:r>
             <a:endParaRPr lang="en-US" sz="1800" dirty="0"/>
           </a:p>
@@ -6170,23 +10667,141 @@
       </p:sp>
       <p:sp>
         <p:nvSpPr>
-          <p:cNvPr id="14" name="Text 11"/>
-          <p:cNvSpPr/>
-          <p:nvPr/>
-        </p:nvSpPr>
-        <p:spPr>
-          <a:xfrm>
-            <a:off x="8193024" y="1664208"/>
-            <a:ext cx="2743200" cy="274320"/>
-          </a:xfrm>
-          <a:prstGeom prst="rect">
-            <a:avLst/>
-          </a:prstGeom>
-          <a:noFill/>
-          <a:ln/>
-        </p:spPr>
-        <p:txBody>
-          <a:bodyPr wrap="square" rtlCol="0" anchor="ctr"/>
+          <p:cNvPr id="18" name="Text 15"/>
+          <p:cNvSpPr/>
+          <p:nvPr/>
+        </p:nvSpPr>
+        <p:spPr>
+          <a:xfrm>
+            <a:off x="3685032" y="2322576"/>
+            <a:ext cx="1828800" cy="1005840"/>
+          </a:xfrm>
+          <a:prstGeom prst="rect">
+            <a:avLst/>
+          </a:prstGeom>
+          <a:noFill/>
+          <a:ln/>
+        </p:spPr>
+        <p:txBody>
+          <a:bodyPr wrap="square" lIns="0" tIns="0" rIns="0" bIns="0" rtlCol="0" anchor="ctr">
+            <a:normAutofit/>
+          </a:bodyPr>
+          <a:lstStyle/>
+          <a:p>
+            <a:pPr indent="0" marL="0">
+              <a:buNone/>
+            </a:pPr>
+            <a:r>
+              <a:rPr lang="en-US" sz="1400" dirty="0">
+                <a:solidFill>
+                  <a:srgbClr val="FFFFFF"/>
+                </a:solidFill>
+                <a:latin typeface="Aptos" pitchFamily="34" charset="0"/>
+                <a:ea typeface="Aptos" pitchFamily="34" charset="-122"/>
+                <a:cs typeface="Aptos" pitchFamily="34" charset="-120"/>
+              </a:rPr>
+              <a:t>Minder context herladen</a:t>
+            </a:r>
+            <a:endParaRPr lang="en-US" sz="1400" dirty="0"/>
+          </a:p>
+          <a:p>
+            <a:pPr indent="0" marL="0">
+              <a:buNone/>
+            </a:pPr>
+            <a:r>
+              <a:rPr lang="en-US" sz="1400" dirty="0">
+                <a:solidFill>
+                  <a:srgbClr val="FFFFFF"/>
+                </a:solidFill>
+                <a:latin typeface="Aptos" pitchFamily="34" charset="0"/>
+                <a:ea typeface="Aptos" pitchFamily="34" charset="-122"/>
+                <a:cs typeface="Aptos" pitchFamily="34" charset="-120"/>
+              </a:rPr>
+              <a:t>Meer persistente state</a:t>
+            </a:r>
+            <a:endParaRPr lang="en-US" sz="1400" dirty="0"/>
+          </a:p>
+          <a:p>
+            <a:pPr indent="0" marL="0">
+              <a:buNone/>
+            </a:pPr>
+            <a:r>
+              <a:rPr lang="en-US" sz="1400" dirty="0">
+                <a:solidFill>
+                  <a:srgbClr val="FFFFFF"/>
+                </a:solidFill>
+                <a:latin typeface="Aptos" pitchFamily="34" charset="0"/>
+                <a:ea typeface="Aptos" pitchFamily="34" charset="-122"/>
+                <a:cs typeface="Aptos" pitchFamily="34" charset="-120"/>
+              </a:rPr>
+              <a:t>Betere continuïteit over sessies</a:t>
+            </a:r>
+            <a:endParaRPr lang="en-US" sz="1400" dirty="0"/>
+          </a:p>
+        </p:txBody>
+      </p:sp>
+      <p:sp>
+        <p:nvSpPr>
+          <p:cNvPr id="19" name="Text 16"/>
+          <p:cNvSpPr/>
+          <p:nvPr/>
+        </p:nvSpPr>
+        <p:spPr>
+          <a:xfrm>
+            <a:off x="3685032" y="4407408"/>
+            <a:ext cx="1938528" cy="566928"/>
+          </a:xfrm>
+          <a:prstGeom prst="rect">
+            <a:avLst/>
+          </a:prstGeom>
+          <a:noFill/>
+          <a:ln/>
+        </p:spPr>
+        <p:txBody>
+          <a:bodyPr wrap="square" lIns="0" tIns="0" rIns="0" bIns="0" rtlCol="0" anchor="ctr">
+            <a:normAutofit/>
+          </a:bodyPr>
+          <a:lstStyle/>
+          <a:p>
+            <a:pPr indent="0" marL="0">
+              <a:buNone/>
+            </a:pPr>
+            <a:r>
+              <a:rPr lang="en-US" sz="1200" dirty="0">
+                <a:solidFill>
+                  <a:srgbClr val="D7DCE7"/>
+                </a:solidFill>
+                <a:latin typeface="Aptos" pitchFamily="34" charset="0"/>
+                <a:ea typeface="Aptos" pitchFamily="34" charset="-122"/>
+                <a:cs typeface="Aptos" pitchFamily="34" charset="-120"/>
+              </a:rPr>
+              <a:t>Anders blijft 'autonomie' vooral reconstructiewerk per run.</a:t>
+            </a:r>
+            <a:endParaRPr lang="en-US" sz="1200" dirty="0"/>
+          </a:p>
+        </p:txBody>
+      </p:sp>
+      <p:sp>
+        <p:nvSpPr>
+          <p:cNvPr id="20" name="Text 17"/>
+          <p:cNvSpPr/>
+          <p:nvPr/>
+        </p:nvSpPr>
+        <p:spPr>
+          <a:xfrm>
+            <a:off x="6437376" y="1865376"/>
+            <a:ext cx="1828800" cy="219456"/>
+          </a:xfrm>
+          <a:prstGeom prst="rect">
+            <a:avLst/>
+          </a:prstGeom>
+          <a:noFill/>
+          <a:ln/>
+        </p:spPr>
+        <p:txBody>
+          <a:bodyPr wrap="square" lIns="0" tIns="0" rIns="0" bIns="0" rtlCol="0" anchor="ctr">
+            <a:normAutofit/>
+          </a:bodyPr>
           <a:lstStyle/>
           <a:p>
             <a:pPr indent="0" marL="0">
@@ -6201,7 +10816,7 @@
                 <a:ea typeface="Aptos Display" pitchFamily="34" charset="-122"/>
                 <a:cs typeface="Aptos Display" pitchFamily="34" charset="-120"/>
               </a:rPr>
-              <a:t>Governance + economics</a:t>
+              <a:t>Governance</a:t>
             </a:r>
             <a:endParaRPr lang="en-US" sz="1800" dirty="0"/>
           </a:p>
@@ -6209,32 +10824,32 @@
       </p:sp>
       <p:sp>
         <p:nvSpPr>
-          <p:cNvPr id="15" name="Text 12"/>
-          <p:cNvSpPr/>
-          <p:nvPr/>
-        </p:nvSpPr>
-        <p:spPr>
-          <a:xfrm>
-            <a:off x="932688" y="2057400"/>
-            <a:ext cx="2834640" cy="2560320"/>
-          </a:xfrm>
-          <a:prstGeom prst="rect">
-            <a:avLst/>
-          </a:prstGeom>
-          <a:noFill/>
-          <a:ln/>
-        </p:spPr>
-        <p:txBody>
-          <a:bodyPr wrap="square" lIns="0" tIns="0" rIns="0" bIns="0" rtlCol="0" anchor="t">
-            <a:normAutofit/>
-          </a:bodyPr>
-          <a:lstStyle/>
-          <a:p>
-            <a:pPr indent="0" marL="0">
-              <a:buNone/>
-            </a:pPr>
-            <a:r>
-              <a:rPr lang="en-US" sz="1600" dirty="0">
+          <p:cNvPr id="21" name="Text 18"/>
+          <p:cNvSpPr/>
+          <p:nvPr/>
+        </p:nvSpPr>
+        <p:spPr>
+          <a:xfrm>
+            <a:off x="6437376" y="2322576"/>
+            <a:ext cx="1828800" cy="1005840"/>
+          </a:xfrm>
+          <a:prstGeom prst="rect">
+            <a:avLst/>
+          </a:prstGeom>
+          <a:noFill/>
+          <a:ln/>
+        </p:spPr>
+        <p:txBody>
+          <a:bodyPr wrap="square" lIns="0" tIns="0" rIns="0" bIns="0" rtlCol="0" anchor="ctr">
+            <a:normAutofit/>
+          </a:bodyPr>
+          <a:lstStyle/>
+          <a:p>
+            <a:pPr indent="0" marL="0">
+              <a:buNone/>
+            </a:pPr>
+            <a:r>
+              <a:rPr lang="en-US" sz="1400" dirty="0">
                 <a:solidFill>
                   <a:srgbClr val="FFFFFF"/>
                 </a:solidFill>
@@ -6242,16 +10857,16 @@
                 <a:ea typeface="Aptos" pitchFamily="34" charset="-122"/>
                 <a:cs typeface="Aptos" pitchFamily="34" charset="-120"/>
               </a:rPr>
-              <a:t>- Stronger attribution</a:t>
-            </a:r>
-            <a:endParaRPr lang="en-US" sz="1600" dirty="0"/>
-          </a:p>
-          <a:p>
-            <a:pPr indent="0" marL="0">
-              <a:buNone/>
-            </a:pPr>
-            <a:r>
-              <a:rPr lang="en-US" sz="1600" dirty="0">
+              <a:t>Controle moet matchen</a:t>
+            </a:r>
+            <a:endParaRPr lang="en-US" sz="1400" dirty="0"/>
+          </a:p>
+          <a:p>
+            <a:pPr indent="0" marL="0">
+              <a:buNone/>
+            </a:pPr>
+            <a:r>
+              <a:rPr lang="en-US" sz="1400" dirty="0">
                 <a:solidFill>
                   <a:srgbClr val="FFFFFF"/>
                 </a:solidFill>
@@ -6259,16 +10874,16 @@
                 <a:ea typeface="Aptos" pitchFamily="34" charset="-122"/>
                 <a:cs typeface="Aptos" pitchFamily="34" charset="-120"/>
               </a:rPr>
-              <a:t>- More than owner-linked X verification</a:t>
-            </a:r>
-            <a:endParaRPr lang="en-US" sz="1600" dirty="0"/>
-          </a:p>
-          <a:p>
-            <a:pPr indent="0" marL="0">
-              <a:buNone/>
-            </a:pPr>
-            <a:r>
-              <a:rPr lang="en-US" sz="1600" dirty="0">
+              <a:t>met aansprakelijkheid</a:t>
+            </a:r>
+            <a:endParaRPr lang="en-US" sz="1400" dirty="0"/>
+          </a:p>
+          <a:p>
+            <a:pPr indent="0" marL="0">
+              <a:buNone/>
+            </a:pPr>
+            <a:r>
+              <a:rPr lang="en-US" sz="1400" dirty="0">
                 <a:solidFill>
                   <a:srgbClr val="FFFFFF"/>
                 </a:solidFill>
@@ -6276,40 +10891,122 @@
                 <a:ea typeface="Aptos" pitchFamily="34" charset="-122"/>
                 <a:cs typeface="Aptos" pitchFamily="34" charset="-120"/>
               </a:rPr>
-              <a:t>- Clear separation of human, hybrid, and autonomous activity</a:t>
-            </a:r>
-            <a:endParaRPr lang="en-US" sz="1600" dirty="0"/>
-          </a:p>
-        </p:txBody>
-      </p:sp>
-      <p:sp>
-        <p:nvSpPr>
-          <p:cNvPr id="16" name="Text 13"/>
-          <p:cNvSpPr/>
-          <p:nvPr/>
-        </p:nvSpPr>
-        <p:spPr>
-          <a:xfrm>
-            <a:off x="4553712" y="2057400"/>
-            <a:ext cx="2788920" cy="2560320"/>
-          </a:xfrm>
-          <a:prstGeom prst="rect">
-            <a:avLst/>
-          </a:prstGeom>
-          <a:noFill/>
-          <a:ln/>
-        </p:spPr>
-        <p:txBody>
-          <a:bodyPr wrap="square" lIns="0" tIns="0" rIns="0" bIns="0" rtlCol="0" anchor="t">
-            <a:normAutofit/>
-          </a:bodyPr>
-          <a:lstStyle/>
-          <a:p>
-            <a:pPr indent="0" marL="0">
-              <a:buNone/>
-            </a:pPr>
-            <a:r>
-              <a:rPr lang="en-US" sz="1600" dirty="0">
+              <a:t>én met echte beslissingsmacht</a:t>
+            </a:r>
+            <a:endParaRPr lang="en-US" sz="1400" dirty="0"/>
+          </a:p>
+        </p:txBody>
+      </p:sp>
+      <p:sp>
+        <p:nvSpPr>
+          <p:cNvPr id="22" name="Text 19"/>
+          <p:cNvSpPr/>
+          <p:nvPr/>
+        </p:nvSpPr>
+        <p:spPr>
+          <a:xfrm>
+            <a:off x="6437376" y="4407408"/>
+            <a:ext cx="1993392" cy="658368"/>
+          </a:xfrm>
+          <a:prstGeom prst="rect">
+            <a:avLst/>
+          </a:prstGeom>
+          <a:noFill/>
+          <a:ln/>
+        </p:spPr>
+        <p:txBody>
+          <a:bodyPr wrap="square" lIns="0" tIns="0" rIns="0" bIns="0" rtlCol="0" anchor="ctr">
+            <a:normAutofit/>
+          </a:bodyPr>
+          <a:lstStyle/>
+          <a:p>
+            <a:pPr indent="0" marL="0">
+              <a:buNone/>
+            </a:pPr>
+            <a:r>
+              <a:rPr lang="en-US" sz="1200" dirty="0">
+                <a:solidFill>
+                  <a:srgbClr val="D7DCE7"/>
+                </a:solidFill>
+                <a:latin typeface="Aptos" pitchFamily="34" charset="0"/>
+                <a:ea typeface="Aptos" pitchFamily="34" charset="-122"/>
+                <a:cs typeface="Aptos" pitchFamily="34" charset="-120"/>
+              </a:rPr>
+              <a:t>Mensen juridisch laten opdraaien voor schijn-autonomie houdt niet lang stand.</a:t>
+            </a:r>
+            <a:endParaRPr lang="en-US" sz="1200" dirty="0"/>
+          </a:p>
+        </p:txBody>
+      </p:sp>
+      <p:sp>
+        <p:nvSpPr>
+          <p:cNvPr id="23" name="Text 20"/>
+          <p:cNvSpPr/>
+          <p:nvPr/>
+        </p:nvSpPr>
+        <p:spPr>
+          <a:xfrm>
+            <a:off x="9189720" y="1865376"/>
+            <a:ext cx="1828800" cy="219456"/>
+          </a:xfrm>
+          <a:prstGeom prst="rect">
+            <a:avLst/>
+          </a:prstGeom>
+          <a:noFill/>
+          <a:ln/>
+        </p:spPr>
+        <p:txBody>
+          <a:bodyPr wrap="square" lIns="0" tIns="0" rIns="0" bIns="0" rtlCol="0" anchor="ctr">
+            <a:normAutofit/>
+          </a:bodyPr>
+          <a:lstStyle/>
+          <a:p>
+            <a:pPr indent="0" marL="0">
+              <a:buNone/>
+            </a:pPr>
+            <a:r>
+              <a:rPr lang="en-US" sz="1800" b="1" dirty="0">
+                <a:solidFill>
+                  <a:srgbClr val="F2AD18"/>
+                </a:solidFill>
+                <a:latin typeface="Aptos Display" pitchFamily="34" charset="0"/>
+                <a:ea typeface="Aptos Display" pitchFamily="34" charset="-122"/>
+                <a:cs typeface="Aptos Display" pitchFamily="34" charset="-120"/>
+              </a:rPr>
+              <a:t>Economics</a:t>
+            </a:r>
+            <a:endParaRPr lang="en-US" sz="1800" dirty="0"/>
+          </a:p>
+        </p:txBody>
+      </p:sp>
+      <p:sp>
+        <p:nvSpPr>
+          <p:cNvPr id="24" name="Text 21"/>
+          <p:cNvSpPr/>
+          <p:nvPr/>
+        </p:nvSpPr>
+        <p:spPr>
+          <a:xfrm>
+            <a:off x="9189720" y="2322576"/>
+            <a:ext cx="1828800" cy="1005840"/>
+          </a:xfrm>
+          <a:prstGeom prst="rect">
+            <a:avLst/>
+          </a:prstGeom>
+          <a:noFill/>
+          <a:ln/>
+        </p:spPr>
+        <p:txBody>
+          <a:bodyPr wrap="square" lIns="0" tIns="0" rIns="0" bIns="0" rtlCol="0" anchor="ctr">
+            <a:normAutofit/>
+          </a:bodyPr>
+          <a:lstStyle/>
+          <a:p>
+            <a:pPr indent="0" marL="0">
+              <a:buNone/>
+            </a:pPr>
+            <a:r>
+              <a:rPr lang="en-US" sz="1400" dirty="0">
                 <a:solidFill>
                   <a:srgbClr val="FFFFFF"/>
                 </a:solidFill>
@@ -6317,16 +11014,16 @@
                 <a:ea typeface="Aptos" pitchFamily="34" charset="-122"/>
                 <a:cs typeface="Aptos" pitchFamily="34" charset="-120"/>
               </a:rPr>
-              <a:t>- Cheaper persistent memory</a:t>
-            </a:r>
-            <a:endParaRPr lang="en-US" sz="1600" dirty="0"/>
-          </a:p>
-          <a:p>
-            <a:pPr indent="0" marL="0">
-              <a:buNone/>
-            </a:pPr>
-            <a:r>
-              <a:rPr lang="en-US" sz="1600" dirty="0">
+              <a:t>Unit economics voorbij demo's</a:t>
+            </a:r>
+            <a:endParaRPr lang="en-US" sz="1400" dirty="0"/>
+          </a:p>
+          <a:p>
+            <a:pPr indent="0" marL="0">
+              <a:buNone/>
+            </a:pPr>
+            <a:r>
+              <a:rPr lang="en-US" sz="1400" dirty="0">
                 <a:solidFill>
                   <a:srgbClr val="FFFFFF"/>
                 </a:solidFill>
@@ -6334,16 +11031,16 @@
                 <a:ea typeface="Aptos" pitchFamily="34" charset="-122"/>
                 <a:cs typeface="Aptos" pitchFamily="34" charset="-120"/>
               </a:rPr>
-              <a:t>- Less repeated context loading</a:t>
-            </a:r>
-            <a:endParaRPr lang="en-US" sz="1600" dirty="0"/>
-          </a:p>
-          <a:p>
-            <a:pPr indent="0" marL="0">
-              <a:buNone/>
-            </a:pPr>
-            <a:r>
-              <a:rPr lang="en-US" sz="1600" dirty="0">
+              <a:t>Goedkopere loops</a:t>
+            </a:r>
+            <a:endParaRPr lang="en-US" sz="1400" dirty="0"/>
+          </a:p>
+          <a:p>
+            <a:pPr indent="0" marL="0">
+              <a:buNone/>
+            </a:pPr>
+            <a:r>
+              <a:rPr lang="en-US" sz="1400" dirty="0">
                 <a:solidFill>
                   <a:srgbClr val="FFFFFF"/>
                 </a:solidFill>
@@ -6351,84 +11048,50 @@
                 <a:ea typeface="Aptos" pitchFamily="34" charset="-122"/>
                 <a:cs typeface="Aptos" pitchFamily="34" charset="-120"/>
               </a:rPr>
-              <a:t>- Better continuity across sessions</a:t>
-            </a:r>
-            <a:endParaRPr lang="en-US" sz="1600" dirty="0"/>
-          </a:p>
-        </p:txBody>
-      </p:sp>
-      <p:sp>
-        <p:nvSpPr>
-          <p:cNvPr id="17" name="Text 14"/>
-          <p:cNvSpPr/>
-          <p:nvPr/>
-        </p:nvSpPr>
-        <p:spPr>
-          <a:xfrm>
-            <a:off x="8193024" y="2057400"/>
-            <a:ext cx="2651760" cy="2560320"/>
-          </a:xfrm>
-          <a:prstGeom prst="rect">
-            <a:avLst/>
-          </a:prstGeom>
-          <a:noFill/>
-          <a:ln/>
-        </p:spPr>
-        <p:txBody>
-          <a:bodyPr wrap="square" lIns="0" tIns="0" rIns="0" bIns="0" rtlCol="0" anchor="t">
-            <a:normAutofit/>
-          </a:bodyPr>
-          <a:lstStyle/>
-          <a:p>
-            <a:pPr indent="0" marL="0">
-              <a:buNone/>
-            </a:pPr>
-            <a:r>
-              <a:rPr lang="en-US" sz="1600" dirty="0">
-                <a:solidFill>
-                  <a:srgbClr val="FFFFFF"/>
-                </a:solidFill>
-                <a:latin typeface="Aptos" pitchFamily="34" charset="0"/>
-                <a:ea typeface="Aptos" pitchFamily="34" charset="-122"/>
-                <a:cs typeface="Aptos" pitchFamily="34" charset="-120"/>
-              </a:rPr>
-              <a:t>- Human accountability that matches actual control</a:t>
-            </a:r>
-            <a:endParaRPr lang="en-US" sz="1600" dirty="0"/>
-          </a:p>
-          <a:p>
-            <a:pPr indent="0" marL="0">
-              <a:buNone/>
-            </a:pPr>
-            <a:r>
-              <a:rPr lang="en-US" sz="1600" dirty="0">
-                <a:solidFill>
-                  <a:srgbClr val="FFFFFF"/>
-                </a:solidFill>
-                <a:latin typeface="Aptos" pitchFamily="34" charset="0"/>
-                <a:ea typeface="Aptos" pitchFamily="34" charset="-122"/>
-                <a:cs typeface="Aptos" pitchFamily="34" charset="-120"/>
-              </a:rPr>
-              <a:t>- Safer incentive design</a:t>
-            </a:r>
-            <a:endParaRPr lang="en-US" sz="1600" dirty="0"/>
-          </a:p>
-          <a:p>
-            <a:pPr indent="0" marL="0">
-              <a:buNone/>
-            </a:pPr>
-            <a:r>
-              <a:rPr lang="en-US" sz="1600" dirty="0">
-                <a:solidFill>
-                  <a:srgbClr val="FFFFFF"/>
-                </a:solidFill>
-                <a:latin typeface="Aptos" pitchFamily="34" charset="0"/>
-                <a:ea typeface="Aptos" pitchFamily="34" charset="-122"/>
-                <a:cs typeface="Aptos" pitchFamily="34" charset="-120"/>
-              </a:rPr>
-              <a:t>- Unit economics that survive beyond demos</a:t>
-            </a:r>
-            <a:endParaRPr lang="en-US" sz="1600" dirty="0"/>
+              <a:t>Minder contextwaste</a:t>
+            </a:r>
+            <a:endParaRPr lang="en-US" sz="1400" dirty="0"/>
+          </a:p>
+        </p:txBody>
+      </p:sp>
+      <p:sp>
+        <p:nvSpPr>
+          <p:cNvPr id="25" name="Text 22"/>
+          <p:cNvSpPr/>
+          <p:nvPr/>
+        </p:nvSpPr>
+        <p:spPr>
+          <a:xfrm>
+            <a:off x="9189720" y="4407408"/>
+            <a:ext cx="1938528" cy="566928"/>
+          </a:xfrm>
+          <a:prstGeom prst="rect">
+            <a:avLst/>
+          </a:prstGeom>
+          <a:noFill/>
+          <a:ln/>
+        </p:spPr>
+        <p:txBody>
+          <a:bodyPr wrap="square" lIns="0" tIns="0" rIns="0" bIns="0" rtlCol="0" anchor="ctr">
+            <a:normAutofit/>
+          </a:bodyPr>
+          <a:lstStyle/>
+          <a:p>
+            <a:pPr indent="0" marL="0">
+              <a:buNone/>
+            </a:pPr>
+            <a:r>
+              <a:rPr lang="en-US" sz="1200" dirty="0">
+                <a:solidFill>
+                  <a:srgbClr val="D7DCE7"/>
+                </a:solidFill>
+                <a:latin typeface="Aptos" pitchFamily="34" charset="0"/>
+                <a:ea typeface="Aptos" pitchFamily="34" charset="-122"/>
+                <a:cs typeface="Aptos" pitchFamily="34" charset="-120"/>
+              </a:rPr>
+              <a:t>Zonder kostdiscipline blijft sociale schaal vooral theater.</a:t>
+            </a:r>
+            <a:endParaRPr lang="en-US" sz="1200" dirty="0"/>
           </a:p>
         </p:txBody>
       </p:sp>

--- a/release/Moltbook.pptx
+++ b/release/Moltbook.pptx
@@ -603,7 +603,11 @@
             <a:r>
               <a:rPr lang="en-US" dirty="0"/>
               <a:t>Laat deze slide rustig landen. Niet te snel naar de vragen springen.
-Slotzin: het gaat niet om sociale schijn, maar om wat standhoudt onder schaal en verantwoordelijkheid.</a:t>
+Slotzin: het gaat niet om sociale schijn, maar om wat standhoudt onder schaal en verantwoordelijkheid.
+Gespreksvragen
+- Welke delen van uw agentstack worden vandaag nog telkens gereconstrueerd?
+- Waar breekt governance eerst?
+- Welke cijfers zijn gemeten, en welke zijn nog scenario-aannames?</a:t>
             </a:r>
             <a:endParaRPr lang="en-US" dirty="0"/>
           </a:p>
@@ -2553,7 +2557,7 @@
         </p:nvSpPr>
         <p:spPr>
           <a:xfrm>
-            <a:off x="713232" y="1481328"/>
+            <a:off x="713232" y="1426464"/>
             <a:ext cx="10058400" cy="493776"/>
           </a:xfrm>
           <a:prstGeom prst="rect">
@@ -2572,7 +2576,7 @@
               <a:buNone/>
             </a:pPr>
             <a:r>
-              <a:rPr lang="en-US" sz="2600" b="1" dirty="0">
+              <a:rPr lang="en-US" sz="2800" b="1" dirty="0">
                 <a:solidFill>
                   <a:srgbClr val="FFFFFF"/>
                 </a:solidFill>
@@ -2582,7 +2586,7 @@
               </a:rPr>
               <a:t>De juiste vraag is niet of de demo sociaal oogt.</a:t>
             </a:r>
-            <a:endParaRPr lang="en-US" sz="2600" dirty="0"/>
+            <a:endParaRPr lang="en-US" sz="2800" dirty="0"/>
           </a:p>
         </p:txBody>
       </p:sp>
@@ -2594,8 +2598,8 @@
         </p:nvSpPr>
         <p:spPr>
           <a:xfrm>
-            <a:off x="1042416" y="2267712"/>
-            <a:ext cx="9418320" cy="896112"/>
+            <a:off x="877824" y="2212848"/>
+            <a:ext cx="10149840" cy="914400"/>
           </a:xfrm>
           <a:prstGeom prst="rect">
             <a:avLst/>
@@ -2613,7 +2617,7 @@
               <a:buNone/>
             </a:pPr>
             <a:r>
-              <a:rPr lang="en-US" sz="2400" b="1" dirty="0">
+              <a:rPr lang="en-US" sz="2700" b="1" dirty="0">
                 <a:solidFill>
                   <a:srgbClr val="F2AD18"/>
                 </a:solidFill>
@@ -2621,9 +2625,9 @@
                 <a:ea typeface="Aptos Display" pitchFamily="34" charset="-122"/>
                 <a:cs typeface="Aptos Display" pitchFamily="34" charset="-120"/>
               </a:rPr>
-              <a:t>De juiste vraag is of identiteit, geheugen, governance en kost standhouden zodra je schaal en verantwoordelijkheid serieus neemt.</a:t>
-            </a:r>
-            <a:endParaRPr lang="en-US" sz="2400" dirty="0"/>
+              <a:t>De juiste vraag is of identiteit, geheugen, governance en kost standhouden zodra schaal en verantwoordelijkheid echt meetellen.</a:t>
+            </a:r>
+            <a:endParaRPr lang="en-US" sz="2700" dirty="0"/>
           </a:p>
         </p:txBody>
       </p:sp>
@@ -2635,12 +2639,12 @@
         </p:nvSpPr>
         <p:spPr>
           <a:xfrm>
-            <a:off x="969264" y="3822192"/>
-            <a:ext cx="10241280" cy="1005840"/>
+            <a:off x="969264" y="3913632"/>
+            <a:ext cx="10241280" cy="1078992"/>
           </a:xfrm>
           <a:prstGeom prst="roundRect">
             <a:avLst>
-              <a:gd name="adj" fmla="val 5455"/>
+              <a:gd name="adj" fmla="val 5085"/>
             </a:avLst>
           </a:prstGeom>
           <a:solidFill>
@@ -2662,7 +2666,7 @@
         </p:nvSpPr>
         <p:spPr>
           <a:xfrm>
-            <a:off x="1261872" y="4114800"/>
+            <a:off x="1261872" y="4187952"/>
             <a:ext cx="1280160" cy="182880"/>
           </a:xfrm>
           <a:prstGeom prst="rect">
@@ -2703,8 +2707,8 @@
         </p:nvSpPr>
         <p:spPr>
           <a:xfrm>
-            <a:off x="1261872" y="4407408"/>
-            <a:ext cx="9326880" cy="310896"/>
+            <a:off x="1261872" y="4498848"/>
+            <a:ext cx="9326880" cy="384048"/>
           </a:xfrm>
           <a:prstGeom prst="rect">
             <a:avLst/>
@@ -2722,75 +2726,48 @@
               <a:buNone/>
             </a:pPr>
             <a:r>
-              <a:rPr lang="en-US" sz="1500" dirty="0">
+              <a:rPr lang="en-US" sz="1800" b="1" dirty="0">
                 <a:solidFill>
                   <a:srgbClr val="FFFFFF"/>
                 </a:solidFill>
-                <a:latin typeface="Aptos" pitchFamily="34" charset="0"/>
-                <a:ea typeface="Aptos" pitchFamily="34" charset="-122"/>
-                <a:cs typeface="Aptos" pitchFamily="34" charset="-120"/>
-              </a:rPr>
-              <a:t>Agentnetwerken zijn technisch indrukwekkend. Maar de geloofwaardigheid zit pas in wat standhoudt onder identiteit, governance en economie.</a:t>
-            </a:r>
-            <a:endParaRPr lang="en-US" sz="1500" dirty="0"/>
-          </a:p>
-        </p:txBody>
-      </p:sp>
-      <p:sp>
-        <p:nvSpPr>
-          <p:cNvPr id="14" name="Shape 11"/>
-          <p:cNvSpPr/>
-          <p:nvPr/>
-        </p:nvSpPr>
-        <p:spPr>
-          <a:xfrm>
-            <a:off x="969264" y="5084064"/>
-            <a:ext cx="10241280" cy="694944"/>
-          </a:xfrm>
-          <a:prstGeom prst="roundRect">
-            <a:avLst>
-              <a:gd name="adj" fmla="val 7895"/>
-            </a:avLst>
-          </a:prstGeom>
-          <a:solidFill>
-            <a:srgbClr val="1C2540"/>
-          </a:solidFill>
-          <a:ln w="12700">
-            <a:solidFill>
-              <a:srgbClr val="394258"/>
-            </a:solidFill>
-            <a:prstDash val="solid"/>
-          </a:ln>
-        </p:spPr>
-      </p:sp>
-      <p:sp>
-        <p:nvSpPr>
-          <p:cNvPr id="15" name="Text 12"/>
-          <p:cNvSpPr/>
-          <p:nvPr/>
-        </p:nvSpPr>
-        <p:spPr>
-          <a:xfrm>
-            <a:off x="1188720" y="5321808"/>
-            <a:ext cx="9784080" cy="182880"/>
-          </a:xfrm>
-          <a:prstGeom prst="rect">
-            <a:avLst/>
-          </a:prstGeom>
-          <a:noFill/>
-          <a:ln/>
-        </p:spPr>
-        <p:txBody>
-          <a:bodyPr wrap="square" lIns="0" tIns="0" rIns="0" bIns="0" rtlCol="0" anchor="ctr">
-            <a:normAutofit/>
-          </a:bodyPr>
-          <a:lstStyle/>
-          <a:p>
-            <a:pPr algn="ctr" indent="0" marL="0">
-              <a:buNone/>
-            </a:pPr>
-            <a:r>
-              <a:rPr lang="en-US" sz="1100" dirty="0">
+                <a:latin typeface="Aptos Display" pitchFamily="34" charset="0"/>
+                <a:ea typeface="Aptos Display" pitchFamily="34" charset="-122"/>
+                <a:cs typeface="Aptos Display" pitchFamily="34" charset="-120"/>
+              </a:rPr>
+              <a:t>Agentnetwerken kunnen indrukwekkend ogen. Geloofwaardigheid begint pas waar identiteit, governance en economie standhouden.</a:t>
+            </a:r>
+            <a:endParaRPr lang="en-US" sz="1800" dirty="0"/>
+          </a:p>
+        </p:txBody>
+      </p:sp>
+      <p:sp>
+        <p:nvSpPr>
+          <p:cNvPr id="14" name="Text 11"/>
+          <p:cNvSpPr/>
+          <p:nvPr/>
+        </p:nvSpPr>
+        <p:spPr>
+          <a:xfrm>
+            <a:off x="713232" y="5504688"/>
+            <a:ext cx="2011680" cy="146304"/>
+          </a:xfrm>
+          <a:prstGeom prst="rect">
+            <a:avLst/>
+          </a:prstGeom>
+          <a:noFill/>
+          <a:ln/>
+        </p:spPr>
+        <p:txBody>
+          <a:bodyPr wrap="square" lIns="0" tIns="0" rIns="0" bIns="0" rtlCol="0" anchor="ctr">
+            <a:normAutofit/>
+          </a:bodyPr>
+          <a:lstStyle/>
+          <a:p>
+            <a:pPr indent="0" marL="0">
+              <a:buNone/>
+            </a:pPr>
+            <a:r>
+              <a:rPr lang="en-US" sz="900" dirty="0">
                 <a:solidFill>
                   <a:srgbClr val="D7DCE7"/>
                 </a:solidFill>
@@ -2798,9 +2775,9 @@
                 <a:ea typeface="Aptos" pitchFamily="34" charset="-122"/>
                 <a:cs typeface="Aptos" pitchFamily="34" charset="-120"/>
               </a:rPr>
-              <a:t>Gespreksvragen: welke delen van uw agentstack worden vandaag nog telkens gereconstrueerd? Waar breekt governance eerst? Welke cijfers zijn gemeten, en welke zijn nog scenario-aannames?</a:t>
-            </a:r>
-            <a:endParaRPr lang="en-US" sz="1100" dirty="0"/>
+              <a:t>Gespreksvragen in de notes</a:t>
+            </a:r>
+            <a:endParaRPr lang="en-US" sz="900" dirty="0"/>
           </a:p>
         </p:txBody>
       </p:sp>
@@ -3827,7 +3804,7 @@
                 <a:ea typeface="Aptos Display" pitchFamily="34" charset="-122"/>
                 <a:cs typeface="Aptos Display" pitchFamily="34" charset="-120"/>
               </a:rPr>
-              <a:t>Een agentnetwerk is vooral een systeem</a:t>
+              <a:t>Een agentnetwerk is een systeem, geen wezen</a:t>
             </a:r>
             <a:endParaRPr lang="en-US" sz="2300" dirty="0"/>
           </a:p>
@@ -3905,36 +3882,36 @@
         </p:nvSpPr>
         <p:spPr>
           <a:xfrm>
-            <a:off x="713232" y="1170432"/>
-            <a:ext cx="5029200" cy="219456"/>
-          </a:xfrm>
-          <a:prstGeom prst="rect">
-            <a:avLst/>
-          </a:prstGeom>
-          <a:noFill/>
-          <a:ln/>
-        </p:spPr>
-        <p:txBody>
-          <a:bodyPr wrap="square" lIns="0" tIns="0" rIns="0" bIns="0" rtlCol="0" anchor="ctr">
-            <a:normAutofit/>
-          </a:bodyPr>
-          <a:lstStyle/>
-          <a:p>
-            <a:pPr indent="0" marL="0">
-              <a:buNone/>
-            </a:pPr>
-            <a:r>
-              <a:rPr lang="en-US" sz="1500" dirty="0">
-                <a:solidFill>
-                  <a:srgbClr val="D7DCE7"/>
-                </a:solidFill>
-                <a:latin typeface="Aptos" pitchFamily="34" charset="0"/>
-                <a:ea typeface="Aptos" pitchFamily="34" charset="-122"/>
-                <a:cs typeface="Aptos" pitchFamily="34" charset="-120"/>
-              </a:rPr>
-              <a:t>De praktische definitie is niet mystiek maar operationeel.</a:t>
-            </a:r>
-            <a:endParaRPr lang="en-US" sz="1500" dirty="0"/>
+            <a:off x="713232" y="1207008"/>
+            <a:ext cx="5669280" cy="310896"/>
+          </a:xfrm>
+          <a:prstGeom prst="rect">
+            <a:avLst/>
+          </a:prstGeom>
+          <a:noFill/>
+          <a:ln/>
+        </p:spPr>
+        <p:txBody>
+          <a:bodyPr wrap="square" lIns="0" tIns="0" rIns="0" bIns="0" rtlCol="0" anchor="ctr">
+            <a:normAutofit/>
+          </a:bodyPr>
+          <a:lstStyle/>
+          <a:p>
+            <a:pPr indent="0" marL="0">
+              <a:buNone/>
+            </a:pPr>
+            <a:r>
+              <a:rPr lang="en-US" sz="1800" b="1" dirty="0">
+                <a:solidFill>
+                  <a:srgbClr val="F2AD18"/>
+                </a:solidFill>
+                <a:latin typeface="Aptos Display" pitchFamily="34" charset="0"/>
+                <a:ea typeface="Aptos Display" pitchFamily="34" charset="-122"/>
+                <a:cs typeface="Aptos Display" pitchFamily="34" charset="-120"/>
+              </a:rPr>
+              <a:t>Wat als autonomie voelt, is vaak een georkestreerde loop.</a:t>
+            </a:r>
+            <a:endParaRPr lang="en-US" sz="1800" dirty="0"/>
           </a:p>
         </p:txBody>
       </p:sp>
@@ -3946,8 +3923,8 @@
         </p:nvSpPr>
         <p:spPr>
           <a:xfrm>
-            <a:off x="713232" y="1499616"/>
-            <a:ext cx="3493008" cy="329184"/>
+            <a:off x="713232" y="1700784"/>
+            <a:ext cx="1298448" cy="329184"/>
           </a:xfrm>
           <a:prstGeom prst="roundRect">
             <a:avLst>
@@ -3955,11 +3932,11 @@
             </a:avLst>
           </a:prstGeom>
           <a:solidFill>
-            <a:srgbClr val="F2AD18"/>
+            <a:srgbClr val="E93325"/>
           </a:solidFill>
           <a:ln w="12700">
             <a:solidFill>
-              <a:srgbClr val="F2AD18">
+              <a:srgbClr val="E93325">
                 <a:alpha val="0"/>
               </a:srgbClr>
             </a:solidFill>
@@ -3975,8 +3952,8 @@
         </p:nvSpPr>
         <p:spPr>
           <a:xfrm>
-            <a:off x="859536" y="1572768"/>
-            <a:ext cx="3200400" cy="164592"/>
+            <a:off x="859536" y="1773936"/>
+            <a:ext cx="1005840" cy="164592"/>
           </a:xfrm>
           <a:prstGeom prst="rect">
             <a:avLst/>
@@ -3996,13 +3973,13 @@
             <a:r>
               <a:rPr lang="en-US" sz="900" b="1" dirty="0">
                 <a:solidFill>
-                  <a:srgbClr val="12192C"/>
-                </a:solidFill>
-                <a:latin typeface="Aptos" pitchFamily="34" charset="0"/>
-                <a:ea typeface="Aptos" pitchFamily="34" charset="-122"/>
-                <a:cs typeface="Aptos" pitchFamily="34" charset="-120"/>
-              </a:rPr>
-              <a:t>model + instructies + context + tools + state</a:t>
+                  <a:srgbClr val="FFFFFF"/>
+                </a:solidFill>
+                <a:latin typeface="Aptos" pitchFamily="34" charset="0"/>
+                <a:ea typeface="Aptos" pitchFamily="34" charset="-122"/>
+                <a:cs typeface="Aptos" pitchFamily="34" charset="-120"/>
+              </a:rPr>
+              <a:t>operationele lezing</a:t>
             </a:r>
             <a:endParaRPr lang="en-US" sz="900" dirty="0"/>
           </a:p>
@@ -4016,8 +3993,8 @@
         </p:nvSpPr>
         <p:spPr>
           <a:xfrm>
-            <a:off x="1133856" y="2907792"/>
-            <a:ext cx="9555480" cy="0"/>
+            <a:off x="1371600" y="2798064"/>
+            <a:ext cx="8138160" cy="0"/>
           </a:xfrm>
           <a:prstGeom prst="line">
             <a:avLst/>
@@ -4039,7 +4016,7 @@
         </p:nvSpPr>
         <p:spPr>
           <a:xfrm>
-            <a:off x="877824" y="2340864"/>
+            <a:off x="987552" y="2212848"/>
             <a:ext cx="1901952" cy="1005840"/>
           </a:xfrm>
           <a:prstGeom prst="roundRect">
@@ -4066,7 +4043,7 @@
         </p:nvSpPr>
         <p:spPr>
           <a:xfrm>
-            <a:off x="1024128" y="2505456"/>
+            <a:off x="1133856" y="2377440"/>
             <a:ext cx="1609344" cy="201168"/>
           </a:xfrm>
           <a:prstGeom prst="rect">
@@ -4093,7 +4070,7 @@
                 <a:ea typeface="Aptos" pitchFamily="34" charset="-122"/>
                 <a:cs typeface="Aptos" pitchFamily="34" charset="-120"/>
               </a:rPr>
-              <a:t>Instructies</a:t>
+              <a:t>Context</a:t>
             </a:r>
             <a:endParaRPr lang="en-US" sz="1400" dirty="0"/>
           </a:p>
@@ -4107,7 +4084,7 @@
         </p:nvSpPr>
         <p:spPr>
           <a:xfrm>
-            <a:off x="1024128" y="2798064"/>
+            <a:off x="1133856" y="2670048"/>
             <a:ext cx="1609344" cy="310896"/>
           </a:xfrm>
           <a:prstGeom prst="rect">
@@ -4134,7 +4111,7 @@
                 <a:ea typeface="Aptos" pitchFamily="34" charset="-122"/>
                 <a:cs typeface="Aptos" pitchFamily="34" charset="-120"/>
               </a:rPr>
-              <a:t>rol, regels,</a:t>
+              <a:t>geschiedenis,</a:t>
             </a:r>
             <a:endParaRPr lang="en-US" sz="1000" dirty="0"/>
           </a:p>
@@ -4151,10 +4128,27 @@
                 <a:ea typeface="Aptos" pitchFamily="34" charset="-122"/>
                 <a:cs typeface="Aptos" pitchFamily="34" charset="-120"/>
               </a:rPr>
-              <a:t>AGENTS.md</a:t>
+              <a:t>retrieval,</a:t>
             </a:r>
             <a:endParaRPr lang="en-US" sz="1000" dirty="0"/>
           </a:p>
+          <a:p>
+            <a:pPr indent="0" marL="0">
+              <a:buNone/>
+            </a:pPr>
+            <a:r>
+              <a:rPr lang="en-US" sz="1000" dirty="0">
+                <a:solidFill>
+                  <a:srgbClr val="D7DCE7"/>
+                </a:solidFill>
+                <a:latin typeface="Aptos" pitchFamily="34" charset="0"/>
+                <a:ea typeface="Aptos" pitchFamily="34" charset="-122"/>
+                <a:cs typeface="Aptos" pitchFamily="34" charset="-120"/>
+              </a:rPr>
+              <a:t>files</a:t>
+            </a:r>
+            <a:endParaRPr lang="en-US" sz="1000" dirty="0"/>
+          </a:p>
         </p:txBody>
       </p:sp>
       <p:sp>
@@ -4165,7 +4159,7 @@
         </p:nvSpPr>
         <p:spPr>
           <a:xfrm>
-            <a:off x="2889504" y="2340864"/>
+            <a:off x="3913632" y="2212848"/>
             <a:ext cx="1901952" cy="1005840"/>
           </a:xfrm>
           <a:prstGeom prst="roundRect">
@@ -4192,7 +4186,7 @@
         </p:nvSpPr>
         <p:spPr>
           <a:xfrm>
-            <a:off x="3035808" y="2505456"/>
+            <a:off x="4059936" y="2377440"/>
             <a:ext cx="1609344" cy="201168"/>
           </a:xfrm>
           <a:prstGeom prst="rect">
@@ -4219,7 +4213,7 @@
                 <a:ea typeface="Aptos" pitchFamily="34" charset="-122"/>
                 <a:cs typeface="Aptos" pitchFamily="34" charset="-120"/>
               </a:rPr>
-              <a:t>Context</a:t>
+              <a:t>Tools</a:t>
             </a:r>
             <a:endParaRPr lang="en-US" sz="1400" dirty="0"/>
           </a:p>
@@ -4233,7 +4227,7 @@
         </p:nvSpPr>
         <p:spPr>
           <a:xfrm>
-            <a:off x="3035808" y="2798064"/>
+            <a:off x="4059936" y="2670048"/>
             <a:ext cx="1609344" cy="310896"/>
           </a:xfrm>
           <a:prstGeom prst="rect">
@@ -4260,7 +4254,7 @@
                 <a:ea typeface="Aptos" pitchFamily="34" charset="-122"/>
                 <a:cs typeface="Aptos" pitchFamily="34" charset="-120"/>
               </a:rPr>
-              <a:t>geschiedenis,</a:t>
+              <a:t>rechten,</a:t>
             </a:r>
             <a:endParaRPr lang="en-US" sz="1000" dirty="0"/>
           </a:p>
@@ -4277,10 +4271,27 @@
                 <a:ea typeface="Aptos" pitchFamily="34" charset="-122"/>
                 <a:cs typeface="Aptos" pitchFamily="34" charset="-120"/>
               </a:rPr>
-              <a:t>retrieval, files</a:t>
+              <a:t>schema's,</a:t>
             </a:r>
             <a:endParaRPr lang="en-US" sz="1000" dirty="0"/>
           </a:p>
+          <a:p>
+            <a:pPr indent="0" marL="0">
+              <a:buNone/>
+            </a:pPr>
+            <a:r>
+              <a:rPr lang="en-US" sz="1000" dirty="0">
+                <a:solidFill>
+                  <a:srgbClr val="D7DCE7"/>
+                </a:solidFill>
+                <a:latin typeface="Aptos" pitchFamily="34" charset="0"/>
+                <a:ea typeface="Aptos" pitchFamily="34" charset="-122"/>
+                <a:cs typeface="Aptos" pitchFamily="34" charset="-120"/>
+              </a:rPr>
+              <a:t>routing</a:t>
+            </a:r>
+            <a:endParaRPr lang="en-US" sz="1000" dirty="0"/>
+          </a:p>
         </p:txBody>
       </p:sp>
       <p:sp>
@@ -4291,7 +4302,7 @@
         </p:nvSpPr>
         <p:spPr>
           <a:xfrm>
-            <a:off x="4901184" y="2340864"/>
+            <a:off x="6839712" y="2212848"/>
             <a:ext cx="1901952" cy="1005840"/>
           </a:xfrm>
           <a:prstGeom prst="roundRect">
@@ -4318,7 +4329,7 @@
         </p:nvSpPr>
         <p:spPr>
           <a:xfrm>
-            <a:off x="5047488" y="2505456"/>
+            <a:off x="6986016" y="2377440"/>
             <a:ext cx="1609344" cy="201168"/>
           </a:xfrm>
           <a:prstGeom prst="rect">
@@ -4345,7 +4356,7 @@
                 <a:ea typeface="Aptos" pitchFamily="34" charset="-122"/>
                 <a:cs typeface="Aptos" pitchFamily="34" charset="-120"/>
               </a:rPr>
-              <a:t>Tools</a:t>
+              <a:t>State</a:t>
             </a:r>
             <a:endParaRPr lang="en-US" sz="1400" dirty="0"/>
           </a:p>
@@ -4359,7 +4370,7 @@
         </p:nvSpPr>
         <p:spPr>
           <a:xfrm>
-            <a:off x="5047488" y="2798064"/>
+            <a:off x="6986016" y="2670048"/>
             <a:ext cx="1609344" cy="310896"/>
           </a:xfrm>
           <a:prstGeom prst="rect">
@@ -4386,7 +4397,7 @@
                 <a:ea typeface="Aptos" pitchFamily="34" charset="-122"/>
                 <a:cs typeface="Aptos" pitchFamily="34" charset="-120"/>
               </a:rPr>
-              <a:t>schema's,</a:t>
+              <a:t>sessies,</a:t>
             </a:r>
             <a:endParaRPr lang="en-US" sz="1000" dirty="0"/>
           </a:p>
@@ -4403,10 +4414,27 @@
                 <a:ea typeface="Aptos" pitchFamily="34" charset="-122"/>
                 <a:cs typeface="Aptos" pitchFamily="34" charset="-120"/>
               </a:rPr>
-              <a:t>rechten</a:t>
+              <a:t>externe</a:t>
             </a:r>
             <a:endParaRPr lang="en-US" sz="1000" dirty="0"/>
           </a:p>
+          <a:p>
+            <a:pPr indent="0" marL="0">
+              <a:buNone/>
+            </a:pPr>
+            <a:r>
+              <a:rPr lang="en-US" sz="1000" dirty="0">
+                <a:solidFill>
+                  <a:srgbClr val="D7DCE7"/>
+                </a:solidFill>
+                <a:latin typeface="Aptos" pitchFamily="34" charset="0"/>
+                <a:ea typeface="Aptos" pitchFamily="34" charset="-122"/>
+                <a:cs typeface="Aptos" pitchFamily="34" charset="-120"/>
+              </a:rPr>
+              <a:t>geheugenlaag</a:t>
+            </a:r>
+            <a:endParaRPr lang="en-US" sz="1000" dirty="0"/>
+          </a:p>
         </p:txBody>
       </p:sp>
       <p:sp>
@@ -4417,12 +4445,12 @@
         </p:nvSpPr>
         <p:spPr>
           <a:xfrm>
-            <a:off x="6912864" y="2340864"/>
-            <a:ext cx="1901952" cy="1005840"/>
+            <a:off x="713232" y="3950208"/>
+            <a:ext cx="6912864" cy="1426464"/>
           </a:xfrm>
           <a:prstGeom prst="roundRect">
             <a:avLst>
-              <a:gd name="adj" fmla="val 5455"/>
+              <a:gd name="adj" fmla="val 3846"/>
             </a:avLst>
           </a:prstGeom>
           <a:solidFill>
@@ -4444,8 +4472,8 @@
         </p:nvSpPr>
         <p:spPr>
           <a:xfrm>
-            <a:off x="7059168" y="2505456"/>
-            <a:ext cx="1609344" cy="201168"/>
+            <a:off x="950976" y="4242816"/>
+            <a:ext cx="2560320" cy="201168"/>
           </a:xfrm>
           <a:prstGeom prst="rect">
             <a:avLst/>
@@ -4471,7 +4499,7 @@
                 <a:ea typeface="Aptos" pitchFamily="34" charset="-122"/>
                 <a:cs typeface="Aptos" pitchFamily="34" charset="-120"/>
               </a:rPr>
-              <a:t>Model</a:t>
+              <a:t>Wat OpenClaw hier hard maakt</a:t>
             </a:r>
             <a:endParaRPr lang="en-US" sz="1400" dirty="0"/>
           </a:p>
@@ -4485,53 +4513,53 @@
         </p:nvSpPr>
         <p:spPr>
           <a:xfrm>
-            <a:off x="7059168" y="2798064"/>
-            <a:ext cx="1609344" cy="310896"/>
-          </a:xfrm>
-          <a:prstGeom prst="rect">
-            <a:avLst/>
-          </a:prstGeom>
-          <a:noFill/>
-          <a:ln/>
-        </p:spPr>
-        <p:txBody>
-          <a:bodyPr wrap="square" lIns="0" tIns="0" rIns="0" bIns="0" rtlCol="0" anchor="ctr">
-            <a:normAutofit/>
-          </a:bodyPr>
-          <a:lstStyle/>
-          <a:p>
-            <a:pPr indent="0" marL="0">
-              <a:buNone/>
-            </a:pPr>
-            <a:r>
-              <a:rPr lang="en-US" sz="1000" dirty="0">
-                <a:solidFill>
-                  <a:srgbClr val="D7DCE7"/>
-                </a:solidFill>
-                <a:latin typeface="Aptos" pitchFamily="34" charset="0"/>
-                <a:ea typeface="Aptos" pitchFamily="34" charset="-122"/>
-                <a:cs typeface="Aptos" pitchFamily="34" charset="-120"/>
-              </a:rPr>
-              <a:t>redenatie,</a:t>
-            </a:r>
-            <a:endParaRPr lang="en-US" sz="1000" dirty="0"/>
-          </a:p>
-          <a:p>
-            <a:pPr indent="0" marL="0">
-              <a:buNone/>
-            </a:pPr>
-            <a:r>
-              <a:rPr lang="en-US" sz="1000" dirty="0">
-                <a:solidFill>
-                  <a:srgbClr val="D7DCE7"/>
-                </a:solidFill>
-                <a:latin typeface="Aptos" pitchFamily="34" charset="0"/>
-                <a:ea typeface="Aptos" pitchFamily="34" charset="-122"/>
-                <a:cs typeface="Aptos" pitchFamily="34" charset="-120"/>
-              </a:rPr>
-              <a:t>output</a:t>
-            </a:r>
-            <a:endParaRPr lang="en-US" sz="1000" dirty="0"/>
+            <a:off x="950976" y="4572000"/>
+            <a:ext cx="6126480" cy="512064"/>
+          </a:xfrm>
+          <a:prstGeom prst="rect">
+            <a:avLst/>
+          </a:prstGeom>
+          <a:noFill/>
+          <a:ln/>
+        </p:spPr>
+        <p:txBody>
+          <a:bodyPr wrap="square" lIns="0" tIns="0" rIns="0" bIns="0" rtlCol="0" anchor="ctr">
+            <a:normAutofit/>
+          </a:bodyPr>
+          <a:lstStyle/>
+          <a:p>
+            <a:pPr indent="0" marL="0">
+              <a:buNone/>
+            </a:pPr>
+            <a:r>
+              <a:rPr lang="en-US" sz="1700" b="1" dirty="0">
+                <a:solidFill>
+                  <a:srgbClr val="FFFFFF"/>
+                </a:solidFill>
+                <a:latin typeface="Aptos Display" pitchFamily="34" charset="0"/>
+                <a:ea typeface="Aptos Display" pitchFamily="34" charset="-122"/>
+                <a:cs typeface="Aptos Display" pitchFamily="34" charset="-120"/>
+              </a:rPr>
+              <a:t>Multi-agent gedrag is technisch echt.</a:t>
+            </a:r>
+            <a:endParaRPr lang="en-US" sz="1700" dirty="0"/>
+          </a:p>
+          <a:p>
+            <a:pPr indent="0" marL="0">
+              <a:buNone/>
+            </a:pPr>
+            <a:r>
+              <a:rPr lang="en-US" sz="1700" b="1" dirty="0">
+                <a:solidFill>
+                  <a:srgbClr val="FFFFFF"/>
+                </a:solidFill>
+                <a:latin typeface="Aptos Display" pitchFamily="34" charset="0"/>
+                <a:ea typeface="Aptos Display" pitchFamily="34" charset="-122"/>
+                <a:cs typeface="Aptos Display" pitchFamily="34" charset="-120"/>
+              </a:rPr>
+              <a:t>Maar het blijft opgebouwd uit context, tools, policies en state.</a:t>
+            </a:r>
+            <a:endParaRPr lang="en-US" sz="1700" dirty="0"/>
           </a:p>
         </p:txBody>
       </p:sp>
@@ -4543,12 +4571,12 @@
         </p:nvSpPr>
         <p:spPr>
           <a:xfrm>
-            <a:off x="8924544" y="2340864"/>
-            <a:ext cx="1901952" cy="1005840"/>
+            <a:off x="7936992" y="1920240"/>
+            <a:ext cx="3566160" cy="3456432"/>
           </a:xfrm>
           <a:prstGeom prst="roundRect">
             <a:avLst>
-              <a:gd name="adj" fmla="val 5455"/>
+              <a:gd name="adj" fmla="val 1587"/>
             </a:avLst>
           </a:prstGeom>
           <a:solidFill>
@@ -4562,119 +4590,44 @@
           </a:ln>
         </p:spPr>
       </p:sp>
-      <p:sp>
-        <p:nvSpPr>
-          <p:cNvPr id="26" name="Text 23"/>
-          <p:cNvSpPr/>
-          <p:nvPr/>
-        </p:nvSpPr>
-        <p:spPr>
-          <a:xfrm>
-            <a:off x="9070848" y="2505456"/>
-            <a:ext cx="1609344" cy="201168"/>
-          </a:xfrm>
-          <a:prstGeom prst="rect">
-            <a:avLst/>
-          </a:prstGeom>
-          <a:noFill/>
-          <a:ln/>
-        </p:spPr>
-        <p:txBody>
-          <a:bodyPr wrap="square" lIns="0" tIns="0" rIns="0" bIns="0" rtlCol="0" anchor="ctr">
-            <a:normAutofit/>
-          </a:bodyPr>
-          <a:lstStyle/>
-          <a:p>
-            <a:pPr indent="0" marL="0">
-              <a:buNone/>
-            </a:pPr>
-            <a:r>
-              <a:rPr lang="en-US" sz="1400" b="1" dirty="0">
-                <a:solidFill>
-                  <a:srgbClr val="F2AD18"/>
-                </a:solidFill>
-                <a:latin typeface="Aptos" pitchFamily="34" charset="0"/>
-                <a:ea typeface="Aptos" pitchFamily="34" charset="-122"/>
-                <a:cs typeface="Aptos" pitchFamily="34" charset="-120"/>
-              </a:rPr>
-              <a:t>State</a:t>
-            </a:r>
-            <a:endParaRPr lang="en-US" sz="1400" dirty="0"/>
-          </a:p>
-        </p:txBody>
-      </p:sp>
-      <p:sp>
-        <p:nvSpPr>
-          <p:cNvPr id="27" name="Text 24"/>
-          <p:cNvSpPr/>
-          <p:nvPr/>
-        </p:nvSpPr>
-        <p:spPr>
-          <a:xfrm>
-            <a:off x="9070848" y="2798064"/>
-            <a:ext cx="1609344" cy="310896"/>
-          </a:xfrm>
-          <a:prstGeom prst="rect">
-            <a:avLst/>
-          </a:prstGeom>
-          <a:noFill/>
-          <a:ln/>
-        </p:spPr>
-        <p:txBody>
-          <a:bodyPr wrap="square" lIns="0" tIns="0" rIns="0" bIns="0" rtlCol="0" anchor="ctr">
-            <a:normAutofit/>
-          </a:bodyPr>
-          <a:lstStyle/>
-          <a:p>
-            <a:pPr indent="0" marL="0">
-              <a:buNone/>
-            </a:pPr>
-            <a:r>
-              <a:rPr lang="en-US" sz="1000" dirty="0">
-                <a:solidFill>
-                  <a:srgbClr val="D7DCE7"/>
-                </a:solidFill>
-                <a:latin typeface="Aptos" pitchFamily="34" charset="0"/>
-                <a:ea typeface="Aptos" pitchFamily="34" charset="-122"/>
-                <a:cs typeface="Aptos" pitchFamily="34" charset="-120"/>
-              </a:rPr>
-              <a:t>routing,</a:t>
-            </a:r>
-            <a:endParaRPr lang="en-US" sz="1000" dirty="0"/>
-          </a:p>
-          <a:p>
-            <a:pPr indent="0" marL="0">
-              <a:buNone/>
-            </a:pPr>
-            <a:r>
-              <a:rPr lang="en-US" sz="1000" dirty="0">
-                <a:solidFill>
-                  <a:srgbClr val="D7DCE7"/>
-                </a:solidFill>
-                <a:latin typeface="Aptos" pitchFamily="34" charset="0"/>
-                <a:ea typeface="Aptos" pitchFamily="34" charset="-122"/>
-                <a:cs typeface="Aptos" pitchFamily="34" charset="-120"/>
-              </a:rPr>
-              <a:t>externe geheugenlaag</a:t>
-            </a:r>
-            <a:endParaRPr lang="en-US" sz="1000" dirty="0"/>
-          </a:p>
-        </p:txBody>
-      </p:sp>
-      <p:sp>
-        <p:nvSpPr>
-          <p:cNvPr id="28" name="Shape 25"/>
-          <p:cNvSpPr/>
-          <p:nvPr/>
-        </p:nvSpPr>
-        <p:spPr>
-          <a:xfrm>
-            <a:off x="713232" y="4133088"/>
-            <a:ext cx="6547104" cy="1261872"/>
+      <p:pic>
+        <p:nvPicPr>
+          <p:cNvPr id="26" name="Image 1" descr="/home/ff/Documents/BoostMeUp/MoltBook_Sessie/assets/openclaw_context_docs.png">    </p:cNvPr>
+          <p:cNvPicPr>
+            <a:picLocks noChangeAspect="1"/>
+          </p:cNvPicPr>
+          <p:nvPr/>
+        </p:nvPicPr>
+        <p:blipFill>
+          <a:blip r:embed="rId2"/>
+          <a:stretch>
+            <a:fillRect/>
+          </a:stretch>
+        </p:blipFill>
+        <p:spPr>
+          <a:xfrm>
+            <a:off x="8046720" y="2029968"/>
+            <a:ext cx="3346704" cy="3236976"/>
+          </a:xfrm>
+          <a:prstGeom prst="rect">
+            <a:avLst/>
+          </a:prstGeom>
+        </p:spPr>
+      </p:pic>
+      <p:sp>
+        <p:nvSpPr>
+          <p:cNvPr id="27" name="Shape 23"/>
+          <p:cNvSpPr/>
+          <p:nvPr/>
+        </p:nvSpPr>
+        <p:spPr>
+          <a:xfrm>
+            <a:off x="713232" y="5504688"/>
+            <a:ext cx="10927080" cy="640080"/>
           </a:xfrm>
           <a:prstGeom prst="roundRect">
             <a:avLst>
-              <a:gd name="adj" fmla="val 4348"/>
+              <a:gd name="adj" fmla="val 11429"/>
             </a:avLst>
           </a:prstGeom>
           <a:solidFill>
@@ -4690,184 +4643,7 @@
       </p:sp>
       <p:sp>
         <p:nvSpPr>
-          <p:cNvPr id="29" name="Text 26"/>
-          <p:cNvSpPr/>
-          <p:nvPr/>
-        </p:nvSpPr>
-        <p:spPr>
-          <a:xfrm>
-            <a:off x="932688" y="4389120"/>
-            <a:ext cx="2194560" cy="201168"/>
-          </a:xfrm>
-          <a:prstGeom prst="rect">
-            <a:avLst/>
-          </a:prstGeom>
-          <a:noFill/>
-          <a:ln/>
-        </p:spPr>
-        <p:txBody>
-          <a:bodyPr wrap="square" lIns="0" tIns="0" rIns="0" bIns="0" rtlCol="0" anchor="ctr">
-            <a:normAutofit/>
-          </a:bodyPr>
-          <a:lstStyle/>
-          <a:p>
-            <a:pPr indent="0" marL="0">
-              <a:buNone/>
-            </a:pPr>
-            <a:r>
-              <a:rPr lang="en-US" sz="1400" b="1" dirty="0">
-                <a:solidFill>
-                  <a:srgbClr val="F2AD18"/>
-                </a:solidFill>
-                <a:latin typeface="Aptos" pitchFamily="34" charset="0"/>
-                <a:ea typeface="Aptos" pitchFamily="34" charset="-122"/>
-                <a:cs typeface="Aptos" pitchFamily="34" charset="-120"/>
-              </a:rPr>
-              <a:t>Wat OpenClaw expliciet toont</a:t>
-            </a:r>
-            <a:endParaRPr lang="en-US" sz="1400" dirty="0"/>
-          </a:p>
-        </p:txBody>
-      </p:sp>
-      <p:sp>
-        <p:nvSpPr>
-          <p:cNvPr id="30" name="Text 27"/>
-          <p:cNvSpPr/>
-          <p:nvPr/>
-        </p:nvSpPr>
-        <p:spPr>
-          <a:xfrm>
-            <a:off x="932688" y="4700016"/>
-            <a:ext cx="5852160" cy="512064"/>
-          </a:xfrm>
-          <a:prstGeom prst="rect">
-            <a:avLst/>
-          </a:prstGeom>
-          <a:noFill/>
-          <a:ln/>
-        </p:spPr>
-        <p:txBody>
-          <a:bodyPr wrap="square" lIns="0" tIns="0" rIns="0" bIns="0" rtlCol="0" anchor="ctr">
-            <a:normAutofit/>
-          </a:bodyPr>
-          <a:lstStyle/>
-          <a:p>
-            <a:pPr indent="0" marL="0">
-              <a:buNone/>
-            </a:pPr>
-            <a:r>
-              <a:rPr lang="en-US" sz="1400" dirty="0">
-                <a:solidFill>
-                  <a:srgbClr val="FFFFFF"/>
-                </a:solidFill>
-                <a:latin typeface="Aptos" pitchFamily="34" charset="0"/>
-                <a:ea typeface="Aptos" pitchFamily="34" charset="-122"/>
-                <a:cs typeface="Aptos" pitchFamily="34" charset="-120"/>
-              </a:rPr>
-              <a:t>Routing, sandboxes en tool policy zijn technisch echt.</a:t>
-            </a:r>
-            <a:endParaRPr lang="en-US" sz="1400" dirty="0"/>
-          </a:p>
-          <a:p>
-            <a:pPr indent="0" marL="0">
-              <a:buNone/>
-            </a:pPr>
-            <a:r>
-              <a:rPr lang="en-US" sz="1400" dirty="0">
-                <a:solidFill>
-                  <a:srgbClr val="FFFFFF"/>
-                </a:solidFill>
-                <a:latin typeface="Aptos" pitchFamily="34" charset="0"/>
-                <a:ea typeface="Aptos" pitchFamily="34" charset="-122"/>
-                <a:cs typeface="Aptos" pitchFamily="34" charset="-120"/>
-              </a:rPr>
-              <a:t>Maar multi-agent setups zijn ook token-heavy en operationeel fragiel.</a:t>
-            </a:r>
-            <a:endParaRPr lang="en-US" sz="1400" dirty="0"/>
-          </a:p>
-        </p:txBody>
-      </p:sp>
-      <p:sp>
-        <p:nvSpPr>
-          <p:cNvPr id="31" name="Shape 28"/>
-          <p:cNvSpPr/>
-          <p:nvPr/>
-        </p:nvSpPr>
-        <p:spPr>
-          <a:xfrm>
-            <a:off x="7589520" y="3858768"/>
-            <a:ext cx="3913632" cy="1920240"/>
-          </a:xfrm>
-          <a:prstGeom prst="roundRect">
-            <a:avLst>
-              <a:gd name="adj" fmla="val 2857"/>
-            </a:avLst>
-          </a:prstGeom>
-          <a:solidFill>
-            <a:srgbClr val="1C2540"/>
-          </a:solidFill>
-          <a:ln w="12700">
-            <a:solidFill>
-              <a:srgbClr val="394258"/>
-            </a:solidFill>
-            <a:prstDash val="solid"/>
-          </a:ln>
-        </p:spPr>
-      </p:sp>
-      <p:pic>
-        <p:nvPicPr>
-          <p:cNvPr id="32" name="Image 1" descr="/home/ff/Documents/BoostMeUp/MoltBook_Sessie/assets/openclaw_context_docs.png">    </p:cNvPr>
-          <p:cNvPicPr>
-            <a:picLocks noChangeAspect="1"/>
-          </p:cNvPicPr>
-          <p:nvPr/>
-        </p:nvPicPr>
-        <p:blipFill>
-          <a:blip r:embed="rId2"/>
-          <a:stretch>
-            <a:fillRect/>
-          </a:stretch>
-        </p:blipFill>
-        <p:spPr>
-          <a:xfrm>
-            <a:off x="7699248" y="3968496"/>
-            <a:ext cx="3694176" cy="1700784"/>
-          </a:xfrm>
-          <a:prstGeom prst="rect">
-            <a:avLst/>
-          </a:prstGeom>
-        </p:spPr>
-      </p:pic>
-      <p:sp>
-        <p:nvSpPr>
-          <p:cNvPr id="33" name="Shape 29"/>
-          <p:cNvSpPr/>
-          <p:nvPr/>
-        </p:nvSpPr>
-        <p:spPr>
-          <a:xfrm>
-            <a:off x="713232" y="5504688"/>
-            <a:ext cx="10927080" cy="640080"/>
-          </a:xfrm>
-          <a:prstGeom prst="roundRect">
-            <a:avLst>
-              <a:gd name="adj" fmla="val 11429"/>
-            </a:avLst>
-          </a:prstGeom>
-          <a:solidFill>
-            <a:srgbClr val="1C2540"/>
-          </a:solidFill>
-          <a:ln w="12700">
-            <a:solidFill>
-              <a:srgbClr val="394258"/>
-            </a:solidFill>
-            <a:prstDash val="solid"/>
-          </a:ln>
-        </p:spPr>
-      </p:sp>
-      <p:sp>
-        <p:nvSpPr>
-          <p:cNvPr id="34" name="Text 30"/>
+          <p:cNvPr id="28" name="Text 24"/>
           <p:cNvSpPr/>
           <p:nvPr/>
         </p:nvSpPr>
@@ -4900,7 +4676,7 @@
                 <a:ea typeface="Aptos" pitchFamily="34" charset="-122"/>
                 <a:cs typeface="Aptos" pitchFamily="34" charset="-120"/>
               </a:rPr>
-              <a:t>Takeaway: dit is een architectuurverhaal, geen bewijs van één stabiel digitaal organisme.</a:t>
+              <a:t>Takeaway: architectuur is zichtbaar. Een autonoom digitaal organisme nog niet.</a:t>
             </a:r>
             <a:endParaRPr lang="en-US" sz="1200" dirty="0"/>
           </a:p>
@@ -5169,11 +4945,11 @@
         <p:spPr>
           <a:xfrm>
             <a:off x="713232" y="1261872"/>
-            <a:ext cx="4187952" cy="4462272"/>
+            <a:ext cx="3858768" cy="4279392"/>
           </a:xfrm>
           <a:prstGeom prst="roundRect">
             <a:avLst>
-              <a:gd name="adj" fmla="val 1310"/>
+              <a:gd name="adj" fmla="val 1422"/>
             </a:avLst>
           </a:prstGeom>
           <a:solidFill>
@@ -5265,26 +5041,26 @@
         </p:nvSpPr>
         <p:spPr>
           <a:xfrm>
-            <a:off x="914400" y="2011680"/>
-            <a:ext cx="2743200" cy="713232"/>
-          </a:xfrm>
-          <a:prstGeom prst="rect">
-            <a:avLst/>
-          </a:prstGeom>
-          <a:noFill/>
-          <a:ln/>
-        </p:spPr>
-        <p:txBody>
-          <a:bodyPr wrap="square" lIns="0" tIns="0" rIns="0" bIns="0" rtlCol="0" anchor="ctr">
-            <a:normAutofit/>
-          </a:bodyPr>
-          <a:lstStyle/>
-          <a:p>
-            <a:pPr indent="0" marL="0">
-              <a:buNone/>
-            </a:pPr>
-            <a:r>
-              <a:rPr lang="en-US" sz="4200" b="1" dirty="0">
+            <a:off x="932688" y="1828800"/>
+            <a:ext cx="2560320" cy="749808"/>
+          </a:xfrm>
+          <a:prstGeom prst="rect">
+            <a:avLst/>
+          </a:prstGeom>
+          <a:noFill/>
+          <a:ln/>
+        </p:spPr>
+        <p:txBody>
+          <a:bodyPr wrap="square" lIns="0" tIns="0" rIns="0" bIns="0" rtlCol="0" anchor="ctr">
+            <a:normAutofit/>
+          </a:bodyPr>
+          <a:lstStyle/>
+          <a:p>
+            <a:pPr indent="0" marL="0">
+              <a:buNone/>
+            </a:pPr>
+            <a:r>
+              <a:rPr lang="en-US" sz="4800" b="1" dirty="0">
                 <a:solidFill>
                   <a:srgbClr val="E93325"/>
                 </a:solidFill>
@@ -5294,7 +5070,7 @@
               </a:rPr>
               <a:t>87%</a:t>
             </a:r>
-            <a:endParaRPr lang="en-US" sz="4200" dirty="0"/>
+            <a:endParaRPr lang="en-US" sz="4800" dirty="0"/>
           </a:p>
         </p:txBody>
       </p:sp>
@@ -5306,67 +5082,26 @@
         </p:nvSpPr>
         <p:spPr>
           <a:xfrm>
-            <a:off x="932688" y="2761488"/>
-            <a:ext cx="3291840" cy="548640"/>
-          </a:xfrm>
-          <a:prstGeom prst="rect">
-            <a:avLst/>
-          </a:prstGeom>
-          <a:noFill/>
-          <a:ln/>
-        </p:spPr>
-        <p:txBody>
-          <a:bodyPr wrap="square" lIns="0" tIns="0" rIns="0" bIns="0" rtlCol="0" anchor="ctr">
-            <a:normAutofit/>
-          </a:bodyPr>
-          <a:lstStyle/>
-          <a:p>
-            <a:pPr indent="0" marL="0">
-              <a:buNone/>
-            </a:pPr>
-            <a:r>
-              <a:rPr lang="en-US" sz="1800" b="1" dirty="0">
-                <a:solidFill>
-                  <a:srgbClr val="12192C"/>
-                </a:solidFill>
-                <a:latin typeface="Aptos" pitchFamily="34" charset="0"/>
-                <a:ea typeface="Aptos" pitchFamily="34" charset="-122"/>
-                <a:cs typeface="Aptos" pitchFamily="34" charset="-120"/>
-              </a:rPr>
-              <a:t>van de totale cyclus zit in het herladen van context</a:t>
-            </a:r>
-            <a:endParaRPr lang="en-US" sz="1800" dirty="0"/>
-          </a:p>
-        </p:txBody>
-      </p:sp>
-      <p:sp>
-        <p:nvSpPr>
-          <p:cNvPr id="14" name="Text 11"/>
-          <p:cNvSpPr/>
-          <p:nvPr/>
-        </p:nvSpPr>
-        <p:spPr>
-          <a:xfrm>
-            <a:off x="932688" y="3730752"/>
-            <a:ext cx="3566160" cy="310896"/>
-          </a:xfrm>
-          <a:prstGeom prst="rect">
-            <a:avLst/>
-          </a:prstGeom>
-          <a:noFill/>
-          <a:ln/>
-        </p:spPr>
-        <p:txBody>
-          <a:bodyPr wrap="square" lIns="0" tIns="0" rIns="0" bIns="0" rtlCol="0" anchor="ctr">
-            <a:normAutofit/>
-          </a:bodyPr>
-          <a:lstStyle/>
-          <a:p>
-            <a:pPr indent="0" marL="0">
-              <a:buNone/>
-            </a:pPr>
-            <a:r>
-              <a:rPr lang="en-US" sz="1800" b="1" dirty="0">
+            <a:off x="932688" y="2724912"/>
+            <a:ext cx="2926080" cy="493776"/>
+          </a:xfrm>
+          <a:prstGeom prst="rect">
+            <a:avLst/>
+          </a:prstGeom>
+          <a:noFill/>
+          <a:ln/>
+        </p:spPr>
+        <p:txBody>
+          <a:bodyPr wrap="square" lIns="0" tIns="0" rIns="0" bIns="0" rtlCol="0" anchor="ctr">
+            <a:normAutofit/>
+          </a:bodyPr>
+          <a:lstStyle/>
+          <a:p>
+            <a:pPr indent="0" marL="0">
+              <a:buNone/>
+            </a:pPr>
+            <a:r>
+              <a:rPr lang="en-US" sz="2000" b="1" dirty="0">
                 <a:solidFill>
                   <a:srgbClr val="12192C"/>
                 </a:solidFill>
@@ -5374,9 +5109,50 @@
                 <a:ea typeface="Aptos Display" pitchFamily="34" charset="-122"/>
                 <a:cs typeface="Aptos Display" pitchFamily="34" charset="-120"/>
               </a:rPr>
-              <a:t>$0,377 per read-reply-post-cyclus op Opus 4.6</a:t>
-            </a:r>
-            <a:endParaRPr lang="en-US" sz="1800" dirty="0"/>
+              <a:t>van de illustratieve cyclus zit in context reload</a:t>
+            </a:r>
+            <a:endParaRPr lang="en-US" sz="2000" dirty="0"/>
+          </a:p>
+        </p:txBody>
+      </p:sp>
+      <p:sp>
+        <p:nvSpPr>
+          <p:cNvPr id="14" name="Text 11"/>
+          <p:cNvSpPr/>
+          <p:nvPr/>
+        </p:nvSpPr>
+        <p:spPr>
+          <a:xfrm>
+            <a:off x="932688" y="3822192"/>
+            <a:ext cx="2926080" cy="310896"/>
+          </a:xfrm>
+          <a:prstGeom prst="rect">
+            <a:avLst/>
+          </a:prstGeom>
+          <a:noFill/>
+          <a:ln/>
+        </p:spPr>
+        <p:txBody>
+          <a:bodyPr wrap="square" lIns="0" tIns="0" rIns="0" bIns="0" rtlCol="0" anchor="ctr">
+            <a:normAutofit/>
+          </a:bodyPr>
+          <a:lstStyle/>
+          <a:p>
+            <a:pPr indent="0" marL="0">
+              <a:buNone/>
+            </a:pPr>
+            <a:r>
+              <a:rPr lang="en-US" sz="2100" b="1" dirty="0">
+                <a:solidFill>
+                  <a:srgbClr val="12192C"/>
+                </a:solidFill>
+                <a:latin typeface="Aptos Display" pitchFamily="34" charset="0"/>
+                <a:ea typeface="Aptos Display" pitchFamily="34" charset="-122"/>
+                <a:cs typeface="Aptos Display" pitchFamily="34" charset="-120"/>
+              </a:rPr>
+              <a:t>$0,377 per read-reply-post-cyclus</a:t>
+            </a:r>
+            <a:endParaRPr lang="en-US" sz="2100" dirty="0"/>
           </a:p>
         </p:txBody>
       </p:sp>
@@ -5388,8 +5164,8 @@
         </p:nvSpPr>
         <p:spPr>
           <a:xfrm>
-            <a:off x="932688" y="4169664"/>
-            <a:ext cx="3291840" cy="256032"/>
+            <a:off x="932688" y="4187952"/>
+            <a:ext cx="2926080" cy="219456"/>
           </a:xfrm>
           <a:prstGeom prst="rect">
             <a:avLst/>
@@ -5415,7 +5191,7 @@
                 <a:ea typeface="Aptos" pitchFamily="34" charset="-122"/>
                 <a:cs typeface="Aptos" pitchFamily="34" charset="-120"/>
               </a:rPr>
-              <a:t>Dat bedrag komt uit expliciete aannames in deze repo.</a:t>
+              <a:t>op Claude Opus 4.6, onder repo-aannames</a:t>
             </a:r>
             <a:endParaRPr lang="en-US" sz="1200" dirty="0"/>
           </a:p>
@@ -5429,12 +5205,12 @@
         </p:nvSpPr>
         <p:spPr>
           <a:xfrm>
-            <a:off x="5175504" y="1261872"/>
-            <a:ext cx="6236208" cy="4462272"/>
+            <a:off x="4828032" y="1261872"/>
+            <a:ext cx="6583680" cy="4279392"/>
           </a:xfrm>
           <a:prstGeom prst="roundRect">
             <a:avLst>
-              <a:gd name="adj" fmla="val 1230"/>
+              <a:gd name="adj" fmla="val 1282"/>
             </a:avLst>
           </a:prstGeom>
           <a:solidFill>
@@ -5456,8 +5232,8 @@
         </p:nvSpPr>
         <p:spPr>
           <a:xfrm>
-            <a:off x="5449824" y="1554480"/>
-            <a:ext cx="3108960" cy="219456"/>
+            <a:off x="5102352" y="1572768"/>
+            <a:ext cx="2011680" cy="219456"/>
           </a:xfrm>
           <a:prstGeom prst="rect">
             <a:avLst/>
@@ -5483,7 +5259,7 @@
                 <a:ea typeface="Aptos" pitchFamily="34" charset="-122"/>
                 <a:cs typeface="Aptos" pitchFamily="34" charset="-120"/>
               </a:rPr>
-              <a:t>Waar de tokens echt naartoe gaan</a:t>
+              <a:t>Eén groot verschil</a:t>
             </a:r>
             <a:endParaRPr lang="en-US" sz="1600" dirty="0"/>
           </a:p>
@@ -5497,8 +5273,8 @@
         </p:nvSpPr>
         <p:spPr>
           <a:xfrm>
-            <a:off x="5449824" y="1956816"/>
-            <a:ext cx="5303520" cy="182880"/>
+            <a:off x="5102352" y="2066544"/>
+            <a:ext cx="5486400" cy="182880"/>
           </a:xfrm>
           <a:prstGeom prst="rect">
             <a:avLst/>
@@ -5524,7 +5300,7 @@
                 <a:ea typeface="Aptos" pitchFamily="34" charset="-122"/>
                 <a:cs typeface="Aptos" pitchFamily="34" charset="-120"/>
               </a:rPr>
-              <a:t>Context laden (3x)</a:t>
+              <a:t>Context reload (3x)</a:t>
             </a:r>
             <a:endParaRPr lang="en-US" sz="1100" dirty="0"/>
           </a:p>
@@ -5538,8 +5314,8 @@
         </p:nvSpPr>
         <p:spPr>
           <a:xfrm>
-            <a:off x="5449824" y="2194560"/>
-            <a:ext cx="5303520" cy="237744"/>
+            <a:off x="5102352" y="2304288"/>
+            <a:ext cx="5486400" cy="237744"/>
           </a:xfrm>
           <a:prstGeom prst="roundRect">
             <a:avLst>
@@ -5567,8 +5343,8 @@
         </p:nvSpPr>
         <p:spPr>
           <a:xfrm>
-            <a:off x="5449824" y="2194560"/>
-            <a:ext cx="4614062" cy="237744"/>
+            <a:off x="5102352" y="2304288"/>
+            <a:ext cx="4773168" cy="237744"/>
           </a:xfrm>
           <a:prstGeom prst="roundRect">
             <a:avLst>
@@ -5596,7 +5372,7 @@
         </p:nvSpPr>
         <p:spPr>
           <a:xfrm>
-            <a:off x="9930384" y="1975104"/>
+            <a:off x="9765792" y="2084832"/>
             <a:ext cx="822960" cy="164592"/>
           </a:xfrm>
           <a:prstGeom prst="rect">
@@ -5623,7 +5399,7 @@
                 <a:ea typeface="Aptos" pitchFamily="34" charset="-122"/>
                 <a:cs typeface="Aptos" pitchFamily="34" charset="-120"/>
               </a:rPr>
-              <a:t>60.900</a:t>
+              <a:t>60.900 tokens</a:t>
             </a:r>
             <a:endParaRPr lang="en-US" sz="1100" dirty="0"/>
           </a:p>
@@ -5637,8 +5413,8 @@
         </p:nvSpPr>
         <p:spPr>
           <a:xfrm>
-            <a:off x="5449824" y="2688336"/>
-            <a:ext cx="5303520" cy="182880"/>
+            <a:off x="5102352" y="2962656"/>
+            <a:ext cx="5486400" cy="182880"/>
           </a:xfrm>
           <a:prstGeom prst="rect">
             <a:avLst/>
@@ -5664,7 +5440,7 @@
                 <a:ea typeface="Aptos" pitchFamily="34" charset="-122"/>
                 <a:cs typeface="Aptos" pitchFamily="34" charset="-120"/>
               </a:rPr>
-              <a:t>Timeline + reply + post</a:t>
+              <a:t>Alles daarbuiten</a:t>
             </a:r>
             <a:endParaRPr lang="en-US" sz="1100" dirty="0"/>
           </a:p>
@@ -5678,8 +5454,8 @@
         </p:nvSpPr>
         <p:spPr>
           <a:xfrm>
-            <a:off x="5449824" y="2926080"/>
-            <a:ext cx="5303520" cy="237744"/>
+            <a:off x="5102352" y="3200400"/>
+            <a:ext cx="5486400" cy="237744"/>
           </a:xfrm>
           <a:prstGeom prst="roundRect">
             <a:avLst>
@@ -5707,8 +5483,8 @@
         </p:nvSpPr>
         <p:spPr>
           <a:xfrm>
-            <a:off x="5449824" y="2926080"/>
-            <a:ext cx="689458" cy="237744"/>
+            <a:off x="5102352" y="3200400"/>
+            <a:ext cx="713232" cy="237744"/>
           </a:xfrm>
           <a:prstGeom prst="roundRect">
             <a:avLst>
@@ -5736,7 +5512,7 @@
         </p:nvSpPr>
         <p:spPr>
           <a:xfrm>
-            <a:off x="9930384" y="2706624"/>
+            <a:off x="9765792" y="2980944"/>
             <a:ext cx="822960" cy="164592"/>
           </a:xfrm>
           <a:prstGeom prst="rect">
@@ -5763,7 +5539,7 @@
                 <a:ea typeface="Aptos" pitchFamily="34" charset="-122"/>
                 <a:cs typeface="Aptos" pitchFamily="34" charset="-120"/>
               </a:rPr>
-              <a:t>8.900</a:t>
+              <a:t>8.900 tokens</a:t>
             </a:r>
             <a:endParaRPr lang="en-US" sz="1100" dirty="0"/>
           </a:p>
@@ -5777,26 +5553,125 @@
         </p:nvSpPr>
         <p:spPr>
           <a:xfrm>
-            <a:off x="5449824" y="3419856"/>
-            <a:ext cx="5303520" cy="182880"/>
-          </a:xfrm>
-          <a:prstGeom prst="rect">
-            <a:avLst/>
-          </a:prstGeom>
-          <a:noFill/>
-          <a:ln/>
-        </p:spPr>
-        <p:txBody>
-          <a:bodyPr wrap="square" lIns="0" tIns="0" rIns="0" bIns="0" rtlCol="0" anchor="ctr">
-            <a:normAutofit/>
-          </a:bodyPr>
-          <a:lstStyle/>
-          <a:p>
-            <a:pPr indent="0" marL="0">
-              <a:buNone/>
-            </a:pPr>
-            <a:r>
-              <a:rPr lang="en-US" sz="1100" b="1" dirty="0">
+            <a:off x="5102352" y="3840480"/>
+            <a:ext cx="1463040" cy="182880"/>
+          </a:xfrm>
+          <a:prstGeom prst="rect">
+            <a:avLst/>
+          </a:prstGeom>
+          <a:noFill/>
+          <a:ln/>
+        </p:spPr>
+        <p:txBody>
+          <a:bodyPr wrap="square" lIns="0" tIns="0" rIns="0" bIns="0" rtlCol="0" anchor="ctr">
+            <a:normAutofit/>
+          </a:bodyPr>
+          <a:lstStyle/>
+          <a:p>
+            <a:pPr indent="0" marL="0">
+              <a:buNone/>
+            </a:pPr>
+            <a:r>
+              <a:rPr lang="en-US" sz="1400" b="1" dirty="0">
+                <a:solidFill>
+                  <a:srgbClr val="E93325"/>
+                </a:solidFill>
+                <a:latin typeface="Aptos" pitchFamily="34" charset="0"/>
+                <a:ea typeface="Aptos" pitchFamily="34" charset="-122"/>
+                <a:cs typeface="Aptos" pitchFamily="34" charset="-120"/>
+              </a:rPr>
+              <a:t>De live-les</a:t>
+            </a:r>
+            <a:endParaRPr lang="en-US" sz="1400" dirty="0"/>
+          </a:p>
+        </p:txBody>
+      </p:sp>
+      <p:sp>
+        <p:nvSpPr>
+          <p:cNvPr id="27" name="Text 24"/>
+          <p:cNvSpPr/>
+          <p:nvPr/>
+        </p:nvSpPr>
+        <p:spPr>
+          <a:xfrm>
+            <a:off x="5102352" y="4133088"/>
+            <a:ext cx="5669280" cy="694944"/>
+          </a:xfrm>
+          <a:prstGeom prst="rect">
+            <a:avLst/>
+          </a:prstGeom>
+          <a:noFill/>
+          <a:ln/>
+        </p:spPr>
+        <p:txBody>
+          <a:bodyPr wrap="square" lIns="0" tIns="0" rIns="0" bIns="0" rtlCol="0" anchor="ctr">
+            <a:normAutofit/>
+          </a:bodyPr>
+          <a:lstStyle/>
+          <a:p>
+            <a:pPr indent="0" marL="0">
+              <a:buNone/>
+            </a:pPr>
+            <a:r>
+              <a:rPr lang="en-US" sz="1900" b="1" dirty="0">
+                <a:solidFill>
+                  <a:srgbClr val="12192C"/>
+                </a:solidFill>
+                <a:latin typeface="Aptos Display" pitchFamily="34" charset="0"/>
+                <a:ea typeface="Aptos Display" pitchFamily="34" charset="-122"/>
+                <a:cs typeface="Aptos Display" pitchFamily="34" charset="-120"/>
+              </a:rPr>
+              <a:t>Niet de reply domineert de kost.</a:t>
+            </a:r>
+            <a:endParaRPr lang="en-US" sz="1900" dirty="0"/>
+          </a:p>
+          <a:p>
+            <a:pPr indent="0" marL="0">
+              <a:buNone/>
+            </a:pPr>
+            <a:r>
+              <a:rPr lang="en-US" sz="1900" b="1" dirty="0">
+                <a:solidFill>
+                  <a:srgbClr val="12192C"/>
+                </a:solidFill>
+                <a:latin typeface="Aptos Display" pitchFamily="34" charset="0"/>
+                <a:ea typeface="Aptos Display" pitchFamily="34" charset="-122"/>
+                <a:cs typeface="Aptos Display" pitchFamily="34" charset="-120"/>
+              </a:rPr>
+              <a:t>Het is het telkens opnieuw laden van systeemcontext, instructies en geschiedenis.</a:t>
+            </a:r>
+            <a:endParaRPr lang="en-US" sz="1900" dirty="0"/>
+          </a:p>
+        </p:txBody>
+      </p:sp>
+      <p:sp>
+        <p:nvSpPr>
+          <p:cNvPr id="28" name="Text 25"/>
+          <p:cNvSpPr/>
+          <p:nvPr/>
+        </p:nvSpPr>
+        <p:spPr>
+          <a:xfrm>
+            <a:off x="5102352" y="5084064"/>
+            <a:ext cx="2377440" cy="146304"/>
+          </a:xfrm>
+          <a:prstGeom prst="rect">
+            <a:avLst/>
+          </a:prstGeom>
+          <a:noFill/>
+          <a:ln/>
+        </p:spPr>
+        <p:txBody>
+          <a:bodyPr wrap="square" lIns="0" tIns="0" rIns="0" bIns="0" rtlCol="0" anchor="ctr">
+            <a:normAutofit/>
+          </a:bodyPr>
+          <a:lstStyle/>
+          <a:p>
+            <a:pPr indent="0" marL="0">
+              <a:buNone/>
+            </a:pPr>
+            <a:r>
+              <a:rPr lang="en-US" sz="900" b="1" dirty="0">
                 <a:solidFill>
                   <a:srgbClr val="5B6476"/>
                 </a:solidFill>
@@ -5804,196 +5679,15 @@
                 <a:ea typeface="Aptos" pitchFamily="34" charset="-122"/>
                 <a:cs typeface="Aptos" pitchFamily="34" charset="-120"/>
               </a:rPr>
-              <a:t>OpenClaw docs voorbeeld</a:t>
-            </a:r>
-            <a:endParaRPr lang="en-US" sz="1100" dirty="0"/>
-          </a:p>
-        </p:txBody>
-      </p:sp>
-      <p:sp>
-        <p:nvSpPr>
-          <p:cNvPr id="27" name="Shape 24"/>
-          <p:cNvSpPr/>
-          <p:nvPr/>
-        </p:nvSpPr>
-        <p:spPr>
-          <a:xfrm>
-            <a:off x="5449824" y="3657600"/>
-            <a:ext cx="5303520" cy="237744"/>
-          </a:xfrm>
-          <a:prstGeom prst="roundRect">
-            <a:avLst>
-              <a:gd name="adj" fmla="val 30769"/>
-            </a:avLst>
-          </a:prstGeom>
-          <a:solidFill>
-            <a:srgbClr val="EEF2F7"/>
-          </a:solidFill>
-          <a:ln w="12700">
-            <a:solidFill>
-              <a:srgbClr val="EEF2F7">
-                <a:alpha val="0"/>
-              </a:srgbClr>
-            </a:solidFill>
-            <a:prstDash val="solid"/>
-          </a:ln>
-        </p:spPr>
-      </p:sp>
-      <p:sp>
-        <p:nvSpPr>
-          <p:cNvPr id="28" name="Shape 25"/>
-          <p:cNvSpPr/>
-          <p:nvPr/>
-        </p:nvSpPr>
-        <p:spPr>
-          <a:xfrm>
-            <a:off x="5449824" y="3657600"/>
-            <a:ext cx="1060704" cy="237744"/>
-          </a:xfrm>
-          <a:prstGeom prst="roundRect">
-            <a:avLst>
-              <a:gd name="adj" fmla="val 30769"/>
-            </a:avLst>
-          </a:prstGeom>
-          <a:solidFill>
-            <a:srgbClr val="0F766E"/>
-          </a:solidFill>
-          <a:ln w="12700">
-            <a:solidFill>
-              <a:srgbClr val="0F766E">
-                <a:alpha val="0"/>
-              </a:srgbClr>
-            </a:solidFill>
-            <a:prstDash val="solid"/>
-          </a:ln>
-        </p:spPr>
-      </p:sp>
-      <p:sp>
-        <p:nvSpPr>
-          <p:cNvPr id="29" name="Text 26"/>
-          <p:cNvSpPr/>
-          <p:nvPr/>
-        </p:nvSpPr>
-        <p:spPr>
-          <a:xfrm>
-            <a:off x="9930384" y="3438144"/>
-            <a:ext cx="822960" cy="164592"/>
-          </a:xfrm>
-          <a:prstGeom prst="rect">
-            <a:avLst/>
-          </a:prstGeom>
-          <a:noFill/>
-          <a:ln/>
-        </p:spPr>
-        <p:txBody>
-          <a:bodyPr wrap="square" lIns="0" tIns="0" rIns="0" bIns="0" rtlCol="0" anchor="ctr">
-            <a:normAutofit/>
-          </a:bodyPr>
-          <a:lstStyle/>
-          <a:p>
-            <a:pPr algn="r" indent="0" marL="0">
-              <a:buNone/>
-            </a:pPr>
-            <a:r>
-              <a:rPr lang="en-US" sz="1100" b="1" dirty="0">
-                <a:solidFill>
-                  <a:srgbClr val="12192C"/>
-                </a:solidFill>
-                <a:latin typeface="Aptos" pitchFamily="34" charset="0"/>
-                <a:ea typeface="Aptos" pitchFamily="34" charset="-122"/>
-                <a:cs typeface="Aptos" pitchFamily="34" charset="-120"/>
-              </a:rPr>
-              <a:t>~14.250</a:t>
-            </a:r>
-            <a:endParaRPr lang="en-US" sz="1100" dirty="0"/>
-          </a:p>
-        </p:txBody>
-      </p:sp>
-      <p:sp>
-        <p:nvSpPr>
-          <p:cNvPr id="30" name="Text 27"/>
-          <p:cNvSpPr/>
-          <p:nvPr/>
-        </p:nvSpPr>
-        <p:spPr>
-          <a:xfrm>
-            <a:off x="5449824" y="4133088"/>
-            <a:ext cx="1645920" cy="201168"/>
-          </a:xfrm>
-          <a:prstGeom prst="rect">
-            <a:avLst/>
-          </a:prstGeom>
-          <a:noFill/>
-          <a:ln/>
-        </p:spPr>
-        <p:txBody>
-          <a:bodyPr wrap="square" lIns="0" tIns="0" rIns="0" bIns="0" rtlCol="0" anchor="ctr">
-            <a:normAutofit/>
-          </a:bodyPr>
-          <a:lstStyle/>
-          <a:p>
-            <a:pPr indent="0" marL="0">
-              <a:buNone/>
-            </a:pPr>
-            <a:r>
-              <a:rPr lang="en-US" sz="1400" b="1" dirty="0">
-                <a:solidFill>
-                  <a:srgbClr val="E93325"/>
-                </a:solidFill>
-                <a:latin typeface="Aptos" pitchFamily="34" charset="0"/>
-                <a:ea typeface="Aptos" pitchFamily="34" charset="-122"/>
-                <a:cs typeface="Aptos" pitchFamily="34" charset="-120"/>
-              </a:rPr>
-              <a:t>Interpretatie</a:t>
-            </a:r>
-            <a:endParaRPr lang="en-US" sz="1400" dirty="0"/>
-          </a:p>
-        </p:txBody>
-      </p:sp>
-      <p:sp>
-        <p:nvSpPr>
-          <p:cNvPr id="31" name="Text 28"/>
-          <p:cNvSpPr/>
-          <p:nvPr/>
-        </p:nvSpPr>
-        <p:spPr>
-          <a:xfrm>
-            <a:off x="5449824" y="4443984"/>
-            <a:ext cx="5394960" cy="658368"/>
-          </a:xfrm>
-          <a:prstGeom prst="rect">
-            <a:avLst/>
-          </a:prstGeom>
-          <a:noFill/>
-          <a:ln/>
-        </p:spPr>
-        <p:txBody>
-          <a:bodyPr wrap="square" lIns="0" tIns="0" rIns="0" bIns="0" rtlCol="0" anchor="ctr">
-            <a:normAutofit/>
-          </a:bodyPr>
-          <a:lstStyle/>
-          <a:p>
-            <a:pPr indent="0" marL="0">
-              <a:buNone/>
-            </a:pPr>
-            <a:r>
-              <a:rPr lang="en-US" sz="1400" dirty="0">
-                <a:solidFill>
-                  <a:srgbClr val="12192C"/>
-                </a:solidFill>
-                <a:latin typeface="Aptos" pitchFamily="34" charset="0"/>
-                <a:ea typeface="Aptos" pitchFamily="34" charset="-122"/>
-                <a:cs typeface="Aptos" pitchFamily="34" charset="-120"/>
-              </a:rPr>
-              <a:t>De kost zit hier niet in één slimme reply. Ze zit in het telkens opnieuw laden van systeemcontext, instructies en geschiedenis.</a:t>
-            </a:r>
-            <a:endParaRPr lang="en-US" sz="1400" dirty="0"/>
-          </a:p>
-        </p:txBody>
-      </p:sp>
-      <p:sp>
-        <p:nvSpPr>
-          <p:cNvPr id="32" name="Shape 29"/>
+              <a:t>OpenClaw anchor: ~14.250 sessietokens in docsvoorbeeld</a:t>
+            </a:r>
+            <a:endParaRPr lang="en-US" sz="900" dirty="0"/>
+          </a:p>
+        </p:txBody>
+      </p:sp>
+      <p:sp>
+        <p:nvSpPr>
+          <p:cNvPr id="29" name="Shape 26"/>
           <p:cNvSpPr/>
           <p:nvPr/>
         </p:nvSpPr>
@@ -6020,7 +5714,7 @@
       </p:sp>
       <p:sp>
         <p:nvSpPr>
-          <p:cNvPr id="33" name="Text 30"/>
+          <p:cNvPr id="30" name="Text 27"/>
           <p:cNvSpPr/>
           <p:nvPr/>
         </p:nvSpPr>
@@ -6053,7 +5747,7 @@
                 <a:ea typeface="Aptos" pitchFamily="34" charset="-122"/>
                 <a:cs typeface="Aptos" pitchFamily="34" charset="-120"/>
               </a:rPr>
-              <a:t>Takeaway: kostdruk is echt; het headline-getal blijft een scenario-uitkomst, geen observatie.</a:t>
+              <a:t>Takeaway: kostdruk is echt; het getal blijft scenario-uitkomst, geen observatie.</a:t>
             </a:r>
             <a:endParaRPr lang="en-US" sz="1200" dirty="0"/>
           </a:p>
@@ -7373,18 +7067,59 @@
       </p:sp>
       <p:sp>
         <p:nvSpPr>
-          <p:cNvPr id="9" name="Shape 6"/>
-          <p:cNvSpPr/>
-          <p:nvPr/>
-        </p:nvSpPr>
-        <p:spPr>
-          <a:xfrm>
-            <a:off x="713232" y="1225296"/>
-            <a:ext cx="7543800" cy="4535424"/>
+          <p:cNvPr id="9" name="Text 6"/>
+          <p:cNvSpPr/>
+          <p:nvPr/>
+        </p:nvSpPr>
+        <p:spPr>
+          <a:xfrm>
+            <a:off x="713232" y="1170432"/>
+            <a:ext cx="7863840" cy="274320"/>
+          </a:xfrm>
+          <a:prstGeom prst="rect">
+            <a:avLst/>
+          </a:prstGeom>
+          <a:noFill/>
+          <a:ln/>
+        </p:spPr>
+        <p:txBody>
+          <a:bodyPr wrap="square" lIns="0" tIns="0" rIns="0" bIns="0" rtlCol="0" anchor="ctr">
+            <a:normAutofit/>
+          </a:bodyPr>
+          <a:lstStyle/>
+          <a:p>
+            <a:pPr indent="0" marL="0">
+              <a:buNone/>
+            </a:pPr>
+            <a:r>
+              <a:rPr lang="en-US" sz="1700" b="1" dirty="0">
+                <a:solidFill>
+                  <a:srgbClr val="12192C"/>
+                </a:solidFill>
+                <a:latin typeface="Aptos Display" pitchFamily="34" charset="0"/>
+                <a:ea typeface="Aptos Display" pitchFamily="34" charset="-122"/>
+                <a:cs typeface="Aptos Display" pitchFamily="34" charset="-120"/>
+              </a:rPr>
+              <a:t>Wat vandaag het hardst verdedigbaar is, zit niet in hypewoorden maar in infrastructuur en economics.</a:t>
+            </a:r>
+            <a:endParaRPr lang="en-US" sz="1700" dirty="0"/>
+          </a:p>
+        </p:txBody>
+      </p:sp>
+      <p:sp>
+        <p:nvSpPr>
+          <p:cNvPr id="10" name="Shape 7"/>
+          <p:cNvSpPr/>
+          <p:nvPr/>
+        </p:nvSpPr>
+        <p:spPr>
+          <a:xfrm>
+            <a:off x="713232" y="1700784"/>
+            <a:ext cx="3054096" cy="1828800"/>
           </a:xfrm>
           <a:prstGeom prst="roundRect">
             <a:avLst>
-              <a:gd name="adj" fmla="val 1210"/>
+              <a:gd name="adj" fmla="val 3000"/>
             </a:avLst>
           </a:prstGeom>
           <a:solidFill>
@@ -7398,9 +7133,568 @@
           </a:ln>
         </p:spPr>
       </p:sp>
+      <p:sp>
+        <p:nvSpPr>
+          <p:cNvPr id="11" name="Text 8"/>
+          <p:cNvSpPr/>
+          <p:nvPr/>
+        </p:nvSpPr>
+        <p:spPr>
+          <a:xfrm>
+            <a:off x="896112" y="1883664"/>
+            <a:ext cx="2688336" cy="502920"/>
+          </a:xfrm>
+          <a:prstGeom prst="rect">
+            <a:avLst/>
+          </a:prstGeom>
+          <a:noFill/>
+          <a:ln/>
+        </p:spPr>
+        <p:txBody>
+          <a:bodyPr wrap="square" lIns="0" tIns="0" rIns="0" bIns="0" rtlCol="0" anchor="ctr">
+            <a:normAutofit/>
+          </a:bodyPr>
+          <a:lstStyle/>
+          <a:p>
+            <a:pPr indent="0" marL="0">
+              <a:buNone/>
+            </a:pPr>
+            <a:r>
+              <a:rPr lang="en-US" sz="2800" b="1" dirty="0">
+                <a:solidFill>
+                  <a:srgbClr val="E93325"/>
+                </a:solidFill>
+                <a:latin typeface="Aptos Display" pitchFamily="34" charset="0"/>
+                <a:ea typeface="Aptos Display" pitchFamily="34" charset="-122"/>
+                <a:cs typeface="Aptos Display" pitchFamily="34" charset="-120"/>
+              </a:rPr>
+              <a:t>&gt;280x</a:t>
+            </a:r>
+            <a:endParaRPr lang="en-US" sz="2800" dirty="0"/>
+          </a:p>
+        </p:txBody>
+      </p:sp>
+      <p:sp>
+        <p:nvSpPr>
+          <p:cNvPr id="12" name="Text 9"/>
+          <p:cNvSpPr/>
+          <p:nvPr/>
+        </p:nvSpPr>
+        <p:spPr>
+          <a:xfrm>
+            <a:off x="896112" y="2487168"/>
+            <a:ext cx="2688336" cy="237744"/>
+          </a:xfrm>
+          <a:prstGeom prst="rect">
+            <a:avLst/>
+          </a:prstGeom>
+          <a:noFill/>
+          <a:ln/>
+        </p:spPr>
+        <p:txBody>
+          <a:bodyPr wrap="square" lIns="0" tIns="0" rIns="0" bIns="0" rtlCol="0" anchor="ctr">
+            <a:normAutofit/>
+          </a:bodyPr>
+          <a:lstStyle/>
+          <a:p>
+            <a:pPr indent="0" marL="0">
+              <a:buNone/>
+            </a:pPr>
+            <a:r>
+              <a:rPr lang="en-US" sz="1200" b="1" dirty="0">
+                <a:solidFill>
+                  <a:srgbClr val="12192C"/>
+                </a:solidFill>
+                <a:latin typeface="Aptos" pitchFamily="34" charset="0"/>
+                <a:ea typeface="Aptos" pitchFamily="34" charset="-122"/>
+                <a:cs typeface="Aptos" pitchFamily="34" charset="-120"/>
+              </a:rPr>
+              <a:t>kostdaling</a:t>
+            </a:r>
+            <a:endParaRPr lang="en-US" sz="1200" dirty="0"/>
+          </a:p>
+        </p:txBody>
+      </p:sp>
+      <p:sp>
+        <p:nvSpPr>
+          <p:cNvPr id="13" name="Text 10"/>
+          <p:cNvSpPr/>
+          <p:nvPr/>
+        </p:nvSpPr>
+        <p:spPr>
+          <a:xfrm>
+            <a:off x="896112" y="2798064"/>
+            <a:ext cx="2688336" cy="457200"/>
+          </a:xfrm>
+          <a:prstGeom prst="rect">
+            <a:avLst/>
+          </a:prstGeom>
+          <a:noFill/>
+          <a:ln/>
+        </p:spPr>
+        <p:txBody>
+          <a:bodyPr wrap="square" lIns="0" tIns="0" rIns="0" bIns="0" rtlCol="0" anchor="ctr">
+            <a:normAutofit/>
+          </a:bodyPr>
+          <a:lstStyle/>
+          <a:p>
+            <a:pPr indent="0" marL="0">
+              <a:buNone/>
+            </a:pPr>
+            <a:r>
+              <a:rPr lang="en-US" sz="1100" dirty="0">
+                <a:solidFill>
+                  <a:srgbClr val="5B6476"/>
+                </a:solidFill>
+                <a:latin typeface="Aptos" pitchFamily="34" charset="0"/>
+                <a:ea typeface="Aptos" pitchFamily="34" charset="-122"/>
+                <a:cs typeface="Aptos" pitchFamily="34" charset="-120"/>
+              </a:rPr>
+              <a:t>GPT-3.5-kwaliteit, nov 2022 → okt 2024</a:t>
+            </a:r>
+            <a:endParaRPr lang="en-US" sz="1100" dirty="0"/>
+          </a:p>
+        </p:txBody>
+      </p:sp>
+      <p:sp>
+        <p:nvSpPr>
+          <p:cNvPr id="14" name="Shape 11"/>
+          <p:cNvSpPr/>
+          <p:nvPr/>
+        </p:nvSpPr>
+        <p:spPr>
+          <a:xfrm>
+            <a:off x="3968496" y="1700784"/>
+            <a:ext cx="2816352" cy="1828800"/>
+          </a:xfrm>
+          <a:prstGeom prst="roundRect">
+            <a:avLst>
+              <a:gd name="adj" fmla="val 3000"/>
+            </a:avLst>
+          </a:prstGeom>
+          <a:solidFill>
+            <a:srgbClr val="F7F8FB"/>
+          </a:solidFill>
+          <a:ln w="12700">
+            <a:solidFill>
+              <a:srgbClr val="D9DDE6"/>
+            </a:solidFill>
+            <a:prstDash val="solid"/>
+          </a:ln>
+        </p:spPr>
+      </p:sp>
+      <p:sp>
+        <p:nvSpPr>
+          <p:cNvPr id="15" name="Text 12"/>
+          <p:cNvSpPr/>
+          <p:nvPr/>
+        </p:nvSpPr>
+        <p:spPr>
+          <a:xfrm>
+            <a:off x="4151376" y="1883664"/>
+            <a:ext cx="2450592" cy="502920"/>
+          </a:xfrm>
+          <a:prstGeom prst="rect">
+            <a:avLst/>
+          </a:prstGeom>
+          <a:noFill/>
+          <a:ln/>
+        </p:spPr>
+        <p:txBody>
+          <a:bodyPr wrap="square" lIns="0" tIns="0" rIns="0" bIns="0" rtlCol="0" anchor="ctr">
+            <a:normAutofit/>
+          </a:bodyPr>
+          <a:lstStyle/>
+          <a:p>
+            <a:pPr indent="0" marL="0">
+              <a:buNone/>
+            </a:pPr>
+            <a:r>
+              <a:rPr lang="en-US" sz="2800" b="1" dirty="0">
+                <a:solidFill>
+                  <a:srgbClr val="F2AD18"/>
+                </a:solidFill>
+                <a:latin typeface="Aptos Display" pitchFamily="34" charset="0"/>
+                <a:ea typeface="Aptos Display" pitchFamily="34" charset="-122"/>
+                <a:cs typeface="Aptos Display" pitchFamily="34" charset="-120"/>
+              </a:rPr>
+              <a:t>5,0x/jaar</a:t>
+            </a:r>
+            <a:endParaRPr lang="en-US" sz="2800" dirty="0"/>
+          </a:p>
+        </p:txBody>
+      </p:sp>
+      <p:sp>
+        <p:nvSpPr>
+          <p:cNvPr id="16" name="Text 13"/>
+          <p:cNvSpPr/>
+          <p:nvPr/>
+        </p:nvSpPr>
+        <p:spPr>
+          <a:xfrm>
+            <a:off x="4151376" y="2487168"/>
+            <a:ext cx="2450592" cy="237744"/>
+          </a:xfrm>
+          <a:prstGeom prst="rect">
+            <a:avLst/>
+          </a:prstGeom>
+          <a:noFill/>
+          <a:ln/>
+        </p:spPr>
+        <p:txBody>
+          <a:bodyPr wrap="square" lIns="0" tIns="0" rIns="0" bIns="0" rtlCol="0" anchor="ctr">
+            <a:normAutofit/>
+          </a:bodyPr>
+          <a:lstStyle/>
+          <a:p>
+            <a:pPr indent="0" marL="0">
+              <a:buNone/>
+            </a:pPr>
+            <a:r>
+              <a:rPr lang="en-US" sz="1200" b="1" dirty="0">
+                <a:solidFill>
+                  <a:srgbClr val="12192C"/>
+                </a:solidFill>
+                <a:latin typeface="Aptos" pitchFamily="34" charset="0"/>
+                <a:ea typeface="Aptos" pitchFamily="34" charset="-122"/>
+                <a:cs typeface="Aptos" pitchFamily="34" charset="-120"/>
+              </a:rPr>
+              <a:t>training compute</a:t>
+            </a:r>
+            <a:endParaRPr lang="en-US" sz="1200" dirty="0"/>
+          </a:p>
+        </p:txBody>
+      </p:sp>
+      <p:sp>
+        <p:nvSpPr>
+          <p:cNvPr id="17" name="Text 14"/>
+          <p:cNvSpPr/>
+          <p:nvPr/>
+        </p:nvSpPr>
+        <p:spPr>
+          <a:xfrm>
+            <a:off x="4151376" y="2798064"/>
+            <a:ext cx="2450592" cy="457200"/>
+          </a:xfrm>
+          <a:prstGeom prst="rect">
+            <a:avLst/>
+          </a:prstGeom>
+          <a:noFill/>
+          <a:ln/>
+        </p:spPr>
+        <p:txBody>
+          <a:bodyPr wrap="square" lIns="0" tIns="0" rIns="0" bIns="0" rtlCol="0" anchor="ctr">
+            <a:normAutofit/>
+          </a:bodyPr>
+          <a:lstStyle/>
+          <a:p>
+            <a:pPr indent="0" marL="0">
+              <a:buNone/>
+            </a:pPr>
+            <a:r>
+              <a:rPr lang="en-US" sz="1100" dirty="0">
+                <a:solidFill>
+                  <a:srgbClr val="5B6476"/>
+                </a:solidFill>
+                <a:latin typeface="Aptos" pitchFamily="34" charset="0"/>
+                <a:ea typeface="Aptos" pitchFamily="34" charset="-122"/>
+                <a:cs typeface="Aptos" pitchFamily="34" charset="-120"/>
+              </a:rPr>
+              <a:t>Epoch frontier snapshot</a:t>
+            </a:r>
+            <a:endParaRPr lang="en-US" sz="1100" dirty="0"/>
+          </a:p>
+        </p:txBody>
+      </p:sp>
+      <p:sp>
+        <p:nvSpPr>
+          <p:cNvPr id="18" name="Shape 15"/>
+          <p:cNvSpPr/>
+          <p:nvPr/>
+        </p:nvSpPr>
+        <p:spPr>
+          <a:xfrm>
+            <a:off x="6986016" y="1700784"/>
+            <a:ext cx="2688336" cy="1828800"/>
+          </a:xfrm>
+          <a:prstGeom prst="roundRect">
+            <a:avLst>
+              <a:gd name="adj" fmla="val 3000"/>
+            </a:avLst>
+          </a:prstGeom>
+          <a:solidFill>
+            <a:srgbClr val="F7F8FB"/>
+          </a:solidFill>
+          <a:ln w="12700">
+            <a:solidFill>
+              <a:srgbClr val="D9DDE6"/>
+            </a:solidFill>
+            <a:prstDash val="solid"/>
+          </a:ln>
+        </p:spPr>
+      </p:sp>
+      <p:sp>
+        <p:nvSpPr>
+          <p:cNvPr id="19" name="Text 16"/>
+          <p:cNvSpPr/>
+          <p:nvPr/>
+        </p:nvSpPr>
+        <p:spPr>
+          <a:xfrm>
+            <a:off x="7168896" y="1883664"/>
+            <a:ext cx="2322576" cy="502920"/>
+          </a:xfrm>
+          <a:prstGeom prst="rect">
+            <a:avLst/>
+          </a:prstGeom>
+          <a:noFill/>
+          <a:ln/>
+        </p:spPr>
+        <p:txBody>
+          <a:bodyPr wrap="square" lIns="0" tIns="0" rIns="0" bIns="0" rtlCol="0" anchor="ctr">
+            <a:normAutofit/>
+          </a:bodyPr>
+          <a:lstStyle/>
+          <a:p>
+            <a:pPr indent="0" marL="0">
+              <a:buNone/>
+            </a:pPr>
+            <a:r>
+              <a:rPr lang="en-US" sz="2800" b="1" dirty="0">
+                <a:solidFill>
+                  <a:srgbClr val="2563EB"/>
+                </a:solidFill>
+                <a:latin typeface="Aptos Display" pitchFamily="34" charset="0"/>
+                <a:ea typeface="Aptos Display" pitchFamily="34" charset="-122"/>
+                <a:cs typeface="Aptos Display" pitchFamily="34" charset="-120"/>
+              </a:rPr>
+              <a:t>+67,3</a:t>
+            </a:r>
+            <a:endParaRPr lang="en-US" sz="2800" dirty="0"/>
+          </a:p>
+        </p:txBody>
+      </p:sp>
+      <p:sp>
+        <p:nvSpPr>
+          <p:cNvPr id="20" name="Text 17"/>
+          <p:cNvSpPr/>
+          <p:nvPr/>
+        </p:nvSpPr>
+        <p:spPr>
+          <a:xfrm>
+            <a:off x="7168896" y="2487168"/>
+            <a:ext cx="2322576" cy="237744"/>
+          </a:xfrm>
+          <a:prstGeom prst="rect">
+            <a:avLst/>
+          </a:prstGeom>
+          <a:noFill/>
+          <a:ln/>
+        </p:spPr>
+        <p:txBody>
+          <a:bodyPr wrap="square" lIns="0" tIns="0" rIns="0" bIns="0" rtlCol="0" anchor="ctr">
+            <a:normAutofit/>
+          </a:bodyPr>
+          <a:lstStyle/>
+          <a:p>
+            <a:pPr indent="0" marL="0">
+              <a:buNone/>
+            </a:pPr>
+            <a:r>
+              <a:rPr lang="en-US" sz="1200" b="1" dirty="0">
+                <a:solidFill>
+                  <a:srgbClr val="12192C"/>
+                </a:solidFill>
+                <a:latin typeface="Aptos" pitchFamily="34" charset="0"/>
+                <a:ea typeface="Aptos" pitchFamily="34" charset="-122"/>
+                <a:cs typeface="Aptos" pitchFamily="34" charset="-120"/>
+              </a:rPr>
+              <a:t>SWE-bench sprong</a:t>
+            </a:r>
+            <a:endParaRPr lang="en-US" sz="1200" dirty="0"/>
+          </a:p>
+        </p:txBody>
+      </p:sp>
+      <p:sp>
+        <p:nvSpPr>
+          <p:cNvPr id="21" name="Text 18"/>
+          <p:cNvSpPr/>
+          <p:nvPr/>
+        </p:nvSpPr>
+        <p:spPr>
+          <a:xfrm>
+            <a:off x="7168896" y="2798064"/>
+            <a:ext cx="2322576" cy="457200"/>
+          </a:xfrm>
+          <a:prstGeom prst="rect">
+            <a:avLst/>
+          </a:prstGeom>
+          <a:noFill/>
+          <a:ln/>
+        </p:spPr>
+        <p:txBody>
+          <a:bodyPr wrap="square" lIns="0" tIns="0" rIns="0" bIns="0" rtlCol="0" anchor="ctr">
+            <a:normAutofit/>
+          </a:bodyPr>
+          <a:lstStyle/>
+          <a:p>
+            <a:pPr indent="0" marL="0">
+              <a:buNone/>
+            </a:pPr>
+            <a:r>
+              <a:rPr lang="en-US" sz="1100" dirty="0">
+                <a:solidFill>
+                  <a:srgbClr val="5B6476"/>
+                </a:solidFill>
+                <a:latin typeface="Aptos" pitchFamily="34" charset="0"/>
+                <a:ea typeface="Aptos" pitchFamily="34" charset="-122"/>
+                <a:cs typeface="Aptos" pitchFamily="34" charset="-120"/>
+              </a:rPr>
+              <a:t>AI Index benchmark jump</a:t>
+            </a:r>
+            <a:endParaRPr lang="en-US" sz="1100" dirty="0"/>
+          </a:p>
+        </p:txBody>
+      </p:sp>
+      <p:sp>
+        <p:nvSpPr>
+          <p:cNvPr id="22" name="Shape 19"/>
+          <p:cNvSpPr/>
+          <p:nvPr/>
+        </p:nvSpPr>
+        <p:spPr>
+          <a:xfrm>
+            <a:off x="9875520" y="1700784"/>
+            <a:ext cx="1536192" cy="1828800"/>
+          </a:xfrm>
+          <a:prstGeom prst="roundRect">
+            <a:avLst>
+              <a:gd name="adj" fmla="val 3571"/>
+            </a:avLst>
+          </a:prstGeom>
+          <a:solidFill>
+            <a:srgbClr val="F7F8FB"/>
+          </a:solidFill>
+          <a:ln w="12700">
+            <a:solidFill>
+              <a:srgbClr val="D9DDE6"/>
+            </a:solidFill>
+            <a:prstDash val="solid"/>
+          </a:ln>
+        </p:spPr>
+      </p:sp>
+      <p:sp>
+        <p:nvSpPr>
+          <p:cNvPr id="23" name="Text 20"/>
+          <p:cNvSpPr/>
+          <p:nvPr/>
+        </p:nvSpPr>
+        <p:spPr>
+          <a:xfrm>
+            <a:off x="10076688" y="1975104"/>
+            <a:ext cx="914400" cy="146304"/>
+          </a:xfrm>
+          <a:prstGeom prst="rect">
+            <a:avLst/>
+          </a:prstGeom>
+          <a:noFill/>
+          <a:ln/>
+        </p:spPr>
+        <p:txBody>
+          <a:bodyPr wrap="square" lIns="0" tIns="0" rIns="0" bIns="0" rtlCol="0" anchor="ctr">
+            <a:normAutofit/>
+          </a:bodyPr>
+          <a:lstStyle/>
+          <a:p>
+            <a:pPr indent="0" marL="0">
+              <a:buNone/>
+            </a:pPr>
+            <a:r>
+              <a:rPr lang="en-US" sz="1000" b="1" dirty="0">
+                <a:solidFill>
+                  <a:srgbClr val="5B6476"/>
+                </a:solidFill>
+                <a:latin typeface="Aptos" pitchFamily="34" charset="0"/>
+                <a:ea typeface="Aptos" pitchFamily="34" charset="-122"/>
+                <a:cs typeface="Aptos" pitchFamily="34" charset="-120"/>
+              </a:rPr>
+              <a:t>bronlijn</a:t>
+            </a:r>
+            <a:endParaRPr lang="en-US" sz="1000" dirty="0"/>
+          </a:p>
+        </p:txBody>
+      </p:sp>
+      <p:sp>
+        <p:nvSpPr>
+          <p:cNvPr id="24" name="Text 21"/>
+          <p:cNvSpPr/>
+          <p:nvPr/>
+        </p:nvSpPr>
+        <p:spPr>
+          <a:xfrm>
+            <a:off x="10076688" y="2286000"/>
+            <a:ext cx="1005840" cy="365760"/>
+          </a:xfrm>
+          <a:prstGeom prst="rect">
+            <a:avLst/>
+          </a:prstGeom>
+          <a:noFill/>
+          <a:ln/>
+        </p:spPr>
+        <p:txBody>
+          <a:bodyPr wrap="square" lIns="0" tIns="0" rIns="0" bIns="0" rtlCol="0" anchor="ctr">
+            <a:normAutofit/>
+          </a:bodyPr>
+          <a:lstStyle/>
+          <a:p>
+            <a:pPr indent="0" marL="0">
+              <a:buNone/>
+            </a:pPr>
+            <a:r>
+              <a:rPr lang="en-US" sz="1400" b="1" dirty="0">
+                <a:solidFill>
+                  <a:srgbClr val="E93325"/>
+                </a:solidFill>
+                <a:latin typeface="Aptos" pitchFamily="34" charset="0"/>
+                <a:ea typeface="Aptos" pitchFamily="34" charset="-122"/>
+                <a:cs typeface="Aptos" pitchFamily="34" charset="-120"/>
+              </a:rPr>
+              <a:t>Stanford + Epoch</a:t>
+            </a:r>
+            <a:endParaRPr lang="en-US" sz="1400" dirty="0"/>
+          </a:p>
+        </p:txBody>
+      </p:sp>
+      <p:sp>
+        <p:nvSpPr>
+          <p:cNvPr id="25" name="Shape 22"/>
+          <p:cNvSpPr/>
+          <p:nvPr/>
+        </p:nvSpPr>
+        <p:spPr>
+          <a:xfrm>
+            <a:off x="713232" y="3730752"/>
+            <a:ext cx="4663440" cy="1792224"/>
+          </a:xfrm>
+          <a:prstGeom prst="roundRect">
+            <a:avLst>
+              <a:gd name="adj" fmla="val 3061"/>
+            </a:avLst>
+          </a:prstGeom>
+          <a:solidFill>
+            <a:srgbClr val="F7F8FB"/>
+          </a:solidFill>
+          <a:ln w="12700">
+            <a:solidFill>
+              <a:srgbClr val="D9DDE6"/>
+            </a:solidFill>
+            <a:prstDash val="solid"/>
+          </a:ln>
+        </p:spPr>
+      </p:sp>
       <p:pic>
         <p:nvPicPr>
-          <p:cNvPr id="10" name="Image 1" descr="/home/ff/Documents/BoostMeUp/MoltBook_Sessie/assets/ai_trends.png">    </p:cNvPr>
+          <p:cNvPr id="26" name="Image 1" descr="/home/ff/Documents/BoostMeUp/MoltBook_Sessie/assets/ai_trends.png">    </p:cNvPr>
           <p:cNvPicPr>
             <a:picLocks noChangeAspect="1"/>
           </p:cNvPicPr>
@@ -7414,8 +7708,8 @@
         </p:blipFill>
         <p:spPr>
           <a:xfrm>
-            <a:off x="822960" y="1335024"/>
-            <a:ext cx="7324344" cy="4315968"/>
+            <a:off x="822960" y="3840480"/>
+            <a:ext cx="4443984" cy="1572768"/>
           </a:xfrm>
           <a:prstGeom prst="rect">
             <a:avLst/>
@@ -7424,18 +7718,18 @@
       </p:pic>
       <p:sp>
         <p:nvSpPr>
-          <p:cNvPr id="11" name="Shape 7"/>
-          <p:cNvSpPr/>
-          <p:nvPr/>
-        </p:nvSpPr>
-        <p:spPr>
-          <a:xfrm>
-            <a:off x="8449056" y="1225296"/>
-            <a:ext cx="3191256" cy="4535424"/>
+          <p:cNvPr id="27" name="Shape 23"/>
+          <p:cNvSpPr/>
+          <p:nvPr/>
+        </p:nvSpPr>
+        <p:spPr>
+          <a:xfrm>
+            <a:off x="5577840" y="3730752"/>
+            <a:ext cx="6062472" cy="1792224"/>
           </a:xfrm>
           <a:prstGeom prst="roundRect">
             <a:avLst>
-              <a:gd name="adj" fmla="val 1719"/>
+              <a:gd name="adj" fmla="val 3061"/>
             </a:avLst>
           </a:prstGeom>
           <a:solidFill>
@@ -7451,159 +7745,14 @@
       </p:sp>
       <p:sp>
         <p:nvSpPr>
-          <p:cNvPr id="12" name="Shape 8"/>
-          <p:cNvSpPr/>
-          <p:nvPr/>
-        </p:nvSpPr>
-        <p:spPr>
-          <a:xfrm>
-            <a:off x="8668512" y="1499616"/>
-            <a:ext cx="1426464" cy="329184"/>
-          </a:xfrm>
-          <a:prstGeom prst="roundRect">
-            <a:avLst>
-              <a:gd name="adj" fmla="val 22222"/>
-            </a:avLst>
-          </a:prstGeom>
-          <a:solidFill>
-            <a:srgbClr val="E93325"/>
-          </a:solidFill>
-          <a:ln w="12700">
-            <a:solidFill>
-              <a:srgbClr val="E93325">
-                <a:alpha val="0"/>
-              </a:srgbClr>
-            </a:solidFill>
-            <a:prstDash val="solid"/>
-          </a:ln>
-        </p:spPr>
-      </p:sp>
-      <p:sp>
-        <p:nvSpPr>
-          <p:cNvPr id="13" name="Text 9"/>
-          <p:cNvSpPr/>
-          <p:nvPr/>
-        </p:nvSpPr>
-        <p:spPr>
-          <a:xfrm>
-            <a:off x="8814816" y="1572768"/>
-            <a:ext cx="1133856" cy="164592"/>
-          </a:xfrm>
-          <a:prstGeom prst="rect">
-            <a:avLst/>
-          </a:prstGeom>
-          <a:noFill/>
-          <a:ln/>
-        </p:spPr>
-        <p:txBody>
-          <a:bodyPr wrap="square" lIns="0" tIns="0" rIns="0" bIns="0" rtlCol="0" anchor="ctr">
-            <a:normAutofit/>
-          </a:bodyPr>
-          <a:lstStyle/>
-          <a:p>
-            <a:pPr indent="0" marL="0">
-              <a:buNone/>
-            </a:pPr>
-            <a:r>
-              <a:rPr lang="en-US" sz="900" b="1" dirty="0">
-                <a:solidFill>
-                  <a:srgbClr val="FFFFFF"/>
-                </a:solidFill>
-                <a:latin typeface="Aptos" pitchFamily="34" charset="0"/>
-                <a:ea typeface="Aptos" pitchFamily="34" charset="-122"/>
-                <a:cs typeface="Aptos" pitchFamily="34" charset="-120"/>
-              </a:rPr>
-              <a:t>wat dit wél toont</a:t>
-            </a:r>
-            <a:endParaRPr lang="en-US" sz="900" dirty="0"/>
-          </a:p>
-        </p:txBody>
-      </p:sp>
-      <p:sp>
-        <p:nvSpPr>
-          <p:cNvPr id="14" name="Text 10"/>
-          <p:cNvSpPr/>
-          <p:nvPr/>
-        </p:nvSpPr>
-        <p:spPr>
-          <a:xfrm>
-            <a:off x="8668512" y="1938528"/>
-            <a:ext cx="2560320" cy="1170432"/>
-          </a:xfrm>
-          <a:prstGeom prst="rect">
-            <a:avLst/>
-          </a:prstGeom>
-          <a:noFill/>
-          <a:ln/>
-        </p:spPr>
-        <p:txBody>
-          <a:bodyPr wrap="square" lIns="0" tIns="0" rIns="0" bIns="0" rtlCol="0" anchor="ctr">
-            <a:normAutofit/>
-          </a:bodyPr>
-          <a:lstStyle/>
-          <a:p>
-            <a:pPr indent="0" marL="0">
-              <a:buNone/>
-            </a:pPr>
-            <a:r>
-              <a:rPr lang="en-US" sz="1600" b="1" dirty="0">
-                <a:solidFill>
-                  <a:srgbClr val="FFFFFF"/>
-                </a:solidFill>
-                <a:latin typeface="Aptos" pitchFamily="34" charset="0"/>
-                <a:ea typeface="Aptos" pitchFamily="34" charset="-122"/>
-                <a:cs typeface="Aptos" pitchFamily="34" charset="-120"/>
-              </a:rPr>
-              <a:t>grote benchmarksprongen</a:t>
-            </a:r>
-            <a:endParaRPr lang="en-US" sz="1600" dirty="0"/>
-          </a:p>
-          <a:p>
-            <a:pPr indent="0" marL="0">
-              <a:buNone/>
-            </a:pPr>
-            <a:r>
-              <a:rPr lang="en-US" sz="1600" b="1" dirty="0">
-                <a:solidFill>
-                  <a:srgbClr val="FFFFFF"/>
-                </a:solidFill>
-                <a:latin typeface="Aptos" pitchFamily="34" charset="0"/>
-                <a:ea typeface="Aptos" pitchFamily="34" charset="-122"/>
-                <a:cs typeface="Aptos" pitchFamily="34" charset="-120"/>
-              </a:rPr>
-              <a:t>&gt;280x kostdaling</a:t>
-            </a:r>
-            <a:endParaRPr lang="en-US" sz="1600" dirty="0"/>
-          </a:p>
-          <a:p>
-            <a:pPr indent="0" marL="0">
-              <a:buNone/>
-            </a:pPr>
-            <a:r>
-              <a:rPr lang="en-US" sz="1600" b="1" dirty="0">
-                <a:solidFill>
-                  <a:srgbClr val="FFFFFF"/>
-                </a:solidFill>
-                <a:latin typeface="Aptos" pitchFamily="34" charset="0"/>
-                <a:ea typeface="Aptos" pitchFamily="34" charset="-122"/>
-                <a:cs typeface="Aptos" pitchFamily="34" charset="-120"/>
-              </a:rPr>
-              <a:t>sterke compute- en efficiencygroei</a:t>
-            </a:r>
-            <a:endParaRPr lang="en-US" sz="1600" dirty="0"/>
-          </a:p>
-        </p:txBody>
-      </p:sp>
-      <p:sp>
-        <p:nvSpPr>
-          <p:cNvPr id="15" name="Shape 11"/>
-          <p:cNvSpPr/>
-          <p:nvPr/>
-        </p:nvSpPr>
-        <p:spPr>
-          <a:xfrm>
-            <a:off x="8668512" y="3456432"/>
-            <a:ext cx="1517904" cy="329184"/>
+          <p:cNvPr id="28" name="Shape 24"/>
+          <p:cNvSpPr/>
+          <p:nvPr/>
+        </p:nvSpPr>
+        <p:spPr>
+          <a:xfrm>
+            <a:off x="5797296" y="3968496"/>
+            <a:ext cx="1591056" cy="329184"/>
           </a:xfrm>
           <a:prstGeom prst="roundRect">
             <a:avLst>
@@ -7625,14 +7774,14 @@
       </p:sp>
       <p:sp>
         <p:nvSpPr>
-          <p:cNvPr id="16" name="Text 12"/>
-          <p:cNvSpPr/>
-          <p:nvPr/>
-        </p:nvSpPr>
-        <p:spPr>
-          <a:xfrm>
-            <a:off x="8814816" y="3529584"/>
-            <a:ext cx="1225296" cy="164592"/>
+          <p:cNvPr id="29" name="Text 25"/>
+          <p:cNvSpPr/>
+          <p:nvPr/>
+        </p:nvSpPr>
+        <p:spPr>
+          <a:xfrm>
+            <a:off x="5943600" y="4041648"/>
+            <a:ext cx="1298448" cy="164592"/>
           </a:xfrm>
           <a:prstGeom prst="rect">
             <a:avLst/>
@@ -7658,7 +7807,7 @@
                 <a:ea typeface="Aptos" pitchFamily="34" charset="-122"/>
                 <a:cs typeface="Aptos" pitchFamily="34" charset="-120"/>
               </a:rPr>
-              <a:t>wat dit níét zegt</a:t>
+              <a:t>voorzichtigheid blijft</a:t>
             </a:r>
             <a:endParaRPr lang="en-US" sz="900" dirty="0"/>
           </a:p>
@@ -7666,71 +7815,71 @@
       </p:sp>
       <p:sp>
         <p:nvSpPr>
-          <p:cNvPr id="17" name="Text 13"/>
-          <p:cNvSpPr/>
-          <p:nvPr/>
-        </p:nvSpPr>
-        <p:spPr>
-          <a:xfrm>
-            <a:off x="8668512" y="3895344"/>
-            <a:ext cx="2578608" cy="896112"/>
-          </a:xfrm>
-          <a:prstGeom prst="rect">
-            <a:avLst/>
-          </a:prstGeom>
-          <a:noFill/>
-          <a:ln/>
-        </p:spPr>
-        <p:txBody>
-          <a:bodyPr wrap="square" lIns="0" tIns="0" rIns="0" bIns="0" rtlCol="0" anchor="ctr">
-            <a:normAutofit/>
-          </a:bodyPr>
-          <a:lstStyle/>
-          <a:p>
-            <a:pPr indent="0" marL="0">
-              <a:buNone/>
-            </a:pPr>
-            <a:r>
-              <a:rPr lang="en-US" sz="1400" dirty="0">
+          <p:cNvPr id="30" name="Text 26"/>
+          <p:cNvSpPr/>
+          <p:nvPr/>
+        </p:nvSpPr>
+        <p:spPr>
+          <a:xfrm>
+            <a:off x="5797296" y="4407408"/>
+            <a:ext cx="5376672" cy="676656"/>
+          </a:xfrm>
+          <a:prstGeom prst="rect">
+            <a:avLst/>
+          </a:prstGeom>
+          <a:noFill/>
+          <a:ln/>
+        </p:spPr>
+        <p:txBody>
+          <a:bodyPr wrap="square" lIns="0" tIns="0" rIns="0" bIns="0" rtlCol="0" anchor="ctr">
+            <a:normAutofit/>
+          </a:bodyPr>
+          <a:lstStyle/>
+          <a:p>
+            <a:pPr indent="0" marL="0">
+              <a:buNone/>
+            </a:pPr>
+            <a:r>
+              <a:rPr lang="en-US" sz="1700" b="1" dirty="0">
                 <a:solidFill>
                   <a:srgbClr val="FFFFFF"/>
                 </a:solidFill>
-                <a:latin typeface="Aptos" pitchFamily="34" charset="0"/>
-                <a:ea typeface="Aptos" pitchFamily="34" charset="-122"/>
-                <a:cs typeface="Aptos" pitchFamily="34" charset="-120"/>
-              </a:rPr>
-              <a:t>niet elke capability-curve blijft netjes exponentieel</a:t>
-            </a:r>
-            <a:endParaRPr lang="en-US" sz="1400" dirty="0"/>
-          </a:p>
-          <a:p>
-            <a:pPr indent="0" marL="0">
-              <a:buNone/>
-            </a:pPr>
-            <a:r>
-              <a:rPr lang="en-US" sz="1400" dirty="0">
+                <a:latin typeface="Aptos Display" pitchFamily="34" charset="0"/>
+                <a:ea typeface="Aptos Display" pitchFamily="34" charset="-122"/>
+                <a:cs typeface="Aptos Display" pitchFamily="34" charset="-120"/>
+              </a:rPr>
+              <a:t>Niet elke capability-curve blijft netjes exponentieel.</a:t>
+            </a:r>
+            <a:endParaRPr lang="en-US" sz="1700" dirty="0"/>
+          </a:p>
+          <a:p>
+            <a:pPr indent="0" marL="0">
+              <a:buNone/>
+            </a:pPr>
+            <a:r>
+              <a:rPr lang="en-US" sz="1700" b="1" dirty="0">
                 <a:solidFill>
                   <a:srgbClr val="FFFFFF"/>
                 </a:solidFill>
-                <a:latin typeface="Aptos" pitchFamily="34" charset="0"/>
-                <a:ea typeface="Aptos" pitchFamily="34" charset="-122"/>
-                <a:cs typeface="Aptos" pitchFamily="34" charset="-120"/>
-              </a:rPr>
-              <a:t>bounded benchmarks kunnen satureren</a:t>
-            </a:r>
-            <a:endParaRPr lang="en-US" sz="1400" dirty="0"/>
-          </a:p>
-        </p:txBody>
-      </p:sp>
-      <p:sp>
-        <p:nvSpPr>
-          <p:cNvPr id="18" name="Shape 14"/>
-          <p:cNvSpPr/>
-          <p:nvPr/>
-        </p:nvSpPr>
-        <p:spPr>
-          <a:xfrm>
-            <a:off x="713232" y="5504688"/>
+                <a:latin typeface="Aptos Display" pitchFamily="34" charset="0"/>
+                <a:ea typeface="Aptos Display" pitchFamily="34" charset="-122"/>
+                <a:cs typeface="Aptos Display" pitchFamily="34" charset="-120"/>
+              </a:rPr>
+              <a:t>Bounded benchmarks kunnen satureren, dus lees capability minder hard dan kosten, compute en efficiency.</a:t>
+            </a:r>
+            <a:endParaRPr lang="en-US" sz="1700" dirty="0"/>
+          </a:p>
+        </p:txBody>
+      </p:sp>
+      <p:sp>
+        <p:nvSpPr>
+          <p:cNvPr id="31" name="Shape 27"/>
+          <p:cNvSpPr/>
+          <p:nvPr/>
+        </p:nvSpPr>
+        <p:spPr>
+          <a:xfrm>
+            <a:off x="713232" y="5596128"/>
             <a:ext cx="10927080" cy="640080"/>
           </a:xfrm>
           <a:prstGeom prst="roundRect">
@@ -7751,13 +7900,13 @@
       </p:sp>
       <p:sp>
         <p:nvSpPr>
-          <p:cNvPr id="19" name="Text 15"/>
-          <p:cNvSpPr/>
-          <p:nvPr/>
-        </p:nvSpPr>
-        <p:spPr>
-          <a:xfrm>
-            <a:off x="932688" y="5669280"/>
+          <p:cNvPr id="32" name="Text 28"/>
+          <p:cNvSpPr/>
+          <p:nvPr/>
+        </p:nvSpPr>
+        <p:spPr>
+          <a:xfrm>
+            <a:off x="932688" y="5760720"/>
             <a:ext cx="10469880" cy="201168"/>
           </a:xfrm>
           <a:prstGeom prst="rect">
@@ -7784,7 +7933,7 @@
                 <a:ea typeface="Aptos" pitchFamily="34" charset="-122"/>
                 <a:cs typeface="Aptos" pitchFamily="34" charset="-120"/>
               </a:rPr>
-              <a:t>Takeaway: kijk harder naar kosten, compute en efficiency dan naar één spectaculaire scorelijn.</a:t>
+              <a:t>Takeaway: onthoud vooral kostdaling, compute en efficiency. Niet één spectaculaire scorelijn.</a:t>
             </a:r>
             <a:endParaRPr lang="en-US" sz="1200" dirty="0"/>
           </a:p>
@@ -8999,25 +9148,25 @@
         <p:spPr>
           <a:xfrm>
             <a:off x="713232" y="1188720"/>
-            <a:ext cx="5669280" cy="493776"/>
-          </a:xfrm>
-          <a:prstGeom prst="rect">
-            <a:avLst/>
-          </a:prstGeom>
-          <a:noFill/>
-          <a:ln/>
-        </p:spPr>
-        <p:txBody>
-          <a:bodyPr wrap="square" lIns="0" tIns="0" rIns="0" bIns="0" rtlCol="0" anchor="ctr">
-            <a:normAutofit/>
-          </a:bodyPr>
-          <a:lstStyle/>
-          <a:p>
-            <a:pPr indent="0" marL="0">
-              <a:buNone/>
-            </a:pPr>
-            <a:r>
-              <a:rPr lang="en-US" sz="2000" b="1" dirty="0">
+            <a:ext cx="6400800" cy="493776"/>
+          </a:xfrm>
+          <a:prstGeom prst="rect">
+            <a:avLst/>
+          </a:prstGeom>
+          <a:noFill/>
+          <a:ln/>
+        </p:spPr>
+        <p:txBody>
+          <a:bodyPr wrap="square" lIns="0" tIns="0" rIns="0" bIns="0" rtlCol="0" anchor="ctr">
+            <a:normAutofit/>
+          </a:bodyPr>
+          <a:lstStyle/>
+          <a:p>
+            <a:pPr indent="0" marL="0">
+              <a:buNone/>
+            </a:pPr>
+            <a:r>
+              <a:rPr lang="en-US" sz="2200" b="1" dirty="0">
                 <a:solidFill>
                   <a:srgbClr val="12192C"/>
                 </a:solidFill>
@@ -9025,16 +9174,16 @@
                 <a:ea typeface="Aptos Display" pitchFamily="34" charset="-122"/>
                 <a:cs typeface="Aptos Display" pitchFamily="34" charset="-120"/>
               </a:rPr>
-              <a:t>Niet vragen: welk jaar belooft dit model?</a:t>
-            </a:r>
-            <a:endParaRPr lang="en-US" sz="2000" dirty="0"/>
-          </a:p>
-          <a:p>
-            <a:pPr indent="0" marL="0">
-              <a:buNone/>
-            </a:pPr>
-            <a:r>
-              <a:rPr lang="en-US" sz="2000" b="1" dirty="0">
+              <a:t>Niet onthouden: één jaartal.</a:t>
+            </a:r>
+            <a:endParaRPr lang="en-US" sz="2200" dirty="0"/>
+          </a:p>
+          <a:p>
+            <a:pPr indent="0" marL="0">
+              <a:buNone/>
+            </a:pPr>
+            <a:r>
+              <a:rPr lang="en-US" sz="2200" b="1" dirty="0">
                 <a:solidFill>
                   <a:srgbClr val="12192C"/>
                 </a:solidFill>
@@ -9042,9 +9191,9 @@
                 <a:ea typeface="Aptos Display" pitchFamily="34" charset="-122"/>
                 <a:cs typeface="Aptos Display" pitchFamily="34" charset="-120"/>
               </a:rPr>
-              <a:t>Wel vragen: welke aannames duwen de uitkomst echt?</a:t>
-            </a:r>
-            <a:endParaRPr lang="en-US" sz="2000" dirty="0"/>
+              <a:t>Wel onthouden: welke bottlenecks de uitkomst sturen.</a:t>
+            </a:r>
+            <a:endParaRPr lang="en-US" sz="2200" dirty="0"/>
           </a:p>
         </p:txBody>
       </p:sp>
@@ -9056,571 +9205,12 @@
         </p:nvSpPr>
         <p:spPr>
           <a:xfrm>
-            <a:off x="713232" y="1920240"/>
-            <a:ext cx="3063240" cy="1828800"/>
+            <a:off x="713232" y="1901952"/>
+            <a:ext cx="10927080" cy="1956816"/>
           </a:xfrm>
           <a:prstGeom prst="roundRect">
             <a:avLst>
-              <a:gd name="adj" fmla="val 3000"/>
-            </a:avLst>
-          </a:prstGeom>
-          <a:solidFill>
-            <a:srgbClr val="F7F8FB"/>
-          </a:solidFill>
-          <a:ln w="12700">
-            <a:solidFill>
-              <a:srgbClr val="D9DDE6"/>
-            </a:solidFill>
-            <a:prstDash val="solid"/>
-          </a:ln>
-        </p:spPr>
-      </p:sp>
-      <p:sp>
-        <p:nvSpPr>
-          <p:cNvPr id="11" name="Text 8"/>
-          <p:cNvSpPr/>
-          <p:nvPr/>
-        </p:nvSpPr>
-        <p:spPr>
-          <a:xfrm>
-            <a:off x="896112" y="2103120"/>
-            <a:ext cx="2697480" cy="502920"/>
-          </a:xfrm>
-          <a:prstGeom prst="rect">
-            <a:avLst/>
-          </a:prstGeom>
-          <a:noFill/>
-          <a:ln/>
-        </p:spPr>
-        <p:txBody>
-          <a:bodyPr wrap="square" lIns="0" tIns="0" rIns="0" bIns="0" rtlCol="0" anchor="ctr">
-            <a:normAutofit/>
-          </a:bodyPr>
-          <a:lstStyle/>
-          <a:p>
-            <a:pPr indent="0" marL="0">
-              <a:buNone/>
-            </a:pPr>
-            <a:r>
-              <a:rPr lang="en-US" sz="2800" b="1" dirty="0">
-                <a:solidFill>
-                  <a:srgbClr val="E93325"/>
-                </a:solidFill>
-                <a:latin typeface="Aptos Display" pitchFamily="34" charset="0"/>
-                <a:ea typeface="Aptos Display" pitchFamily="34" charset="-122"/>
-                <a:cs typeface="Aptos Display" pitchFamily="34" charset="-120"/>
-              </a:rPr>
-              <a:t>28,1%</a:t>
-            </a:r>
-            <a:endParaRPr lang="en-US" sz="2800" dirty="0"/>
-          </a:p>
-        </p:txBody>
-      </p:sp>
-      <p:sp>
-        <p:nvSpPr>
-          <p:cNvPr id="12" name="Text 9"/>
-          <p:cNvSpPr/>
-          <p:nvPr/>
-        </p:nvSpPr>
-        <p:spPr>
-          <a:xfrm>
-            <a:off x="896112" y="2706624"/>
-            <a:ext cx="2697480" cy="237744"/>
-          </a:xfrm>
-          <a:prstGeom prst="rect">
-            <a:avLst/>
-          </a:prstGeom>
-          <a:noFill/>
-          <a:ln/>
-        </p:spPr>
-        <p:txBody>
-          <a:bodyPr wrap="square" lIns="0" tIns="0" rIns="0" bIns="0" rtlCol="0" anchor="ctr">
-            <a:normAutofit/>
-          </a:bodyPr>
-          <a:lstStyle/>
-          <a:p>
-            <a:pPr indent="0" marL="0">
-              <a:buNone/>
-            </a:pPr>
-            <a:r>
-              <a:rPr lang="en-US" sz="1200" b="1" dirty="0">
-                <a:solidFill>
-                  <a:srgbClr val="12192C"/>
-                </a:solidFill>
-                <a:latin typeface="Aptos" pitchFamily="34" charset="0"/>
-                <a:ea typeface="Aptos" pitchFamily="34" charset="-122"/>
-                <a:cs typeface="Aptos" pitchFamily="34" charset="-120"/>
-              </a:rPr>
-              <a:t>basisscenario tegen 2040</a:t>
-            </a:r>
-            <a:endParaRPr lang="en-US" sz="1200" dirty="0"/>
-          </a:p>
-        </p:txBody>
-      </p:sp>
-      <p:sp>
-        <p:nvSpPr>
-          <p:cNvPr id="13" name="Text 10"/>
-          <p:cNvSpPr/>
-          <p:nvPr/>
-        </p:nvSpPr>
-        <p:spPr>
-          <a:xfrm>
-            <a:off x="896112" y="3017520"/>
-            <a:ext cx="2697480" cy="457200"/>
-          </a:xfrm>
-          <a:prstGeom prst="rect">
-            <a:avLst/>
-          </a:prstGeom>
-          <a:noFill/>
-          <a:ln/>
-        </p:spPr>
-        <p:txBody>
-          <a:bodyPr wrap="square" lIns="0" tIns="0" rIns="0" bIns="0" rtlCol="0" anchor="ctr">
-            <a:normAutofit/>
-          </a:bodyPr>
-          <a:lstStyle/>
-          <a:p>
-            <a:pPr indent="0" marL="0">
-              <a:buNone/>
-            </a:pPr>
-            <a:r>
-              <a:rPr lang="en-US" sz="1100" dirty="0">
-                <a:solidFill>
-                  <a:srgbClr val="5B6476"/>
-                </a:solidFill>
-                <a:latin typeface="Aptos" pitchFamily="34" charset="0"/>
-                <a:ea typeface="Aptos" pitchFamily="34" charset="-122"/>
-                <a:cs typeface="Aptos" pitchFamily="34" charset="-120"/>
-              </a:rPr>
-              <a:t>kans op crossing</a:t>
-            </a:r>
-            <a:endParaRPr lang="en-US" sz="1100" dirty="0"/>
-          </a:p>
-        </p:txBody>
-      </p:sp>
-      <p:sp>
-        <p:nvSpPr>
-          <p:cNvPr id="14" name="Shape 11"/>
-          <p:cNvSpPr/>
-          <p:nvPr/>
-        </p:nvSpPr>
-        <p:spPr>
-          <a:xfrm>
-            <a:off x="3968496" y="1920240"/>
-            <a:ext cx="2560320" cy="1828800"/>
-          </a:xfrm>
-          <a:prstGeom prst="roundRect">
-            <a:avLst>
-              <a:gd name="adj" fmla="val 3000"/>
-            </a:avLst>
-          </a:prstGeom>
-          <a:solidFill>
-            <a:srgbClr val="F7F8FB"/>
-          </a:solidFill>
-          <a:ln w="12700">
-            <a:solidFill>
-              <a:srgbClr val="D9DDE6"/>
-            </a:solidFill>
-            <a:prstDash val="solid"/>
-          </a:ln>
-        </p:spPr>
-      </p:sp>
-      <p:sp>
-        <p:nvSpPr>
-          <p:cNvPr id="15" name="Text 12"/>
-          <p:cNvSpPr/>
-          <p:nvPr/>
-        </p:nvSpPr>
-        <p:spPr>
-          <a:xfrm>
-            <a:off x="4151376" y="2103120"/>
-            <a:ext cx="2194560" cy="502920"/>
-          </a:xfrm>
-          <a:prstGeom prst="rect">
-            <a:avLst/>
-          </a:prstGeom>
-          <a:noFill/>
-          <a:ln/>
-        </p:spPr>
-        <p:txBody>
-          <a:bodyPr wrap="square" lIns="0" tIns="0" rIns="0" bIns="0" rtlCol="0" anchor="ctr">
-            <a:normAutofit/>
-          </a:bodyPr>
-          <a:lstStyle/>
-          <a:p>
-            <a:pPr indent="0" marL="0">
-              <a:buNone/>
-            </a:pPr>
-            <a:r>
-              <a:rPr lang="en-US" sz="2800" b="1" dirty="0">
-                <a:solidFill>
-                  <a:srgbClr val="F2AD18"/>
-                </a:solidFill>
-                <a:latin typeface="Aptos Display" pitchFamily="34" charset="0"/>
-                <a:ea typeface="Aptos Display" pitchFamily="34" charset="-122"/>
-                <a:cs typeface="Aptos Display" pitchFamily="34" charset="-120"/>
-              </a:rPr>
-              <a:t>2038</a:t>
-            </a:r>
-            <a:endParaRPr lang="en-US" sz="2800" dirty="0"/>
-          </a:p>
-        </p:txBody>
-      </p:sp>
-      <p:sp>
-        <p:nvSpPr>
-          <p:cNvPr id="16" name="Text 13"/>
-          <p:cNvSpPr/>
-          <p:nvPr/>
-        </p:nvSpPr>
-        <p:spPr>
-          <a:xfrm>
-            <a:off x="4151376" y="2706624"/>
-            <a:ext cx="2194560" cy="237744"/>
-          </a:xfrm>
-          <a:prstGeom prst="rect">
-            <a:avLst/>
-          </a:prstGeom>
-          <a:noFill/>
-          <a:ln/>
-        </p:spPr>
-        <p:txBody>
-          <a:bodyPr wrap="square" lIns="0" tIns="0" rIns="0" bIns="0" rtlCol="0" anchor="ctr">
-            <a:normAutofit/>
-          </a:bodyPr>
-          <a:lstStyle/>
-          <a:p>
-            <a:pPr indent="0" marL="0">
-              <a:buNone/>
-            </a:pPr>
-            <a:r>
-              <a:rPr lang="en-US" sz="1200" b="1" dirty="0">
-                <a:solidFill>
-                  <a:srgbClr val="12192C"/>
-                </a:solidFill>
-                <a:latin typeface="Aptos" pitchFamily="34" charset="0"/>
-                <a:ea typeface="Aptos" pitchFamily="34" charset="-122"/>
-                <a:cs typeface="Aptos" pitchFamily="34" charset="-120"/>
-              </a:rPr>
-              <a:t>mediaan in basisscenario</a:t>
-            </a:r>
-            <a:endParaRPr lang="en-US" sz="1200" dirty="0"/>
-          </a:p>
-        </p:txBody>
-      </p:sp>
-      <p:sp>
-        <p:nvSpPr>
-          <p:cNvPr id="17" name="Text 14"/>
-          <p:cNvSpPr/>
-          <p:nvPr/>
-        </p:nvSpPr>
-        <p:spPr>
-          <a:xfrm>
-            <a:off x="4151376" y="3017520"/>
-            <a:ext cx="2194560" cy="457200"/>
-          </a:xfrm>
-          <a:prstGeom prst="rect">
-            <a:avLst/>
-          </a:prstGeom>
-          <a:noFill/>
-          <a:ln/>
-        </p:spPr>
-        <p:txBody>
-          <a:bodyPr wrap="square" lIns="0" tIns="0" rIns="0" bIns="0" rtlCol="0" anchor="ctr">
-            <a:normAutofit/>
-          </a:bodyPr>
-          <a:lstStyle/>
-          <a:p>
-            <a:pPr indent="0" marL="0">
-              <a:buNone/>
-            </a:pPr>
-            <a:r>
-              <a:rPr lang="en-US" sz="1100" dirty="0">
-                <a:solidFill>
-                  <a:srgbClr val="5B6476"/>
-                </a:solidFill>
-                <a:latin typeface="Aptos" pitchFamily="34" charset="0"/>
-                <a:ea typeface="Aptos" pitchFamily="34" charset="-122"/>
-                <a:cs typeface="Aptos" pitchFamily="34" charset="-120"/>
-              </a:rPr>
-              <a:t>geen datum-belofte</a:t>
-            </a:r>
-            <a:endParaRPr lang="en-US" sz="1100" dirty="0"/>
-          </a:p>
-        </p:txBody>
-      </p:sp>
-      <p:sp>
-        <p:nvSpPr>
-          <p:cNvPr id="18" name="Shape 15"/>
-          <p:cNvSpPr/>
-          <p:nvPr/>
-        </p:nvSpPr>
-        <p:spPr>
-          <a:xfrm>
-            <a:off x="6729984" y="1920240"/>
-            <a:ext cx="2962656" cy="1828800"/>
-          </a:xfrm>
-          <a:prstGeom prst="roundRect">
-            <a:avLst>
-              <a:gd name="adj" fmla="val 3000"/>
-            </a:avLst>
-          </a:prstGeom>
-          <a:solidFill>
-            <a:srgbClr val="F7F8FB"/>
-          </a:solidFill>
-          <a:ln w="12700">
-            <a:solidFill>
-              <a:srgbClr val="D9DDE6"/>
-            </a:solidFill>
-            <a:prstDash val="solid"/>
-          </a:ln>
-        </p:spPr>
-      </p:sp>
-      <p:sp>
-        <p:nvSpPr>
-          <p:cNvPr id="19" name="Text 16"/>
-          <p:cNvSpPr/>
-          <p:nvPr/>
-        </p:nvSpPr>
-        <p:spPr>
-          <a:xfrm>
-            <a:off x="6912864" y="2103120"/>
-            <a:ext cx="2596896" cy="502920"/>
-          </a:xfrm>
-          <a:prstGeom prst="rect">
-            <a:avLst/>
-          </a:prstGeom>
-          <a:noFill/>
-          <a:ln/>
-        </p:spPr>
-        <p:txBody>
-          <a:bodyPr wrap="square" lIns="0" tIns="0" rIns="0" bIns="0" rtlCol="0" anchor="ctr">
-            <a:normAutofit/>
-          </a:bodyPr>
-          <a:lstStyle/>
-          <a:p>
-            <a:pPr indent="0" marL="0">
-              <a:buNone/>
-            </a:pPr>
-            <a:r>
-              <a:rPr lang="en-US" sz="2800" b="1" dirty="0">
-                <a:solidFill>
-                  <a:srgbClr val="0F766E"/>
-                </a:solidFill>
-                <a:latin typeface="Aptos Display" pitchFamily="34" charset="0"/>
-                <a:ea typeface="Aptos Display" pitchFamily="34" charset="-122"/>
-                <a:cs typeface="Aptos Display" pitchFamily="34" charset="-120"/>
-              </a:rPr>
-              <a:t>71,9%</a:t>
-            </a:r>
-            <a:endParaRPr lang="en-US" sz="2800" dirty="0"/>
-          </a:p>
-        </p:txBody>
-      </p:sp>
-      <p:sp>
-        <p:nvSpPr>
-          <p:cNvPr id="20" name="Text 17"/>
-          <p:cNvSpPr/>
-          <p:nvPr/>
-        </p:nvSpPr>
-        <p:spPr>
-          <a:xfrm>
-            <a:off x="6912864" y="2706624"/>
-            <a:ext cx="2596896" cy="237744"/>
-          </a:xfrm>
-          <a:prstGeom prst="rect">
-            <a:avLst/>
-          </a:prstGeom>
-          <a:noFill/>
-          <a:ln/>
-        </p:spPr>
-        <p:txBody>
-          <a:bodyPr wrap="square" lIns="0" tIns="0" rIns="0" bIns="0" rtlCol="0" anchor="ctr">
-            <a:normAutofit/>
-          </a:bodyPr>
-          <a:lstStyle/>
-          <a:p>
-            <a:pPr indent="0" marL="0">
-              <a:buNone/>
-            </a:pPr>
-            <a:r>
-              <a:rPr lang="en-US" sz="1200" b="1" dirty="0">
-                <a:solidFill>
-                  <a:srgbClr val="12192C"/>
-                </a:solidFill>
-                <a:latin typeface="Aptos" pitchFamily="34" charset="0"/>
-                <a:ea typeface="Aptos" pitchFamily="34" charset="-122"/>
-                <a:cs typeface="Aptos" pitchFamily="34" charset="-120"/>
-              </a:rPr>
-              <a:t>crosst niet tegen 2040</a:t>
-            </a:r>
-            <a:endParaRPr lang="en-US" sz="1200" dirty="0"/>
-          </a:p>
-        </p:txBody>
-      </p:sp>
-      <p:sp>
-        <p:nvSpPr>
-          <p:cNvPr id="21" name="Text 18"/>
-          <p:cNvSpPr/>
-          <p:nvPr/>
-        </p:nvSpPr>
-        <p:spPr>
-          <a:xfrm>
-            <a:off x="6912864" y="3017520"/>
-            <a:ext cx="2596896" cy="457200"/>
-          </a:xfrm>
-          <a:prstGeom prst="rect">
-            <a:avLst/>
-          </a:prstGeom>
-          <a:noFill/>
-          <a:ln/>
-        </p:spPr>
-        <p:txBody>
-          <a:bodyPr wrap="square" lIns="0" tIns="0" rIns="0" bIns="0" rtlCol="0" anchor="ctr">
-            <a:normAutofit/>
-          </a:bodyPr>
-          <a:lstStyle/>
-          <a:p>
-            <a:pPr indent="0" marL="0">
-              <a:buNone/>
-            </a:pPr>
-            <a:r>
-              <a:rPr lang="en-US" sz="1100" dirty="0">
-                <a:solidFill>
-                  <a:srgbClr val="5B6476"/>
-                </a:solidFill>
-                <a:latin typeface="Aptos" pitchFamily="34" charset="0"/>
-                <a:ea typeface="Aptos" pitchFamily="34" charset="-122"/>
-                <a:cs typeface="Aptos" pitchFamily="34" charset="-120"/>
-              </a:rPr>
-              <a:t>onder huidige aannames</a:t>
-            </a:r>
-            <a:endParaRPr lang="en-US" sz="1100" dirty="0"/>
-          </a:p>
-        </p:txBody>
-      </p:sp>
-      <p:sp>
-        <p:nvSpPr>
-          <p:cNvPr id="22" name="Shape 19"/>
-          <p:cNvSpPr/>
-          <p:nvPr/>
-        </p:nvSpPr>
-        <p:spPr>
-          <a:xfrm>
-            <a:off x="9912096" y="1920240"/>
-            <a:ext cx="1728216" cy="1828800"/>
-          </a:xfrm>
-          <a:prstGeom prst="roundRect">
-            <a:avLst>
-              <a:gd name="adj" fmla="val 3175"/>
-            </a:avLst>
-          </a:prstGeom>
-          <a:solidFill>
-            <a:srgbClr val="F7F8FB"/>
-          </a:solidFill>
-          <a:ln w="12700">
-            <a:solidFill>
-              <a:srgbClr val="D9DDE6"/>
-            </a:solidFill>
-            <a:prstDash val="solid"/>
-          </a:ln>
-        </p:spPr>
-      </p:sp>
-      <p:sp>
-        <p:nvSpPr>
-          <p:cNvPr id="23" name="Text 20"/>
-          <p:cNvSpPr/>
-          <p:nvPr/>
-        </p:nvSpPr>
-        <p:spPr>
-          <a:xfrm>
-            <a:off x="10113264" y="2139696"/>
-            <a:ext cx="1097280" cy="146304"/>
-          </a:xfrm>
-          <a:prstGeom prst="rect">
-            <a:avLst/>
-          </a:prstGeom>
-          <a:noFill/>
-          <a:ln/>
-        </p:spPr>
-        <p:txBody>
-          <a:bodyPr wrap="square" lIns="0" tIns="0" rIns="0" bIns="0" rtlCol="0" anchor="ctr">
-            <a:normAutofit/>
-          </a:bodyPr>
-          <a:lstStyle/>
-          <a:p>
-            <a:pPr indent="0" marL="0">
-              <a:buNone/>
-            </a:pPr>
-            <a:r>
-              <a:rPr lang="en-US" sz="1000" b="1" dirty="0">
-                <a:solidFill>
-                  <a:srgbClr val="5B6476"/>
-                </a:solidFill>
-                <a:latin typeface="Aptos" pitchFamily="34" charset="0"/>
-                <a:ea typeface="Aptos" pitchFamily="34" charset="-122"/>
-                <a:cs typeface="Aptos" pitchFamily="34" charset="-120"/>
-              </a:rPr>
-              <a:t>label</a:t>
-            </a:r>
-            <a:endParaRPr lang="en-US" sz="1000" dirty="0"/>
-          </a:p>
-        </p:txBody>
-      </p:sp>
-      <p:sp>
-        <p:nvSpPr>
-          <p:cNvPr id="24" name="Text 21"/>
-          <p:cNvSpPr/>
-          <p:nvPr/>
-        </p:nvSpPr>
-        <p:spPr>
-          <a:xfrm>
-            <a:off x="10113264" y="2432304"/>
-            <a:ext cx="1097280" cy="475488"/>
-          </a:xfrm>
-          <a:prstGeom prst="rect">
-            <a:avLst/>
-          </a:prstGeom>
-          <a:noFill/>
-          <a:ln/>
-        </p:spPr>
-        <p:txBody>
-          <a:bodyPr wrap="square" lIns="0" tIns="0" rIns="0" bIns="0" rtlCol="0" anchor="ctr">
-            <a:normAutofit/>
-          </a:bodyPr>
-          <a:lstStyle/>
-          <a:p>
-            <a:pPr indent="0" marL="0">
-              <a:buNone/>
-            </a:pPr>
-            <a:r>
-              <a:rPr lang="en-US" sz="1500" b="1" dirty="0">
-                <a:solidFill>
-                  <a:srgbClr val="E93325"/>
-                </a:solidFill>
-                <a:latin typeface="Aptos" pitchFamily="34" charset="0"/>
-                <a:ea typeface="Aptos" pitchFamily="34" charset="-122"/>
-                <a:cs typeface="Aptos" pitchFamily="34" charset="-120"/>
-              </a:rPr>
-              <a:t>assumptie-gedreven</a:t>
-            </a:r>
-            <a:endParaRPr lang="en-US" sz="1500" dirty="0"/>
-          </a:p>
-        </p:txBody>
-      </p:sp>
-      <p:sp>
-        <p:nvSpPr>
-          <p:cNvPr id="25" name="Shape 22"/>
-          <p:cNvSpPr/>
-          <p:nvPr/>
-        </p:nvSpPr>
-        <p:spPr>
-          <a:xfrm>
-            <a:off x="713232" y="4133088"/>
-            <a:ext cx="10927080" cy="1335024"/>
-          </a:xfrm>
-          <a:prstGeom prst="roundRect">
-            <a:avLst>
-              <a:gd name="adj" fmla="val 4110"/>
+              <a:gd name="adj" fmla="val 2804"/>
             </a:avLst>
           </a:prstGeom>
           <a:solidFill>
@@ -9636,14 +9226,14 @@
       </p:sp>
       <p:sp>
         <p:nvSpPr>
-          <p:cNvPr id="26" name="Text 23"/>
-          <p:cNvSpPr/>
-          <p:nvPr/>
-        </p:nvSpPr>
-        <p:spPr>
-          <a:xfrm>
-            <a:off x="932688" y="4407408"/>
-            <a:ext cx="2377440" cy="182880"/>
+          <p:cNvPr id="11" name="Text 8"/>
+          <p:cNvSpPr/>
+          <p:nvPr/>
+        </p:nvSpPr>
+        <p:spPr>
+          <a:xfrm>
+            <a:off x="987552" y="2212848"/>
+            <a:ext cx="2560320" cy="201168"/>
           </a:xfrm>
           <a:prstGeom prst="rect">
             <a:avLst/>
@@ -9677,55 +9267,96 @@
       </p:sp>
       <p:sp>
         <p:nvSpPr>
-          <p:cNvPr id="27" name="Text 24"/>
-          <p:cNvSpPr/>
-          <p:nvPr/>
-        </p:nvSpPr>
-        <p:spPr>
-          <a:xfrm>
-            <a:off x="932688" y="4718304"/>
-            <a:ext cx="9875520" cy="457200"/>
-          </a:xfrm>
-          <a:prstGeom prst="rect">
-            <a:avLst/>
-          </a:prstGeom>
-          <a:noFill/>
-          <a:ln/>
-        </p:spPr>
-        <p:txBody>
-          <a:bodyPr wrap="square" lIns="0" tIns="0" rIns="0" bIns="0" rtlCol="0" anchor="ctr">
-            <a:normAutofit/>
-          </a:bodyPr>
-          <a:lstStyle/>
-          <a:p>
-            <a:pPr indent="0" marL="0">
-              <a:buNone/>
-            </a:pPr>
-            <a:r>
-              <a:rPr lang="en-US" sz="1600" dirty="0">
+          <p:cNvPr id="12" name="Text 9"/>
+          <p:cNvSpPr/>
+          <p:nvPr/>
+        </p:nvSpPr>
+        <p:spPr>
+          <a:xfrm>
+            <a:off x="987552" y="2615184"/>
+            <a:ext cx="9875520" cy="310896"/>
+          </a:xfrm>
+          <a:prstGeom prst="rect">
+            <a:avLst/>
+          </a:prstGeom>
+          <a:noFill/>
+          <a:ln/>
+        </p:spPr>
+        <p:txBody>
+          <a:bodyPr wrap="square" lIns="0" tIns="0" rIns="0" bIns="0" rtlCol="0" anchor="ctr">
+            <a:normAutofit/>
+          </a:bodyPr>
+          <a:lstStyle/>
+          <a:p>
+            <a:pPr indent="0" marL="0">
+              <a:buNone/>
+            </a:pPr>
+            <a:r>
+              <a:rPr lang="en-US" sz="2400" b="1" dirty="0">
                 <a:solidFill>
                   <a:srgbClr val="FFFFFF"/>
                 </a:solidFill>
-                <a:latin typeface="Aptos" pitchFamily="34" charset="0"/>
-                <a:ea typeface="Aptos" pitchFamily="34" charset="-122"/>
-                <a:cs typeface="Aptos" pitchFamily="34" charset="-120"/>
-              </a:rPr>
-              <a:t>In deze parameterisatie binden floors eerder dan de headline threshold. Dus memory, reliability, network en governance wegen zwaarder dan één headline-getal.</a:t>
-            </a:r>
-            <a:endParaRPr lang="en-US" sz="1600" dirty="0"/>
-          </a:p>
-        </p:txBody>
-      </p:sp>
-      <p:sp>
-        <p:nvSpPr>
-          <p:cNvPr id="28" name="Shape 25"/>
-          <p:cNvSpPr/>
-          <p:nvPr/>
-        </p:nvSpPr>
-        <p:spPr>
-          <a:xfrm>
-            <a:off x="932688" y="5138928"/>
-            <a:ext cx="822960" cy="329184"/>
+                <a:latin typeface="Aptos Display" pitchFamily="34" charset="0"/>
+                <a:ea typeface="Aptos Display" pitchFamily="34" charset="-122"/>
+                <a:cs typeface="Aptos Display" pitchFamily="34" charset="-120"/>
+              </a:rPr>
+              <a:t>In deze parameterisatie binden floors eerder dan de headline threshold.</a:t>
+            </a:r>
+            <a:endParaRPr lang="en-US" sz="2400" dirty="0"/>
+          </a:p>
+        </p:txBody>
+      </p:sp>
+      <p:sp>
+        <p:nvSpPr>
+          <p:cNvPr id="13" name="Text 10"/>
+          <p:cNvSpPr/>
+          <p:nvPr/>
+        </p:nvSpPr>
+        <p:spPr>
+          <a:xfrm>
+            <a:off x="987552" y="3072384"/>
+            <a:ext cx="9875520" cy="256032"/>
+          </a:xfrm>
+          <a:prstGeom prst="rect">
+            <a:avLst/>
+          </a:prstGeom>
+          <a:noFill/>
+          <a:ln/>
+        </p:spPr>
+        <p:txBody>
+          <a:bodyPr wrap="square" lIns="0" tIns="0" rIns="0" bIns="0" rtlCol="0" anchor="ctr">
+            <a:normAutofit/>
+          </a:bodyPr>
+          <a:lstStyle/>
+          <a:p>
+            <a:pPr indent="0" marL="0">
+              <a:buNone/>
+            </a:pPr>
+            <a:r>
+              <a:rPr lang="en-US" sz="1700" b="1" dirty="0">
+                <a:solidFill>
+                  <a:srgbClr val="D7DCE7"/>
+                </a:solidFill>
+                <a:latin typeface="Aptos" pitchFamily="34" charset="0"/>
+                <a:ea typeface="Aptos" pitchFamily="34" charset="-122"/>
+                <a:cs typeface="Aptos" pitchFamily="34" charset="-120"/>
+              </a:rPr>
+              <a:t>Dus memory, reliability, network en governance wegen zwaarder dan één headline-getal.</a:t>
+            </a:r>
+            <a:endParaRPr lang="en-US" sz="1700" dirty="0"/>
+          </a:p>
+        </p:txBody>
+      </p:sp>
+      <p:sp>
+        <p:nvSpPr>
+          <p:cNvPr id="14" name="Shape 11"/>
+          <p:cNvSpPr/>
+          <p:nvPr/>
+        </p:nvSpPr>
+        <p:spPr>
+          <a:xfrm>
+            <a:off x="987552" y="3456432"/>
+            <a:ext cx="1005840" cy="329184"/>
           </a:xfrm>
           <a:prstGeom prst="roundRect">
             <a:avLst>
@@ -9747,14 +9378,14 @@
       </p:sp>
       <p:sp>
         <p:nvSpPr>
-          <p:cNvPr id="29" name="Text 26"/>
-          <p:cNvSpPr/>
-          <p:nvPr/>
-        </p:nvSpPr>
-        <p:spPr>
-          <a:xfrm>
-            <a:off x="1078992" y="5212080"/>
-            <a:ext cx="530352" cy="164592"/>
+          <p:cNvPr id="15" name="Text 12"/>
+          <p:cNvSpPr/>
+          <p:nvPr/>
+        </p:nvSpPr>
+        <p:spPr>
+          <a:xfrm>
+            <a:off x="1133856" y="3529584"/>
+            <a:ext cx="713232" cy="164592"/>
           </a:xfrm>
           <a:prstGeom prst="rect">
             <a:avLst/>
@@ -9788,14 +9419,14 @@
       </p:sp>
       <p:sp>
         <p:nvSpPr>
-          <p:cNvPr id="30" name="Shape 27"/>
-          <p:cNvSpPr/>
-          <p:nvPr/>
-        </p:nvSpPr>
-        <p:spPr>
-          <a:xfrm>
-            <a:off x="1847088" y="5138928"/>
-            <a:ext cx="932688" cy="329184"/>
+          <p:cNvPr id="16" name="Shape 13"/>
+          <p:cNvSpPr/>
+          <p:nvPr/>
+        </p:nvSpPr>
+        <p:spPr>
+          <a:xfrm>
+            <a:off x="2121408" y="3456432"/>
+            <a:ext cx="1097280" cy="329184"/>
           </a:xfrm>
           <a:prstGeom prst="roundRect">
             <a:avLst>
@@ -9817,14 +9448,14 @@
       </p:sp>
       <p:sp>
         <p:nvSpPr>
-          <p:cNvPr id="31" name="Text 28"/>
-          <p:cNvSpPr/>
-          <p:nvPr/>
-        </p:nvSpPr>
-        <p:spPr>
-          <a:xfrm>
-            <a:off x="1993392" y="5212080"/>
-            <a:ext cx="640080" cy="164592"/>
+          <p:cNvPr id="17" name="Text 14"/>
+          <p:cNvSpPr/>
+          <p:nvPr/>
+        </p:nvSpPr>
+        <p:spPr>
+          <a:xfrm>
+            <a:off x="2267712" y="3529584"/>
+            <a:ext cx="804672" cy="164592"/>
           </a:xfrm>
           <a:prstGeom prst="rect">
             <a:avLst/>
@@ -9858,14 +9489,14 @@
       </p:sp>
       <p:sp>
         <p:nvSpPr>
-          <p:cNvPr id="32" name="Shape 29"/>
-          <p:cNvSpPr/>
-          <p:nvPr/>
-        </p:nvSpPr>
-        <p:spPr>
-          <a:xfrm>
-            <a:off x="2889504" y="5138928"/>
-            <a:ext cx="841248" cy="329184"/>
+          <p:cNvPr id="18" name="Shape 15"/>
+          <p:cNvSpPr/>
+          <p:nvPr/>
+        </p:nvSpPr>
+        <p:spPr>
+          <a:xfrm>
+            <a:off x="3346704" y="3456432"/>
+            <a:ext cx="987552" cy="329184"/>
           </a:xfrm>
           <a:prstGeom prst="roundRect">
             <a:avLst>
@@ -9887,14 +9518,14 @@
       </p:sp>
       <p:sp>
         <p:nvSpPr>
-          <p:cNvPr id="33" name="Text 30"/>
-          <p:cNvSpPr/>
-          <p:nvPr/>
-        </p:nvSpPr>
-        <p:spPr>
-          <a:xfrm>
-            <a:off x="3035808" y="5212080"/>
-            <a:ext cx="548640" cy="164592"/>
+          <p:cNvPr id="19" name="Text 16"/>
+          <p:cNvSpPr/>
+          <p:nvPr/>
+        </p:nvSpPr>
+        <p:spPr>
+          <a:xfrm>
+            <a:off x="3493008" y="3529584"/>
+            <a:ext cx="694944" cy="164592"/>
           </a:xfrm>
           <a:prstGeom prst="rect">
             <a:avLst/>
@@ -9928,14 +9559,14 @@
       </p:sp>
       <p:sp>
         <p:nvSpPr>
-          <p:cNvPr id="34" name="Shape 31"/>
-          <p:cNvSpPr/>
-          <p:nvPr/>
-        </p:nvSpPr>
-        <p:spPr>
-          <a:xfrm>
-            <a:off x="3822192" y="5138928"/>
-            <a:ext cx="1024128" cy="329184"/>
+          <p:cNvPr id="20" name="Shape 17"/>
+          <p:cNvSpPr/>
+          <p:nvPr/>
+        </p:nvSpPr>
+        <p:spPr>
+          <a:xfrm>
+            <a:off x="4462272" y="3456432"/>
+            <a:ext cx="1170432" cy="329184"/>
           </a:xfrm>
           <a:prstGeom prst="roundRect">
             <a:avLst>
@@ -9957,54 +9588,613 @@
       </p:sp>
       <p:sp>
         <p:nvSpPr>
+          <p:cNvPr id="21" name="Text 18"/>
+          <p:cNvSpPr/>
+          <p:nvPr/>
+        </p:nvSpPr>
+        <p:spPr>
+          <a:xfrm>
+            <a:off x="4608576" y="3529584"/>
+            <a:ext cx="877824" cy="164592"/>
+          </a:xfrm>
+          <a:prstGeom prst="rect">
+            <a:avLst/>
+          </a:prstGeom>
+          <a:noFill/>
+          <a:ln/>
+        </p:spPr>
+        <p:txBody>
+          <a:bodyPr wrap="square" lIns="0" tIns="0" rIns="0" bIns="0" rtlCol="0" anchor="ctr">
+            <a:normAutofit/>
+          </a:bodyPr>
+          <a:lstStyle/>
+          <a:p>
+            <a:pPr indent="0" marL="0">
+              <a:buNone/>
+            </a:pPr>
+            <a:r>
+              <a:rPr lang="en-US" sz="900" b="1" dirty="0">
+                <a:solidFill>
+                  <a:srgbClr val="FFFFFF"/>
+                </a:solidFill>
+                <a:latin typeface="Aptos" pitchFamily="34" charset="0"/>
+                <a:ea typeface="Aptos" pitchFamily="34" charset="-122"/>
+                <a:cs typeface="Aptos" pitchFamily="34" charset="-120"/>
+              </a:rPr>
+              <a:t>governance</a:t>
+            </a:r>
+            <a:endParaRPr lang="en-US" sz="900" dirty="0"/>
+          </a:p>
+        </p:txBody>
+      </p:sp>
+      <p:sp>
+        <p:nvSpPr>
+          <p:cNvPr id="22" name="Shape 19"/>
+          <p:cNvSpPr/>
+          <p:nvPr/>
+        </p:nvSpPr>
+        <p:spPr>
+          <a:xfrm>
+            <a:off x="713232" y="4187952"/>
+            <a:ext cx="3054096" cy="1828800"/>
+          </a:xfrm>
+          <a:prstGeom prst="roundRect">
+            <a:avLst>
+              <a:gd name="adj" fmla="val 3000"/>
+            </a:avLst>
+          </a:prstGeom>
+          <a:solidFill>
+            <a:srgbClr val="F7F8FB"/>
+          </a:solidFill>
+          <a:ln w="12700">
+            <a:solidFill>
+              <a:srgbClr val="D9DDE6"/>
+            </a:solidFill>
+            <a:prstDash val="solid"/>
+          </a:ln>
+        </p:spPr>
+      </p:sp>
+      <p:sp>
+        <p:nvSpPr>
+          <p:cNvPr id="23" name="Text 20"/>
+          <p:cNvSpPr/>
+          <p:nvPr/>
+        </p:nvSpPr>
+        <p:spPr>
+          <a:xfrm>
+            <a:off x="896112" y="4370832"/>
+            <a:ext cx="2688336" cy="502920"/>
+          </a:xfrm>
+          <a:prstGeom prst="rect">
+            <a:avLst/>
+          </a:prstGeom>
+          <a:noFill/>
+          <a:ln/>
+        </p:spPr>
+        <p:txBody>
+          <a:bodyPr wrap="square" lIns="0" tIns="0" rIns="0" bIns="0" rtlCol="0" anchor="ctr">
+            <a:normAutofit/>
+          </a:bodyPr>
+          <a:lstStyle/>
+          <a:p>
+            <a:pPr indent="0" marL="0">
+              <a:buNone/>
+            </a:pPr>
+            <a:r>
+              <a:rPr lang="en-US" sz="2800" b="1" dirty="0">
+                <a:solidFill>
+                  <a:srgbClr val="E93325"/>
+                </a:solidFill>
+                <a:latin typeface="Aptos Display" pitchFamily="34" charset="0"/>
+                <a:ea typeface="Aptos Display" pitchFamily="34" charset="-122"/>
+                <a:cs typeface="Aptos Display" pitchFamily="34" charset="-120"/>
+              </a:rPr>
+              <a:t>28,1%</a:t>
+            </a:r>
+            <a:endParaRPr lang="en-US" sz="2800" dirty="0"/>
+          </a:p>
+        </p:txBody>
+      </p:sp>
+      <p:sp>
+        <p:nvSpPr>
+          <p:cNvPr id="24" name="Text 21"/>
+          <p:cNvSpPr/>
+          <p:nvPr/>
+        </p:nvSpPr>
+        <p:spPr>
+          <a:xfrm>
+            <a:off x="896112" y="4974336"/>
+            <a:ext cx="2688336" cy="237744"/>
+          </a:xfrm>
+          <a:prstGeom prst="rect">
+            <a:avLst/>
+          </a:prstGeom>
+          <a:noFill/>
+          <a:ln/>
+        </p:spPr>
+        <p:txBody>
+          <a:bodyPr wrap="square" lIns="0" tIns="0" rIns="0" bIns="0" rtlCol="0" anchor="ctr">
+            <a:normAutofit/>
+          </a:bodyPr>
+          <a:lstStyle/>
+          <a:p>
+            <a:pPr indent="0" marL="0">
+              <a:buNone/>
+            </a:pPr>
+            <a:r>
+              <a:rPr lang="en-US" sz="1200" b="1" dirty="0">
+                <a:solidFill>
+                  <a:srgbClr val="12192C"/>
+                </a:solidFill>
+                <a:latin typeface="Aptos" pitchFamily="34" charset="0"/>
+                <a:ea typeface="Aptos" pitchFamily="34" charset="-122"/>
+                <a:cs typeface="Aptos" pitchFamily="34" charset="-120"/>
+              </a:rPr>
+              <a:t>basisscenario tegen 2040</a:t>
+            </a:r>
+            <a:endParaRPr lang="en-US" sz="1200" dirty="0"/>
+          </a:p>
+        </p:txBody>
+      </p:sp>
+      <p:sp>
+        <p:nvSpPr>
+          <p:cNvPr id="25" name="Text 22"/>
+          <p:cNvSpPr/>
+          <p:nvPr/>
+        </p:nvSpPr>
+        <p:spPr>
+          <a:xfrm>
+            <a:off x="896112" y="5285232"/>
+            <a:ext cx="2688336" cy="457200"/>
+          </a:xfrm>
+          <a:prstGeom prst="rect">
+            <a:avLst/>
+          </a:prstGeom>
+          <a:noFill/>
+          <a:ln/>
+        </p:spPr>
+        <p:txBody>
+          <a:bodyPr wrap="square" lIns="0" tIns="0" rIns="0" bIns="0" rtlCol="0" anchor="ctr">
+            <a:normAutofit/>
+          </a:bodyPr>
+          <a:lstStyle/>
+          <a:p>
+            <a:pPr indent="0" marL="0">
+              <a:buNone/>
+            </a:pPr>
+            <a:r>
+              <a:rPr lang="en-US" sz="1100" dirty="0">
+                <a:solidFill>
+                  <a:srgbClr val="5B6476"/>
+                </a:solidFill>
+                <a:latin typeface="Aptos" pitchFamily="34" charset="0"/>
+                <a:ea typeface="Aptos" pitchFamily="34" charset="-122"/>
+                <a:cs typeface="Aptos" pitchFamily="34" charset="-120"/>
+              </a:rPr>
+              <a:t>onder huidige aannames</a:t>
+            </a:r>
+            <a:endParaRPr lang="en-US" sz="1100" dirty="0"/>
+          </a:p>
+        </p:txBody>
+      </p:sp>
+      <p:sp>
+        <p:nvSpPr>
+          <p:cNvPr id="26" name="Shape 23"/>
+          <p:cNvSpPr/>
+          <p:nvPr/>
+        </p:nvSpPr>
+        <p:spPr>
+          <a:xfrm>
+            <a:off x="3968496" y="4187952"/>
+            <a:ext cx="2743200" cy="1828800"/>
+          </a:xfrm>
+          <a:prstGeom prst="roundRect">
+            <a:avLst>
+              <a:gd name="adj" fmla="val 3000"/>
+            </a:avLst>
+          </a:prstGeom>
+          <a:solidFill>
+            <a:srgbClr val="F7F8FB"/>
+          </a:solidFill>
+          <a:ln w="12700">
+            <a:solidFill>
+              <a:srgbClr val="D9DDE6"/>
+            </a:solidFill>
+            <a:prstDash val="solid"/>
+          </a:ln>
+        </p:spPr>
+      </p:sp>
+      <p:sp>
+        <p:nvSpPr>
+          <p:cNvPr id="27" name="Text 24"/>
+          <p:cNvSpPr/>
+          <p:nvPr/>
+        </p:nvSpPr>
+        <p:spPr>
+          <a:xfrm>
+            <a:off x="4151376" y="4370832"/>
+            <a:ext cx="2377440" cy="502920"/>
+          </a:xfrm>
+          <a:prstGeom prst="rect">
+            <a:avLst/>
+          </a:prstGeom>
+          <a:noFill/>
+          <a:ln/>
+        </p:spPr>
+        <p:txBody>
+          <a:bodyPr wrap="square" lIns="0" tIns="0" rIns="0" bIns="0" rtlCol="0" anchor="ctr">
+            <a:normAutofit/>
+          </a:bodyPr>
+          <a:lstStyle/>
+          <a:p>
+            <a:pPr indent="0" marL="0">
+              <a:buNone/>
+            </a:pPr>
+            <a:r>
+              <a:rPr lang="en-US" sz="2800" b="1" dirty="0">
+                <a:solidFill>
+                  <a:srgbClr val="F2AD18"/>
+                </a:solidFill>
+                <a:latin typeface="Aptos Display" pitchFamily="34" charset="0"/>
+                <a:ea typeface="Aptos Display" pitchFamily="34" charset="-122"/>
+                <a:cs typeface="Aptos Display" pitchFamily="34" charset="-120"/>
+              </a:rPr>
+              <a:t>2038</a:t>
+            </a:r>
+            <a:endParaRPr lang="en-US" sz="2800" dirty="0"/>
+          </a:p>
+        </p:txBody>
+      </p:sp>
+      <p:sp>
+        <p:nvSpPr>
+          <p:cNvPr id="28" name="Text 25"/>
+          <p:cNvSpPr/>
+          <p:nvPr/>
+        </p:nvSpPr>
+        <p:spPr>
+          <a:xfrm>
+            <a:off x="4151376" y="4974336"/>
+            <a:ext cx="2377440" cy="237744"/>
+          </a:xfrm>
+          <a:prstGeom prst="rect">
+            <a:avLst/>
+          </a:prstGeom>
+          <a:noFill/>
+          <a:ln/>
+        </p:spPr>
+        <p:txBody>
+          <a:bodyPr wrap="square" lIns="0" tIns="0" rIns="0" bIns="0" rtlCol="0" anchor="ctr">
+            <a:normAutofit/>
+          </a:bodyPr>
+          <a:lstStyle/>
+          <a:p>
+            <a:pPr indent="0" marL="0">
+              <a:buNone/>
+            </a:pPr>
+            <a:r>
+              <a:rPr lang="en-US" sz="1200" b="1" dirty="0">
+                <a:solidFill>
+                  <a:srgbClr val="12192C"/>
+                </a:solidFill>
+                <a:latin typeface="Aptos" pitchFamily="34" charset="0"/>
+                <a:ea typeface="Aptos" pitchFamily="34" charset="-122"/>
+                <a:cs typeface="Aptos" pitchFamily="34" charset="-120"/>
+              </a:rPr>
+              <a:t>mediaan in basisscenario</a:t>
+            </a:r>
+            <a:endParaRPr lang="en-US" sz="1200" dirty="0"/>
+          </a:p>
+        </p:txBody>
+      </p:sp>
+      <p:sp>
+        <p:nvSpPr>
+          <p:cNvPr id="29" name="Text 26"/>
+          <p:cNvSpPr/>
+          <p:nvPr/>
+        </p:nvSpPr>
+        <p:spPr>
+          <a:xfrm>
+            <a:off x="4151376" y="5285232"/>
+            <a:ext cx="2377440" cy="457200"/>
+          </a:xfrm>
+          <a:prstGeom prst="rect">
+            <a:avLst/>
+          </a:prstGeom>
+          <a:noFill/>
+          <a:ln/>
+        </p:spPr>
+        <p:txBody>
+          <a:bodyPr wrap="square" lIns="0" tIns="0" rIns="0" bIns="0" rtlCol="0" anchor="ctr">
+            <a:normAutofit/>
+          </a:bodyPr>
+          <a:lstStyle/>
+          <a:p>
+            <a:pPr indent="0" marL="0">
+              <a:buNone/>
+            </a:pPr>
+            <a:r>
+              <a:rPr lang="en-US" sz="1100" dirty="0">
+                <a:solidFill>
+                  <a:srgbClr val="5B6476"/>
+                </a:solidFill>
+                <a:latin typeface="Aptos" pitchFamily="34" charset="0"/>
+                <a:ea typeface="Aptos" pitchFamily="34" charset="-122"/>
+                <a:cs typeface="Aptos" pitchFamily="34" charset="-120"/>
+              </a:rPr>
+              <a:t>geen datum-belofte</a:t>
+            </a:r>
+            <a:endParaRPr lang="en-US" sz="1100" dirty="0"/>
+          </a:p>
+        </p:txBody>
+      </p:sp>
+      <p:sp>
+        <p:nvSpPr>
+          <p:cNvPr id="30" name="Shape 27"/>
+          <p:cNvSpPr/>
+          <p:nvPr/>
+        </p:nvSpPr>
+        <p:spPr>
+          <a:xfrm>
+            <a:off x="6912864" y="4187952"/>
+            <a:ext cx="2560320" cy="1828800"/>
+          </a:xfrm>
+          <a:prstGeom prst="roundRect">
+            <a:avLst>
+              <a:gd name="adj" fmla="val 3000"/>
+            </a:avLst>
+          </a:prstGeom>
+          <a:solidFill>
+            <a:srgbClr val="F7F8FB"/>
+          </a:solidFill>
+          <a:ln w="12700">
+            <a:solidFill>
+              <a:srgbClr val="D9DDE6"/>
+            </a:solidFill>
+            <a:prstDash val="solid"/>
+          </a:ln>
+        </p:spPr>
+      </p:sp>
+      <p:sp>
+        <p:nvSpPr>
+          <p:cNvPr id="31" name="Text 28"/>
+          <p:cNvSpPr/>
+          <p:nvPr/>
+        </p:nvSpPr>
+        <p:spPr>
+          <a:xfrm>
+            <a:off x="7095744" y="4370832"/>
+            <a:ext cx="2194560" cy="502920"/>
+          </a:xfrm>
+          <a:prstGeom prst="rect">
+            <a:avLst/>
+          </a:prstGeom>
+          <a:noFill/>
+          <a:ln/>
+        </p:spPr>
+        <p:txBody>
+          <a:bodyPr wrap="square" lIns="0" tIns="0" rIns="0" bIns="0" rtlCol="0" anchor="ctr">
+            <a:normAutofit/>
+          </a:bodyPr>
+          <a:lstStyle/>
+          <a:p>
+            <a:pPr indent="0" marL="0">
+              <a:buNone/>
+            </a:pPr>
+            <a:r>
+              <a:rPr lang="en-US" sz="2800" b="1" dirty="0">
+                <a:solidFill>
+                  <a:srgbClr val="0F766E"/>
+                </a:solidFill>
+                <a:latin typeface="Aptos Display" pitchFamily="34" charset="0"/>
+                <a:ea typeface="Aptos Display" pitchFamily="34" charset="-122"/>
+                <a:cs typeface="Aptos Display" pitchFamily="34" charset="-120"/>
+              </a:rPr>
+              <a:t>71,9%</a:t>
+            </a:r>
+            <a:endParaRPr lang="en-US" sz="2800" dirty="0"/>
+          </a:p>
+        </p:txBody>
+      </p:sp>
+      <p:sp>
+        <p:nvSpPr>
+          <p:cNvPr id="32" name="Text 29"/>
+          <p:cNvSpPr/>
+          <p:nvPr/>
+        </p:nvSpPr>
+        <p:spPr>
+          <a:xfrm>
+            <a:off x="7095744" y="4974336"/>
+            <a:ext cx="2194560" cy="237744"/>
+          </a:xfrm>
+          <a:prstGeom prst="rect">
+            <a:avLst/>
+          </a:prstGeom>
+          <a:noFill/>
+          <a:ln/>
+        </p:spPr>
+        <p:txBody>
+          <a:bodyPr wrap="square" lIns="0" tIns="0" rIns="0" bIns="0" rtlCol="0" anchor="ctr">
+            <a:normAutofit/>
+          </a:bodyPr>
+          <a:lstStyle/>
+          <a:p>
+            <a:pPr indent="0" marL="0">
+              <a:buNone/>
+            </a:pPr>
+            <a:r>
+              <a:rPr lang="en-US" sz="1200" b="1" dirty="0">
+                <a:solidFill>
+                  <a:srgbClr val="12192C"/>
+                </a:solidFill>
+                <a:latin typeface="Aptos" pitchFamily="34" charset="0"/>
+                <a:ea typeface="Aptos" pitchFamily="34" charset="-122"/>
+                <a:cs typeface="Aptos" pitchFamily="34" charset="-120"/>
+              </a:rPr>
+              <a:t>haalt drempel niet</a:t>
+            </a:r>
+            <a:endParaRPr lang="en-US" sz="1200" dirty="0"/>
+          </a:p>
+        </p:txBody>
+      </p:sp>
+      <p:sp>
+        <p:nvSpPr>
+          <p:cNvPr id="33" name="Text 30"/>
+          <p:cNvSpPr/>
+          <p:nvPr/>
+        </p:nvSpPr>
+        <p:spPr>
+          <a:xfrm>
+            <a:off x="7095744" y="5285232"/>
+            <a:ext cx="2194560" cy="457200"/>
+          </a:xfrm>
+          <a:prstGeom prst="rect">
+            <a:avLst/>
+          </a:prstGeom>
+          <a:noFill/>
+          <a:ln/>
+        </p:spPr>
+        <p:txBody>
+          <a:bodyPr wrap="square" lIns="0" tIns="0" rIns="0" bIns="0" rtlCol="0" anchor="ctr">
+            <a:normAutofit/>
+          </a:bodyPr>
+          <a:lstStyle/>
+          <a:p>
+            <a:pPr indent="0" marL="0">
+              <a:buNone/>
+            </a:pPr>
+            <a:r>
+              <a:rPr lang="en-US" sz="1100" dirty="0">
+                <a:solidFill>
+                  <a:srgbClr val="5B6476"/>
+                </a:solidFill>
+                <a:latin typeface="Aptos" pitchFamily="34" charset="0"/>
+                <a:ea typeface="Aptos" pitchFamily="34" charset="-122"/>
+                <a:cs typeface="Aptos" pitchFamily="34" charset="-120"/>
+              </a:rPr>
+              <a:t>tegen 2040</a:t>
+            </a:r>
+            <a:endParaRPr lang="en-US" sz="1100" dirty="0"/>
+          </a:p>
+        </p:txBody>
+      </p:sp>
+      <p:sp>
+        <p:nvSpPr>
+          <p:cNvPr id="34" name="Shape 31"/>
+          <p:cNvSpPr/>
+          <p:nvPr/>
+        </p:nvSpPr>
+        <p:spPr>
+          <a:xfrm>
+            <a:off x="9674352" y="4187952"/>
+            <a:ext cx="1965960" cy="1828800"/>
+          </a:xfrm>
+          <a:prstGeom prst="roundRect">
+            <a:avLst>
+              <a:gd name="adj" fmla="val 3000"/>
+            </a:avLst>
+          </a:prstGeom>
+          <a:solidFill>
+            <a:srgbClr val="F7F8FB"/>
+          </a:solidFill>
+          <a:ln w="12700">
+            <a:solidFill>
+              <a:srgbClr val="D9DDE6"/>
+            </a:solidFill>
+            <a:prstDash val="solid"/>
+          </a:ln>
+        </p:spPr>
+      </p:sp>
+      <p:sp>
+        <p:nvSpPr>
           <p:cNvPr id="35" name="Text 32"/>
           <p:cNvSpPr/>
           <p:nvPr/>
         </p:nvSpPr>
         <p:spPr>
           <a:xfrm>
-            <a:off x="3968496" y="5212080"/>
-            <a:ext cx="731520" cy="164592"/>
-          </a:xfrm>
-          <a:prstGeom prst="rect">
-            <a:avLst/>
-          </a:prstGeom>
-          <a:noFill/>
-          <a:ln/>
-        </p:spPr>
-        <p:txBody>
-          <a:bodyPr wrap="square" lIns="0" tIns="0" rIns="0" bIns="0" rtlCol="0" anchor="ctr">
-            <a:normAutofit/>
-          </a:bodyPr>
-          <a:lstStyle/>
-          <a:p>
-            <a:pPr indent="0" marL="0">
-              <a:buNone/>
-            </a:pPr>
-            <a:r>
-              <a:rPr lang="en-US" sz="900" b="1" dirty="0">
-                <a:solidFill>
-                  <a:srgbClr val="FFFFFF"/>
-                </a:solidFill>
-                <a:latin typeface="Aptos" pitchFamily="34" charset="0"/>
-                <a:ea typeface="Aptos" pitchFamily="34" charset="-122"/>
-                <a:cs typeface="Aptos" pitchFamily="34" charset="-120"/>
-              </a:rPr>
-              <a:t>governance</a:t>
-            </a:r>
-            <a:endParaRPr lang="en-US" sz="900" dirty="0"/>
-          </a:p>
-        </p:txBody>
-      </p:sp>
-      <p:sp>
-        <p:nvSpPr>
-          <p:cNvPr id="36" name="Shape 33"/>
-          <p:cNvSpPr/>
-          <p:nvPr/>
-        </p:nvSpPr>
-        <p:spPr>
-          <a:xfrm>
-            <a:off x="713232" y="5559552"/>
+            <a:off x="9893808" y="4425696"/>
+            <a:ext cx="1097280" cy="146304"/>
+          </a:xfrm>
+          <a:prstGeom prst="rect">
+            <a:avLst/>
+          </a:prstGeom>
+          <a:noFill/>
+          <a:ln/>
+        </p:spPr>
+        <p:txBody>
+          <a:bodyPr wrap="square" lIns="0" tIns="0" rIns="0" bIns="0" rtlCol="0" anchor="ctr">
+            <a:normAutofit/>
+          </a:bodyPr>
+          <a:lstStyle/>
+          <a:p>
+            <a:pPr indent="0" marL="0">
+              <a:buNone/>
+            </a:pPr>
+            <a:r>
+              <a:rPr lang="en-US" sz="1000" b="1" dirty="0">
+                <a:solidFill>
+                  <a:srgbClr val="5B6476"/>
+                </a:solidFill>
+                <a:latin typeface="Aptos" pitchFamily="34" charset="0"/>
+                <a:ea typeface="Aptos" pitchFamily="34" charset="-122"/>
+                <a:cs typeface="Aptos" pitchFamily="34" charset="-120"/>
+              </a:rPr>
+              <a:t>label</a:t>
+            </a:r>
+            <a:endParaRPr lang="en-US" sz="1000" dirty="0"/>
+          </a:p>
+        </p:txBody>
+      </p:sp>
+      <p:sp>
+        <p:nvSpPr>
+          <p:cNvPr id="36" name="Text 33"/>
+          <p:cNvSpPr/>
+          <p:nvPr/>
+        </p:nvSpPr>
+        <p:spPr>
+          <a:xfrm>
+            <a:off x="9893808" y="4736592"/>
+            <a:ext cx="1371600" cy="329184"/>
+          </a:xfrm>
+          <a:prstGeom prst="rect">
+            <a:avLst/>
+          </a:prstGeom>
+          <a:noFill/>
+          <a:ln/>
+        </p:spPr>
+        <p:txBody>
+          <a:bodyPr wrap="square" lIns="0" tIns="0" rIns="0" bIns="0" rtlCol="0" anchor="ctr">
+            <a:normAutofit/>
+          </a:bodyPr>
+          <a:lstStyle/>
+          <a:p>
+            <a:pPr indent="0" marL="0">
+              <a:buNone/>
+            </a:pPr>
+            <a:r>
+              <a:rPr lang="en-US" sz="1500" b="1" dirty="0">
+                <a:solidFill>
+                  <a:srgbClr val="E93325"/>
+                </a:solidFill>
+                <a:latin typeface="Aptos" pitchFamily="34" charset="0"/>
+                <a:ea typeface="Aptos" pitchFamily="34" charset="-122"/>
+                <a:cs typeface="Aptos" pitchFamily="34" charset="-120"/>
+              </a:rPr>
+              <a:t>assumptie-gedreven</a:t>
+            </a:r>
+            <a:endParaRPr lang="en-US" sz="1500" dirty="0"/>
+          </a:p>
+        </p:txBody>
+      </p:sp>
+      <p:sp>
+        <p:nvSpPr>
+          <p:cNvPr id="37" name="Shape 34"/>
+          <p:cNvSpPr/>
+          <p:nvPr/>
+        </p:nvSpPr>
+        <p:spPr>
+          <a:xfrm>
+            <a:off x="713232" y="5596128"/>
             <a:ext cx="10927080" cy="640080"/>
           </a:xfrm>
           <a:prstGeom prst="roundRect">
@@ -10025,13 +10215,13 @@
       </p:sp>
       <p:sp>
         <p:nvSpPr>
-          <p:cNvPr id="37" name="Text 34"/>
-          <p:cNvSpPr/>
-          <p:nvPr/>
-        </p:nvSpPr>
-        <p:spPr>
-          <a:xfrm>
-            <a:off x="932688" y="5724144"/>
+          <p:cNvPr id="38" name="Text 35"/>
+          <p:cNvSpPr/>
+          <p:nvPr/>
+        </p:nvSpPr>
+        <p:spPr>
+          <a:xfrm>
+            <a:off x="932688" y="5760720"/>
             <a:ext cx="10469880" cy="201168"/>
           </a:xfrm>
           <a:prstGeom prst="rect">
@@ -10058,7 +10248,7 @@
                 <a:ea typeface="Aptos" pitchFamily="34" charset="-122"/>
                 <a:cs typeface="Aptos" pitchFamily="34" charset="-120"/>
               </a:rPr>
-              <a:t>Takeaway: gebruik dit model om onzekerheid te ordenen, niet om 2038 als lot uit te spreken.</a:t>
+              <a:t>Takeaway: gebruik dit model om bottlenecks te ordenen, niet om 2038 als lot uit te spreken.</a:t>
             </a:r>
             <a:endParaRPr lang="en-US" sz="1200" dirty="0"/>
           </a:p>
@@ -10326,36 +10516,36 @@
         </p:nvSpPr>
         <p:spPr>
           <a:xfrm>
-            <a:off x="713232" y="1170432"/>
-            <a:ext cx="5486400" cy="219456"/>
-          </a:xfrm>
-          <a:prstGeom prst="rect">
-            <a:avLst/>
-          </a:prstGeom>
-          <a:noFill/>
-          <a:ln/>
-        </p:spPr>
-        <p:txBody>
-          <a:bodyPr wrap="square" lIns="0" tIns="0" rIns="0" bIns="0" rtlCol="0" anchor="ctr">
-            <a:normAutofit/>
-          </a:bodyPr>
-          <a:lstStyle/>
-          <a:p>
-            <a:pPr indent="0" marL="0">
-              <a:buNone/>
-            </a:pPr>
-            <a:r>
-              <a:rPr lang="en-US" sz="1500" dirty="0">
-                <a:solidFill>
-                  <a:srgbClr val="D7DCE7"/>
-                </a:solidFill>
-                <a:latin typeface="Aptos" pitchFamily="34" charset="0"/>
-                <a:ea typeface="Aptos" pitchFamily="34" charset="-122"/>
-                <a:cs typeface="Aptos" pitchFamily="34" charset="-120"/>
+            <a:off x="713232" y="1133856"/>
+            <a:ext cx="6949440" cy="329184"/>
+          </a:xfrm>
+          <a:prstGeom prst="rect">
+            <a:avLst/>
+          </a:prstGeom>
+          <a:noFill/>
+          <a:ln/>
+        </p:spPr>
+        <p:txBody>
+          <a:bodyPr wrap="square" lIns="0" tIns="0" rIns="0" bIns="0" rtlCol="0" anchor="ctr">
+            <a:normAutofit/>
+          </a:bodyPr>
+          <a:lstStyle/>
+          <a:p>
+            <a:pPr indent="0" marL="0">
+              <a:buNone/>
+            </a:pPr>
+            <a:r>
+              <a:rPr lang="en-US" sz="2200" b="1" dirty="0">
+                <a:solidFill>
+                  <a:srgbClr val="F2AD18"/>
+                </a:solidFill>
+                <a:latin typeface="Aptos Display" pitchFamily="34" charset="0"/>
+                <a:ea typeface="Aptos Display" pitchFamily="34" charset="-122"/>
+                <a:cs typeface="Aptos Display" pitchFamily="34" charset="-120"/>
               </a:rPr>
               <a:t>Dit zijn geen randvoorwaarden. Dit zijn de bottlenecks.</a:t>
             </a:r>
-            <a:endParaRPr lang="en-US" sz="1500" dirty="0"/>
+            <a:endParaRPr lang="en-US" sz="2200" dirty="0"/>
           </a:p>
         </p:txBody>
       </p:sp>
@@ -11090,6 +11280,74 @@
                 <a:cs typeface="Aptos" pitchFamily="34" charset="-120"/>
               </a:rPr>
               <a:t>Zonder kostdiscipline blijft sociale schaal vooral theater.</a:t>
+            </a:r>
+            <a:endParaRPr lang="en-US" sz="1200" dirty="0"/>
+          </a:p>
+        </p:txBody>
+      </p:sp>
+      <p:sp>
+        <p:nvSpPr>
+          <p:cNvPr id="26" name="Shape 23"/>
+          <p:cNvSpPr/>
+          <p:nvPr/>
+        </p:nvSpPr>
+        <p:spPr>
+          <a:xfrm>
+            <a:off x="713232" y="5541264"/>
+            <a:ext cx="10927080" cy="640080"/>
+          </a:xfrm>
+          <a:prstGeom prst="roundRect">
+            <a:avLst>
+              <a:gd name="adj" fmla="val 11429"/>
+            </a:avLst>
+          </a:prstGeom>
+          <a:solidFill>
+            <a:srgbClr val="1C2540"/>
+          </a:solidFill>
+          <a:ln w="12700">
+            <a:solidFill>
+              <a:srgbClr val="394258"/>
+            </a:solidFill>
+            <a:prstDash val="solid"/>
+          </a:ln>
+        </p:spPr>
+      </p:sp>
+      <p:sp>
+        <p:nvSpPr>
+          <p:cNvPr id="27" name="Text 24"/>
+          <p:cNvSpPr/>
+          <p:nvPr/>
+        </p:nvSpPr>
+        <p:spPr>
+          <a:xfrm>
+            <a:off x="932688" y="5705856"/>
+            <a:ext cx="10469880" cy="201168"/>
+          </a:xfrm>
+          <a:prstGeom prst="rect">
+            <a:avLst/>
+          </a:prstGeom>
+          <a:noFill/>
+          <a:ln/>
+        </p:spPr>
+        <p:txBody>
+          <a:bodyPr wrap="square" lIns="0" tIns="0" rIns="0" bIns="0" rtlCol="0" anchor="ctr">
+            <a:normAutofit/>
+          </a:bodyPr>
+          <a:lstStyle/>
+          <a:p>
+            <a:pPr indent="0" marL="0">
+              <a:buNone/>
+            </a:pPr>
+            <a:r>
+              <a:rPr lang="en-US" sz="1200" b="1" dirty="0">
+                <a:solidFill>
+                  <a:srgbClr val="FFFFFF"/>
+                </a:solidFill>
+                <a:latin typeface="Aptos" pitchFamily="34" charset="0"/>
+                <a:ea typeface="Aptos" pitchFamily="34" charset="-122"/>
+                <a:cs typeface="Aptos" pitchFamily="34" charset="-120"/>
+              </a:rPr>
+              <a:t>Takeaway: zonder identiteit, geheugen, governance en economics blijft 'agentsamenleving' vooral taal.</a:t>
             </a:r>
             <a:endParaRPr lang="en-US" sz="1200" dirty="0"/>
           </a:p>
